--- a/lab_07-state_management/lab_07-state_management.pptx
+++ b/lab_07-state_management/lab_07-state_management.pptx
@@ -5,7 +5,7 @@
     <p:sldMasterId id="2147483648" r:id="rId1"/>
   </p:sldMasterIdLst>
   <p:notesMasterIdLst>
-    <p:notesMasterId r:id="rId37"/>
+    <p:notesMasterId r:id="rId31"/>
   </p:notesMasterIdLst>
   <p:sldIdLst>
     <p:sldId id="259" r:id="rId2"/>
@@ -20,29 +20,23 @@
     <p:sldId id="409" r:id="rId11"/>
     <p:sldId id="395" r:id="rId12"/>
     <p:sldId id="397" r:id="rId13"/>
-    <p:sldId id="402" r:id="rId14"/>
-    <p:sldId id="398" r:id="rId15"/>
-    <p:sldId id="399" r:id="rId16"/>
-    <p:sldId id="400" r:id="rId17"/>
+    <p:sldId id="398" r:id="rId14"/>
+    <p:sldId id="399" r:id="rId15"/>
+    <p:sldId id="400" r:id="rId16"/>
+    <p:sldId id="405" r:id="rId17"/>
     <p:sldId id="401" r:id="rId18"/>
     <p:sldId id="410" r:id="rId19"/>
     <p:sldId id="391" r:id="rId20"/>
     <p:sldId id="392" r:id="rId21"/>
     <p:sldId id="393" r:id="rId22"/>
     <p:sldId id="378" r:id="rId23"/>
-    <p:sldId id="411" r:id="rId24"/>
-    <p:sldId id="403" r:id="rId25"/>
-    <p:sldId id="404" r:id="rId26"/>
-    <p:sldId id="405" r:id="rId27"/>
-    <p:sldId id="406" r:id="rId28"/>
-    <p:sldId id="407" r:id="rId29"/>
-    <p:sldId id="412" r:id="rId30"/>
-    <p:sldId id="349" r:id="rId31"/>
-    <p:sldId id="417" r:id="rId32"/>
-    <p:sldId id="413" r:id="rId33"/>
-    <p:sldId id="303" r:id="rId34"/>
-    <p:sldId id="414" r:id="rId35"/>
-    <p:sldId id="309" r:id="rId36"/>
+    <p:sldId id="412" r:id="rId24"/>
+    <p:sldId id="349" r:id="rId25"/>
+    <p:sldId id="417" r:id="rId26"/>
+    <p:sldId id="413" r:id="rId27"/>
+    <p:sldId id="303" r:id="rId28"/>
+    <p:sldId id="414" r:id="rId29"/>
+    <p:sldId id="309" r:id="rId30"/>
   </p:sldIdLst>
   <p:sldSz cx="12192000" cy="6858000"/>
   <p:notesSz cx="6858000" cy="9144000"/>
@@ -234,7 +228,7 @@
           <a:p>
             <a:fld id="{81C4B3FE-0320-8142-8396-5C3025C019EC}" type="datetimeFigureOut">
               <a:rPr lang="en-IT" smtClean="0"/>
-              <a:t>5/4/24</a:t>
+              <a:t>4/14/25</a:t>
             </a:fld>
             <a:endParaRPr lang="en-IT"/>
           </a:p>
@@ -651,7 +645,7 @@
           <a:p>
             <a:fld id="{CC0F43FB-3F33-3F4B-9768-2FBED988F992}" type="slidenum">
               <a:rPr lang="en-IT" smtClean="0"/>
-              <a:t>15</a:t>
+              <a:t>14</a:t>
             </a:fld>
             <a:endParaRPr lang="en-IT"/>
           </a:p>
@@ -735,7 +729,7 @@
           <a:p>
             <a:fld id="{CC0F43FB-3F33-3F4B-9768-2FBED988F992}" type="slidenum">
               <a:rPr lang="en-IT" smtClean="0"/>
-              <a:t>16</a:t>
+              <a:t>15</a:t>
             </a:fld>
             <a:endParaRPr lang="en-IT"/>
           </a:p>
@@ -1006,90 +1000,6 @@
 </p:notes>
 </file>
 
-<file path=ppt/notesSlides/notesSlide7.xml><?xml version="1.0" encoding="utf-8"?>
-<p:notes xmlns:a="http://schemas.openxmlformats.org/drawingml/2006/main" xmlns:r="http://schemas.openxmlformats.org/officeDocument/2006/relationships" xmlns:p="http://schemas.openxmlformats.org/presentationml/2006/main">
-  <p:cSld>
-    <p:spTree>
-      <p:nvGrpSpPr>
-        <p:cNvPr id="1" name=""/>
-        <p:cNvGrpSpPr/>
-        <p:nvPr/>
-      </p:nvGrpSpPr>
-      <p:grpSpPr>
-        <a:xfrm>
-          <a:off x="0" y="0"/>
-          <a:ext cx="0" cy="0"/>
-          <a:chOff x="0" y="0"/>
-          <a:chExt cx="0" cy="0"/>
-        </a:xfrm>
-      </p:grpSpPr>
-      <p:sp>
-        <p:nvSpPr>
-          <p:cNvPr id="2" name="Slide Image Placeholder 1"/>
-          <p:cNvSpPr>
-            <a:spLocks noGrp="1" noRot="1" noChangeAspect="1"/>
-          </p:cNvSpPr>
-          <p:nvPr>
-            <p:ph type="sldImg"/>
-          </p:nvPr>
-        </p:nvSpPr>
-        <p:spPr/>
-      </p:sp>
-      <p:sp>
-        <p:nvSpPr>
-          <p:cNvPr id="3" name="Notes Placeholder 2"/>
-          <p:cNvSpPr>
-            <a:spLocks noGrp="1"/>
-          </p:cNvSpPr>
-          <p:nvPr>
-            <p:ph type="body" idx="1"/>
-          </p:nvPr>
-        </p:nvSpPr>
-        <p:spPr/>
-        <p:txBody>
-          <a:bodyPr/>
-          <a:lstStyle/>
-          <a:p>
-            <a:endParaRPr lang="en-IT" dirty="0"/>
-          </a:p>
-        </p:txBody>
-      </p:sp>
-      <p:sp>
-        <p:nvSpPr>
-          <p:cNvPr id="4" name="Slide Number Placeholder 3"/>
-          <p:cNvSpPr>
-            <a:spLocks noGrp="1"/>
-          </p:cNvSpPr>
-          <p:nvPr>
-            <p:ph type="sldNum" sz="quarter" idx="5"/>
-          </p:nvPr>
-        </p:nvSpPr>
-        <p:spPr/>
-        <p:txBody>
-          <a:bodyPr/>
-          <a:lstStyle/>
-          <a:p>
-            <a:fld id="{CC0F43FB-3F33-3F4B-9768-2FBED988F992}" type="slidenum">
-              <a:rPr lang="en-IT" smtClean="0"/>
-              <a:t>27</a:t>
-            </a:fld>
-            <a:endParaRPr lang="en-IT"/>
-          </a:p>
-        </p:txBody>
-      </p:sp>
-    </p:spTree>
-    <p:extLst>
-      <p:ext uri="{BB962C8B-B14F-4D97-AF65-F5344CB8AC3E}">
-        <p14:creationId xmlns:p14="http://schemas.microsoft.com/office/powerpoint/2010/main" val="2741696687"/>
-      </p:ext>
-    </p:extLst>
-  </p:cSld>
-  <p:clrMapOvr>
-    <a:masterClrMapping/>
-  </p:clrMapOvr>
-</p:notes>
-</file>
-
 <file path=ppt/slideLayouts/slideLayout1.xml><?xml version="1.0" encoding="utf-8"?>
 <p:sldLayout xmlns:a="http://schemas.openxmlformats.org/drawingml/2006/main" xmlns:r="http://schemas.openxmlformats.org/officeDocument/2006/relationships" xmlns:p="http://schemas.openxmlformats.org/presentationml/2006/main" type="obj" preserve="1">
   <p:cSld name="Titolo e contenuto">
@@ -1788,7 +1698,9 @@
           <a:lstStyle>
             <a:lvl1pPr marL="0" indent="0" algn="ctr">
               <a:buNone/>
-              <a:defRPr sz="4800" b="1"/>
+              <a:defRPr sz="4800" b="1">
+                <a:latin typeface="Aptos" panose="020B0004020202020204" pitchFamily="34" charset="0"/>
+              </a:defRPr>
             </a:lvl1pPr>
             <a:lvl2pPr marL="457200" indent="0" algn="ctr">
               <a:buNone/>
@@ -1874,7 +1786,9 @@
           <a:lstStyle/>
           <a:p>
             <a:pPr algn="ctr"/>
-            <a:endParaRPr lang="en-GB" dirty="0"/>
+            <a:endParaRPr lang="en-GB" dirty="0">
+              <a:latin typeface="Aptos" panose="020B0004020202020204" pitchFamily="34" charset="0"/>
+            </a:endParaRPr>
           </a:p>
         </p:txBody>
       </p:sp>
@@ -1924,7 +1838,9 @@
           <a:lstStyle/>
           <a:p>
             <a:pPr algn="ctr"/>
-            <a:endParaRPr lang="en-GB" dirty="0"/>
+            <a:endParaRPr lang="en-GB" dirty="0">
+              <a:latin typeface="Aptos" panose="020B0004020202020204" pitchFamily="34" charset="0"/>
+            </a:endParaRPr>
           </a:p>
         </p:txBody>
       </p:sp>
@@ -1970,36 +1886,52 @@
           </a:lstStyle>
           <a:p>
             <a:r>
-              <a:rPr lang="it-IT" sz="2800" b="0" dirty="0" err="1"/>
+              <a:rPr lang="it-IT" sz="2800" b="0" dirty="0" err="1">
+                <a:latin typeface="Aptos" panose="020B0004020202020204" pitchFamily="34" charset="0"/>
+              </a:rPr>
               <a:t>Biomedical</a:t>
             </a:r>
             <a:r>
-              <a:rPr lang="it-IT" sz="2800" b="0" dirty="0"/>
+              <a:rPr lang="it-IT" sz="2800" b="0" dirty="0">
+                <a:latin typeface="Aptos" panose="020B0004020202020204" pitchFamily="34" charset="0"/>
+              </a:rPr>
               <a:t> </a:t>
             </a:r>
             <a:r>
-              <a:rPr lang="it-IT" sz="2800" b="0" dirty="0" err="1"/>
+              <a:rPr lang="it-IT" sz="2800" b="0" dirty="0" err="1">
+                <a:latin typeface="Aptos" panose="020B0004020202020204" pitchFamily="34" charset="0"/>
+              </a:rPr>
               <a:t>Wearable</a:t>
             </a:r>
             <a:r>
-              <a:rPr lang="it-IT" sz="2800" b="0" dirty="0"/>
+              <a:rPr lang="it-IT" sz="2800" b="0" dirty="0">
+                <a:latin typeface="Aptos" panose="020B0004020202020204" pitchFamily="34" charset="0"/>
+              </a:rPr>
               <a:t> Technologies </a:t>
             </a:r>
           </a:p>
           <a:p>
             <a:r>
-              <a:rPr lang="it-IT" sz="2800" b="0" dirty="0"/>
+              <a:rPr lang="it-IT" sz="2800" b="0" dirty="0">
+                <a:latin typeface="Aptos" panose="020B0004020202020204" pitchFamily="34" charset="0"/>
+              </a:rPr>
               <a:t>for Healthcare and </a:t>
             </a:r>
             <a:r>
-              <a:rPr lang="it-IT" sz="2800" b="0" dirty="0" err="1"/>
+              <a:rPr lang="it-IT" sz="2800" b="0" dirty="0" err="1">
+                <a:latin typeface="Aptos" panose="020B0004020202020204" pitchFamily="34" charset="0"/>
+              </a:rPr>
               <a:t>Wellbeing</a:t>
             </a:r>
             <a:r>
-              <a:rPr lang="it-IT" sz="2800" b="0" dirty="0"/>
+              <a:rPr lang="it-IT" sz="2800" b="0" dirty="0">
+                <a:latin typeface="Aptos" panose="020B0004020202020204" pitchFamily="34" charset="0"/>
+              </a:rPr>
               <a:t>  </a:t>
             </a:r>
-            <a:endParaRPr lang="en-GB" sz="2800" b="0" dirty="0"/>
+            <a:endParaRPr lang="en-GB" sz="2800" b="0" dirty="0">
+              <a:latin typeface="Aptos" panose="020B0004020202020204" pitchFamily="34" charset="0"/>
+            </a:endParaRPr>
           </a:p>
         </p:txBody>
       </p:sp>
@@ -2050,8 +1982,10 @@
               </a:spcAft>
             </a:pPr>
             <a:r>
-              <a:rPr lang="it-IT" sz="2800" dirty="0"/>
-              <a:t>A.Y. 2023-2024</a:t>
+              <a:rPr lang="it-IT" sz="2800" dirty="0">
+                <a:latin typeface="Aptos" panose="020B0004020202020204" pitchFamily="34" charset="0"/>
+              </a:rPr>
+              <a:t>A.Y. 2024-2025</a:t>
             </a:r>
           </a:p>
         </p:txBody>
@@ -2090,7 +2024,7 @@
                 <a:effectLst/>
                 <a:uLnTx/>
                 <a:uFillTx/>
-                <a:latin typeface="Palatino Linotype" panose="02040502050505030304" pitchFamily="18" charset="0"/>
+                <a:latin typeface="Aptos" panose="020B0004020202020204" pitchFamily="34" charset="0"/>
                 <a:ea typeface="+mj-ea"/>
                 <a:cs typeface="+mj-cs"/>
               </a:rPr>
@@ -2107,7 +2041,7 @@
                 <a:effectLst/>
                 <a:uLnTx/>
                 <a:uFillTx/>
-                <a:latin typeface="Palatino Linotype" panose="02040502050505030304" pitchFamily="18" charset="0"/>
+                <a:latin typeface="Aptos" panose="020B0004020202020204" pitchFamily="34" charset="0"/>
                 <a:ea typeface="+mj-ea"/>
                 <a:cs typeface="+mj-cs"/>
               </a:rPr>
@@ -2124,7 +2058,7 @@
                 <a:effectLst/>
                 <a:uLnTx/>
                 <a:uFillTx/>
-                <a:latin typeface="Palatino Linotype" panose="02040502050505030304" pitchFamily="18" charset="0"/>
+                <a:latin typeface="Aptos" panose="020B0004020202020204" pitchFamily="34" charset="0"/>
                 <a:ea typeface="+mj-ea"/>
                 <a:cs typeface="+mj-cs"/>
               </a:rPr>
@@ -2140,7 +2074,7 @@
                 <a:effectLst/>
                 <a:uLnTx/>
                 <a:uFillTx/>
-                <a:latin typeface="Palatino Linotype" panose="02040502050505030304" pitchFamily="18" charset="0"/>
+                <a:latin typeface="Aptos" panose="020B0004020202020204" pitchFamily="34" charset="0"/>
                 <a:ea typeface="+mj-ea"/>
                 <a:cs typeface="+mj-cs"/>
               </a:rPr>
@@ -2157,7 +2091,7 @@
                 <a:effectLst/>
                 <a:uLnTx/>
                 <a:uFillTx/>
-                <a:latin typeface="Palatino Linotype" panose="02040502050505030304" pitchFamily="18" charset="0"/>
+                <a:latin typeface="Aptos" panose="020B0004020202020204" pitchFamily="34" charset="0"/>
                 <a:ea typeface="+mj-ea"/>
                 <a:cs typeface="+mj-cs"/>
               </a:rPr>
@@ -2174,13 +2108,15 @@
                 <a:effectLst/>
                 <a:uLnTx/>
                 <a:uFillTx/>
-                <a:latin typeface="Palatino Linotype" panose="02040502050505030304" pitchFamily="18" charset="0"/>
+                <a:latin typeface="Aptos" panose="020B0004020202020204" pitchFamily="34" charset="0"/>
                 <a:ea typeface="+mj-ea"/>
                 <a:cs typeface="+mj-cs"/>
               </a:rPr>
               <a:t>Engineering</a:t>
             </a:r>
-            <a:endParaRPr lang="en-GB" sz="1100" cap="small" baseline="0" dirty="0"/>
+            <a:endParaRPr lang="en-GB" sz="1100" cap="small" baseline="0" dirty="0">
+              <a:latin typeface="Aptos" panose="020B0004020202020204" pitchFamily="34" charset="0"/>
+            </a:endParaRPr>
           </a:p>
         </p:txBody>
       </p:sp>
@@ -2290,7 +2226,9 @@
           </a:bodyPr>
           <a:lstStyle>
             <a:lvl1pPr>
-              <a:defRPr sz="3200"/>
+              <a:defRPr sz="3200">
+                <a:latin typeface="Aptos" panose="020B0004020202020204" pitchFamily="34" charset="0"/>
+              </a:defRPr>
             </a:lvl1pPr>
           </a:lstStyle>
           <a:p>
@@ -2690,12 +2628,14 @@
                     <a:tint val="75000"/>
                   </a:schemeClr>
                 </a:solidFill>
+                <a:latin typeface="Aptos" panose="020B0004020202020204" pitchFamily="34" charset="0"/>
               </a:defRPr>
             </a:lvl1pPr>
           </a:lstStyle>
           <a:p>
             <a:fld id="{31DE2C5B-556E-47B8-A792-024C2FCA4ACC}" type="slidenum">
               <a:rPr lang="en-GB" smtClean="0"/>
+              <a:pPr/>
               <a:t>‹#›</a:t>
             </a:fld>
             <a:endParaRPr lang="en-GB"/>
@@ -2731,7 +2671,7 @@
           <a:solidFill>
             <a:schemeClr val="tx1"/>
           </a:solidFill>
-          <a:latin typeface="Palatino Linotype" panose="02040502050505030304" pitchFamily="18" charset="0"/>
+          <a:latin typeface="Aptos" panose="020B0004020202020204" pitchFamily="34" charset="0"/>
           <a:ea typeface="+mj-ea"/>
           <a:cs typeface="+mj-cs"/>
         </a:defRPr>
@@ -2754,7 +2694,7 @@
           <a:solidFill>
             <a:schemeClr val="tx1"/>
           </a:solidFill>
-          <a:latin typeface="Palatino Linotype" panose="02040502050505030304" pitchFamily="18" charset="0"/>
+          <a:latin typeface="Aptos" panose="020B0004020202020204" pitchFamily="34" charset="0"/>
           <a:ea typeface="+mn-ea"/>
           <a:cs typeface="+mn-cs"/>
         </a:defRPr>
@@ -2775,7 +2715,7 @@
           <a:solidFill>
             <a:schemeClr val="tx1"/>
           </a:solidFill>
-          <a:latin typeface="Palatino Linotype" panose="02040502050505030304" pitchFamily="18" charset="0"/>
+          <a:latin typeface="Aptos" panose="020B0004020202020204" pitchFamily="34" charset="0"/>
           <a:ea typeface="+mn-ea"/>
           <a:cs typeface="+mn-cs"/>
         </a:defRPr>
@@ -2796,7 +2736,7 @@
           <a:solidFill>
             <a:schemeClr val="tx1"/>
           </a:solidFill>
-          <a:latin typeface="Palatino Linotype" panose="02040502050505030304" pitchFamily="18" charset="0"/>
+          <a:latin typeface="Aptos" panose="020B0004020202020204" pitchFamily="34" charset="0"/>
           <a:ea typeface="+mn-ea"/>
           <a:cs typeface="+mn-cs"/>
         </a:defRPr>
@@ -2817,7 +2757,7 @@
           <a:solidFill>
             <a:schemeClr val="tx1"/>
           </a:solidFill>
-          <a:latin typeface="Palatino Linotype" panose="02040502050505030304" pitchFamily="18" charset="0"/>
+          <a:latin typeface="Aptos" panose="020B0004020202020204" pitchFamily="34" charset="0"/>
           <a:ea typeface="+mn-ea"/>
           <a:cs typeface="+mn-cs"/>
         </a:defRPr>
@@ -2838,7 +2778,7 @@
           <a:solidFill>
             <a:schemeClr val="tx1"/>
           </a:solidFill>
-          <a:latin typeface="Palatino Linotype" panose="02040502050505030304" pitchFamily="18" charset="0"/>
+          <a:latin typeface="Aptos" panose="020B0004020202020204" pitchFamily="34" charset="0"/>
           <a:ea typeface="+mn-ea"/>
           <a:cs typeface="+mn-cs"/>
         </a:defRPr>
@@ -3205,18 +3145,6 @@
             </a:r>
           </a:p>
           <a:p>
-            <a:r>
-              <a:rPr lang="en-GB" dirty="0">
-                <a:solidFill>
-                  <a:schemeClr val="bg2">
-                    <a:lumMod val="90000"/>
-                  </a:schemeClr>
-                </a:solidFill>
-              </a:rPr>
-              <a:t>Other Provider classes</a:t>
-            </a:r>
-          </a:p>
-          <a:p>
             <a:endParaRPr lang="en-GB" dirty="0">
               <a:solidFill>
                 <a:schemeClr val="bg2">
@@ -3447,7 +3375,9 @@
           <a:lstStyle/>
           <a:p>
             <a:pPr algn="ctr"/>
-            <a:endParaRPr lang="en-IT"/>
+            <a:endParaRPr lang="en-IT">
+              <a:latin typeface="Aptos" panose="020B0004020202020204" pitchFamily="34" charset="0"/>
+            </a:endParaRPr>
           </a:p>
         </p:txBody>
       </p:sp>
@@ -3492,7 +3422,9 @@
           <a:lstStyle/>
           <a:p>
             <a:pPr algn="ctr"/>
-            <a:endParaRPr lang="en-IT"/>
+            <a:endParaRPr lang="en-IT">
+              <a:latin typeface="Aptos" panose="020B0004020202020204" pitchFamily="34" charset="0"/>
+            </a:endParaRPr>
           </a:p>
         </p:txBody>
       </p:sp>
@@ -3537,7 +3469,9 @@
           <a:lstStyle/>
           <a:p>
             <a:pPr algn="ctr"/>
-            <a:endParaRPr lang="en-IT"/>
+            <a:endParaRPr lang="en-IT">
+              <a:latin typeface="Aptos" panose="020B0004020202020204" pitchFamily="34" charset="0"/>
+            </a:endParaRPr>
           </a:p>
         </p:txBody>
       </p:sp>
@@ -3582,7 +3516,9 @@
           <a:lstStyle/>
           <a:p>
             <a:pPr algn="ctr"/>
-            <a:endParaRPr lang="en-IT"/>
+            <a:endParaRPr lang="en-IT">
+              <a:latin typeface="Aptos" panose="020B0004020202020204" pitchFamily="34" charset="0"/>
+            </a:endParaRPr>
           </a:p>
         </p:txBody>
       </p:sp>
@@ -3627,7 +3563,9 @@
           <a:lstStyle/>
           <a:p>
             <a:pPr algn="ctr"/>
-            <a:endParaRPr lang="en-IT"/>
+            <a:endParaRPr lang="en-IT">
+              <a:latin typeface="Aptos" panose="020B0004020202020204" pitchFamily="34" charset="0"/>
+            </a:endParaRPr>
           </a:p>
         </p:txBody>
       </p:sp>
@@ -3672,7 +3610,9 @@
           <a:lstStyle/>
           <a:p>
             <a:pPr algn="ctr"/>
-            <a:endParaRPr lang="en-IT"/>
+            <a:endParaRPr lang="en-IT">
+              <a:latin typeface="Aptos" panose="020B0004020202020204" pitchFamily="34" charset="0"/>
+            </a:endParaRPr>
           </a:p>
         </p:txBody>
       </p:sp>
@@ -3879,13 +3819,13 @@
             <a:pPr algn="ctr"/>
             <a:r>
               <a:rPr lang="en-GB" dirty="0">
-                <a:latin typeface="Palatino Linotype" panose="02040502050505030304" pitchFamily="18" charset="0"/>
+                <a:latin typeface="Aptos" panose="020B0004020202020204" pitchFamily="34" charset="0"/>
               </a:rPr>
               <a:t>C</a:t>
             </a:r>
             <a:r>
               <a:rPr lang="en-IT" dirty="0">
-                <a:latin typeface="Palatino Linotype" panose="02040502050505030304" pitchFamily="18" charset="0"/>
+                <a:latin typeface="Aptos" panose="020B0004020202020204" pitchFamily="34" charset="0"/>
               </a:rPr>
               <a:t>hild widget tree </a:t>
             </a:r>
@@ -3933,7 +3873,9 @@
           <a:lstStyle/>
           <a:p>
             <a:pPr algn="ctr"/>
-            <a:endParaRPr lang="en-IT"/>
+            <a:endParaRPr lang="en-IT">
+              <a:latin typeface="Aptos" panose="020B0004020202020204" pitchFamily="34" charset="0"/>
+            </a:endParaRPr>
           </a:p>
         </p:txBody>
       </p:sp>
@@ -3966,12 +3908,12 @@
           <a:p>
             <a:r>
               <a:rPr lang="en-GB" sz="1600" dirty="0">
-                <a:latin typeface="Palatino Linotype" panose="02040502050505030304" pitchFamily="18" charset="0"/>
+                <a:latin typeface="Aptos" panose="020B0004020202020204" pitchFamily="34" charset="0"/>
               </a:rPr>
               <a:t>Inject it to</a:t>
             </a:r>
             <a:endParaRPr lang="en-IT" sz="1600" dirty="0">
-              <a:latin typeface="Palatino Linotype" panose="02040502050505030304" pitchFamily="18" charset="0"/>
+              <a:latin typeface="Aptos" panose="020B0004020202020204" pitchFamily="34" charset="0"/>
             </a:endParaRPr>
           </a:p>
         </p:txBody>
@@ -4049,12 +3991,12 @@
             <a:pPr algn="ctr"/>
             <a:r>
               <a:rPr lang="en-GB" sz="1600" dirty="0">
-                <a:latin typeface="Palatino Linotype" panose="02040502050505030304" pitchFamily="18" charset="0"/>
+                <a:latin typeface="Aptos" panose="020B0004020202020204" pitchFamily="34" charset="0"/>
               </a:rPr>
               <a:t>State manager entity</a:t>
             </a:r>
             <a:endParaRPr lang="en-IT" sz="1600" dirty="0">
-              <a:latin typeface="Palatino Linotype" panose="02040502050505030304" pitchFamily="18" charset="0"/>
+              <a:latin typeface="Aptos" panose="020B0004020202020204" pitchFamily="34" charset="0"/>
             </a:endParaRPr>
           </a:p>
         </p:txBody>
@@ -4306,6 +4248,25 @@
             </a:r>
           </a:p>
           <a:p>
+            <a:pPr marL="457200" lvl="1" indent="0">
+              <a:buNone/>
+            </a:pPr>
+            <a:endParaRPr lang="en-IT" dirty="0">
+              <a:latin typeface="Courier" pitchFamily="2" charset="0"/>
+              <a:cs typeface="Courier New" panose="02070309020205020404" pitchFamily="49" charset="0"/>
+            </a:endParaRPr>
+          </a:p>
+          <a:p>
+            <a:pPr lvl="1"/>
+            <a:r>
+              <a:rPr lang="en-IT" dirty="0">
+                <a:latin typeface="Courier" pitchFamily="2" charset="0"/>
+                <a:cs typeface="Courier New" panose="02070309020205020404" pitchFamily="49" charset="0"/>
+              </a:rPr>
+              <a:t>MultiProvider</a:t>
+            </a:r>
+          </a:p>
+          <a:p>
             <a:pPr lvl="1"/>
             <a:endParaRPr lang="en-IT" dirty="0">
               <a:latin typeface="Courier" pitchFamily="2" charset="0"/>
@@ -4315,46 +4276,16 @@
           <a:p>
             <a:pPr lvl="1"/>
             <a:r>
-              <a:rPr lang="en-IT" dirty="0">
+              <a:rPr lang="en-US" dirty="0">
                 <a:latin typeface="Courier" pitchFamily="2" charset="0"/>
                 <a:cs typeface="Courier New" panose="02070309020205020404" pitchFamily="49" charset="0"/>
               </a:rPr>
-              <a:t>FutureProvider/StreamProvider</a:t>
-            </a:r>
-          </a:p>
-          <a:p>
-            <a:pPr lvl="1"/>
+              <a:t>...</a:t>
+            </a:r>
             <a:endParaRPr lang="en-IT" dirty="0">
               <a:latin typeface="Courier" pitchFamily="2" charset="0"/>
               <a:cs typeface="Courier New" panose="02070309020205020404" pitchFamily="49" charset="0"/>
             </a:endParaRPr>
-          </a:p>
-          <a:p>
-            <a:pPr lvl="1"/>
-            <a:r>
-              <a:rPr lang="en-IT" dirty="0">
-                <a:latin typeface="Courier" pitchFamily="2" charset="0"/>
-                <a:cs typeface="Courier New" panose="02070309020205020404" pitchFamily="49" charset="0"/>
-              </a:rPr>
-              <a:t>MultiProvider</a:t>
-            </a:r>
-          </a:p>
-          <a:p>
-            <a:pPr lvl="1"/>
-            <a:endParaRPr lang="en-IT" dirty="0">
-              <a:latin typeface="Courier" pitchFamily="2" charset="0"/>
-              <a:cs typeface="Courier New" panose="02070309020205020404" pitchFamily="49" charset="0"/>
-            </a:endParaRPr>
-          </a:p>
-          <a:p>
-            <a:pPr lvl="1"/>
-            <a:r>
-              <a:rPr lang="en-IT" dirty="0">
-                <a:latin typeface="Courier" pitchFamily="2" charset="0"/>
-                <a:cs typeface="Courier New" panose="02070309020205020404" pitchFamily="49" charset="0"/>
-              </a:rPr>
-              <a:t>ProxyProvider</a:t>
-            </a:r>
           </a:p>
           <a:p>
             <a:pPr lvl="1"/>
@@ -4451,7 +4382,17 @@
           <a:p>
             <a:r>
               <a:rPr lang="en-IT" dirty="0"/>
-              <a:t>Provider classes </a:t>
+              <a:t>Provider classes: </a:t>
+            </a:r>
+            <a:r>
+              <a:rPr lang="en-IT" dirty="0">
+                <a:latin typeface="Courier" pitchFamily="2" charset="0"/>
+              </a:rPr>
+              <a:t>ChangeNotifier</a:t>
+            </a:r>
+            <a:r>
+              <a:rPr lang="en-IT" dirty="0"/>
+              <a:t> </a:t>
             </a:r>
           </a:p>
         </p:txBody>
@@ -4475,7 +4416,7 @@
         <p:spPr>
           <a:xfrm>
             <a:off x="428172" y="1361167"/>
-            <a:ext cx="10807518" cy="5153933"/>
+            <a:ext cx="6596625" cy="5153933"/>
           </a:xfrm>
         </p:spPr>
         <p:txBody>
@@ -4485,118 +4426,546 @@
           <a:lstStyle/>
           <a:p>
             <a:r>
-              <a:rPr lang="en-IT" dirty="0"/>
-              <a:t>Provider implement a set of classes, here’s the most important:</a:t>
-            </a:r>
+              <a:rPr lang="en-GB" dirty="0" err="1">
+                <a:latin typeface="Courier" pitchFamily="2" charset="0"/>
+              </a:rPr>
+              <a:t>ChangeNotifier</a:t>
+            </a:r>
+            <a:r>
+              <a:rPr lang="en-GB" dirty="0"/>
+              <a:t> is a class that can notify </a:t>
+            </a:r>
+            <a:r>
+              <a:rPr lang="en-GB" b="1" dirty="0"/>
+              <a:t>listeners </a:t>
+            </a:r>
+            <a:r>
+              <a:rPr lang="en-GB" dirty="0"/>
+              <a:t>of any changes in the state. </a:t>
+            </a:r>
+          </a:p>
+          <a:p>
+            <a:endParaRPr lang="en-GB" dirty="0"/>
+          </a:p>
+          <a:p>
+            <a:r>
+              <a:rPr lang="en-GB" dirty="0"/>
+              <a:t>You usually extend the </a:t>
+            </a:r>
+            <a:r>
+              <a:rPr lang="en-GB" dirty="0" err="1">
+                <a:latin typeface="Courier" pitchFamily="2" charset="0"/>
+              </a:rPr>
+              <a:t>ChangeNotifier</a:t>
+            </a:r>
+            <a:r>
+              <a:rPr lang="en-GB" dirty="0"/>
+              <a:t> for models so you can send notifications when your model changes. </a:t>
+            </a:r>
+          </a:p>
+          <a:p>
+            <a:endParaRPr lang="en-GB" dirty="0"/>
+          </a:p>
+          <a:p>
+            <a:r>
+              <a:rPr lang="en-GB" dirty="0"/>
+              <a:t>When something in the model changes, you call </a:t>
+            </a:r>
+            <a:r>
+              <a:rPr lang="en-GB" b="1" dirty="0" err="1">
+                <a:latin typeface="Courier" pitchFamily="2" charset="0"/>
+              </a:rPr>
+              <a:t>notifyListeners</a:t>
+            </a:r>
+            <a:r>
+              <a:rPr lang="en-GB" dirty="0">
+                <a:latin typeface="Courier" pitchFamily="2" charset="0"/>
+              </a:rPr>
+              <a:t>() </a:t>
+            </a:r>
+            <a:r>
+              <a:rPr lang="en-GB" dirty="0"/>
+              <a:t>and whoever is listening can use the newly changed model.</a:t>
+            </a:r>
+            <a:endParaRPr lang="en-IT" dirty="0"/>
           </a:p>
           <a:p>
             <a:pPr lvl="1"/>
             <a:endParaRPr lang="en-IT" dirty="0"/>
           </a:p>
           <a:p>
-            <a:pPr lvl="1"/>
-            <a:r>
-              <a:rPr lang="en-IT" b="1" dirty="0">
-                <a:latin typeface="Courier" pitchFamily="2" charset="0"/>
-                <a:cs typeface="Courier New" panose="02070309020205020404" pitchFamily="49" charset="0"/>
-              </a:rPr>
-              <a:t>ChangeNotifier</a:t>
-            </a:r>
-          </a:p>
-          <a:p>
-            <a:pPr lvl="1"/>
-            <a:endParaRPr lang="en-IT" b="1" dirty="0">
-              <a:latin typeface="Courier" pitchFamily="2" charset="0"/>
-              <a:cs typeface="Courier New" panose="02070309020205020404" pitchFamily="49" charset="0"/>
-            </a:endParaRPr>
-          </a:p>
-          <a:p>
-            <a:pPr lvl="1"/>
-            <a:r>
-              <a:rPr lang="en-IT" b="1" dirty="0">
-                <a:latin typeface="Courier" pitchFamily="2" charset="0"/>
-                <a:cs typeface="Courier New" panose="02070309020205020404" pitchFamily="49" charset="0"/>
-              </a:rPr>
-              <a:t>ChangeNotifierProvider</a:t>
-            </a:r>
-          </a:p>
-          <a:p>
-            <a:pPr lvl="1"/>
-            <a:endParaRPr lang="en-IT" b="1" dirty="0">
-              <a:latin typeface="Courier" pitchFamily="2" charset="0"/>
-              <a:cs typeface="Courier New" panose="02070309020205020404" pitchFamily="49" charset="0"/>
-            </a:endParaRPr>
-          </a:p>
-          <a:p>
-            <a:pPr lvl="1"/>
-            <a:r>
-              <a:rPr lang="en-IT" b="1" dirty="0">
-                <a:latin typeface="Courier" pitchFamily="2" charset="0"/>
-                <a:cs typeface="Courier New" panose="02070309020205020404" pitchFamily="49" charset="0"/>
-              </a:rPr>
-              <a:t>Consumer</a:t>
-            </a:r>
-          </a:p>
-          <a:p>
-            <a:pPr lvl="1"/>
-            <a:endParaRPr lang="en-IT" dirty="0">
-              <a:latin typeface="Courier" pitchFamily="2" charset="0"/>
-              <a:cs typeface="Courier New" panose="02070309020205020404" pitchFamily="49" charset="0"/>
-            </a:endParaRPr>
-          </a:p>
-          <a:p>
-            <a:pPr lvl="1"/>
+            <a:endParaRPr lang="en-IT" dirty="0"/>
+          </a:p>
+        </p:txBody>
+      </p:sp>
+      <p:pic>
+        <p:nvPicPr>
+          <p:cNvPr id="4" name="Graphic 3" descr="Ear outline">
+            <a:extLst>
+              <a:ext uri="{FF2B5EF4-FFF2-40B4-BE49-F238E27FC236}">
+                <a16:creationId xmlns:a16="http://schemas.microsoft.com/office/drawing/2014/main" id="{15C98D6F-4ED5-884C-A6AC-A97108B17751}"/>
+              </a:ext>
+            </a:extLst>
+          </p:cNvPr>
+          <p:cNvPicPr>
+            <a:picLocks noChangeAspect="1"/>
+          </p:cNvPicPr>
+          <p:nvPr/>
+        </p:nvPicPr>
+        <p:blipFill>
+          <a:blip r:embed="rId2">
+            <a:extLst>
+              <a:ext uri="{28A0092B-C50C-407E-A947-70E740481C1C}">
+                <a14:useLocalDpi xmlns:a14="http://schemas.microsoft.com/office/drawing/2010/main" val="0"/>
+              </a:ext>
+              <a:ext uri="{96DAC541-7B7A-43D3-8B79-37D633B846F1}">
+                <asvg:svgBlip xmlns:asvg="http://schemas.microsoft.com/office/drawing/2016/SVG/main" r:embed="rId3"/>
+              </a:ext>
+            </a:extLst>
+          </a:blip>
+          <a:stretch>
+            <a:fillRect/>
+          </a:stretch>
+        </p:blipFill>
+        <p:spPr>
+          <a:xfrm>
+            <a:off x="8063935" y="5093040"/>
+            <a:ext cx="914400" cy="914400"/>
+          </a:xfrm>
+          <a:prstGeom prst="rect">
+            <a:avLst/>
+          </a:prstGeom>
+        </p:spPr>
+      </p:pic>
+      <p:pic>
+        <p:nvPicPr>
+          <p:cNvPr id="7" name="Graphic 6" descr="Bell outline">
+            <a:extLst>
+              <a:ext uri="{FF2B5EF4-FFF2-40B4-BE49-F238E27FC236}">
+                <a16:creationId xmlns:a16="http://schemas.microsoft.com/office/drawing/2014/main" id="{25DCBBD3-6E78-9141-9E2C-341174CD81A6}"/>
+              </a:ext>
+            </a:extLst>
+          </p:cNvPr>
+          <p:cNvPicPr>
+            <a:picLocks noChangeAspect="1"/>
+          </p:cNvPicPr>
+          <p:nvPr/>
+        </p:nvPicPr>
+        <p:blipFill>
+          <a:blip r:embed="rId4">
+            <a:extLst>
+              <a:ext uri="{28A0092B-C50C-407E-A947-70E740481C1C}">
+                <a14:useLocalDpi xmlns:a14="http://schemas.microsoft.com/office/drawing/2010/main" val="0"/>
+              </a:ext>
+              <a:ext uri="{96DAC541-7B7A-43D3-8B79-37D633B846F1}">
+                <asvg:svgBlip xmlns:asvg="http://schemas.microsoft.com/office/drawing/2016/SVG/main" r:embed="rId5"/>
+              </a:ext>
+            </a:extLst>
+          </a:blip>
+          <a:stretch>
+            <a:fillRect/>
+          </a:stretch>
+        </p:blipFill>
+        <p:spPr>
+          <a:xfrm>
+            <a:off x="9716987" y="2166178"/>
+            <a:ext cx="914400" cy="914400"/>
+          </a:xfrm>
+          <a:prstGeom prst="rect">
+            <a:avLst/>
+          </a:prstGeom>
+        </p:spPr>
+      </p:pic>
+      <p:sp>
+        <p:nvSpPr>
+          <p:cNvPr id="8" name="Rectangle 7">
+            <a:extLst>
+              <a:ext uri="{FF2B5EF4-FFF2-40B4-BE49-F238E27FC236}">
+                <a16:creationId xmlns:a16="http://schemas.microsoft.com/office/drawing/2014/main" id="{4E311616-F193-6E49-89E0-0FF273168CC9}"/>
+              </a:ext>
+            </a:extLst>
+          </p:cNvPr>
+          <p:cNvSpPr/>
+          <p:nvPr/>
+        </p:nvSpPr>
+        <p:spPr>
+          <a:xfrm>
+            <a:off x="9069049" y="1461541"/>
+            <a:ext cx="2210276" cy="1596453"/>
+          </a:xfrm>
+          <a:prstGeom prst="rect">
+            <a:avLst/>
+          </a:prstGeom>
+          <a:noFill/>
+        </p:spPr>
+        <p:style>
+          <a:lnRef idx="2">
+            <a:schemeClr val="accent6"/>
+          </a:lnRef>
+          <a:fillRef idx="1">
+            <a:schemeClr val="lt1"/>
+          </a:fillRef>
+          <a:effectRef idx="0">
+            <a:schemeClr val="accent6"/>
+          </a:effectRef>
+          <a:fontRef idx="minor">
+            <a:schemeClr val="dk1"/>
+          </a:fontRef>
+        </p:style>
+        <p:txBody>
+          <a:bodyPr rtlCol="0" anchor="ctr"/>
+          <a:lstStyle/>
+          <a:p>
+            <a:pPr algn="ctr"/>
+            <a:endParaRPr lang="en-IT"/>
+          </a:p>
+        </p:txBody>
+      </p:sp>
+      <p:sp>
+        <p:nvSpPr>
+          <p:cNvPr id="9" name="TextBox 8">
+            <a:extLst>
+              <a:ext uri="{FF2B5EF4-FFF2-40B4-BE49-F238E27FC236}">
+                <a16:creationId xmlns:a16="http://schemas.microsoft.com/office/drawing/2014/main" id="{314AD37F-8378-DB48-A962-465066E6F1DF}"/>
+              </a:ext>
+            </a:extLst>
+          </p:cNvPr>
+          <p:cNvSpPr txBox="1"/>
+          <p:nvPr/>
+        </p:nvSpPr>
+        <p:spPr>
+          <a:xfrm>
+            <a:off x="8985258" y="1550666"/>
+            <a:ext cx="2377857" cy="646331"/>
+          </a:xfrm>
+          <a:prstGeom prst="rect">
+            <a:avLst/>
+          </a:prstGeom>
+          <a:noFill/>
+        </p:spPr>
+        <p:txBody>
+          <a:bodyPr wrap="square" rtlCol="0">
+            <a:spAutoFit/>
+          </a:bodyPr>
+          <a:lstStyle/>
+          <a:p>
+            <a:pPr algn="ctr"/>
+            <a:r>
+              <a:rPr lang="en-IT" dirty="0">
+                <a:latin typeface="Aptos" panose="020B0004020202020204" pitchFamily="34" charset="0"/>
+              </a:rPr>
+              <a:t>A class that extends </a:t>
+            </a:r>
             <a:r>
               <a:rPr lang="en-IT" dirty="0">
                 <a:latin typeface="Courier" pitchFamily="2" charset="0"/>
-                <a:cs typeface="Courier New" panose="02070309020205020404" pitchFamily="49" charset="0"/>
-              </a:rPr>
-              <a:t>FutureProvider/StreamProvider</a:t>
-            </a:r>
-          </a:p>
-          <a:p>
-            <a:pPr lvl="1"/>
-            <a:endParaRPr lang="en-IT" dirty="0">
-              <a:latin typeface="Courier" pitchFamily="2" charset="0"/>
-              <a:cs typeface="Courier New" panose="02070309020205020404" pitchFamily="49" charset="0"/>
-            </a:endParaRPr>
-          </a:p>
-          <a:p>
-            <a:pPr lvl="1"/>
+              </a:rPr>
+              <a:t>ChangeNotifier</a:t>
+            </a:r>
+          </a:p>
+        </p:txBody>
+      </p:sp>
+      <p:sp>
+        <p:nvSpPr>
+          <p:cNvPr id="11" name="Rectangle 10">
+            <a:extLst>
+              <a:ext uri="{FF2B5EF4-FFF2-40B4-BE49-F238E27FC236}">
+                <a16:creationId xmlns:a16="http://schemas.microsoft.com/office/drawing/2014/main" id="{9080970A-73C6-3E41-9EBF-FA8F214931FC}"/>
+              </a:ext>
+            </a:extLst>
+          </p:cNvPr>
+          <p:cNvSpPr/>
+          <p:nvPr/>
+        </p:nvSpPr>
+        <p:spPr>
+          <a:xfrm>
+            <a:off x="7415997" y="4431467"/>
+            <a:ext cx="2210276" cy="1596453"/>
+          </a:xfrm>
+          <a:prstGeom prst="rect">
+            <a:avLst/>
+          </a:prstGeom>
+          <a:noFill/>
+        </p:spPr>
+        <p:style>
+          <a:lnRef idx="2">
+            <a:schemeClr val="accent6"/>
+          </a:lnRef>
+          <a:fillRef idx="1">
+            <a:schemeClr val="lt1"/>
+          </a:fillRef>
+          <a:effectRef idx="0">
+            <a:schemeClr val="accent6"/>
+          </a:effectRef>
+          <a:fontRef idx="minor">
+            <a:schemeClr val="dk1"/>
+          </a:fontRef>
+        </p:style>
+        <p:txBody>
+          <a:bodyPr rtlCol="0" anchor="ctr"/>
+          <a:lstStyle/>
+          <a:p>
+            <a:pPr algn="ctr"/>
+            <a:endParaRPr lang="en-IT"/>
+          </a:p>
+        </p:txBody>
+      </p:sp>
+      <p:sp>
+        <p:nvSpPr>
+          <p:cNvPr id="12" name="TextBox 11">
+            <a:extLst>
+              <a:ext uri="{FF2B5EF4-FFF2-40B4-BE49-F238E27FC236}">
+                <a16:creationId xmlns:a16="http://schemas.microsoft.com/office/drawing/2014/main" id="{26907009-4BCC-2C4B-810E-C75043F6F869}"/>
+              </a:ext>
+            </a:extLst>
+          </p:cNvPr>
+          <p:cNvSpPr txBox="1"/>
+          <p:nvPr/>
+        </p:nvSpPr>
+        <p:spPr>
+          <a:xfrm>
+            <a:off x="7483788" y="4508149"/>
+            <a:ext cx="2074693" cy="646331"/>
+          </a:xfrm>
+          <a:prstGeom prst="rect">
+            <a:avLst/>
+          </a:prstGeom>
+          <a:noFill/>
+        </p:spPr>
+        <p:txBody>
+          <a:bodyPr wrap="square" rtlCol="0">
+            <a:spAutoFit/>
+          </a:bodyPr>
+          <a:lstStyle/>
+          <a:p>
+            <a:pPr algn="ctr"/>
+            <a:r>
+              <a:rPr lang="en-IT" dirty="0">
+                <a:latin typeface="Aptos" panose="020B0004020202020204" pitchFamily="34" charset="0"/>
+              </a:rPr>
+              <a:t>A class that listens to the other class</a:t>
+            </a:r>
+          </a:p>
+        </p:txBody>
+      </p:sp>
+      <p:pic>
+        <p:nvPicPr>
+          <p:cNvPr id="14" name="Graphic 13" descr="Excellent outline">
+            <a:extLst>
+              <a:ext uri="{FF2B5EF4-FFF2-40B4-BE49-F238E27FC236}">
+                <a16:creationId xmlns:a16="http://schemas.microsoft.com/office/drawing/2014/main" id="{025E28A6-47A6-A147-BCB1-4B7EA047E61A}"/>
+              </a:ext>
+            </a:extLst>
+          </p:cNvPr>
+          <p:cNvPicPr>
+            <a:picLocks noChangeAspect="1"/>
+          </p:cNvPicPr>
+          <p:nvPr/>
+        </p:nvPicPr>
+        <p:blipFill>
+          <a:blip r:embed="rId6">
+            <a:extLst>
+              <a:ext uri="{28A0092B-C50C-407E-A947-70E740481C1C}">
+                <a14:useLocalDpi xmlns:a14="http://schemas.microsoft.com/office/drawing/2010/main" val="0"/>
+              </a:ext>
+              <a:ext uri="{96DAC541-7B7A-43D3-8B79-37D633B846F1}">
+                <asvg:svgBlip xmlns:asvg="http://schemas.microsoft.com/office/drawing/2016/SVG/main" r:embed="rId7"/>
+              </a:ext>
+            </a:extLst>
+          </a:blip>
+          <a:stretch>
+            <a:fillRect/>
+          </a:stretch>
+        </p:blipFill>
+        <p:spPr>
+          <a:xfrm>
+            <a:off x="10631387" y="4772493"/>
+            <a:ext cx="914400" cy="914400"/>
+          </a:xfrm>
+          <a:prstGeom prst="rect">
+            <a:avLst/>
+          </a:prstGeom>
+        </p:spPr>
+      </p:pic>
+      <p:cxnSp>
+        <p:nvCxnSpPr>
+          <p:cNvPr id="16" name="Straight Arrow Connector 15">
+            <a:extLst>
+              <a:ext uri="{FF2B5EF4-FFF2-40B4-BE49-F238E27FC236}">
+                <a16:creationId xmlns:a16="http://schemas.microsoft.com/office/drawing/2014/main" id="{B44389E6-B3F0-0A40-B55C-723EF474F832}"/>
+              </a:ext>
+            </a:extLst>
+          </p:cNvPr>
+          <p:cNvCxnSpPr>
+            <a:cxnSpLocks/>
+            <a:stCxn id="8" idx="2"/>
+          </p:cNvCxnSpPr>
+          <p:nvPr/>
+        </p:nvCxnSpPr>
+        <p:spPr>
+          <a:xfrm>
+            <a:off x="10174187" y="3057994"/>
+            <a:ext cx="0" cy="2096486"/>
+          </a:xfrm>
+          <a:prstGeom prst="straightConnector1">
+            <a:avLst/>
+          </a:prstGeom>
+          <a:ln>
+            <a:tailEnd type="triangle"/>
+          </a:ln>
+        </p:spPr>
+        <p:style>
+          <a:lnRef idx="1">
+            <a:schemeClr val="accent6"/>
+          </a:lnRef>
+          <a:fillRef idx="0">
+            <a:schemeClr val="accent6"/>
+          </a:fillRef>
+          <a:effectRef idx="0">
+            <a:schemeClr val="accent6"/>
+          </a:effectRef>
+          <a:fontRef idx="minor">
+            <a:schemeClr val="tx1"/>
+          </a:fontRef>
+        </p:style>
+      </p:cxnSp>
+      <p:sp>
+        <p:nvSpPr>
+          <p:cNvPr id="17" name="TextBox 16">
+            <a:extLst>
+              <a:ext uri="{FF2B5EF4-FFF2-40B4-BE49-F238E27FC236}">
+                <a16:creationId xmlns:a16="http://schemas.microsoft.com/office/drawing/2014/main" id="{436E1531-BA3E-7A40-BAFD-4ED44A86B181}"/>
+              </a:ext>
+            </a:extLst>
+          </p:cNvPr>
+          <p:cNvSpPr txBox="1"/>
+          <p:nvPr/>
+        </p:nvSpPr>
+        <p:spPr>
+          <a:xfrm>
+            <a:off x="7630333" y="3549659"/>
+            <a:ext cx="2543853" cy="646331"/>
+          </a:xfrm>
+          <a:prstGeom prst="rect">
+            <a:avLst/>
+          </a:prstGeom>
+          <a:noFill/>
+        </p:spPr>
+        <p:txBody>
+          <a:bodyPr wrap="square" rtlCol="0">
+            <a:spAutoFit/>
+          </a:bodyPr>
+          <a:lstStyle/>
+          <a:p>
+            <a:pPr algn="ctr"/>
             <a:r>
               <a:rPr lang="en-IT" dirty="0">
                 <a:latin typeface="Courier" pitchFamily="2" charset="0"/>
-                <a:cs typeface="Courier New" panose="02070309020205020404" pitchFamily="49" charset="0"/>
-              </a:rPr>
-              <a:t>MultiProvider</a:t>
-            </a:r>
-          </a:p>
-          <a:p>
-            <a:pPr lvl="1"/>
-            <a:endParaRPr lang="en-IT" dirty="0">
-              <a:latin typeface="Courier" pitchFamily="2" charset="0"/>
-              <a:cs typeface="Courier New" panose="02070309020205020404" pitchFamily="49" charset="0"/>
-            </a:endParaRPr>
-          </a:p>
-          <a:p>
-            <a:pPr lvl="1"/>
+              </a:rPr>
+              <a:t>notifyListeners</a:t>
+            </a:r>
+            <a:r>
+              <a:rPr lang="en-IT">
+                <a:latin typeface="Courier" pitchFamily="2" charset="0"/>
+              </a:rPr>
+              <a:t>() </a:t>
+            </a:r>
             <a:r>
               <a:rPr lang="en-IT" dirty="0">
-                <a:latin typeface="Courier" pitchFamily="2" charset="0"/>
-                <a:cs typeface="Courier New" panose="02070309020205020404" pitchFamily="49" charset="0"/>
-              </a:rPr>
-              <a:t>ProxyProvider</a:t>
-            </a:r>
-            <a:endParaRPr lang="en-IT" dirty="0"/>
-          </a:p>
-        </p:txBody>
-      </p:sp>
+                <a:latin typeface="Aptos" panose="020B0004020202020204" pitchFamily="34" charset="0"/>
+              </a:rPr>
+              <a:t>is called</a:t>
+            </a:r>
+          </a:p>
+        </p:txBody>
+      </p:sp>
+      <p:sp>
+        <p:nvSpPr>
+          <p:cNvPr id="18" name="TextBox 17">
+            <a:extLst>
+              <a:ext uri="{FF2B5EF4-FFF2-40B4-BE49-F238E27FC236}">
+                <a16:creationId xmlns:a16="http://schemas.microsoft.com/office/drawing/2014/main" id="{26D4C8E7-89C0-8D41-AE8C-0860C5F9D2C3}"/>
+              </a:ext>
+            </a:extLst>
+          </p:cNvPr>
+          <p:cNvSpPr txBox="1"/>
+          <p:nvPr/>
+        </p:nvSpPr>
+        <p:spPr>
+          <a:xfrm>
+            <a:off x="10107857" y="5777472"/>
+            <a:ext cx="1961460" cy="369332"/>
+          </a:xfrm>
+          <a:prstGeom prst="rect">
+            <a:avLst/>
+          </a:prstGeom>
+          <a:noFill/>
+        </p:spPr>
+        <p:txBody>
+          <a:bodyPr wrap="square" rtlCol="0">
+            <a:spAutoFit/>
+          </a:bodyPr>
+          <a:lstStyle/>
+          <a:p>
+            <a:pPr algn="ctr"/>
+            <a:r>
+              <a:rPr lang="en-IT" dirty="0">
+                <a:latin typeface="Aptos" panose="020B0004020202020204" pitchFamily="34" charset="0"/>
+              </a:rPr>
+              <a:t>Do something!</a:t>
+            </a:r>
+          </a:p>
+        </p:txBody>
+      </p:sp>
+      <p:cxnSp>
+        <p:nvCxnSpPr>
+          <p:cNvPr id="19" name="Straight Arrow Connector 18">
+            <a:extLst>
+              <a:ext uri="{FF2B5EF4-FFF2-40B4-BE49-F238E27FC236}">
+                <a16:creationId xmlns:a16="http://schemas.microsoft.com/office/drawing/2014/main" id="{34B34F18-5C99-1F45-B468-1CEF7DA149E1}"/>
+              </a:ext>
+            </a:extLst>
+          </p:cNvPr>
+          <p:cNvCxnSpPr>
+            <a:cxnSpLocks/>
+            <a:stCxn id="11" idx="3"/>
+            <a:endCxn id="14" idx="1"/>
+          </p:cNvCxnSpPr>
+          <p:nvPr/>
+        </p:nvCxnSpPr>
+        <p:spPr>
+          <a:xfrm flipV="1">
+            <a:off x="9626273" y="5229693"/>
+            <a:ext cx="1005114" cy="1"/>
+          </a:xfrm>
+          <a:prstGeom prst="straightConnector1">
+            <a:avLst/>
+          </a:prstGeom>
+          <a:ln>
+            <a:tailEnd type="triangle"/>
+          </a:ln>
+        </p:spPr>
+        <p:style>
+          <a:lnRef idx="1">
+            <a:schemeClr val="accent6"/>
+          </a:lnRef>
+          <a:fillRef idx="0">
+            <a:schemeClr val="accent6"/>
+          </a:fillRef>
+          <a:effectRef idx="0">
+            <a:schemeClr val="accent6"/>
+          </a:effectRef>
+          <a:fontRef idx="minor">
+            <a:schemeClr val="tx1"/>
+          </a:fontRef>
+        </p:style>
+      </p:cxnSp>
       <p:sp>
         <p:nvSpPr>
           <p:cNvPr id="3" name="Slide Number Placeholder 2">
             <a:extLst>
               <a:ext uri="{FF2B5EF4-FFF2-40B4-BE49-F238E27FC236}">
-                <a16:creationId xmlns:a16="http://schemas.microsoft.com/office/drawing/2014/main" id="{7B5FFEB4-86CC-D24E-AECC-C61D8D8E46E9}"/>
+                <a16:creationId xmlns:a16="http://schemas.microsoft.com/office/drawing/2014/main" id="{4574285D-3BDB-2340-8F11-DC7C05ED5D78}"/>
               </a:ext>
             </a:extLst>
           </p:cNvPr>
@@ -4623,7 +4992,7 @@
     </p:spTree>
     <p:extLst>
       <p:ext uri="{BB962C8B-B14F-4D97-AF65-F5344CB8AC3E}">
-        <p14:creationId xmlns:p14="http://schemas.microsoft.com/office/powerpoint/2010/main" val="3442879726"/>
+        <p14:creationId xmlns:p14="http://schemas.microsoft.com/office/powerpoint/2010/main" val="3707481951"/>
       </p:ext>
     </p:extLst>
   </p:cSld>
@@ -4679,7 +5048,7 @@
               <a:rPr lang="en-IT" dirty="0">
                 <a:latin typeface="Courier" pitchFamily="2" charset="0"/>
               </a:rPr>
-              <a:t>ChangeNotifier</a:t>
+              <a:t>ChangeNotifierProvider</a:t>
             </a:r>
             <a:r>
               <a:rPr lang="en-IT" dirty="0"/>
@@ -4707,7 +5076,7 @@
         <p:spPr>
           <a:xfrm>
             <a:off x="428172" y="1361167"/>
-            <a:ext cx="6596625" cy="5153933"/>
+            <a:ext cx="7118612" cy="5153933"/>
           </a:xfrm>
         </p:spPr>
         <p:txBody>
@@ -4720,28 +5089,11 @@
               <a:rPr lang="en-GB" dirty="0" err="1">
                 <a:latin typeface="Courier" pitchFamily="2" charset="0"/>
               </a:rPr>
-              <a:t>ChangeNotifier</a:t>
+              <a:t>ChangeNotifierProvider</a:t>
             </a:r>
             <a:r>
               <a:rPr lang="en-GB" dirty="0"/>
-              <a:t> is a class that can notify </a:t>
-            </a:r>
-            <a:r>
-              <a:rPr lang="en-GB" b="1" dirty="0"/>
-              <a:t>listeners </a:t>
-            </a:r>
-            <a:r>
-              <a:rPr lang="en-GB" dirty="0"/>
-              <a:t>of any changes in the state. </a:t>
-            </a:r>
-          </a:p>
-          <a:p>
-            <a:endParaRPr lang="en-GB" dirty="0"/>
-          </a:p>
-          <a:p>
-            <a:r>
-              <a:rPr lang="en-GB" dirty="0"/>
-              <a:t>You usually extend the </a:t>
+              <a:t> is a class that wraps a class that implements </a:t>
             </a:r>
             <a:r>
               <a:rPr lang="en-GB" dirty="0" err="1">
@@ -4751,7 +5103,15 @@
             </a:r>
             <a:r>
               <a:rPr lang="en-GB" dirty="0"/>
-              <a:t> for models so you can send notifications when your model changes. </a:t>
+              <a:t> and </a:t>
+            </a:r>
+            <a:r>
+              <a:rPr lang="en-GB" b="1" dirty="0"/>
+              <a:t>provide it </a:t>
+            </a:r>
+            <a:r>
+              <a:rPr lang="en-GB" dirty="0"/>
+              <a:t>to its descendants.</a:t>
             </a:r>
           </a:p>
           <a:p>
@@ -4760,25 +5120,121 @@
           <a:p>
             <a:r>
               <a:rPr lang="en-GB" dirty="0"/>
-              <a:t>When something in the model changes, you call </a:t>
-            </a:r>
-            <a:r>
-              <a:rPr lang="en-GB" b="1" dirty="0" err="1">
+              <a:t>Now the widget tree can access to it (and use it!)</a:t>
+            </a:r>
+          </a:p>
+          <a:p>
+            <a:pPr marL="0" indent="0">
+              <a:buNone/>
+            </a:pPr>
+            <a:endParaRPr lang="en-GB" dirty="0"/>
+          </a:p>
+          <a:p>
+            <a:r>
+              <a:rPr lang="en-GB" dirty="0">
+                <a:ea typeface="Palatino" pitchFamily="2" charset="77"/>
+              </a:rPr>
+              <a:t> </a:t>
+            </a:r>
+            <a:r>
+              <a:rPr lang="en-GB" dirty="0" err="1">
+                <a:ea typeface="Palatino" pitchFamily="2" charset="77"/>
+              </a:rPr>
+              <a:t>Synthax</a:t>
+            </a:r>
+            <a:r>
+              <a:rPr lang="en-GB" dirty="0">
+                <a:ea typeface="Palatino" pitchFamily="2" charset="77"/>
+              </a:rPr>
+              <a:t>:</a:t>
+            </a:r>
+            <a:br>
+              <a:rPr lang="en-GB" dirty="0">
+                <a:latin typeface="Palatino" pitchFamily="2" charset="77"/>
+                <a:ea typeface="Palatino" pitchFamily="2" charset="77"/>
+              </a:rPr>
+            </a:br>
+            <a:br>
+              <a:rPr lang="en-GB" dirty="0">
+                <a:latin typeface="Palatino" pitchFamily="2" charset="77"/>
+                <a:ea typeface="Palatino" pitchFamily="2" charset="77"/>
+              </a:rPr>
+            </a:br>
+            <a:r>
+              <a:rPr lang="en-GB" sz="2000" b="1" dirty="0" err="1">
                 <a:latin typeface="Courier" pitchFamily="2" charset="0"/>
               </a:rPr>
-              <a:t>notifyListeners</a:t>
-            </a:r>
-            <a:r>
-              <a:rPr lang="en-GB" dirty="0">
+              <a:t>ChangeNotifierProvider</a:t>
+            </a:r>
+            <a:r>
+              <a:rPr lang="en-GB" sz="2000" dirty="0">
                 <a:latin typeface="Courier" pitchFamily="2" charset="0"/>
               </a:rPr>
-              <a:t>() </a:t>
-            </a:r>
-            <a:r>
-              <a:rPr lang="en-GB" dirty="0"/>
-              <a:t>and whoever is listening can use the newly changed model.</a:t>
-            </a:r>
-            <a:endParaRPr lang="en-IT" dirty="0"/>
+              <a:t>(</a:t>
+            </a:r>
+            <a:br>
+              <a:rPr lang="en-GB" sz="2000" dirty="0">
+                <a:latin typeface="Courier" pitchFamily="2" charset="0"/>
+              </a:rPr>
+            </a:br>
+            <a:r>
+              <a:rPr lang="en-GB" sz="2000" dirty="0">
+                <a:latin typeface="Courier" pitchFamily="2" charset="0"/>
+              </a:rPr>
+              <a:t>	create: (context) =&gt; 	</a:t>
+            </a:r>
+            <a:r>
+              <a:rPr lang="en-GB" sz="2000" dirty="0" err="1">
+                <a:latin typeface="Courier" pitchFamily="2" charset="0"/>
+              </a:rPr>
+              <a:t>ClassImplementingChangeNotifier</a:t>
+            </a:r>
+            <a:r>
+              <a:rPr lang="en-GB" sz="2000" dirty="0">
+                <a:latin typeface="Courier" pitchFamily="2" charset="0"/>
+              </a:rPr>
+              <a:t>(), </a:t>
+            </a:r>
+            <a:br>
+              <a:rPr lang="en-GB" sz="2000" dirty="0">
+                <a:latin typeface="Courier" pitchFamily="2" charset="0"/>
+              </a:rPr>
+            </a:br>
+            <a:r>
+              <a:rPr lang="en-GB" sz="2000" dirty="0">
+                <a:latin typeface="Courier" pitchFamily="2" charset="0"/>
+              </a:rPr>
+              <a:t>	child: &lt;</a:t>
+            </a:r>
+            <a:r>
+              <a:rPr lang="en-GB" sz="2000" dirty="0" err="1">
+                <a:latin typeface="Courier" pitchFamily="2" charset="0"/>
+              </a:rPr>
+              <a:t>widget_tree</a:t>
+            </a:r>
+            <a:r>
+              <a:rPr lang="en-GB" sz="2000" dirty="0">
+                <a:latin typeface="Courier" pitchFamily="2" charset="0"/>
+              </a:rPr>
+              <a:t>&gt;, </a:t>
+            </a:r>
+            <a:br>
+              <a:rPr lang="en-GB" sz="2000" dirty="0">
+                <a:latin typeface="Courier" pitchFamily="2" charset="0"/>
+              </a:rPr>
+            </a:br>
+            <a:r>
+              <a:rPr lang="en-GB" sz="2000" dirty="0">
+                <a:latin typeface="Courier" pitchFamily="2" charset="0"/>
+              </a:rPr>
+              <a:t>); </a:t>
+            </a:r>
+          </a:p>
+          <a:p>
+            <a:endParaRPr lang="en-IT" dirty="0">
+              <a:latin typeface="Palatino" pitchFamily="2" charset="77"/>
+              <a:ea typeface="Palatino" pitchFamily="2" charset="77"/>
+            </a:endParaRPr>
           </a:p>
           <a:p>
             <a:pPr lvl="1"/>
@@ -4791,10 +5247,10 @@
       </p:sp>
       <p:pic>
         <p:nvPicPr>
-          <p:cNvPr id="4" name="Graphic 3" descr="Ear outline">
-            <a:extLst>
-              <a:ext uri="{FF2B5EF4-FFF2-40B4-BE49-F238E27FC236}">
-                <a16:creationId xmlns:a16="http://schemas.microsoft.com/office/drawing/2014/main" id="{15C98D6F-4ED5-884C-A6AC-A97108B17751}"/>
+          <p:cNvPr id="7" name="Graphic 6" descr="Bell outline">
+            <a:extLst>
+              <a:ext uri="{FF2B5EF4-FFF2-40B4-BE49-F238E27FC236}">
+                <a16:creationId xmlns:a16="http://schemas.microsoft.com/office/drawing/2014/main" id="{25DCBBD3-6E78-9141-9E2C-341174CD81A6}"/>
               </a:ext>
             </a:extLst>
           </p:cNvPr>
@@ -4804,13 +5260,13 @@
           <p:nvPr/>
         </p:nvPicPr>
         <p:blipFill>
-          <a:blip r:embed="rId2">
+          <a:blip r:embed="rId3">
             <a:extLst>
               <a:ext uri="{28A0092B-C50C-407E-A947-70E740481C1C}">
                 <a14:useLocalDpi xmlns:a14="http://schemas.microsoft.com/office/drawing/2010/main" val="0"/>
               </a:ext>
               <a:ext uri="{96DAC541-7B7A-43D3-8B79-37D633B846F1}">
-                <asvg:svgBlip xmlns:asvg="http://schemas.microsoft.com/office/drawing/2016/SVG/main" r:embed="rId3"/>
+                <asvg:svgBlip xmlns:asvg="http://schemas.microsoft.com/office/drawing/2016/SVG/main" r:embed="rId4"/>
               </a:ext>
             </a:extLst>
           </a:blip>
@@ -4820,7 +5276,7 @@
         </p:blipFill>
         <p:spPr>
           <a:xfrm>
-            <a:off x="8063935" y="5093040"/>
+            <a:off x="9883775" y="2165639"/>
             <a:ext cx="914400" cy="914400"/>
           </a:xfrm>
           <a:prstGeom prst="rect">
@@ -4828,45 +5284,6 @@
           </a:prstGeom>
         </p:spPr>
       </p:pic>
-      <p:pic>
-        <p:nvPicPr>
-          <p:cNvPr id="7" name="Graphic 6" descr="Bell outline">
-            <a:extLst>
-              <a:ext uri="{FF2B5EF4-FFF2-40B4-BE49-F238E27FC236}">
-                <a16:creationId xmlns:a16="http://schemas.microsoft.com/office/drawing/2014/main" id="{25DCBBD3-6E78-9141-9E2C-341174CD81A6}"/>
-              </a:ext>
-            </a:extLst>
-          </p:cNvPr>
-          <p:cNvPicPr>
-            <a:picLocks noChangeAspect="1"/>
-          </p:cNvPicPr>
-          <p:nvPr/>
-        </p:nvPicPr>
-        <p:blipFill>
-          <a:blip r:embed="rId4">
-            <a:extLst>
-              <a:ext uri="{28A0092B-C50C-407E-A947-70E740481C1C}">
-                <a14:useLocalDpi xmlns:a14="http://schemas.microsoft.com/office/drawing/2010/main" val="0"/>
-              </a:ext>
-              <a:ext uri="{96DAC541-7B7A-43D3-8B79-37D633B846F1}">
-                <asvg:svgBlip xmlns:asvg="http://schemas.microsoft.com/office/drawing/2016/SVG/main" r:embed="rId5"/>
-              </a:ext>
-            </a:extLst>
-          </a:blip>
-          <a:stretch>
-            <a:fillRect/>
-          </a:stretch>
-        </p:blipFill>
-        <p:spPr>
-          <a:xfrm>
-            <a:off x="9716987" y="2166178"/>
-            <a:ext cx="914400" cy="914400"/>
-          </a:xfrm>
-          <a:prstGeom prst="rect">
-            <a:avLst/>
-          </a:prstGeom>
-        </p:spPr>
-      </p:pic>
       <p:sp>
         <p:nvSpPr>
           <p:cNvPr id="8" name="Rectangle 7">
@@ -4881,8 +5298,8 @@
         </p:nvSpPr>
         <p:spPr>
           <a:xfrm>
-            <a:off x="9069049" y="1461541"/>
-            <a:ext cx="2210276" cy="1596453"/>
+            <a:off x="9004186" y="1468733"/>
+            <a:ext cx="2543852" cy="1596453"/>
           </a:xfrm>
           <a:prstGeom prst="rect">
             <a:avLst/>
@@ -4927,7 +5344,7 @@
         <p:spPr>
           <a:xfrm>
             <a:off x="8985258" y="1550666"/>
-            <a:ext cx="2377857" cy="646331"/>
+            <a:ext cx="2560529" cy="646331"/>
           </a:xfrm>
           <a:prstGeom prst="rect">
             <a:avLst/>
@@ -4942,17 +5359,14 @@
           <a:p>
             <a:pPr algn="ctr"/>
             <a:r>
-              <a:rPr lang="en-IT" dirty="0">
-                <a:latin typeface="Palatino Linotype" panose="02040502050505030304" pitchFamily="18" charset="0"/>
-              </a:rPr>
-              <a:t>A class that extends </a:t>
-            </a:r>
-            <a:r>
-              <a:rPr lang="en-IT" dirty="0">
+              <a:rPr lang="en-GB" dirty="0" err="1">
                 <a:latin typeface="Courier" pitchFamily="2" charset="0"/>
               </a:rPr>
-              <a:t>ChangeNotifier</a:t>
-            </a:r>
+              <a:t>ClassImplementingChangeNotifier</a:t>
+            </a:r>
+            <a:endParaRPr lang="en-IT" dirty="0">
+              <a:latin typeface="Courier" pitchFamily="2" charset="0"/>
+            </a:endParaRPr>
           </a:p>
         </p:txBody>
       </p:sp>
@@ -4970,8 +5384,8 @@
         </p:nvSpPr>
         <p:spPr>
           <a:xfrm>
-            <a:off x="7415997" y="4431467"/>
-            <a:ext cx="2210276" cy="1596453"/>
+            <a:off x="7757416" y="3229481"/>
+            <a:ext cx="3290334" cy="3373178"/>
           </a:xfrm>
           <a:prstGeom prst="rect">
             <a:avLst/>
@@ -5015,8 +5429,8 @@
         </p:nvSpPr>
         <p:spPr>
           <a:xfrm>
-            <a:off x="7483788" y="4508149"/>
-            <a:ext cx="2074693" cy="646331"/>
+            <a:off x="7688769" y="3244334"/>
+            <a:ext cx="3427627" cy="369332"/>
           </a:xfrm>
           <a:prstGeom prst="rect">
             <a:avLst/>
@@ -5031,72 +5445,307 @@
           <a:p>
             <a:pPr algn="ctr"/>
             <a:r>
-              <a:rPr lang="en-IT" dirty="0">
-                <a:latin typeface="Palatino Linotype" panose="02040502050505030304" pitchFamily="18" charset="0"/>
-              </a:rPr>
-              <a:t>A class that listens to the other class</a:t>
-            </a:r>
-          </a:p>
-        </p:txBody>
-      </p:sp>
-      <p:pic>
-        <p:nvPicPr>
-          <p:cNvPr id="14" name="Graphic 13" descr="Excellent outline">
-            <a:extLst>
-              <a:ext uri="{FF2B5EF4-FFF2-40B4-BE49-F238E27FC236}">
-                <a16:creationId xmlns:a16="http://schemas.microsoft.com/office/drawing/2014/main" id="{025E28A6-47A6-A147-BCB1-4B7EA047E61A}"/>
-              </a:ext>
-            </a:extLst>
-          </p:cNvPr>
-          <p:cNvPicPr>
-            <a:picLocks noChangeAspect="1"/>
-          </p:cNvPicPr>
-          <p:nvPr/>
-        </p:nvPicPr>
-        <p:blipFill>
-          <a:blip r:embed="rId6">
-            <a:extLst>
-              <a:ext uri="{28A0092B-C50C-407E-A947-70E740481C1C}">
-                <a14:useLocalDpi xmlns:a14="http://schemas.microsoft.com/office/drawing/2010/main" val="0"/>
-              </a:ext>
-              <a:ext uri="{96DAC541-7B7A-43D3-8B79-37D633B846F1}">
-                <asvg:svgBlip xmlns:asvg="http://schemas.microsoft.com/office/drawing/2016/SVG/main" r:embed="rId7"/>
-              </a:ext>
-            </a:extLst>
-          </a:blip>
-          <a:stretch>
-            <a:fillRect/>
-          </a:stretch>
-        </p:blipFill>
-        <p:spPr>
-          <a:xfrm>
-            <a:off x="10631387" y="4772493"/>
-            <a:ext cx="914400" cy="914400"/>
+              <a:rPr lang="en-GB" dirty="0" err="1">
+                <a:latin typeface="Courier" pitchFamily="2" charset="0"/>
+              </a:rPr>
+              <a:t>ChangeNotifierProvider</a:t>
+            </a:r>
+            <a:endParaRPr lang="en-IT" dirty="0">
+              <a:latin typeface="Palatino Linotype" panose="02040502050505030304" pitchFamily="18" charset="0"/>
+            </a:endParaRPr>
+          </a:p>
+        </p:txBody>
+      </p:sp>
+      <p:sp>
+        <p:nvSpPr>
+          <p:cNvPr id="21" name="Rectangle 20">
+            <a:extLst>
+              <a:ext uri="{FF2B5EF4-FFF2-40B4-BE49-F238E27FC236}">
+                <a16:creationId xmlns:a16="http://schemas.microsoft.com/office/drawing/2014/main" id="{2DB90A0C-F170-3046-950B-B6AA1D0B827A}"/>
+              </a:ext>
+            </a:extLst>
+          </p:cNvPr>
+          <p:cNvSpPr/>
+          <p:nvPr/>
+        </p:nvSpPr>
+        <p:spPr>
+          <a:xfrm>
+            <a:off x="8000948" y="4404308"/>
+            <a:ext cx="2214850" cy="2066651"/>
           </a:xfrm>
           <a:prstGeom prst="rect">
             <a:avLst/>
           </a:prstGeom>
-        </p:spPr>
-      </p:pic>
+          <a:noFill/>
+        </p:spPr>
+        <p:style>
+          <a:lnRef idx="2">
+            <a:schemeClr val="accent6"/>
+          </a:lnRef>
+          <a:fillRef idx="1">
+            <a:schemeClr val="lt1"/>
+          </a:fillRef>
+          <a:effectRef idx="0">
+            <a:schemeClr val="accent6"/>
+          </a:effectRef>
+          <a:fontRef idx="minor">
+            <a:schemeClr val="dk1"/>
+          </a:fontRef>
+        </p:style>
+        <p:txBody>
+          <a:bodyPr rtlCol="0" anchor="ctr"/>
+          <a:lstStyle/>
+          <a:p>
+            <a:pPr algn="ctr"/>
+            <a:endParaRPr lang="en-IT"/>
+          </a:p>
+        </p:txBody>
+      </p:sp>
+      <p:sp>
+        <p:nvSpPr>
+          <p:cNvPr id="22" name="Rectangle 21">
+            <a:extLst>
+              <a:ext uri="{FF2B5EF4-FFF2-40B4-BE49-F238E27FC236}">
+                <a16:creationId xmlns:a16="http://schemas.microsoft.com/office/drawing/2014/main" id="{0F3FF18A-66D3-B941-90F4-612F80FDB5BB}"/>
+              </a:ext>
+            </a:extLst>
+          </p:cNvPr>
+          <p:cNvSpPr/>
+          <p:nvPr/>
+        </p:nvSpPr>
+        <p:spPr>
+          <a:xfrm>
+            <a:off x="9004186" y="4885268"/>
+            <a:ext cx="348899" cy="282473"/>
+          </a:xfrm>
+          <a:prstGeom prst="rect">
+            <a:avLst/>
+          </a:prstGeom>
+          <a:noFill/>
+        </p:spPr>
+        <p:style>
+          <a:lnRef idx="2">
+            <a:schemeClr val="accent6"/>
+          </a:lnRef>
+          <a:fillRef idx="1">
+            <a:schemeClr val="lt1"/>
+          </a:fillRef>
+          <a:effectRef idx="0">
+            <a:schemeClr val="accent6"/>
+          </a:effectRef>
+          <a:fontRef idx="minor">
+            <a:schemeClr val="dk1"/>
+          </a:fontRef>
+        </p:style>
+        <p:txBody>
+          <a:bodyPr rtlCol="0" anchor="ctr"/>
+          <a:lstStyle/>
+          <a:p>
+            <a:pPr algn="ctr"/>
+            <a:endParaRPr lang="en-IT"/>
+          </a:p>
+        </p:txBody>
+      </p:sp>
+      <p:sp>
+        <p:nvSpPr>
+          <p:cNvPr id="23" name="Rectangle 22">
+            <a:extLst>
+              <a:ext uri="{FF2B5EF4-FFF2-40B4-BE49-F238E27FC236}">
+                <a16:creationId xmlns:a16="http://schemas.microsoft.com/office/drawing/2014/main" id="{ED4D41E2-2F4F-4841-9D31-A65CF094C8D4}"/>
+              </a:ext>
+            </a:extLst>
+          </p:cNvPr>
+          <p:cNvSpPr/>
+          <p:nvPr/>
+        </p:nvSpPr>
+        <p:spPr>
+          <a:xfrm>
+            <a:off x="9388124" y="5392691"/>
+            <a:ext cx="348899" cy="282473"/>
+          </a:xfrm>
+          <a:prstGeom prst="rect">
+            <a:avLst/>
+          </a:prstGeom>
+          <a:noFill/>
+        </p:spPr>
+        <p:style>
+          <a:lnRef idx="2">
+            <a:schemeClr val="accent6"/>
+          </a:lnRef>
+          <a:fillRef idx="1">
+            <a:schemeClr val="lt1"/>
+          </a:fillRef>
+          <a:effectRef idx="0">
+            <a:schemeClr val="accent6"/>
+          </a:effectRef>
+          <a:fontRef idx="minor">
+            <a:schemeClr val="dk1"/>
+          </a:fontRef>
+        </p:style>
+        <p:txBody>
+          <a:bodyPr rtlCol="0" anchor="ctr"/>
+          <a:lstStyle/>
+          <a:p>
+            <a:pPr algn="ctr"/>
+            <a:endParaRPr lang="en-IT"/>
+          </a:p>
+        </p:txBody>
+      </p:sp>
+      <p:sp>
+        <p:nvSpPr>
+          <p:cNvPr id="24" name="Rectangle 23">
+            <a:extLst>
+              <a:ext uri="{FF2B5EF4-FFF2-40B4-BE49-F238E27FC236}">
+                <a16:creationId xmlns:a16="http://schemas.microsoft.com/office/drawing/2014/main" id="{064416C4-FAA0-9D4F-B3EA-52A11C99FAC0}"/>
+              </a:ext>
+            </a:extLst>
+          </p:cNvPr>
+          <p:cNvSpPr/>
+          <p:nvPr/>
+        </p:nvSpPr>
+        <p:spPr>
+          <a:xfrm>
+            <a:off x="8890474" y="5988352"/>
+            <a:ext cx="348899" cy="282473"/>
+          </a:xfrm>
+          <a:prstGeom prst="rect">
+            <a:avLst/>
+          </a:prstGeom>
+          <a:noFill/>
+        </p:spPr>
+        <p:style>
+          <a:lnRef idx="2">
+            <a:schemeClr val="accent6"/>
+          </a:lnRef>
+          <a:fillRef idx="1">
+            <a:schemeClr val="lt1"/>
+          </a:fillRef>
+          <a:effectRef idx="0">
+            <a:schemeClr val="accent6"/>
+          </a:effectRef>
+          <a:fontRef idx="minor">
+            <a:schemeClr val="dk1"/>
+          </a:fontRef>
+        </p:style>
+        <p:txBody>
+          <a:bodyPr rtlCol="0" anchor="ctr"/>
+          <a:lstStyle/>
+          <a:p>
+            <a:pPr algn="ctr"/>
+            <a:endParaRPr lang="en-IT"/>
+          </a:p>
+        </p:txBody>
+      </p:sp>
+      <p:sp>
+        <p:nvSpPr>
+          <p:cNvPr id="25" name="Rectangle 24">
+            <a:extLst>
+              <a:ext uri="{FF2B5EF4-FFF2-40B4-BE49-F238E27FC236}">
+                <a16:creationId xmlns:a16="http://schemas.microsoft.com/office/drawing/2014/main" id="{FB467CAA-3EC9-CC4D-861D-6AB37A6759CC}"/>
+              </a:ext>
+            </a:extLst>
+          </p:cNvPr>
+          <p:cNvSpPr/>
+          <p:nvPr/>
+        </p:nvSpPr>
+        <p:spPr>
+          <a:xfrm>
+            <a:off x="8542832" y="5392692"/>
+            <a:ext cx="348899" cy="282473"/>
+          </a:xfrm>
+          <a:prstGeom prst="rect">
+            <a:avLst/>
+          </a:prstGeom>
+          <a:noFill/>
+        </p:spPr>
+        <p:style>
+          <a:lnRef idx="2">
+            <a:schemeClr val="accent6"/>
+          </a:lnRef>
+          <a:fillRef idx="1">
+            <a:schemeClr val="lt1"/>
+          </a:fillRef>
+          <a:effectRef idx="0">
+            <a:schemeClr val="accent6"/>
+          </a:effectRef>
+          <a:fontRef idx="minor">
+            <a:schemeClr val="dk1"/>
+          </a:fontRef>
+        </p:style>
+        <p:txBody>
+          <a:bodyPr rtlCol="0" anchor="ctr"/>
+          <a:lstStyle/>
+          <a:p>
+            <a:pPr algn="ctr"/>
+            <a:endParaRPr lang="en-IT"/>
+          </a:p>
+        </p:txBody>
+      </p:sp>
+      <p:sp>
+        <p:nvSpPr>
+          <p:cNvPr id="26" name="Rectangle 25">
+            <a:extLst>
+              <a:ext uri="{FF2B5EF4-FFF2-40B4-BE49-F238E27FC236}">
+                <a16:creationId xmlns:a16="http://schemas.microsoft.com/office/drawing/2014/main" id="{D9CBB247-5361-CF4C-B5BB-F8318BB442EE}"/>
+              </a:ext>
+            </a:extLst>
+          </p:cNvPr>
+          <p:cNvSpPr/>
+          <p:nvPr/>
+        </p:nvSpPr>
+        <p:spPr>
+          <a:xfrm>
+            <a:off x="8235047" y="5988352"/>
+            <a:ext cx="348899" cy="282473"/>
+          </a:xfrm>
+          <a:prstGeom prst="rect">
+            <a:avLst/>
+          </a:prstGeom>
+          <a:noFill/>
+        </p:spPr>
+        <p:style>
+          <a:lnRef idx="2">
+            <a:schemeClr val="accent6"/>
+          </a:lnRef>
+          <a:fillRef idx="1">
+            <a:schemeClr val="lt1"/>
+          </a:fillRef>
+          <a:effectRef idx="0">
+            <a:schemeClr val="accent6"/>
+          </a:effectRef>
+          <a:fontRef idx="minor">
+            <a:schemeClr val="dk1"/>
+          </a:fontRef>
+        </p:style>
+        <p:txBody>
+          <a:bodyPr rtlCol="0" anchor="ctr"/>
+          <a:lstStyle/>
+          <a:p>
+            <a:pPr algn="ctr"/>
+            <a:endParaRPr lang="en-IT"/>
+          </a:p>
+        </p:txBody>
+      </p:sp>
       <p:cxnSp>
         <p:nvCxnSpPr>
-          <p:cNvPr id="16" name="Straight Arrow Connector 15">
-            <a:extLst>
-              <a:ext uri="{FF2B5EF4-FFF2-40B4-BE49-F238E27FC236}">
-                <a16:creationId xmlns:a16="http://schemas.microsoft.com/office/drawing/2014/main" id="{B44389E6-B3F0-0A40-B55C-723EF474F832}"/>
+          <p:cNvPr id="27" name="Straight Arrow Connector 26">
+            <a:extLst>
+              <a:ext uri="{FF2B5EF4-FFF2-40B4-BE49-F238E27FC236}">
+                <a16:creationId xmlns:a16="http://schemas.microsoft.com/office/drawing/2014/main" id="{A4C1144C-68BE-314D-A267-35AC11772950}"/>
               </a:ext>
             </a:extLst>
           </p:cNvPr>
           <p:cNvCxnSpPr>
             <a:cxnSpLocks/>
-            <a:stCxn id="8" idx="2"/>
+            <a:stCxn id="22" idx="2"/>
+            <a:endCxn id="25" idx="0"/>
           </p:cNvCxnSpPr>
           <p:nvPr/>
         </p:nvCxnSpPr>
         <p:spPr>
-          <a:xfrm>
-            <a:off x="10174187" y="3057994"/>
-            <a:ext cx="0" cy="2096486"/>
+          <a:xfrm flipH="1">
+            <a:off x="8717282" y="5167741"/>
+            <a:ext cx="461354" cy="224951"/>
           </a:xfrm>
           <a:prstGeom prst="straightConnector1">
             <a:avLst/>
@@ -5120,108 +5769,26 @@
           </a:fontRef>
         </p:style>
       </p:cxnSp>
-      <p:sp>
-        <p:nvSpPr>
-          <p:cNvPr id="17" name="TextBox 16">
-            <a:extLst>
-              <a:ext uri="{FF2B5EF4-FFF2-40B4-BE49-F238E27FC236}">
-                <a16:creationId xmlns:a16="http://schemas.microsoft.com/office/drawing/2014/main" id="{436E1531-BA3E-7A40-BAFD-4ED44A86B181}"/>
-              </a:ext>
-            </a:extLst>
-          </p:cNvPr>
-          <p:cNvSpPr txBox="1"/>
-          <p:nvPr/>
-        </p:nvSpPr>
-        <p:spPr>
-          <a:xfrm>
-            <a:off x="7630333" y="3549659"/>
-            <a:ext cx="2543853" cy="646331"/>
-          </a:xfrm>
-          <a:prstGeom prst="rect">
-            <a:avLst/>
-          </a:prstGeom>
-          <a:noFill/>
-        </p:spPr>
-        <p:txBody>
-          <a:bodyPr wrap="square" rtlCol="0">
-            <a:spAutoFit/>
-          </a:bodyPr>
-          <a:lstStyle/>
-          <a:p>
-            <a:pPr algn="ctr"/>
-            <a:r>
-              <a:rPr lang="en-IT" dirty="0">
-                <a:latin typeface="Courier" pitchFamily="2" charset="0"/>
-              </a:rPr>
-              <a:t>notifyListeners() </a:t>
-            </a:r>
-            <a:r>
-              <a:rPr lang="en-IT" dirty="0">
-                <a:latin typeface="Palatino Linotype" panose="02040502050505030304" pitchFamily="18" charset="0"/>
-              </a:rPr>
-              <a:t>is called</a:t>
-            </a:r>
-          </a:p>
-        </p:txBody>
-      </p:sp>
-      <p:sp>
-        <p:nvSpPr>
-          <p:cNvPr id="18" name="TextBox 17">
-            <a:extLst>
-              <a:ext uri="{FF2B5EF4-FFF2-40B4-BE49-F238E27FC236}">
-                <a16:creationId xmlns:a16="http://schemas.microsoft.com/office/drawing/2014/main" id="{26D4C8E7-89C0-8D41-AE8C-0860C5F9D2C3}"/>
-              </a:ext>
-            </a:extLst>
-          </p:cNvPr>
-          <p:cNvSpPr txBox="1"/>
-          <p:nvPr/>
-        </p:nvSpPr>
-        <p:spPr>
-          <a:xfrm>
-            <a:off x="10107857" y="5777472"/>
-            <a:ext cx="1961460" cy="369332"/>
-          </a:xfrm>
-          <a:prstGeom prst="rect">
-            <a:avLst/>
-          </a:prstGeom>
-          <a:noFill/>
-        </p:spPr>
-        <p:txBody>
-          <a:bodyPr wrap="square" rtlCol="0">
-            <a:spAutoFit/>
-          </a:bodyPr>
-          <a:lstStyle/>
-          <a:p>
-            <a:pPr algn="ctr"/>
-            <a:r>
-              <a:rPr lang="en-IT" dirty="0">
-                <a:latin typeface="Palatino Linotype" panose="02040502050505030304" pitchFamily="18" charset="0"/>
-              </a:rPr>
-              <a:t>Do something!</a:t>
-            </a:r>
-          </a:p>
-        </p:txBody>
-      </p:sp>
       <p:cxnSp>
         <p:nvCxnSpPr>
-          <p:cNvPr id="19" name="Straight Arrow Connector 18">
-            <a:extLst>
-              <a:ext uri="{FF2B5EF4-FFF2-40B4-BE49-F238E27FC236}">
-                <a16:creationId xmlns:a16="http://schemas.microsoft.com/office/drawing/2014/main" id="{34B34F18-5C99-1F45-B468-1CEF7DA149E1}"/>
+          <p:cNvPr id="30" name="Straight Arrow Connector 29">
+            <a:extLst>
+              <a:ext uri="{FF2B5EF4-FFF2-40B4-BE49-F238E27FC236}">
+                <a16:creationId xmlns:a16="http://schemas.microsoft.com/office/drawing/2014/main" id="{97BE5B32-B35D-9949-A654-D7E5A8DC5D5C}"/>
               </a:ext>
             </a:extLst>
           </p:cNvPr>
           <p:cNvCxnSpPr>
             <a:cxnSpLocks/>
-            <a:stCxn id="11" idx="3"/>
-            <a:endCxn id="14" idx="1"/>
+            <a:stCxn id="22" idx="2"/>
+            <a:endCxn id="23" idx="0"/>
           </p:cNvCxnSpPr>
           <p:nvPr/>
         </p:nvCxnSpPr>
         <p:spPr>
-          <a:xfrm flipV="1">
-            <a:off x="9626273" y="5229693"/>
-            <a:ext cx="1005114" cy="1"/>
+          <a:xfrm>
+            <a:off x="9178636" y="5167741"/>
+            <a:ext cx="383938" cy="224950"/>
           </a:xfrm>
           <a:prstGeom prst="straightConnector1">
             <a:avLst/>
@@ -5245,12 +5812,350 @@
           </a:fontRef>
         </p:style>
       </p:cxnSp>
+      <p:cxnSp>
+        <p:nvCxnSpPr>
+          <p:cNvPr id="33" name="Straight Arrow Connector 32">
+            <a:extLst>
+              <a:ext uri="{FF2B5EF4-FFF2-40B4-BE49-F238E27FC236}">
+                <a16:creationId xmlns:a16="http://schemas.microsoft.com/office/drawing/2014/main" id="{6FA2566E-76D7-8749-8663-DB0DD2E413FF}"/>
+              </a:ext>
+            </a:extLst>
+          </p:cNvPr>
+          <p:cNvCxnSpPr>
+            <a:cxnSpLocks/>
+            <a:stCxn id="25" idx="2"/>
+            <a:endCxn id="26" idx="0"/>
+          </p:cNvCxnSpPr>
+          <p:nvPr/>
+        </p:nvCxnSpPr>
+        <p:spPr>
+          <a:xfrm flipH="1">
+            <a:off x="8409497" y="5675165"/>
+            <a:ext cx="307785" cy="313187"/>
+          </a:xfrm>
+          <a:prstGeom prst="straightConnector1">
+            <a:avLst/>
+          </a:prstGeom>
+          <a:ln>
+            <a:tailEnd type="triangle"/>
+          </a:ln>
+        </p:spPr>
+        <p:style>
+          <a:lnRef idx="1">
+            <a:schemeClr val="accent6"/>
+          </a:lnRef>
+          <a:fillRef idx="0">
+            <a:schemeClr val="accent6"/>
+          </a:fillRef>
+          <a:effectRef idx="0">
+            <a:schemeClr val="accent6"/>
+          </a:effectRef>
+          <a:fontRef idx="minor">
+            <a:schemeClr val="tx1"/>
+          </a:fontRef>
+        </p:style>
+      </p:cxnSp>
+      <p:cxnSp>
+        <p:nvCxnSpPr>
+          <p:cNvPr id="36" name="Straight Arrow Connector 35">
+            <a:extLst>
+              <a:ext uri="{FF2B5EF4-FFF2-40B4-BE49-F238E27FC236}">
+                <a16:creationId xmlns:a16="http://schemas.microsoft.com/office/drawing/2014/main" id="{07FA9171-EA1A-C44A-8C8F-8C2B0354C2E0}"/>
+              </a:ext>
+            </a:extLst>
+          </p:cNvPr>
+          <p:cNvCxnSpPr>
+            <a:cxnSpLocks/>
+            <a:stCxn id="25" idx="2"/>
+            <a:endCxn id="24" idx="0"/>
+          </p:cNvCxnSpPr>
+          <p:nvPr/>
+        </p:nvCxnSpPr>
+        <p:spPr>
+          <a:xfrm>
+            <a:off x="8717282" y="5675165"/>
+            <a:ext cx="347642" cy="313187"/>
+          </a:xfrm>
+          <a:prstGeom prst="straightConnector1">
+            <a:avLst/>
+          </a:prstGeom>
+          <a:ln>
+            <a:tailEnd type="triangle"/>
+          </a:ln>
+        </p:spPr>
+        <p:style>
+          <a:lnRef idx="1">
+            <a:schemeClr val="accent6"/>
+          </a:lnRef>
+          <a:fillRef idx="0">
+            <a:schemeClr val="accent6"/>
+          </a:fillRef>
+          <a:effectRef idx="0">
+            <a:schemeClr val="accent6"/>
+          </a:effectRef>
+          <a:fontRef idx="minor">
+            <a:schemeClr val="tx1"/>
+          </a:fontRef>
+        </p:style>
+      </p:cxnSp>
+      <p:sp>
+        <p:nvSpPr>
+          <p:cNvPr id="39" name="TextBox 38">
+            <a:extLst>
+              <a:ext uri="{FF2B5EF4-FFF2-40B4-BE49-F238E27FC236}">
+                <a16:creationId xmlns:a16="http://schemas.microsoft.com/office/drawing/2014/main" id="{8605D10F-7D6C-3F46-9879-2D6E8EAE7F0E}"/>
+              </a:ext>
+            </a:extLst>
+          </p:cNvPr>
+          <p:cNvSpPr txBox="1"/>
+          <p:nvPr/>
+        </p:nvSpPr>
+        <p:spPr>
+          <a:xfrm>
+            <a:off x="8234482" y="4486674"/>
+            <a:ext cx="1961460" cy="369332"/>
+          </a:xfrm>
+          <a:prstGeom prst="rect">
+            <a:avLst/>
+          </a:prstGeom>
+          <a:noFill/>
+        </p:spPr>
+        <p:txBody>
+          <a:bodyPr wrap="square" rtlCol="0">
+            <a:spAutoFit/>
+          </a:bodyPr>
+          <a:lstStyle/>
+          <a:p>
+            <a:pPr algn="ctr"/>
+            <a:r>
+              <a:rPr lang="en-GB" dirty="0">
+                <a:latin typeface="Aptos" panose="020B0004020202020204" pitchFamily="34" charset="0"/>
+              </a:rPr>
+              <a:t>C</a:t>
+            </a:r>
+            <a:r>
+              <a:rPr lang="en-IT" dirty="0">
+                <a:latin typeface="Aptos" panose="020B0004020202020204" pitchFamily="34" charset="0"/>
+              </a:rPr>
+              <a:t>hild widget tree </a:t>
+            </a:r>
+          </a:p>
+        </p:txBody>
+      </p:sp>
+      <p:cxnSp>
+        <p:nvCxnSpPr>
+          <p:cNvPr id="59" name="Elbow Connector 58">
+            <a:extLst>
+              <a:ext uri="{FF2B5EF4-FFF2-40B4-BE49-F238E27FC236}">
+                <a16:creationId xmlns:a16="http://schemas.microsoft.com/office/drawing/2014/main" id="{FAB7DA39-7C78-1146-B34C-05956F593EEF}"/>
+              </a:ext>
+            </a:extLst>
+          </p:cNvPr>
+          <p:cNvCxnSpPr>
+            <a:cxnSpLocks/>
+            <a:endCxn id="63" idx="3"/>
+          </p:cNvCxnSpPr>
+          <p:nvPr/>
+        </p:nvCxnSpPr>
+        <p:spPr>
+          <a:xfrm rot="5400000">
+            <a:off x="10709250" y="3231218"/>
+            <a:ext cx="886786" cy="554721"/>
+          </a:xfrm>
+          <a:prstGeom prst="bentConnector2">
+            <a:avLst/>
+          </a:prstGeom>
+          <a:ln>
+            <a:tailEnd type="triangle"/>
+          </a:ln>
+        </p:spPr>
+        <p:style>
+          <a:lnRef idx="1">
+            <a:schemeClr val="accent6"/>
+          </a:lnRef>
+          <a:fillRef idx="0">
+            <a:schemeClr val="accent6"/>
+          </a:fillRef>
+          <a:effectRef idx="0">
+            <a:schemeClr val="accent6"/>
+          </a:effectRef>
+          <a:fontRef idx="minor">
+            <a:schemeClr val="tx1"/>
+          </a:fontRef>
+        </p:style>
+      </p:cxnSp>
+      <p:pic>
+        <p:nvPicPr>
+          <p:cNvPr id="62" name="Graphic 61" descr="Bell outline">
+            <a:extLst>
+              <a:ext uri="{FF2B5EF4-FFF2-40B4-BE49-F238E27FC236}">
+                <a16:creationId xmlns:a16="http://schemas.microsoft.com/office/drawing/2014/main" id="{DFDFE0A7-9745-7B40-9500-678779F5B1BA}"/>
+              </a:ext>
+            </a:extLst>
+          </p:cNvPr>
+          <p:cNvPicPr>
+            <a:picLocks noChangeAspect="1"/>
+          </p:cNvPicPr>
+          <p:nvPr/>
+        </p:nvPicPr>
+        <p:blipFill>
+          <a:blip r:embed="rId3">
+            <a:extLst>
+              <a:ext uri="{28A0092B-C50C-407E-A947-70E740481C1C}">
+                <a14:useLocalDpi xmlns:a14="http://schemas.microsoft.com/office/drawing/2010/main" val="0"/>
+              </a:ext>
+              <a:ext uri="{96DAC541-7B7A-43D3-8B79-37D633B846F1}">
+                <asvg:svgBlip xmlns:asvg="http://schemas.microsoft.com/office/drawing/2016/SVG/main" r:embed="rId4"/>
+              </a:ext>
+            </a:extLst>
+          </a:blip>
+          <a:stretch>
+            <a:fillRect/>
+          </a:stretch>
+        </p:blipFill>
+        <p:spPr>
+          <a:xfrm>
+            <a:off x="10253654" y="3693871"/>
+            <a:ext cx="512445" cy="512445"/>
+          </a:xfrm>
+          <a:prstGeom prst="rect">
+            <a:avLst/>
+          </a:prstGeom>
+        </p:spPr>
+      </p:pic>
+      <p:sp>
+        <p:nvSpPr>
+          <p:cNvPr id="63" name="Rectangle 62">
+            <a:extLst>
+              <a:ext uri="{FF2B5EF4-FFF2-40B4-BE49-F238E27FC236}">
+                <a16:creationId xmlns:a16="http://schemas.microsoft.com/office/drawing/2014/main" id="{06D4C327-F7DB-B84B-B91C-71E6C84E0653}"/>
+              </a:ext>
+            </a:extLst>
+          </p:cNvPr>
+          <p:cNvSpPr/>
+          <p:nvPr/>
+        </p:nvSpPr>
+        <p:spPr>
+          <a:xfrm>
+            <a:off x="10148093" y="3667515"/>
+            <a:ext cx="727189" cy="568912"/>
+          </a:xfrm>
+          <a:prstGeom prst="rect">
+            <a:avLst/>
+          </a:prstGeom>
+          <a:noFill/>
+        </p:spPr>
+        <p:style>
+          <a:lnRef idx="2">
+            <a:schemeClr val="accent6"/>
+          </a:lnRef>
+          <a:fillRef idx="1">
+            <a:schemeClr val="lt1"/>
+          </a:fillRef>
+          <a:effectRef idx="0">
+            <a:schemeClr val="accent6"/>
+          </a:effectRef>
+          <a:fontRef idx="minor">
+            <a:schemeClr val="dk1"/>
+          </a:fontRef>
+        </p:style>
+        <p:txBody>
+          <a:bodyPr rtlCol="0" anchor="ctr"/>
+          <a:lstStyle/>
+          <a:p>
+            <a:pPr algn="ctr"/>
+            <a:endParaRPr lang="en-IT"/>
+          </a:p>
+        </p:txBody>
+      </p:sp>
+      <p:sp>
+        <p:nvSpPr>
+          <p:cNvPr id="72" name="Rectangle 71">
+            <a:extLst>
+              <a:ext uri="{FF2B5EF4-FFF2-40B4-BE49-F238E27FC236}">
+                <a16:creationId xmlns:a16="http://schemas.microsoft.com/office/drawing/2014/main" id="{C05882C3-8342-C145-8C44-829898E68094}"/>
+              </a:ext>
+            </a:extLst>
+          </p:cNvPr>
+          <p:cNvSpPr/>
+          <p:nvPr/>
+        </p:nvSpPr>
+        <p:spPr>
+          <a:xfrm>
+            <a:off x="7970529" y="3693871"/>
+            <a:ext cx="1357060" cy="584775"/>
+          </a:xfrm>
+          <a:prstGeom prst="rect">
+            <a:avLst/>
+          </a:prstGeom>
+        </p:spPr>
+        <p:txBody>
+          <a:bodyPr wrap="square">
+            <a:spAutoFit/>
+          </a:bodyPr>
+          <a:lstStyle/>
+          <a:p>
+            <a:r>
+              <a:rPr lang="en-GB" sz="1600" dirty="0">
+                <a:latin typeface="Aptos" panose="020B0004020202020204" pitchFamily="34" charset="0"/>
+              </a:rPr>
+              <a:t>Inject an instance to</a:t>
+            </a:r>
+            <a:endParaRPr lang="en-IT" sz="1600" dirty="0">
+              <a:latin typeface="Aptos" panose="020B0004020202020204" pitchFamily="34" charset="0"/>
+            </a:endParaRPr>
+          </a:p>
+        </p:txBody>
+      </p:sp>
+      <p:cxnSp>
+        <p:nvCxnSpPr>
+          <p:cNvPr id="73" name="Elbow Connector 72">
+            <a:extLst>
+              <a:ext uri="{FF2B5EF4-FFF2-40B4-BE49-F238E27FC236}">
+                <a16:creationId xmlns:a16="http://schemas.microsoft.com/office/drawing/2014/main" id="{FE039E0F-504E-2346-B225-87FC9D387E24}"/>
+              </a:ext>
+            </a:extLst>
+          </p:cNvPr>
+          <p:cNvCxnSpPr>
+            <a:cxnSpLocks/>
+            <a:stCxn id="63" idx="1"/>
+            <a:endCxn id="21" idx="0"/>
+          </p:cNvCxnSpPr>
+          <p:nvPr/>
+        </p:nvCxnSpPr>
+        <p:spPr>
+          <a:xfrm rot="10800000" flipV="1">
+            <a:off x="9108373" y="3951970"/>
+            <a:ext cx="1039720" cy="452337"/>
+          </a:xfrm>
+          <a:prstGeom prst="bentConnector2">
+            <a:avLst/>
+          </a:prstGeom>
+          <a:ln>
+            <a:tailEnd type="triangle"/>
+          </a:ln>
+        </p:spPr>
+        <p:style>
+          <a:lnRef idx="1">
+            <a:schemeClr val="accent6"/>
+          </a:lnRef>
+          <a:fillRef idx="0">
+            <a:schemeClr val="accent6"/>
+          </a:fillRef>
+          <a:effectRef idx="0">
+            <a:schemeClr val="accent6"/>
+          </a:effectRef>
+          <a:fontRef idx="minor">
+            <a:schemeClr val="tx1"/>
+          </a:fontRef>
+        </p:style>
+      </p:cxnSp>
       <p:sp>
         <p:nvSpPr>
           <p:cNvPr id="3" name="Slide Number Placeholder 2">
             <a:extLst>
               <a:ext uri="{FF2B5EF4-FFF2-40B4-BE49-F238E27FC236}">
-                <a16:creationId xmlns:a16="http://schemas.microsoft.com/office/drawing/2014/main" id="{4574285D-3BDB-2340-8F11-DC7C05ED5D78}"/>
+                <a16:creationId xmlns:a16="http://schemas.microsoft.com/office/drawing/2014/main" id="{974894B6-4213-A44D-B473-19DC7D2EFB58}"/>
               </a:ext>
             </a:extLst>
           </p:cNvPr>
@@ -5277,7 +6182,7 @@
     </p:spTree>
     <p:extLst>
       <p:ext uri="{BB962C8B-B14F-4D97-AF65-F5344CB8AC3E}">
-        <p14:creationId xmlns:p14="http://schemas.microsoft.com/office/powerpoint/2010/main" val="3707481951"/>
+        <p14:creationId xmlns:p14="http://schemas.microsoft.com/office/powerpoint/2010/main" val="3625446621"/>
       </p:ext>
     </p:extLst>
   </p:cSld>
@@ -5333,7 +6238,7 @@
               <a:rPr lang="en-IT" dirty="0">
                 <a:latin typeface="Courier" pitchFamily="2" charset="0"/>
               </a:rPr>
-              <a:t>ChangeNotifierProvider</a:t>
+              <a:t>Consumer</a:t>
             </a:r>
             <a:r>
               <a:rPr lang="en-IT" dirty="0"/>
@@ -5360,61 +6265,68 @@
         </p:nvSpPr>
         <p:spPr>
           <a:xfrm>
-            <a:off x="428172" y="1361167"/>
-            <a:ext cx="7118612" cy="5153933"/>
+            <a:off x="142407" y="1361167"/>
+            <a:ext cx="6311192" cy="5153933"/>
           </a:xfrm>
         </p:spPr>
         <p:txBody>
           <a:bodyPr>
-            <a:normAutofit/>
+            <a:normAutofit lnSpcReduction="10000"/>
           </a:bodyPr>
           <a:lstStyle/>
           <a:p>
+            <a:r>
+              <a:rPr lang="en-GB" dirty="0">
+                <a:latin typeface="Courier" pitchFamily="2" charset="0"/>
+              </a:rPr>
+              <a:t>Consumer</a:t>
+            </a:r>
+            <a:r>
+              <a:rPr lang="en-GB" dirty="0"/>
+              <a:t> is a widget that listens for changes in a class that implements </a:t>
+            </a:r>
             <a:r>
               <a:rPr lang="en-GB" dirty="0" err="1">
                 <a:latin typeface="Courier" pitchFamily="2" charset="0"/>
               </a:rPr>
-              <a:t>ChangeNotifierProvider</a:t>
+              <a:t>ChangeNotifier</a:t>
             </a:r>
             <a:r>
               <a:rPr lang="en-GB" dirty="0"/>
-              <a:t> is a class that wraps a class that implements </a:t>
+              <a:t>, then rebuilds the widget tree below itself when it finds any. </a:t>
+            </a:r>
+          </a:p>
+          <a:p>
+            <a:endParaRPr lang="en-GB" dirty="0"/>
+          </a:p>
+          <a:p>
+            <a:r>
+              <a:rPr lang="en-GB" dirty="0"/>
+              <a:t>Whenever </a:t>
             </a:r>
             <a:r>
               <a:rPr lang="en-GB" dirty="0" err="1">
                 <a:latin typeface="Courier" pitchFamily="2" charset="0"/>
               </a:rPr>
-              <a:t>ChangeNotifier</a:t>
+              <a:t>notifyListeners</a:t>
             </a:r>
             <a:r>
               <a:rPr lang="en-GB" dirty="0"/>
-              <a:t> and </a:t>
-            </a:r>
-            <a:r>
-              <a:rPr lang="en-GB" b="1" dirty="0"/>
-              <a:t>provide it </a:t>
-            </a:r>
-            <a:r>
-              <a:rPr lang="en-GB" dirty="0"/>
-              <a:t>to its descendants.</a:t>
-            </a:r>
-          </a:p>
-          <a:p>
-            <a:endParaRPr lang="en-GB" dirty="0"/>
-          </a:p>
-          <a:p>
-            <a:r>
-              <a:rPr lang="en-GB" dirty="0"/>
-              <a:t>Now the widget tree can access to it (and use it!)</a:t>
-            </a:r>
-          </a:p>
-          <a:p>
-            <a:pPr marL="0" indent="0">
-              <a:buNone/>
-            </a:pPr>
-            <a:endParaRPr lang="en-GB" dirty="0"/>
-          </a:p>
-          <a:p>
+              <a:t>() </a:t>
+            </a:r>
+            <a:r>
+              <a:rPr lang="en-GB" dirty="0">
+                <a:ea typeface="Palatino" pitchFamily="2" charset="77"/>
+              </a:rPr>
+              <a:t>is called, the </a:t>
+            </a:r>
+            <a:r>
+              <a:rPr lang="en-GB" dirty="0">
+                <a:latin typeface="Courier" pitchFamily="2" charset="0"/>
+                <a:ea typeface="Palatino" pitchFamily="2" charset="77"/>
+              </a:rPr>
+              <a:t>Consumer’s builder</a:t>
+            </a:r>
             <a:r>
               <a:rPr lang="en-GB" dirty="0">
                 <a:latin typeface="Palatino" pitchFamily="2" charset="77"/>
@@ -5423,15 +6335,19 @@
               <a:t> </a:t>
             </a:r>
             <a:r>
+              <a:rPr lang="en-GB" dirty="0">
+                <a:ea typeface="Palatino" pitchFamily="2" charset="77"/>
+              </a:rPr>
+              <a:t>function is called. </a:t>
+            </a:r>
+            <a:r>
               <a:rPr lang="en-GB" dirty="0" err="1">
-                <a:latin typeface="Palatino" pitchFamily="2" charset="77"/>
                 <a:ea typeface="Palatino" pitchFamily="2" charset="77"/>
               </a:rPr>
               <a:t>Synthax</a:t>
             </a:r>
             <a:r>
               <a:rPr lang="en-GB" dirty="0">
-                <a:latin typeface="Palatino" pitchFamily="2" charset="77"/>
                 <a:ea typeface="Palatino" pitchFamily="2" charset="77"/>
               </a:rPr>
               <a:t>:</a:t>
@@ -5448,78 +6364,99 @@
                 <a:ea typeface="Palatino" pitchFamily="2" charset="77"/>
               </a:rPr>
             </a:br>
-            <a:r>
-              <a:rPr lang="en-GB" sz="2000" b="1" dirty="0" err="1">
+            <a:br>
+              <a:rPr lang="en-GB" dirty="0">
+                <a:latin typeface="Palatino" pitchFamily="2" charset="77"/>
+                <a:ea typeface="Palatino" pitchFamily="2" charset="77"/>
+              </a:rPr>
+            </a:br>
+            <a:r>
+              <a:rPr lang="en-GB" sz="1800" dirty="0">
                 <a:latin typeface="Courier" pitchFamily="2" charset="0"/>
               </a:rPr>
-              <a:t>ChangeNotifierProvider</a:t>
-            </a:r>
-            <a:r>
-              <a:rPr lang="en-GB" sz="2000" dirty="0">
+              <a:t>return </a:t>
+            </a:r>
+            <a:r>
+              <a:rPr lang="en-GB" sz="1800" b="1" dirty="0">
                 <a:latin typeface="Courier" pitchFamily="2" charset="0"/>
               </a:rPr>
-              <a:t>(</a:t>
+              <a:t>Consumer</a:t>
+            </a:r>
+            <a:r>
+              <a:rPr lang="en-GB" sz="1800" dirty="0">
+                <a:latin typeface="Courier" pitchFamily="2" charset="0"/>
+              </a:rPr>
+              <a:t>&lt;</a:t>
+            </a:r>
+            <a:r>
+              <a:rPr lang="en-GB" sz="1800" dirty="0" err="1">
+                <a:latin typeface="Courier" pitchFamily="2" charset="0"/>
+              </a:rPr>
+              <a:t>ClassImplementingChangeNotifier</a:t>
+            </a:r>
+            <a:r>
+              <a:rPr lang="en-GB" sz="1800" dirty="0">
+                <a:latin typeface="Courier" pitchFamily="2" charset="0"/>
+              </a:rPr>
+              <a:t>&gt;(</a:t>
             </a:r>
             <a:br>
-              <a:rPr lang="en-GB" sz="2000" dirty="0">
+              <a:rPr lang="en-GB" sz="1800" dirty="0">
                 <a:latin typeface="Courier" pitchFamily="2" charset="0"/>
               </a:rPr>
             </a:br>
             <a:r>
-              <a:rPr lang="en-GB" sz="2000" dirty="0">
+              <a:rPr lang="en-GB" sz="1800" dirty="0">
                 <a:latin typeface="Courier" pitchFamily="2" charset="0"/>
               </a:rPr>
-              <a:t>	create: (context) =&gt; 	</a:t>
-            </a:r>
-            <a:r>
-              <a:rPr lang="en-GB" sz="2000" dirty="0" err="1">
+              <a:t> builder: (context, cart, child) {</a:t>
+            </a:r>
+            <a:br>
+              <a:rPr lang="en-GB" sz="1800" dirty="0">
                 <a:latin typeface="Courier" pitchFamily="2" charset="0"/>
               </a:rPr>
-              <a:t>ClassImplementingChangeNotifier</a:t>
-            </a:r>
-            <a:r>
-              <a:rPr lang="en-GB" sz="2000" dirty="0">
+            </a:br>
+            <a:r>
+              <a:rPr lang="en-GB" sz="1800" dirty="0">
                 <a:latin typeface="Courier" pitchFamily="2" charset="0"/>
               </a:rPr>
-              <a:t>(), </a:t>
+              <a:t>  return Text("Total price:  		${</a:t>
+            </a:r>
+            <a:r>
+              <a:rPr lang="en-GB" sz="1800" dirty="0" err="1">
+                <a:latin typeface="Courier" pitchFamily="2" charset="0"/>
+              </a:rPr>
+              <a:t>cart.totalPrice</a:t>
+            </a:r>
+            <a:r>
+              <a:rPr lang="en-GB" sz="1800" dirty="0">
+                <a:latin typeface="Courier" pitchFamily="2" charset="0"/>
+              </a:rPr>
+              <a:t>}");</a:t>
             </a:r>
             <a:br>
-              <a:rPr lang="en-GB" sz="2000" dirty="0">
+              <a:rPr lang="en-GB" sz="1800" dirty="0">
                 <a:latin typeface="Courier" pitchFamily="2" charset="0"/>
               </a:rPr>
             </a:br>
             <a:r>
-              <a:rPr lang="en-GB" sz="2000" dirty="0">
+              <a:rPr lang="en-GB" sz="1800" dirty="0">
                 <a:latin typeface="Courier" pitchFamily="2" charset="0"/>
               </a:rPr>
-              <a:t>	child: &lt;</a:t>
-            </a:r>
-            <a:r>
-              <a:rPr lang="en-GB" sz="2000" dirty="0" err="1">
+              <a:t>  },</a:t>
+            </a:r>
+            <a:br>
+              <a:rPr lang="en-GB" sz="1800" dirty="0">
                 <a:latin typeface="Courier" pitchFamily="2" charset="0"/>
               </a:rPr>
-              <a:t>widget_tree</a:t>
-            </a:r>
-            <a:r>
-              <a:rPr lang="en-GB" sz="2000" dirty="0">
+            </a:br>
+            <a:r>
+              <a:rPr lang="en-GB" sz="1800" dirty="0">
                 <a:latin typeface="Courier" pitchFamily="2" charset="0"/>
               </a:rPr>
-              <a:t>&gt;, </a:t>
-            </a:r>
-            <a:br>
-              <a:rPr lang="en-GB" sz="2000" dirty="0">
-                <a:latin typeface="Courier" pitchFamily="2" charset="0"/>
-              </a:rPr>
-            </a:br>
-            <a:r>
-              <a:rPr lang="en-GB" sz="2000" dirty="0">
-                <a:latin typeface="Courier" pitchFamily="2" charset="0"/>
-              </a:rPr>
-              <a:t>); </a:t>
-            </a:r>
-          </a:p>
-          <a:p>
-            <a:endParaRPr lang="en-IT" dirty="0">
+              <a:t>);</a:t>
+            </a:r>
+            <a:endParaRPr lang="en-IT" sz="1800" dirty="0">
               <a:latin typeface="Palatino" pitchFamily="2" charset="77"/>
               <a:ea typeface="Palatino" pitchFamily="2" charset="77"/>
             </a:endParaRPr>
@@ -5564,7 +6501,7 @@
         </p:blipFill>
         <p:spPr>
           <a:xfrm>
-            <a:off x="9883775" y="2165639"/>
+            <a:off x="10325662" y="1863628"/>
             <a:ext cx="914400" cy="914400"/>
           </a:xfrm>
           <a:prstGeom prst="rect">
@@ -5586,7 +6523,7 @@
         </p:nvSpPr>
         <p:spPr>
           <a:xfrm>
-            <a:off x="9004186" y="1468733"/>
+            <a:off x="9446073" y="1166722"/>
             <a:ext cx="2543852" cy="1596453"/>
           </a:xfrm>
           <a:prstGeom prst="rect">
@@ -5631,7 +6568,7 @@
         </p:nvSpPr>
         <p:spPr>
           <a:xfrm>
-            <a:off x="8985258" y="1550666"/>
+            <a:off x="9427145" y="1248655"/>
             <a:ext cx="2560529" cy="646331"/>
           </a:xfrm>
           <a:prstGeom prst="rect">
@@ -5660,10 +6597,110 @@
       </p:sp>
       <p:sp>
         <p:nvSpPr>
-          <p:cNvPr id="11" name="Rectangle 10">
-            <a:extLst>
-              <a:ext uri="{FF2B5EF4-FFF2-40B4-BE49-F238E27FC236}">
-                <a16:creationId xmlns:a16="http://schemas.microsoft.com/office/drawing/2014/main" id="{9080970A-73C6-3E41-9EBF-FA8F214931FC}"/>
+          <p:cNvPr id="17" name="TextBox 16">
+            <a:extLst>
+              <a:ext uri="{FF2B5EF4-FFF2-40B4-BE49-F238E27FC236}">
+                <a16:creationId xmlns:a16="http://schemas.microsoft.com/office/drawing/2014/main" id="{436E1531-BA3E-7A40-BAFD-4ED44A86B181}"/>
+              </a:ext>
+            </a:extLst>
+          </p:cNvPr>
+          <p:cNvSpPr txBox="1"/>
+          <p:nvPr/>
+        </p:nvSpPr>
+        <p:spPr>
+          <a:xfrm>
+            <a:off x="9908895" y="4670627"/>
+            <a:ext cx="2283105" cy="584775"/>
+          </a:xfrm>
+          <a:prstGeom prst="rect">
+            <a:avLst/>
+          </a:prstGeom>
+          <a:noFill/>
+        </p:spPr>
+        <p:txBody>
+          <a:bodyPr wrap="square" rtlCol="0">
+            <a:spAutoFit/>
+          </a:bodyPr>
+          <a:lstStyle/>
+          <a:p>
+            <a:pPr algn="ctr"/>
+            <a:r>
+              <a:rPr lang="en-IT" sz="1600" dirty="0">
+                <a:latin typeface="Courier" pitchFamily="2" charset="0"/>
+              </a:rPr>
+              <a:t>notifyListeners() </a:t>
+            </a:r>
+            <a:r>
+              <a:rPr lang="en-IT" sz="1600" dirty="0">
+                <a:latin typeface="Aptos" panose="020B0004020202020204" pitchFamily="34" charset="0"/>
+              </a:rPr>
+              <a:t>is called</a:t>
+            </a:r>
+          </a:p>
+        </p:txBody>
+      </p:sp>
+      <p:sp>
+        <p:nvSpPr>
+          <p:cNvPr id="18" name="TextBox 17">
+            <a:extLst>
+              <a:ext uri="{FF2B5EF4-FFF2-40B4-BE49-F238E27FC236}">
+                <a16:creationId xmlns:a16="http://schemas.microsoft.com/office/drawing/2014/main" id="{26D4C8E7-89C0-8D41-AE8C-0860C5F9D2C3}"/>
+              </a:ext>
+            </a:extLst>
+          </p:cNvPr>
+          <p:cNvSpPr txBox="1"/>
+          <p:nvPr/>
+        </p:nvSpPr>
+        <p:spPr>
+          <a:xfrm>
+            <a:off x="10197859" y="5519616"/>
+            <a:ext cx="1705175" cy="646331"/>
+          </a:xfrm>
+          <a:prstGeom prst="rect">
+            <a:avLst/>
+          </a:prstGeom>
+          <a:noFill/>
+        </p:spPr>
+        <p:txBody>
+          <a:bodyPr wrap="square" rtlCol="0">
+            <a:spAutoFit/>
+          </a:bodyPr>
+          <a:lstStyle/>
+          <a:p>
+            <a:pPr algn="ctr"/>
+            <a:r>
+              <a:rPr lang="en-IT" dirty="0">
+                <a:latin typeface="Aptos" panose="020B0004020202020204" pitchFamily="34" charset="0"/>
+              </a:rPr>
+              <a:t>Call</a:t>
+            </a:r>
+            <a:r>
+              <a:rPr lang="en-IT" dirty="0">
+                <a:latin typeface="Palatino Linotype" panose="02040502050505030304" pitchFamily="18" charset="0"/>
+              </a:rPr>
+              <a:t> </a:t>
+            </a:r>
+            <a:r>
+              <a:rPr lang="en-IT">
+                <a:latin typeface="Courier" pitchFamily="2" charset="0"/>
+              </a:rPr>
+              <a:t>builder </a:t>
+            </a:r>
+            <a:r>
+              <a:rPr lang="en-IT" dirty="0">
+                <a:latin typeface="Aptos" panose="020B0004020202020204" pitchFamily="34" charset="0"/>
+              </a:rPr>
+              <a:t>method</a:t>
+            </a:r>
+          </a:p>
+        </p:txBody>
+      </p:sp>
+      <p:sp>
+        <p:nvSpPr>
+          <p:cNvPr id="28" name="Rectangle 27">
+            <a:extLst>
+              <a:ext uri="{FF2B5EF4-FFF2-40B4-BE49-F238E27FC236}">
+                <a16:creationId xmlns:a16="http://schemas.microsoft.com/office/drawing/2014/main" id="{DCADE902-AE76-0C4E-8A9B-DCD0A5F12B87}"/>
               </a:ext>
             </a:extLst>
           </p:cNvPr>
@@ -5672,8 +6709,8 @@
         </p:nvSpPr>
         <p:spPr>
           <a:xfrm>
-            <a:off x="7757416" y="3229481"/>
-            <a:ext cx="3290334" cy="3373178"/>
+            <a:off x="6559159" y="3276426"/>
+            <a:ext cx="3292848" cy="3419648"/>
           </a:xfrm>
           <a:prstGeom prst="rect">
             <a:avLst/>
@@ -5705,10 +6742,10 @@
       </p:sp>
       <p:sp>
         <p:nvSpPr>
-          <p:cNvPr id="12" name="TextBox 11">
-            <a:extLst>
-              <a:ext uri="{FF2B5EF4-FFF2-40B4-BE49-F238E27FC236}">
-                <a16:creationId xmlns:a16="http://schemas.microsoft.com/office/drawing/2014/main" id="{26907009-4BCC-2C4B-810E-C75043F6F869}"/>
+          <p:cNvPr id="29" name="TextBox 28">
+            <a:extLst>
+              <a:ext uri="{FF2B5EF4-FFF2-40B4-BE49-F238E27FC236}">
+                <a16:creationId xmlns:a16="http://schemas.microsoft.com/office/drawing/2014/main" id="{712208B6-FB17-3948-9E81-98C671A17004}"/>
               </a:ext>
             </a:extLst>
           </p:cNvPr>
@@ -5717,7 +6754,7 @@
         </p:nvSpPr>
         <p:spPr>
           <a:xfrm>
-            <a:off x="7688769" y="3244334"/>
+            <a:off x="6490512" y="3291279"/>
             <a:ext cx="3427627" cy="369332"/>
           </a:xfrm>
           <a:prstGeom prst="rect">
@@ -5746,10 +6783,10 @@
       </p:sp>
       <p:sp>
         <p:nvSpPr>
-          <p:cNvPr id="21" name="Rectangle 20">
-            <a:extLst>
-              <a:ext uri="{FF2B5EF4-FFF2-40B4-BE49-F238E27FC236}">
-                <a16:creationId xmlns:a16="http://schemas.microsoft.com/office/drawing/2014/main" id="{2DB90A0C-F170-3046-950B-B6AA1D0B827A}"/>
+          <p:cNvPr id="31" name="Rectangle 30">
+            <a:extLst>
+              <a:ext uri="{FF2B5EF4-FFF2-40B4-BE49-F238E27FC236}">
+                <a16:creationId xmlns:a16="http://schemas.microsoft.com/office/drawing/2014/main" id="{BDBF5486-046D-DD4C-9FA3-4F1EB2ADFB39}"/>
               </a:ext>
             </a:extLst>
           </p:cNvPr>
@@ -5758,8 +6795,8 @@
         </p:nvSpPr>
         <p:spPr>
           <a:xfrm>
-            <a:off x="8000948" y="4404308"/>
-            <a:ext cx="2214850" cy="2066651"/>
+            <a:off x="6802690" y="4451253"/>
+            <a:ext cx="2701073" cy="2181895"/>
           </a:xfrm>
           <a:prstGeom prst="rect">
             <a:avLst/>
@@ -5791,10 +6828,10 @@
       </p:sp>
       <p:sp>
         <p:nvSpPr>
-          <p:cNvPr id="22" name="Rectangle 21">
-            <a:extLst>
-              <a:ext uri="{FF2B5EF4-FFF2-40B4-BE49-F238E27FC236}">
-                <a16:creationId xmlns:a16="http://schemas.microsoft.com/office/drawing/2014/main" id="{0F3FF18A-66D3-B941-90F4-612F80FDB5BB}"/>
+          <p:cNvPr id="32" name="Rectangle 31">
+            <a:extLst>
+              <a:ext uri="{FF2B5EF4-FFF2-40B4-BE49-F238E27FC236}">
+                <a16:creationId xmlns:a16="http://schemas.microsoft.com/office/drawing/2014/main" id="{F93A7DB7-662A-9B4B-A09C-2CA0EC3B77D6}"/>
               </a:ext>
             </a:extLst>
           </p:cNvPr>
@@ -5803,7 +6840,7 @@
         </p:nvSpPr>
         <p:spPr>
           <a:xfrm>
-            <a:off x="9004186" y="4885268"/>
+            <a:off x="7177032" y="4963015"/>
             <a:ext cx="348899" cy="282473"/>
           </a:xfrm>
           <a:prstGeom prst="rect">
@@ -5836,10 +6873,10 @@
       </p:sp>
       <p:sp>
         <p:nvSpPr>
-          <p:cNvPr id="23" name="Rectangle 22">
-            <a:extLst>
-              <a:ext uri="{FF2B5EF4-FFF2-40B4-BE49-F238E27FC236}">
-                <a16:creationId xmlns:a16="http://schemas.microsoft.com/office/drawing/2014/main" id="{ED4D41E2-2F4F-4841-9D31-A65CF094C8D4}"/>
+          <p:cNvPr id="34" name="Rectangle 33">
+            <a:extLst>
+              <a:ext uri="{FF2B5EF4-FFF2-40B4-BE49-F238E27FC236}">
+                <a16:creationId xmlns:a16="http://schemas.microsoft.com/office/drawing/2014/main" id="{8B20CA3D-51F2-484F-9B03-A9633F5E3F42}"/>
               </a:ext>
             </a:extLst>
           </p:cNvPr>
@@ -5848,7 +6885,7 @@
         </p:nvSpPr>
         <p:spPr>
           <a:xfrm>
-            <a:off x="9388124" y="5392691"/>
+            <a:off x="6918536" y="5484578"/>
             <a:ext cx="348899" cy="282473"/>
           </a:xfrm>
           <a:prstGeom prst="rect">
@@ -5881,10 +6918,10 @@
       </p:sp>
       <p:sp>
         <p:nvSpPr>
-          <p:cNvPr id="24" name="Rectangle 23">
-            <a:extLst>
-              <a:ext uri="{FF2B5EF4-FFF2-40B4-BE49-F238E27FC236}">
-                <a16:creationId xmlns:a16="http://schemas.microsoft.com/office/drawing/2014/main" id="{064416C4-FAA0-9D4F-B3EA-52A11C99FAC0}"/>
+          <p:cNvPr id="35" name="Rectangle 34">
+            <a:extLst>
+              <a:ext uri="{FF2B5EF4-FFF2-40B4-BE49-F238E27FC236}">
+                <a16:creationId xmlns:a16="http://schemas.microsoft.com/office/drawing/2014/main" id="{88E4FF2A-87B0-ED48-967C-6FBBBD92052F}"/>
               </a:ext>
             </a:extLst>
           </p:cNvPr>
@@ -5893,7 +6930,7 @@
         </p:nvSpPr>
         <p:spPr>
           <a:xfrm>
-            <a:off x="8890474" y="5988352"/>
+            <a:off x="8726262" y="6120512"/>
             <a:ext cx="348899" cy="282473"/>
           </a:xfrm>
           <a:prstGeom prst="rect">
@@ -5926,10 +6963,10 @@
       </p:sp>
       <p:sp>
         <p:nvSpPr>
-          <p:cNvPr id="25" name="Rectangle 24">
-            <a:extLst>
-              <a:ext uri="{FF2B5EF4-FFF2-40B4-BE49-F238E27FC236}">
-                <a16:creationId xmlns:a16="http://schemas.microsoft.com/office/drawing/2014/main" id="{FB467CAA-3EC9-CC4D-861D-6AB37A6759CC}"/>
+          <p:cNvPr id="37" name="Rectangle 36">
+            <a:extLst>
+              <a:ext uri="{FF2B5EF4-FFF2-40B4-BE49-F238E27FC236}">
+                <a16:creationId xmlns:a16="http://schemas.microsoft.com/office/drawing/2014/main" id="{16895098-62E8-C041-82F9-E332E566B3CB}"/>
               </a:ext>
             </a:extLst>
           </p:cNvPr>
@@ -5938,8 +6975,8 @@
         </p:nvSpPr>
         <p:spPr>
           <a:xfrm>
-            <a:off x="8542832" y="5392692"/>
-            <a:ext cx="348899" cy="282473"/>
+            <a:off x="8426916" y="5564273"/>
+            <a:ext cx="348899" cy="305016"/>
           </a:xfrm>
           <a:prstGeom prst="rect">
             <a:avLst/>
@@ -5971,10 +7008,10 @@
       </p:sp>
       <p:sp>
         <p:nvSpPr>
-          <p:cNvPr id="26" name="Rectangle 25">
-            <a:extLst>
-              <a:ext uri="{FF2B5EF4-FFF2-40B4-BE49-F238E27FC236}">
-                <a16:creationId xmlns:a16="http://schemas.microsoft.com/office/drawing/2014/main" id="{D9CBB247-5361-CF4C-B5BB-F8318BB442EE}"/>
+          <p:cNvPr id="38" name="Rectangle 37">
+            <a:extLst>
+              <a:ext uri="{FF2B5EF4-FFF2-40B4-BE49-F238E27FC236}">
+                <a16:creationId xmlns:a16="http://schemas.microsoft.com/office/drawing/2014/main" id="{2A498B04-41CF-9E42-8231-EFA0A9145AF7}"/>
               </a:ext>
             </a:extLst>
           </p:cNvPr>
@@ -5983,7 +7020,7 @@
         </p:nvSpPr>
         <p:spPr>
           <a:xfrm>
-            <a:off x="8235047" y="5988352"/>
+            <a:off x="8104673" y="6119272"/>
             <a:ext cx="348899" cy="282473"/>
           </a:xfrm>
           <a:prstGeom prst="rect">
@@ -6016,24 +7053,24 @@
       </p:sp>
       <p:cxnSp>
         <p:nvCxnSpPr>
-          <p:cNvPr id="27" name="Straight Arrow Connector 26">
-            <a:extLst>
-              <a:ext uri="{FF2B5EF4-FFF2-40B4-BE49-F238E27FC236}">
-                <a16:creationId xmlns:a16="http://schemas.microsoft.com/office/drawing/2014/main" id="{A4C1144C-68BE-314D-A267-35AC11772950}"/>
+          <p:cNvPr id="40" name="Straight Arrow Connector 39">
+            <a:extLst>
+              <a:ext uri="{FF2B5EF4-FFF2-40B4-BE49-F238E27FC236}">
+                <a16:creationId xmlns:a16="http://schemas.microsoft.com/office/drawing/2014/main" id="{EEE1A2A9-9E71-E540-856F-EC184C65FCF4}"/>
               </a:ext>
             </a:extLst>
           </p:cNvPr>
           <p:cNvCxnSpPr>
             <a:cxnSpLocks/>
-            <a:stCxn id="22" idx="2"/>
-            <a:endCxn id="25" idx="0"/>
+            <a:stCxn id="32" idx="2"/>
+            <a:endCxn id="51" idx="1"/>
           </p:cNvCxnSpPr>
           <p:nvPr/>
         </p:nvCxnSpPr>
         <p:spPr>
-          <a:xfrm flipH="1">
-            <a:off x="8717282" y="5167741"/>
-            <a:ext cx="461354" cy="224951"/>
+          <a:xfrm>
+            <a:off x="7351482" y="5245488"/>
+            <a:ext cx="667473" cy="106440"/>
           </a:xfrm>
           <a:prstGeom prst="straightConnector1">
             <a:avLst/>
@@ -6059,24 +7096,24 @@
       </p:cxnSp>
       <p:cxnSp>
         <p:nvCxnSpPr>
-          <p:cNvPr id="30" name="Straight Arrow Connector 29">
-            <a:extLst>
-              <a:ext uri="{FF2B5EF4-FFF2-40B4-BE49-F238E27FC236}">
-                <a16:creationId xmlns:a16="http://schemas.microsoft.com/office/drawing/2014/main" id="{97BE5B32-B35D-9949-A654-D7E5A8DC5D5C}"/>
+          <p:cNvPr id="41" name="Straight Arrow Connector 40">
+            <a:extLst>
+              <a:ext uri="{FF2B5EF4-FFF2-40B4-BE49-F238E27FC236}">
+                <a16:creationId xmlns:a16="http://schemas.microsoft.com/office/drawing/2014/main" id="{05546FED-A595-FE42-B624-547A60370B86}"/>
               </a:ext>
             </a:extLst>
           </p:cNvPr>
           <p:cNvCxnSpPr>
             <a:cxnSpLocks/>
-            <a:stCxn id="22" idx="2"/>
-            <a:endCxn id="23" idx="0"/>
+            <a:stCxn id="32" idx="2"/>
+            <a:endCxn id="34" idx="0"/>
           </p:cNvCxnSpPr>
           <p:nvPr/>
         </p:nvCxnSpPr>
         <p:spPr>
-          <a:xfrm>
-            <a:off x="9178636" y="5167741"/>
-            <a:ext cx="383938" cy="224950"/>
+          <a:xfrm flipH="1">
+            <a:off x="7092986" y="5245488"/>
+            <a:ext cx="258496" cy="239090"/>
           </a:xfrm>
           <a:prstGeom prst="straightConnector1">
             <a:avLst/>
@@ -6102,24 +7139,24 @@
       </p:cxnSp>
       <p:cxnSp>
         <p:nvCxnSpPr>
-          <p:cNvPr id="33" name="Straight Arrow Connector 32">
-            <a:extLst>
-              <a:ext uri="{FF2B5EF4-FFF2-40B4-BE49-F238E27FC236}">
-                <a16:creationId xmlns:a16="http://schemas.microsoft.com/office/drawing/2014/main" id="{6FA2566E-76D7-8749-8663-DB0DD2E413FF}"/>
+          <p:cNvPr id="42" name="Straight Arrow Connector 41">
+            <a:extLst>
+              <a:ext uri="{FF2B5EF4-FFF2-40B4-BE49-F238E27FC236}">
+                <a16:creationId xmlns:a16="http://schemas.microsoft.com/office/drawing/2014/main" id="{62128583-786E-C740-B197-29B14CC6F4E9}"/>
               </a:ext>
             </a:extLst>
           </p:cNvPr>
           <p:cNvCxnSpPr>
             <a:cxnSpLocks/>
-            <a:stCxn id="25" idx="2"/>
-            <a:endCxn id="26" idx="0"/>
+            <a:stCxn id="37" idx="2"/>
+            <a:endCxn id="38" idx="0"/>
           </p:cNvCxnSpPr>
           <p:nvPr/>
         </p:nvCxnSpPr>
         <p:spPr>
           <a:xfrm flipH="1">
-            <a:off x="8409497" y="5675165"/>
-            <a:ext cx="307785" cy="313187"/>
+            <a:off x="8279123" y="5869289"/>
+            <a:ext cx="322243" cy="249983"/>
           </a:xfrm>
           <a:prstGeom prst="straightConnector1">
             <a:avLst/>
@@ -6145,24 +7182,24 @@
       </p:cxnSp>
       <p:cxnSp>
         <p:nvCxnSpPr>
-          <p:cNvPr id="36" name="Straight Arrow Connector 35">
-            <a:extLst>
-              <a:ext uri="{FF2B5EF4-FFF2-40B4-BE49-F238E27FC236}">
-                <a16:creationId xmlns:a16="http://schemas.microsoft.com/office/drawing/2014/main" id="{07FA9171-EA1A-C44A-8C8F-8C2B0354C2E0}"/>
+          <p:cNvPr id="44" name="Straight Arrow Connector 43">
+            <a:extLst>
+              <a:ext uri="{FF2B5EF4-FFF2-40B4-BE49-F238E27FC236}">
+                <a16:creationId xmlns:a16="http://schemas.microsoft.com/office/drawing/2014/main" id="{E4636790-1ACF-7A48-9335-D6199B135726}"/>
               </a:ext>
             </a:extLst>
           </p:cNvPr>
           <p:cNvCxnSpPr>
             <a:cxnSpLocks/>
-            <a:stCxn id="25" idx="2"/>
-            <a:endCxn id="24" idx="0"/>
+            <a:stCxn id="37" idx="2"/>
+            <a:endCxn id="35" idx="0"/>
           </p:cNvCxnSpPr>
           <p:nvPr/>
         </p:nvCxnSpPr>
         <p:spPr>
           <a:xfrm>
-            <a:off x="8717282" y="5675165"/>
-            <a:ext cx="347642" cy="313187"/>
+            <a:off x="8601366" y="5869289"/>
+            <a:ext cx="299346" cy="251223"/>
           </a:xfrm>
           <a:prstGeom prst="straightConnector1">
             <a:avLst/>
@@ -6188,10 +7225,10 @@
       </p:cxnSp>
       <p:sp>
         <p:nvSpPr>
-          <p:cNvPr id="39" name="TextBox 38">
-            <a:extLst>
-              <a:ext uri="{FF2B5EF4-FFF2-40B4-BE49-F238E27FC236}">
-                <a16:creationId xmlns:a16="http://schemas.microsoft.com/office/drawing/2014/main" id="{8605D10F-7D6C-3F46-9879-2D6E8EAE7F0E}"/>
+          <p:cNvPr id="45" name="TextBox 44">
+            <a:extLst>
+              <a:ext uri="{FF2B5EF4-FFF2-40B4-BE49-F238E27FC236}">
+                <a16:creationId xmlns:a16="http://schemas.microsoft.com/office/drawing/2014/main" id="{DFDC46EE-BA82-A84A-8C63-0FE6DDEEDDBA}"/>
               </a:ext>
             </a:extLst>
           </p:cNvPr>
@@ -6200,7 +7237,7 @@
         </p:nvSpPr>
         <p:spPr>
           <a:xfrm>
-            <a:off x="8234482" y="4486674"/>
+            <a:off x="7036225" y="4533619"/>
             <a:ext cx="1961460" cy="369332"/>
           </a:xfrm>
           <a:prstGeom prst="rect">
@@ -6217,38 +7254,165 @@
             <a:pPr algn="ctr"/>
             <a:r>
               <a:rPr lang="en-GB" dirty="0">
-                <a:latin typeface="Palatino Linotype" panose="02040502050505030304" pitchFamily="18" charset="0"/>
+                <a:latin typeface="Aptos" panose="020B0004020202020204" pitchFamily="34" charset="0"/>
               </a:rPr>
               <a:t>C</a:t>
             </a:r>
             <a:r>
-              <a:rPr lang="en-IT" dirty="0">
-                <a:latin typeface="Palatino Linotype" panose="02040502050505030304" pitchFamily="18" charset="0"/>
+              <a:rPr lang="en-IT">
+                <a:latin typeface="Aptos" panose="020B0004020202020204" pitchFamily="34" charset="0"/>
               </a:rPr>
               <a:t>hild widget tree </a:t>
             </a:r>
+            <a:endParaRPr lang="en-IT" dirty="0">
+              <a:latin typeface="Aptos" panose="020B0004020202020204" pitchFamily="34" charset="0"/>
+            </a:endParaRPr>
+          </a:p>
+        </p:txBody>
+      </p:sp>
+      <p:pic>
+        <p:nvPicPr>
+          <p:cNvPr id="46" name="Graphic 45" descr="Bell outline">
+            <a:extLst>
+              <a:ext uri="{FF2B5EF4-FFF2-40B4-BE49-F238E27FC236}">
+                <a16:creationId xmlns:a16="http://schemas.microsoft.com/office/drawing/2014/main" id="{957D0E34-866D-654B-B441-327CDA4EC4B0}"/>
+              </a:ext>
+            </a:extLst>
+          </p:cNvPr>
+          <p:cNvPicPr>
+            <a:picLocks noChangeAspect="1"/>
+          </p:cNvPicPr>
+          <p:nvPr/>
+        </p:nvPicPr>
+        <p:blipFill>
+          <a:blip r:embed="rId3">
+            <a:extLst>
+              <a:ext uri="{28A0092B-C50C-407E-A947-70E740481C1C}">
+                <a14:useLocalDpi xmlns:a14="http://schemas.microsoft.com/office/drawing/2010/main" val="0"/>
+              </a:ext>
+              <a:ext uri="{96DAC541-7B7A-43D3-8B79-37D633B846F1}">
+                <asvg:svgBlip xmlns:asvg="http://schemas.microsoft.com/office/drawing/2016/SVG/main" r:embed="rId4"/>
+              </a:ext>
+            </a:extLst>
+          </a:blip>
+          <a:stretch>
+            <a:fillRect/>
+          </a:stretch>
+        </p:blipFill>
+        <p:spPr>
+          <a:xfrm>
+            <a:off x="9055397" y="3740816"/>
+            <a:ext cx="512445" cy="512445"/>
+          </a:xfrm>
+          <a:prstGeom prst="rect">
+            <a:avLst/>
+          </a:prstGeom>
+        </p:spPr>
+      </p:pic>
+      <p:sp>
+        <p:nvSpPr>
+          <p:cNvPr id="47" name="Rectangle 46">
+            <a:extLst>
+              <a:ext uri="{FF2B5EF4-FFF2-40B4-BE49-F238E27FC236}">
+                <a16:creationId xmlns:a16="http://schemas.microsoft.com/office/drawing/2014/main" id="{3BEB9512-370A-2747-AE18-DA13F29FBB8E}"/>
+              </a:ext>
+            </a:extLst>
+          </p:cNvPr>
+          <p:cNvSpPr/>
+          <p:nvPr/>
+        </p:nvSpPr>
+        <p:spPr>
+          <a:xfrm>
+            <a:off x="8949836" y="3714460"/>
+            <a:ext cx="727189" cy="568912"/>
+          </a:xfrm>
+          <a:prstGeom prst="rect">
+            <a:avLst/>
+          </a:prstGeom>
+          <a:noFill/>
+        </p:spPr>
+        <p:style>
+          <a:lnRef idx="2">
+            <a:schemeClr val="accent6"/>
+          </a:lnRef>
+          <a:fillRef idx="1">
+            <a:schemeClr val="lt1"/>
+          </a:fillRef>
+          <a:effectRef idx="0">
+            <a:schemeClr val="accent6"/>
+          </a:effectRef>
+          <a:fontRef idx="minor">
+            <a:schemeClr val="dk1"/>
+          </a:fontRef>
+        </p:style>
+        <p:txBody>
+          <a:bodyPr rtlCol="0" anchor="ctr"/>
+          <a:lstStyle/>
+          <a:p>
+            <a:pPr algn="ctr"/>
+            <a:endParaRPr lang="en-IT"/>
+          </a:p>
+        </p:txBody>
+      </p:sp>
+      <p:sp>
+        <p:nvSpPr>
+          <p:cNvPr id="48" name="Rectangle 47">
+            <a:extLst>
+              <a:ext uri="{FF2B5EF4-FFF2-40B4-BE49-F238E27FC236}">
+                <a16:creationId xmlns:a16="http://schemas.microsoft.com/office/drawing/2014/main" id="{A4D35447-04B8-CE48-B390-EA9816DBD563}"/>
+              </a:ext>
+            </a:extLst>
+          </p:cNvPr>
+          <p:cNvSpPr/>
+          <p:nvPr/>
+        </p:nvSpPr>
+        <p:spPr>
+          <a:xfrm>
+            <a:off x="6747613" y="3786819"/>
+            <a:ext cx="1357060" cy="584775"/>
+          </a:xfrm>
+          <a:prstGeom prst="rect">
+            <a:avLst/>
+          </a:prstGeom>
+        </p:spPr>
+        <p:txBody>
+          <a:bodyPr wrap="square">
+            <a:spAutoFit/>
+          </a:bodyPr>
+          <a:lstStyle/>
+          <a:p>
+            <a:r>
+              <a:rPr lang="en-GB" sz="1600" dirty="0">
+                <a:latin typeface="Aptos" panose="020B0004020202020204" pitchFamily="34" charset="0"/>
+              </a:rPr>
+              <a:t>Inject an instance to</a:t>
+            </a:r>
+            <a:endParaRPr lang="en-IT" sz="1600" dirty="0">
+              <a:latin typeface="Aptos" panose="020B0004020202020204" pitchFamily="34" charset="0"/>
+            </a:endParaRPr>
           </a:p>
         </p:txBody>
       </p:sp>
       <p:cxnSp>
         <p:nvCxnSpPr>
-          <p:cNvPr id="59" name="Elbow Connector 58">
-            <a:extLst>
-              <a:ext uri="{FF2B5EF4-FFF2-40B4-BE49-F238E27FC236}">
-                <a16:creationId xmlns:a16="http://schemas.microsoft.com/office/drawing/2014/main" id="{FAB7DA39-7C78-1146-B34C-05956F593EEF}"/>
+          <p:cNvPr id="49" name="Elbow Connector 48">
+            <a:extLst>
+              <a:ext uri="{FF2B5EF4-FFF2-40B4-BE49-F238E27FC236}">
+                <a16:creationId xmlns:a16="http://schemas.microsoft.com/office/drawing/2014/main" id="{995D4FF0-CF7C-144A-8AA9-703C2521D235}"/>
               </a:ext>
             </a:extLst>
           </p:cNvPr>
           <p:cNvCxnSpPr>
             <a:cxnSpLocks/>
-            <a:endCxn id="63" idx="3"/>
+            <a:stCxn id="47" idx="1"/>
+            <a:endCxn id="31" idx="0"/>
           </p:cNvCxnSpPr>
           <p:nvPr/>
         </p:nvCxnSpPr>
         <p:spPr>
-          <a:xfrm rot="5400000">
-            <a:off x="10709250" y="3231218"/>
-            <a:ext cx="886786" cy="554721"/>
+          <a:xfrm rot="10800000" flipV="1">
+            <a:off x="8153228" y="3998915"/>
+            <a:ext cx="796609" cy="452337"/>
           </a:xfrm>
           <a:prstGeom prst="bentConnector2">
             <a:avLst/>
@@ -6272,149 +7436,25 @@
           </a:fontRef>
         </p:style>
       </p:cxnSp>
-      <p:pic>
-        <p:nvPicPr>
-          <p:cNvPr id="62" name="Graphic 61" descr="Bell outline">
-            <a:extLst>
-              <a:ext uri="{FF2B5EF4-FFF2-40B4-BE49-F238E27FC236}">
-                <a16:creationId xmlns:a16="http://schemas.microsoft.com/office/drawing/2014/main" id="{DFDFE0A7-9745-7B40-9500-678779F5B1BA}"/>
-              </a:ext>
-            </a:extLst>
-          </p:cNvPr>
-          <p:cNvPicPr>
-            <a:picLocks noChangeAspect="1"/>
-          </p:cNvPicPr>
-          <p:nvPr/>
-        </p:nvPicPr>
-        <p:blipFill>
-          <a:blip r:embed="rId3">
-            <a:extLst>
-              <a:ext uri="{28A0092B-C50C-407E-A947-70E740481C1C}">
-                <a14:useLocalDpi xmlns:a14="http://schemas.microsoft.com/office/drawing/2010/main" val="0"/>
-              </a:ext>
-              <a:ext uri="{96DAC541-7B7A-43D3-8B79-37D633B846F1}">
-                <asvg:svgBlip xmlns:asvg="http://schemas.microsoft.com/office/drawing/2016/SVG/main" r:embed="rId4"/>
-              </a:ext>
-            </a:extLst>
-          </a:blip>
-          <a:stretch>
-            <a:fillRect/>
-          </a:stretch>
-        </p:blipFill>
-        <p:spPr>
-          <a:xfrm>
-            <a:off x="10253654" y="3693871"/>
-            <a:ext cx="512445" cy="512445"/>
-          </a:xfrm>
-          <a:prstGeom prst="rect">
-            <a:avLst/>
-          </a:prstGeom>
-        </p:spPr>
-      </p:pic>
-      <p:sp>
-        <p:nvSpPr>
-          <p:cNvPr id="63" name="Rectangle 62">
-            <a:extLst>
-              <a:ext uri="{FF2B5EF4-FFF2-40B4-BE49-F238E27FC236}">
-                <a16:creationId xmlns:a16="http://schemas.microsoft.com/office/drawing/2014/main" id="{06D4C327-F7DB-B84B-B91C-71E6C84E0653}"/>
-              </a:ext>
-            </a:extLst>
-          </p:cNvPr>
-          <p:cNvSpPr/>
-          <p:nvPr/>
-        </p:nvSpPr>
-        <p:spPr>
-          <a:xfrm>
-            <a:off x="10148093" y="3667515"/>
-            <a:ext cx="727189" cy="568912"/>
-          </a:xfrm>
-          <a:prstGeom prst="rect">
-            <a:avLst/>
-          </a:prstGeom>
-          <a:noFill/>
-        </p:spPr>
-        <p:style>
-          <a:lnRef idx="2">
-            <a:schemeClr val="accent6"/>
-          </a:lnRef>
-          <a:fillRef idx="1">
-            <a:schemeClr val="lt1"/>
-          </a:fillRef>
-          <a:effectRef idx="0">
-            <a:schemeClr val="accent6"/>
-          </a:effectRef>
-          <a:fontRef idx="minor">
-            <a:schemeClr val="dk1"/>
-          </a:fontRef>
-        </p:style>
-        <p:txBody>
-          <a:bodyPr rtlCol="0" anchor="ctr"/>
-          <a:lstStyle/>
-          <a:p>
-            <a:pPr algn="ctr"/>
-            <a:endParaRPr lang="en-IT"/>
-          </a:p>
-        </p:txBody>
-      </p:sp>
-      <p:sp>
-        <p:nvSpPr>
-          <p:cNvPr id="72" name="Rectangle 71">
-            <a:extLst>
-              <a:ext uri="{FF2B5EF4-FFF2-40B4-BE49-F238E27FC236}">
-                <a16:creationId xmlns:a16="http://schemas.microsoft.com/office/drawing/2014/main" id="{C05882C3-8342-C145-8C44-829898E68094}"/>
-              </a:ext>
-            </a:extLst>
-          </p:cNvPr>
-          <p:cNvSpPr/>
-          <p:nvPr/>
-        </p:nvSpPr>
-        <p:spPr>
-          <a:xfrm>
-            <a:off x="7970529" y="3693871"/>
-            <a:ext cx="1357060" cy="584775"/>
-          </a:xfrm>
-          <a:prstGeom prst="rect">
-            <a:avLst/>
-          </a:prstGeom>
-        </p:spPr>
-        <p:txBody>
-          <a:bodyPr wrap="square">
-            <a:spAutoFit/>
-          </a:bodyPr>
-          <a:lstStyle/>
-          <a:p>
-            <a:r>
-              <a:rPr lang="en-GB" sz="1600" dirty="0">
-                <a:latin typeface="Palatino Linotype" panose="02040502050505030304" pitchFamily="18" charset="0"/>
-              </a:rPr>
-              <a:t>Inject an instance to</a:t>
-            </a:r>
-            <a:endParaRPr lang="en-IT" sz="1600" dirty="0">
-              <a:latin typeface="Palatino Linotype" panose="02040502050505030304" pitchFamily="18" charset="0"/>
-            </a:endParaRPr>
-          </a:p>
-        </p:txBody>
-      </p:sp>
       <p:cxnSp>
         <p:nvCxnSpPr>
-          <p:cNvPr id="73" name="Elbow Connector 72">
-            <a:extLst>
-              <a:ext uri="{FF2B5EF4-FFF2-40B4-BE49-F238E27FC236}">
-                <a16:creationId xmlns:a16="http://schemas.microsoft.com/office/drawing/2014/main" id="{FE039E0F-504E-2346-B225-87FC9D387E24}"/>
+          <p:cNvPr id="50" name="Elbow Connector 49">
+            <a:extLst>
+              <a:ext uri="{FF2B5EF4-FFF2-40B4-BE49-F238E27FC236}">
+                <a16:creationId xmlns:a16="http://schemas.microsoft.com/office/drawing/2014/main" id="{4ECEB6BB-98BF-6B47-A5D5-F167186A05BF}"/>
               </a:ext>
             </a:extLst>
           </p:cNvPr>
           <p:cNvCxnSpPr>
             <a:cxnSpLocks/>
-            <a:stCxn id="63" idx="1"/>
-            <a:endCxn id="21" idx="0"/>
+            <a:endCxn id="47" idx="3"/>
           </p:cNvCxnSpPr>
           <p:nvPr/>
         </p:nvCxnSpPr>
         <p:spPr>
-          <a:xfrm rot="10800000" flipV="1">
-            <a:off x="9108373" y="3951970"/>
-            <a:ext cx="1039720" cy="452337"/>
+          <a:xfrm rot="5400000">
+            <a:off x="9619763" y="2718715"/>
+            <a:ext cx="1337463" cy="1222938"/>
           </a:xfrm>
           <a:prstGeom prst="bentConnector2">
             <a:avLst/>
@@ -6440,10 +7480,224 @@
       </p:cxnSp>
       <p:sp>
         <p:nvSpPr>
+          <p:cNvPr id="51" name="Rectangle 50">
+            <a:extLst>
+              <a:ext uri="{FF2B5EF4-FFF2-40B4-BE49-F238E27FC236}">
+                <a16:creationId xmlns:a16="http://schemas.microsoft.com/office/drawing/2014/main" id="{833B8466-9178-3741-BAE3-6D71C8EE8F51}"/>
+              </a:ext>
+            </a:extLst>
+          </p:cNvPr>
+          <p:cNvSpPr/>
+          <p:nvPr/>
+        </p:nvSpPr>
+        <p:spPr>
+          <a:xfrm>
+            <a:off x="8018955" y="5182651"/>
+            <a:ext cx="1170015" cy="338554"/>
+          </a:xfrm>
+          <a:prstGeom prst="rect">
+            <a:avLst/>
+          </a:prstGeom>
+        </p:spPr>
+        <p:txBody>
+          <a:bodyPr wrap="square">
+            <a:spAutoFit/>
+          </a:bodyPr>
+          <a:lstStyle/>
+          <a:p>
+            <a:r>
+              <a:rPr lang="en-GB" sz="1600" dirty="0">
+                <a:latin typeface="Courier" pitchFamily="2" charset="0"/>
+              </a:rPr>
+              <a:t>Consumer</a:t>
+            </a:r>
+            <a:endParaRPr lang="en-IT" sz="1600" dirty="0">
+              <a:latin typeface="Courier" pitchFamily="2" charset="0"/>
+            </a:endParaRPr>
+          </a:p>
+        </p:txBody>
+      </p:sp>
+      <p:cxnSp>
+        <p:nvCxnSpPr>
+          <p:cNvPr id="52" name="Elbow Connector 51">
+            <a:extLst>
+              <a:ext uri="{FF2B5EF4-FFF2-40B4-BE49-F238E27FC236}">
+                <a16:creationId xmlns:a16="http://schemas.microsoft.com/office/drawing/2014/main" id="{C89D5534-B274-3842-9AD4-6B535139EDD8}"/>
+              </a:ext>
+            </a:extLst>
+          </p:cNvPr>
+          <p:cNvCxnSpPr>
+            <a:cxnSpLocks/>
+            <a:endCxn id="17" idx="0"/>
+          </p:cNvCxnSpPr>
+          <p:nvPr/>
+        </p:nvCxnSpPr>
+        <p:spPr>
+          <a:xfrm rot="5400000">
+            <a:off x="10123019" y="3741281"/>
+            <a:ext cx="1856776" cy="1917"/>
+          </a:xfrm>
+          <a:prstGeom prst="bentConnector3">
+            <a:avLst>
+              <a:gd name="adj1" fmla="val 50000"/>
+            </a:avLst>
+          </a:prstGeom>
+          <a:ln>
+            <a:tailEnd type="triangle"/>
+          </a:ln>
+        </p:spPr>
+        <p:style>
+          <a:lnRef idx="1">
+            <a:schemeClr val="accent6"/>
+          </a:lnRef>
+          <a:fillRef idx="0">
+            <a:schemeClr val="accent6"/>
+          </a:fillRef>
+          <a:effectRef idx="0">
+            <a:schemeClr val="accent6"/>
+          </a:effectRef>
+          <a:fontRef idx="minor">
+            <a:schemeClr val="tx1"/>
+          </a:fontRef>
+        </p:style>
+      </p:cxnSp>
+      <p:sp>
+        <p:nvSpPr>
+          <p:cNvPr id="89" name="Rectangle 88">
+            <a:extLst>
+              <a:ext uri="{FF2B5EF4-FFF2-40B4-BE49-F238E27FC236}">
+                <a16:creationId xmlns:a16="http://schemas.microsoft.com/office/drawing/2014/main" id="{699AF843-0517-7842-8BD0-AC356B180D49}"/>
+              </a:ext>
+            </a:extLst>
+          </p:cNvPr>
+          <p:cNvSpPr/>
+          <p:nvPr/>
+        </p:nvSpPr>
+        <p:spPr>
+          <a:xfrm>
+            <a:off x="8034815" y="5170315"/>
+            <a:ext cx="1213557" cy="1324756"/>
+          </a:xfrm>
+          <a:prstGeom prst="rect">
+            <a:avLst/>
+          </a:prstGeom>
+          <a:noFill/>
+        </p:spPr>
+        <p:style>
+          <a:lnRef idx="2">
+            <a:schemeClr val="accent6"/>
+          </a:lnRef>
+          <a:fillRef idx="1">
+            <a:schemeClr val="lt1"/>
+          </a:fillRef>
+          <a:effectRef idx="0">
+            <a:schemeClr val="accent6"/>
+          </a:effectRef>
+          <a:fontRef idx="minor">
+            <a:schemeClr val="dk1"/>
+          </a:fontRef>
+        </p:style>
+        <p:txBody>
+          <a:bodyPr rtlCol="0" anchor="ctr"/>
+          <a:lstStyle/>
+          <a:p>
+            <a:pPr algn="ctr"/>
+            <a:endParaRPr lang="en-IT"/>
+          </a:p>
+        </p:txBody>
+      </p:sp>
+      <p:cxnSp>
+        <p:nvCxnSpPr>
+          <p:cNvPr id="94" name="Straight Arrow Connector 93">
+            <a:extLst>
+              <a:ext uri="{FF2B5EF4-FFF2-40B4-BE49-F238E27FC236}">
+                <a16:creationId xmlns:a16="http://schemas.microsoft.com/office/drawing/2014/main" id="{14171B37-1BAF-E847-8A9F-13DDD5951959}"/>
+              </a:ext>
+            </a:extLst>
+          </p:cNvPr>
+          <p:cNvCxnSpPr>
+            <a:cxnSpLocks/>
+            <a:stCxn id="18" idx="1"/>
+            <a:endCxn id="89" idx="3"/>
+          </p:cNvCxnSpPr>
+          <p:nvPr/>
+        </p:nvCxnSpPr>
+        <p:spPr>
+          <a:xfrm flipH="1" flipV="1">
+            <a:off x="9248372" y="5832693"/>
+            <a:ext cx="949487" cy="10089"/>
+          </a:xfrm>
+          <a:prstGeom prst="straightConnector1">
+            <a:avLst/>
+          </a:prstGeom>
+          <a:ln>
+            <a:tailEnd type="triangle"/>
+          </a:ln>
+        </p:spPr>
+        <p:style>
+          <a:lnRef idx="1">
+            <a:schemeClr val="accent6"/>
+          </a:lnRef>
+          <a:fillRef idx="0">
+            <a:schemeClr val="accent6"/>
+          </a:fillRef>
+          <a:effectRef idx="0">
+            <a:schemeClr val="accent6"/>
+          </a:effectRef>
+          <a:fontRef idx="minor">
+            <a:schemeClr val="tx1"/>
+          </a:fontRef>
+        </p:style>
+      </p:cxnSp>
+      <p:cxnSp>
+        <p:nvCxnSpPr>
+          <p:cNvPr id="99" name="Straight Arrow Connector 98">
+            <a:extLst>
+              <a:ext uri="{FF2B5EF4-FFF2-40B4-BE49-F238E27FC236}">
+                <a16:creationId xmlns:a16="http://schemas.microsoft.com/office/drawing/2014/main" id="{E4EA29F2-86DD-5B4E-B5D7-1BC40D33D8C5}"/>
+              </a:ext>
+            </a:extLst>
+          </p:cNvPr>
+          <p:cNvCxnSpPr>
+            <a:cxnSpLocks/>
+            <a:stCxn id="17" idx="2"/>
+            <a:endCxn id="18" idx="0"/>
+          </p:cNvCxnSpPr>
+          <p:nvPr/>
+        </p:nvCxnSpPr>
+        <p:spPr>
+          <a:xfrm flipH="1">
+            <a:off x="11050447" y="5255402"/>
+            <a:ext cx="1" cy="264214"/>
+          </a:xfrm>
+          <a:prstGeom prst="straightConnector1">
+            <a:avLst/>
+          </a:prstGeom>
+          <a:ln>
+            <a:tailEnd type="triangle"/>
+          </a:ln>
+        </p:spPr>
+        <p:style>
+          <a:lnRef idx="1">
+            <a:schemeClr val="accent6"/>
+          </a:lnRef>
+          <a:fillRef idx="0">
+            <a:schemeClr val="accent6"/>
+          </a:fillRef>
+          <a:effectRef idx="0">
+            <a:schemeClr val="accent6"/>
+          </a:effectRef>
+          <a:fontRef idx="minor">
+            <a:schemeClr val="tx1"/>
+          </a:fontRef>
+        </p:style>
+      </p:cxnSp>
+      <p:sp>
+        <p:nvSpPr>
           <p:cNvPr id="3" name="Slide Number Placeholder 2">
             <a:extLst>
               <a:ext uri="{FF2B5EF4-FFF2-40B4-BE49-F238E27FC236}">
-                <a16:creationId xmlns:a16="http://schemas.microsoft.com/office/drawing/2014/main" id="{974894B6-4213-A44D-B473-19DC7D2EFB58}"/>
+                <a16:creationId xmlns:a16="http://schemas.microsoft.com/office/drawing/2014/main" id="{EEE3CC18-2D47-F945-B89B-ACEE8C1E8A95}"/>
               </a:ext>
             </a:extLst>
           </p:cNvPr>
@@ -6470,7 +7724,7 @@
     </p:spTree>
     <p:extLst>
       <p:ext uri="{BB962C8B-B14F-4D97-AF65-F5344CB8AC3E}">
-        <p14:creationId xmlns:p14="http://schemas.microsoft.com/office/powerpoint/2010/main" val="3625446621"/>
+        <p14:creationId xmlns:p14="http://schemas.microsoft.com/office/powerpoint/2010/main" val="3496802827"/>
       </p:ext>
     </p:extLst>
   </p:cSld>
@@ -6515,7 +7769,9 @@
         </p:nvSpPr>
         <p:spPr/>
         <p:txBody>
-          <a:bodyPr/>
+          <a:bodyPr>
+            <a:normAutofit/>
+          </a:bodyPr>
           <a:lstStyle/>
           <a:p>
             <a:r>
@@ -6526,12 +7782,9 @@
               <a:rPr lang="en-IT" dirty="0">
                 <a:latin typeface="Courier" pitchFamily="2" charset="0"/>
               </a:rPr>
-              <a:t>Consumer</a:t>
-            </a:r>
-            <a:r>
-              <a:rPr lang="en-IT" dirty="0"/>
-              <a:t> </a:t>
-            </a:r>
+              <a:t>MultiProvider</a:t>
+            </a:r>
+            <a:endParaRPr lang="en-IT" dirty="0"/>
           </a:p>
         </p:txBody>
       </p:sp>
@@ -6553,805 +7806,224 @@
         </p:nvSpPr>
         <p:spPr>
           <a:xfrm>
-            <a:off x="142407" y="1361167"/>
-            <a:ext cx="6311192" cy="5153933"/>
+            <a:off x="428172" y="1361167"/>
+            <a:ext cx="7868884" cy="5153933"/>
           </a:xfrm>
         </p:spPr>
         <p:txBody>
           <a:bodyPr>
-            <a:normAutofit lnSpcReduction="10000"/>
+            <a:normAutofit/>
           </a:bodyPr>
           <a:lstStyle/>
           <a:p>
+            <a:r>
+              <a:rPr lang="en-GB" dirty="0"/>
+              <a:t>What if you need to inject more than one provider through the widget tree? Use </a:t>
+            </a:r>
+            <a:r>
+              <a:rPr lang="en-GB" dirty="0" err="1">
+                <a:latin typeface="Courier" pitchFamily="2" charset="0"/>
+              </a:rPr>
+              <a:t>MultiProvider</a:t>
+            </a:r>
             <a:r>
               <a:rPr lang="en-GB" dirty="0">
                 <a:latin typeface="Courier" pitchFamily="2" charset="0"/>
               </a:rPr>
-              <a:t>Consumer</a:t>
+              <a:t>.</a:t>
+            </a:r>
+          </a:p>
+          <a:p>
+            <a:endParaRPr lang="en-GB" dirty="0"/>
+          </a:p>
+          <a:p>
+            <a:r>
+              <a:rPr lang="en-GB" dirty="0" err="1"/>
+              <a:t>Synthax</a:t>
             </a:r>
             <a:r>
               <a:rPr lang="en-GB" dirty="0"/>
-              <a:t> is a widget that listens for changes in a class that implements </a:t>
-            </a:r>
+              <a:t> example:</a:t>
+            </a:r>
+          </a:p>
+          <a:p>
+            <a:endParaRPr lang="en-GB" dirty="0"/>
+          </a:p>
+          <a:p>
+            <a:pPr marL="342900" lvl="1" indent="0">
+              <a:buNone/>
+            </a:pPr>
+            <a:r>
+              <a:rPr lang="en-GB" b="1" dirty="0" err="1">
+                <a:latin typeface="Courier" pitchFamily="2" charset="0"/>
+              </a:rPr>
+              <a:t>MultiProvider</a:t>
+            </a:r>
+            <a:r>
+              <a:rPr lang="en-GB" dirty="0">
+                <a:latin typeface="Courier" pitchFamily="2" charset="0"/>
+              </a:rPr>
+              <a:t>(</a:t>
+            </a:r>
+          </a:p>
+          <a:p>
+            <a:pPr marL="342900" lvl="1" indent="0">
+              <a:buNone/>
+            </a:pPr>
+            <a:r>
+              <a:rPr lang="en-GB" dirty="0">
+                <a:latin typeface="Courier" pitchFamily="2" charset="0"/>
+              </a:rPr>
+              <a:t>  providers: [</a:t>
+            </a:r>
+          </a:p>
+          <a:p>
+            <a:pPr marL="342900" lvl="1" indent="0">
+              <a:buNone/>
+            </a:pPr>
             <a:r>
               <a:rPr lang="en-GB" dirty="0" err="1">
                 <a:latin typeface="Courier" pitchFamily="2" charset="0"/>
               </a:rPr>
-              <a:t>ChangeNotifier</a:t>
-            </a:r>
-            <a:r>
-              <a:rPr lang="en-GB" dirty="0"/>
-              <a:t>, then rebuilds the widget tree below itself when it finds any. </a:t>
-            </a:r>
-          </a:p>
-          <a:p>
-            <a:endParaRPr lang="en-GB" dirty="0"/>
-          </a:p>
-          <a:p>
-            <a:r>
-              <a:rPr lang="en-GB" dirty="0"/>
-              <a:t>Whenever </a:t>
-            </a:r>
+              <a:t>ChangeNotifierProvider</a:t>
+            </a:r>
+            <a:r>
+              <a:rPr lang="en-GB" dirty="0">
+                <a:latin typeface="Courier" pitchFamily="2" charset="0"/>
+              </a:rPr>
+              <a:t>(...),</a:t>
+            </a:r>
+          </a:p>
+          <a:p>
+            <a:pPr marL="342900" lvl="1" indent="0">
+              <a:buNone/>
+            </a:pPr>
             <a:r>
               <a:rPr lang="en-GB" dirty="0" err="1">
                 <a:latin typeface="Courier" pitchFamily="2" charset="0"/>
               </a:rPr>
-              <a:t>notifyListeners</a:t>
+              <a:t>ChangeNotifierProvider</a:t>
             </a:r>
             <a:r>
               <a:rPr lang="en-GB" dirty="0">
                 <a:latin typeface="Courier" pitchFamily="2" charset="0"/>
               </a:rPr>
-              <a:t>() </a:t>
-            </a:r>
-            <a:r>
-              <a:rPr lang="en-GB" dirty="0">
-                <a:latin typeface="Palatino" pitchFamily="2" charset="77"/>
-                <a:ea typeface="Palatino" pitchFamily="2" charset="77"/>
-              </a:rPr>
-              <a:t>is called, the </a:t>
-            </a:r>
+              <a:t>(...),</a:t>
+            </a:r>
+          </a:p>
+          <a:p>
+            <a:pPr marL="342900" lvl="1" indent="0">
+              <a:buNone/>
+            </a:pPr>
             <a:r>
               <a:rPr lang="en-GB" dirty="0">
                 <a:latin typeface="Courier" pitchFamily="2" charset="0"/>
-                <a:ea typeface="Palatino" pitchFamily="2" charset="77"/>
-              </a:rPr>
-              <a:t>Consumer’s builder</a:t>
-            </a:r>
+              </a:rPr>
+              <a:t>  ],</a:t>
+            </a:r>
+          </a:p>
+          <a:p>
+            <a:pPr marL="342900" lvl="1" indent="0">
+              <a:buNone/>
+            </a:pPr>
             <a:r>
               <a:rPr lang="en-GB" dirty="0">
-                <a:latin typeface="Palatino" pitchFamily="2" charset="77"/>
-                <a:ea typeface="Palatino" pitchFamily="2" charset="77"/>
-              </a:rPr>
-              <a:t> function is called. </a:t>
-            </a:r>
-            <a:r>
-              <a:rPr lang="en-GB" dirty="0" err="1">
-                <a:latin typeface="Palatino" pitchFamily="2" charset="77"/>
-                <a:ea typeface="Palatino" pitchFamily="2" charset="77"/>
-              </a:rPr>
-              <a:t>Synthax</a:t>
-            </a:r>
-            <a:r>
-              <a:rPr lang="en-GB" dirty="0">
-                <a:latin typeface="Palatino" pitchFamily="2" charset="77"/>
-                <a:ea typeface="Palatino" pitchFamily="2" charset="77"/>
-              </a:rPr>
-              <a:t>:</a:t>
-            </a:r>
-            <a:br>
-              <a:rPr lang="en-GB" dirty="0">
-                <a:latin typeface="Palatino" pitchFamily="2" charset="77"/>
-                <a:ea typeface="Palatino" pitchFamily="2" charset="77"/>
-              </a:rPr>
-            </a:br>
-            <a:br>
-              <a:rPr lang="en-GB" dirty="0">
-                <a:latin typeface="Palatino" pitchFamily="2" charset="77"/>
-                <a:ea typeface="Palatino" pitchFamily="2" charset="77"/>
-              </a:rPr>
-            </a:br>
-            <a:br>
-              <a:rPr lang="en-GB" dirty="0">
-                <a:latin typeface="Palatino" pitchFamily="2" charset="77"/>
-                <a:ea typeface="Palatino" pitchFamily="2" charset="77"/>
-              </a:rPr>
-            </a:br>
-            <a:r>
-              <a:rPr lang="en-GB" sz="1800" dirty="0">
                 <a:latin typeface="Courier" pitchFamily="2" charset="0"/>
               </a:rPr>
-              <a:t>return </a:t>
-            </a:r>
-            <a:r>
-              <a:rPr lang="en-GB" sz="1800" b="1" dirty="0">
-                <a:latin typeface="Courier" pitchFamily="2" charset="0"/>
-              </a:rPr>
-              <a:t>Consumer</a:t>
-            </a:r>
-            <a:r>
-              <a:rPr lang="en-GB" sz="1800" dirty="0">
-                <a:latin typeface="Courier" pitchFamily="2" charset="0"/>
-              </a:rPr>
-              <a:t>&lt;</a:t>
-            </a:r>
-            <a:r>
-              <a:rPr lang="en-GB" sz="1800" dirty="0" err="1">
-                <a:latin typeface="Courier" pitchFamily="2" charset="0"/>
-              </a:rPr>
-              <a:t>ClassImplementingChangeNotifier</a:t>
-            </a:r>
-            <a:r>
-              <a:rPr lang="en-GB" sz="1800" dirty="0">
-                <a:latin typeface="Courier" pitchFamily="2" charset="0"/>
-              </a:rPr>
-              <a:t>&gt;(</a:t>
-            </a:r>
-            <a:br>
-              <a:rPr lang="en-GB" sz="1800" dirty="0">
-                <a:latin typeface="Courier" pitchFamily="2" charset="0"/>
-              </a:rPr>
-            </a:br>
-            <a:r>
-              <a:rPr lang="en-GB" sz="1800" dirty="0">
-                <a:latin typeface="Courier" pitchFamily="2" charset="0"/>
-              </a:rPr>
-              <a:t> builder: (context, cart, child) {</a:t>
-            </a:r>
-            <a:br>
-              <a:rPr lang="en-GB" sz="1800" dirty="0">
-                <a:latin typeface="Courier" pitchFamily="2" charset="0"/>
-              </a:rPr>
-            </a:br>
-            <a:r>
-              <a:rPr lang="en-GB" sz="1800" dirty="0">
-                <a:latin typeface="Courier" pitchFamily="2" charset="0"/>
-              </a:rPr>
-              <a:t>  return Text("Total price:  		${</a:t>
-            </a:r>
-            <a:r>
-              <a:rPr lang="en-GB" sz="1800" dirty="0" err="1">
-                <a:latin typeface="Courier" pitchFamily="2" charset="0"/>
-              </a:rPr>
-              <a:t>cart.totalPrice</a:t>
-            </a:r>
-            <a:r>
-              <a:rPr lang="en-GB" sz="1800" dirty="0">
-                <a:latin typeface="Courier" pitchFamily="2" charset="0"/>
-              </a:rPr>
-              <a:t>}");</a:t>
-            </a:r>
-            <a:br>
-              <a:rPr lang="en-GB" sz="1800" dirty="0">
-                <a:latin typeface="Courier" pitchFamily="2" charset="0"/>
-              </a:rPr>
-            </a:br>
-            <a:r>
-              <a:rPr lang="en-GB" sz="1800" dirty="0">
-                <a:latin typeface="Courier" pitchFamily="2" charset="0"/>
-              </a:rPr>
-              <a:t>  },</a:t>
-            </a:r>
-            <a:br>
-              <a:rPr lang="en-GB" sz="1800" dirty="0">
-                <a:latin typeface="Courier" pitchFamily="2" charset="0"/>
-              </a:rPr>
-            </a:br>
-            <a:r>
-              <a:rPr lang="en-GB" sz="1800" dirty="0">
-                <a:latin typeface="Courier" pitchFamily="2" charset="0"/>
-              </a:rPr>
-              <a:t>);</a:t>
-            </a:r>
-            <a:endParaRPr lang="en-IT" sz="1800" dirty="0">
-              <a:latin typeface="Palatino" pitchFamily="2" charset="77"/>
-              <a:ea typeface="Palatino" pitchFamily="2" charset="77"/>
-            </a:endParaRPr>
-          </a:p>
-          <a:p>
-            <a:pPr lvl="1"/>
-            <a:endParaRPr lang="en-IT" dirty="0"/>
-          </a:p>
-          <a:p>
-            <a:endParaRPr lang="en-IT" dirty="0"/>
-          </a:p>
-        </p:txBody>
-      </p:sp>
-      <p:pic>
-        <p:nvPicPr>
-          <p:cNvPr id="7" name="Graphic 6" descr="Bell outline">
-            <a:extLst>
-              <a:ext uri="{FF2B5EF4-FFF2-40B4-BE49-F238E27FC236}">
-                <a16:creationId xmlns:a16="http://schemas.microsoft.com/office/drawing/2014/main" id="{25DCBBD3-6E78-9141-9E2C-341174CD81A6}"/>
-              </a:ext>
-            </a:extLst>
-          </p:cNvPr>
-          <p:cNvPicPr>
-            <a:picLocks noChangeAspect="1"/>
-          </p:cNvPicPr>
-          <p:nvPr/>
-        </p:nvPicPr>
-        <p:blipFill>
-          <a:blip r:embed="rId3">
-            <a:extLst>
-              <a:ext uri="{28A0092B-C50C-407E-A947-70E740481C1C}">
-                <a14:useLocalDpi xmlns:a14="http://schemas.microsoft.com/office/drawing/2010/main" val="0"/>
-              </a:ext>
-              <a:ext uri="{96DAC541-7B7A-43D3-8B79-37D633B846F1}">
-                <asvg:svgBlip xmlns:asvg="http://schemas.microsoft.com/office/drawing/2016/SVG/main" r:embed="rId4"/>
-              </a:ext>
-            </a:extLst>
-          </a:blip>
-          <a:stretch>
-            <a:fillRect/>
-          </a:stretch>
-        </p:blipFill>
-        <p:spPr>
-          <a:xfrm>
-            <a:off x="10325662" y="1863628"/>
-            <a:ext cx="914400" cy="914400"/>
-          </a:xfrm>
-          <a:prstGeom prst="rect">
-            <a:avLst/>
-          </a:prstGeom>
-        </p:spPr>
-      </p:pic>
-      <p:sp>
-        <p:nvSpPr>
-          <p:cNvPr id="8" name="Rectangle 7">
-            <a:extLst>
-              <a:ext uri="{FF2B5EF4-FFF2-40B4-BE49-F238E27FC236}">
-                <a16:creationId xmlns:a16="http://schemas.microsoft.com/office/drawing/2014/main" id="{4E311616-F193-6E49-89E0-0FF273168CC9}"/>
-              </a:ext>
-            </a:extLst>
-          </p:cNvPr>
-          <p:cNvSpPr/>
-          <p:nvPr/>
-        </p:nvSpPr>
-        <p:spPr>
-          <a:xfrm>
-            <a:off x="9446073" y="1166722"/>
-            <a:ext cx="2543852" cy="1596453"/>
-          </a:xfrm>
-          <a:prstGeom prst="rect">
-            <a:avLst/>
-          </a:prstGeom>
-          <a:noFill/>
-        </p:spPr>
-        <p:style>
-          <a:lnRef idx="2">
-            <a:schemeClr val="accent6"/>
-          </a:lnRef>
-          <a:fillRef idx="1">
-            <a:schemeClr val="lt1"/>
-          </a:fillRef>
-          <a:effectRef idx="0">
-            <a:schemeClr val="accent6"/>
-          </a:effectRef>
-          <a:fontRef idx="minor">
-            <a:schemeClr val="dk1"/>
-          </a:fontRef>
-        </p:style>
-        <p:txBody>
-          <a:bodyPr rtlCol="0" anchor="ctr"/>
-          <a:lstStyle/>
-          <a:p>
-            <a:pPr algn="ctr"/>
-            <a:endParaRPr lang="en-IT"/>
-          </a:p>
-        </p:txBody>
-      </p:sp>
-      <p:sp>
-        <p:nvSpPr>
-          <p:cNvPr id="9" name="TextBox 8">
-            <a:extLst>
-              <a:ext uri="{FF2B5EF4-FFF2-40B4-BE49-F238E27FC236}">
-                <a16:creationId xmlns:a16="http://schemas.microsoft.com/office/drawing/2014/main" id="{314AD37F-8378-DB48-A962-465066E6F1DF}"/>
-              </a:ext>
-            </a:extLst>
-          </p:cNvPr>
-          <p:cNvSpPr txBox="1"/>
-          <p:nvPr/>
-        </p:nvSpPr>
-        <p:spPr>
-          <a:xfrm>
-            <a:off x="9427145" y="1248655"/>
-            <a:ext cx="2560529" cy="646331"/>
-          </a:xfrm>
-          <a:prstGeom prst="rect">
-            <a:avLst/>
-          </a:prstGeom>
-          <a:noFill/>
-        </p:spPr>
-        <p:txBody>
-          <a:bodyPr wrap="square" rtlCol="0">
-            <a:spAutoFit/>
-          </a:bodyPr>
-          <a:lstStyle/>
-          <a:p>
-            <a:pPr algn="ctr"/>
+              <a:t>  child: &lt;</a:t>
+            </a:r>
             <a:r>
               <a:rPr lang="en-GB" dirty="0" err="1">
                 <a:latin typeface="Courier" pitchFamily="2" charset="0"/>
               </a:rPr>
-              <a:t>ClassImplementingChangeNotifier</a:t>
-            </a:r>
+              <a:t>widget_tree</a:t>
+            </a:r>
+            <a:r>
+              <a:rPr lang="en-GB" dirty="0">
+                <a:latin typeface="Courier" pitchFamily="2" charset="0"/>
+              </a:rPr>
+              <a:t>&gt;,</a:t>
+            </a:r>
+          </a:p>
+          <a:p>
+            <a:pPr marL="342900" lvl="1" indent="0">
+              <a:buNone/>
+            </a:pPr>
+            <a:r>
+              <a:rPr lang="en-GB" dirty="0">
+                <a:latin typeface="Courier" pitchFamily="2" charset="0"/>
+              </a:rPr>
+              <a:t>);</a:t>
+            </a:r>
+          </a:p>
+          <a:p>
+            <a:pPr marL="0" indent="0">
+              <a:buNone/>
+            </a:pPr>
             <a:endParaRPr lang="en-IT" dirty="0">
               <a:latin typeface="Courier" pitchFamily="2" charset="0"/>
             </a:endParaRPr>
           </a:p>
-        </p:txBody>
-      </p:sp>
-      <p:sp>
-        <p:nvSpPr>
-          <p:cNvPr id="17" name="TextBox 16">
-            <a:extLst>
-              <a:ext uri="{FF2B5EF4-FFF2-40B4-BE49-F238E27FC236}">
-                <a16:creationId xmlns:a16="http://schemas.microsoft.com/office/drawing/2014/main" id="{436E1531-BA3E-7A40-BAFD-4ED44A86B181}"/>
-              </a:ext>
-            </a:extLst>
-          </p:cNvPr>
-          <p:cNvSpPr txBox="1"/>
-          <p:nvPr/>
-        </p:nvSpPr>
-        <p:spPr>
-          <a:xfrm>
-            <a:off x="9908895" y="4670627"/>
-            <a:ext cx="2283105" cy="584775"/>
+          <a:p>
+            <a:endParaRPr lang="en-IT" dirty="0"/>
+          </a:p>
+        </p:txBody>
+      </p:sp>
+      <p:sp>
+        <p:nvSpPr>
+          <p:cNvPr id="15" name="Rectangle 14">
+            <a:extLst>
+              <a:ext uri="{FF2B5EF4-FFF2-40B4-BE49-F238E27FC236}">
+                <a16:creationId xmlns:a16="http://schemas.microsoft.com/office/drawing/2014/main" id="{B99A70FB-D572-6A4B-8E41-00EC37FB7A6C}"/>
+              </a:ext>
+            </a:extLst>
+          </p:cNvPr>
+          <p:cNvSpPr/>
+          <p:nvPr/>
+        </p:nvSpPr>
+        <p:spPr>
+          <a:xfrm>
+            <a:off x="8091874" y="3122435"/>
+            <a:ext cx="3530500" cy="461665"/>
           </a:xfrm>
           <a:prstGeom prst="rect">
             <a:avLst/>
           </a:prstGeom>
-          <a:noFill/>
-        </p:spPr>
-        <p:txBody>
-          <a:bodyPr wrap="square" rtlCol="0">
+        </p:spPr>
+        <p:txBody>
+          <a:bodyPr wrap="square">
             <a:spAutoFit/>
           </a:bodyPr>
           <a:lstStyle/>
           <a:p>
-            <a:pPr algn="ctr"/>
-            <a:r>
-              <a:rPr lang="en-IT" sz="1600" dirty="0">
-                <a:latin typeface="Courier" pitchFamily="2" charset="0"/>
-              </a:rPr>
-              <a:t>notifyListeners() </a:t>
-            </a:r>
-            <a:r>
-              <a:rPr lang="en-IT" sz="1600" dirty="0">
-                <a:latin typeface="Palatino Linotype" panose="02040502050505030304" pitchFamily="18" charset="0"/>
-              </a:rPr>
-              <a:t>is called</a:t>
-            </a:r>
-          </a:p>
-        </p:txBody>
-      </p:sp>
-      <p:sp>
-        <p:nvSpPr>
-          <p:cNvPr id="18" name="TextBox 17">
-            <a:extLst>
-              <a:ext uri="{FF2B5EF4-FFF2-40B4-BE49-F238E27FC236}">
-                <a16:creationId xmlns:a16="http://schemas.microsoft.com/office/drawing/2014/main" id="{26D4C8E7-89C0-8D41-AE8C-0860C5F9D2C3}"/>
-              </a:ext>
-            </a:extLst>
-          </p:cNvPr>
-          <p:cNvSpPr txBox="1"/>
-          <p:nvPr/>
-        </p:nvSpPr>
-        <p:spPr>
-          <a:xfrm>
-            <a:off x="10197859" y="5519616"/>
-            <a:ext cx="1705175" cy="646331"/>
-          </a:xfrm>
-          <a:prstGeom prst="rect">
-            <a:avLst/>
-          </a:prstGeom>
-          <a:noFill/>
-        </p:spPr>
-        <p:txBody>
-          <a:bodyPr wrap="square" rtlCol="0">
-            <a:spAutoFit/>
-          </a:bodyPr>
-          <a:lstStyle/>
-          <a:p>
-            <a:pPr algn="ctr"/>
-            <a:r>
-              <a:rPr lang="en-IT" dirty="0">
-                <a:latin typeface="Palatino Linotype" panose="02040502050505030304" pitchFamily="18" charset="0"/>
-              </a:rPr>
-              <a:t>Call </a:t>
-            </a:r>
-            <a:r>
-              <a:rPr lang="en-IT" dirty="0">
-                <a:latin typeface="Courier" pitchFamily="2" charset="0"/>
-              </a:rPr>
-              <a:t>builder </a:t>
-            </a:r>
-            <a:r>
-              <a:rPr lang="en-IT" dirty="0">
-                <a:latin typeface="Palatino Linotype" panose="02040502050505030304" pitchFamily="18" charset="0"/>
-              </a:rPr>
-              <a:t>method</a:t>
-            </a:r>
-          </a:p>
-        </p:txBody>
-      </p:sp>
-      <p:sp>
-        <p:nvSpPr>
-          <p:cNvPr id="28" name="Rectangle 27">
-            <a:extLst>
-              <a:ext uri="{FF2B5EF4-FFF2-40B4-BE49-F238E27FC236}">
-                <a16:creationId xmlns:a16="http://schemas.microsoft.com/office/drawing/2014/main" id="{DCADE902-AE76-0C4E-8A9B-DCD0A5F12B87}"/>
-              </a:ext>
-            </a:extLst>
-          </p:cNvPr>
-          <p:cNvSpPr/>
-          <p:nvPr/>
-        </p:nvSpPr>
-        <p:spPr>
-          <a:xfrm>
-            <a:off x="6559159" y="3276426"/>
-            <a:ext cx="3292848" cy="3419648"/>
-          </a:xfrm>
-          <a:prstGeom prst="rect">
-            <a:avLst/>
-          </a:prstGeom>
-          <a:noFill/>
-        </p:spPr>
-        <p:style>
-          <a:lnRef idx="2">
-            <a:schemeClr val="accent6"/>
-          </a:lnRef>
-          <a:fillRef idx="1">
-            <a:schemeClr val="lt1"/>
-          </a:fillRef>
-          <a:effectRef idx="0">
-            <a:schemeClr val="accent6"/>
-          </a:effectRef>
-          <a:fontRef idx="minor">
-            <a:schemeClr val="dk1"/>
-          </a:fontRef>
-        </p:style>
-        <p:txBody>
-          <a:bodyPr rtlCol="0" anchor="ctr"/>
-          <a:lstStyle/>
-          <a:p>
-            <a:pPr algn="ctr"/>
-            <a:endParaRPr lang="en-IT"/>
-          </a:p>
-        </p:txBody>
-      </p:sp>
-      <p:sp>
-        <p:nvSpPr>
-          <p:cNvPr id="29" name="TextBox 28">
-            <a:extLst>
-              <a:ext uri="{FF2B5EF4-FFF2-40B4-BE49-F238E27FC236}">
-                <a16:creationId xmlns:a16="http://schemas.microsoft.com/office/drawing/2014/main" id="{712208B6-FB17-3948-9E81-98C671A17004}"/>
-              </a:ext>
-            </a:extLst>
-          </p:cNvPr>
-          <p:cNvSpPr txBox="1"/>
-          <p:nvPr/>
-        </p:nvSpPr>
-        <p:spPr>
-          <a:xfrm>
-            <a:off x="6490512" y="3291279"/>
-            <a:ext cx="3427627" cy="369332"/>
-          </a:xfrm>
-          <a:prstGeom prst="rect">
-            <a:avLst/>
-          </a:prstGeom>
-          <a:noFill/>
-        </p:spPr>
-        <p:txBody>
-          <a:bodyPr wrap="square" rtlCol="0">
-            <a:spAutoFit/>
-          </a:bodyPr>
-          <a:lstStyle/>
-          <a:p>
-            <a:pPr algn="ctr"/>
-            <a:r>
-              <a:rPr lang="en-GB" dirty="0" err="1">
-                <a:latin typeface="Courier" pitchFamily="2" charset="0"/>
-              </a:rPr>
-              <a:t>ChangeNotifierProvider</a:t>
-            </a:r>
-            <a:endParaRPr lang="en-IT" dirty="0">
-              <a:latin typeface="Palatino Linotype" panose="02040502050505030304" pitchFamily="18" charset="0"/>
-            </a:endParaRPr>
-          </a:p>
-        </p:txBody>
-      </p:sp>
-      <p:sp>
-        <p:nvSpPr>
-          <p:cNvPr id="31" name="Rectangle 30">
-            <a:extLst>
-              <a:ext uri="{FF2B5EF4-FFF2-40B4-BE49-F238E27FC236}">
-                <a16:creationId xmlns:a16="http://schemas.microsoft.com/office/drawing/2014/main" id="{BDBF5486-046D-DD4C-9FA3-4F1EB2ADFB39}"/>
-              </a:ext>
-            </a:extLst>
-          </p:cNvPr>
-          <p:cNvSpPr/>
-          <p:nvPr/>
-        </p:nvSpPr>
-        <p:spPr>
-          <a:xfrm>
-            <a:off x="6802690" y="4451253"/>
-            <a:ext cx="2701073" cy="2181895"/>
-          </a:xfrm>
-          <a:prstGeom prst="rect">
-            <a:avLst/>
-          </a:prstGeom>
-          <a:noFill/>
-        </p:spPr>
-        <p:style>
-          <a:lnRef idx="2">
-            <a:schemeClr val="accent6"/>
-          </a:lnRef>
-          <a:fillRef idx="1">
-            <a:schemeClr val="lt1"/>
-          </a:fillRef>
-          <a:effectRef idx="0">
-            <a:schemeClr val="accent6"/>
-          </a:effectRef>
-          <a:fontRef idx="minor">
-            <a:schemeClr val="dk1"/>
-          </a:fontRef>
-        </p:style>
-        <p:txBody>
-          <a:bodyPr rtlCol="0" anchor="ctr"/>
-          <a:lstStyle/>
-          <a:p>
-            <a:pPr algn="ctr"/>
-            <a:endParaRPr lang="en-IT"/>
-          </a:p>
-        </p:txBody>
-      </p:sp>
-      <p:sp>
-        <p:nvSpPr>
-          <p:cNvPr id="32" name="Rectangle 31">
-            <a:extLst>
-              <a:ext uri="{FF2B5EF4-FFF2-40B4-BE49-F238E27FC236}">
-                <a16:creationId xmlns:a16="http://schemas.microsoft.com/office/drawing/2014/main" id="{F93A7DB7-662A-9B4B-A09C-2CA0EC3B77D6}"/>
-              </a:ext>
-            </a:extLst>
-          </p:cNvPr>
-          <p:cNvSpPr/>
-          <p:nvPr/>
-        </p:nvSpPr>
-        <p:spPr>
-          <a:xfrm>
-            <a:off x="7177032" y="4963015"/>
-            <a:ext cx="348899" cy="282473"/>
-          </a:xfrm>
-          <a:prstGeom prst="rect">
-            <a:avLst/>
-          </a:prstGeom>
-          <a:noFill/>
-        </p:spPr>
-        <p:style>
-          <a:lnRef idx="2">
-            <a:schemeClr val="accent6"/>
-          </a:lnRef>
-          <a:fillRef idx="1">
-            <a:schemeClr val="lt1"/>
-          </a:fillRef>
-          <a:effectRef idx="0">
-            <a:schemeClr val="accent6"/>
-          </a:effectRef>
-          <a:fontRef idx="minor">
-            <a:schemeClr val="dk1"/>
-          </a:fontRef>
-        </p:style>
-        <p:txBody>
-          <a:bodyPr rtlCol="0" anchor="ctr"/>
-          <a:lstStyle/>
-          <a:p>
-            <a:pPr algn="ctr"/>
-            <a:endParaRPr lang="en-IT"/>
-          </a:p>
-        </p:txBody>
-      </p:sp>
-      <p:sp>
-        <p:nvSpPr>
-          <p:cNvPr id="34" name="Rectangle 33">
-            <a:extLst>
-              <a:ext uri="{FF2B5EF4-FFF2-40B4-BE49-F238E27FC236}">
-                <a16:creationId xmlns:a16="http://schemas.microsoft.com/office/drawing/2014/main" id="{8B20CA3D-51F2-484F-9B03-A9633F5E3F42}"/>
-              </a:ext>
-            </a:extLst>
-          </p:cNvPr>
-          <p:cNvSpPr/>
-          <p:nvPr/>
-        </p:nvSpPr>
-        <p:spPr>
-          <a:xfrm>
-            <a:off x="6918536" y="5484578"/>
-            <a:ext cx="348899" cy="282473"/>
-          </a:xfrm>
-          <a:prstGeom prst="rect">
-            <a:avLst/>
-          </a:prstGeom>
-          <a:noFill/>
-        </p:spPr>
-        <p:style>
-          <a:lnRef idx="2">
-            <a:schemeClr val="accent6"/>
-          </a:lnRef>
-          <a:fillRef idx="1">
-            <a:schemeClr val="lt1"/>
-          </a:fillRef>
-          <a:effectRef idx="0">
-            <a:schemeClr val="accent6"/>
-          </a:effectRef>
-          <a:fontRef idx="minor">
-            <a:schemeClr val="dk1"/>
-          </a:fontRef>
-        </p:style>
-        <p:txBody>
-          <a:bodyPr rtlCol="0" anchor="ctr"/>
-          <a:lstStyle/>
-          <a:p>
-            <a:pPr algn="ctr"/>
-            <a:endParaRPr lang="en-IT"/>
-          </a:p>
-        </p:txBody>
-      </p:sp>
-      <p:sp>
-        <p:nvSpPr>
-          <p:cNvPr id="35" name="Rectangle 34">
-            <a:extLst>
-              <a:ext uri="{FF2B5EF4-FFF2-40B4-BE49-F238E27FC236}">
-                <a16:creationId xmlns:a16="http://schemas.microsoft.com/office/drawing/2014/main" id="{88E4FF2A-87B0-ED48-967C-6FBBBD92052F}"/>
-              </a:ext>
-            </a:extLst>
-          </p:cNvPr>
-          <p:cNvSpPr/>
-          <p:nvPr/>
-        </p:nvSpPr>
-        <p:spPr>
-          <a:xfrm>
-            <a:off x="8726262" y="6120512"/>
-            <a:ext cx="348899" cy="282473"/>
-          </a:xfrm>
-          <a:prstGeom prst="rect">
-            <a:avLst/>
-          </a:prstGeom>
-          <a:noFill/>
-        </p:spPr>
-        <p:style>
-          <a:lnRef idx="2">
-            <a:schemeClr val="accent6"/>
-          </a:lnRef>
-          <a:fillRef idx="1">
-            <a:schemeClr val="lt1"/>
-          </a:fillRef>
-          <a:effectRef idx="0">
-            <a:schemeClr val="accent6"/>
-          </a:effectRef>
-          <a:fontRef idx="minor">
-            <a:schemeClr val="dk1"/>
-          </a:fontRef>
-        </p:style>
-        <p:txBody>
-          <a:bodyPr rtlCol="0" anchor="ctr"/>
-          <a:lstStyle/>
-          <a:p>
-            <a:pPr algn="ctr"/>
-            <a:endParaRPr lang="en-IT"/>
-          </a:p>
-        </p:txBody>
-      </p:sp>
-      <p:sp>
-        <p:nvSpPr>
-          <p:cNvPr id="37" name="Rectangle 36">
-            <a:extLst>
-              <a:ext uri="{FF2B5EF4-FFF2-40B4-BE49-F238E27FC236}">
-                <a16:creationId xmlns:a16="http://schemas.microsoft.com/office/drawing/2014/main" id="{16895098-62E8-C041-82F9-E332E566B3CB}"/>
-              </a:ext>
-            </a:extLst>
-          </p:cNvPr>
-          <p:cNvSpPr/>
-          <p:nvPr/>
-        </p:nvSpPr>
-        <p:spPr>
-          <a:xfrm>
-            <a:off x="8426916" y="5564273"/>
-            <a:ext cx="348899" cy="305016"/>
-          </a:xfrm>
-          <a:prstGeom prst="rect">
-            <a:avLst/>
-          </a:prstGeom>
-          <a:noFill/>
-        </p:spPr>
-        <p:style>
-          <a:lnRef idx="2">
-            <a:schemeClr val="accent6"/>
-          </a:lnRef>
-          <a:fillRef idx="1">
-            <a:schemeClr val="lt1"/>
-          </a:fillRef>
-          <a:effectRef idx="0">
-            <a:schemeClr val="accent6"/>
-          </a:effectRef>
-          <a:fontRef idx="minor">
-            <a:schemeClr val="dk1"/>
-          </a:fontRef>
-        </p:style>
-        <p:txBody>
-          <a:bodyPr rtlCol="0" anchor="ctr"/>
-          <a:lstStyle/>
-          <a:p>
-            <a:pPr algn="ctr"/>
-            <a:endParaRPr lang="en-IT"/>
-          </a:p>
-        </p:txBody>
-      </p:sp>
-      <p:sp>
-        <p:nvSpPr>
-          <p:cNvPr id="38" name="Rectangle 37">
-            <a:extLst>
-              <a:ext uri="{FF2B5EF4-FFF2-40B4-BE49-F238E27FC236}">
-                <a16:creationId xmlns:a16="http://schemas.microsoft.com/office/drawing/2014/main" id="{2A498B04-41CF-9E42-8231-EFA0A9145AF7}"/>
-              </a:ext>
-            </a:extLst>
-          </p:cNvPr>
-          <p:cNvSpPr/>
-          <p:nvPr/>
-        </p:nvSpPr>
-        <p:spPr>
-          <a:xfrm>
-            <a:off x="8104673" y="6119272"/>
-            <a:ext cx="348899" cy="282473"/>
-          </a:xfrm>
-          <a:prstGeom prst="rect">
-            <a:avLst/>
-          </a:prstGeom>
-          <a:noFill/>
-        </p:spPr>
-        <p:style>
-          <a:lnRef idx="2">
-            <a:schemeClr val="accent6"/>
-          </a:lnRef>
-          <a:fillRef idx="1">
-            <a:schemeClr val="lt1"/>
-          </a:fillRef>
-          <a:effectRef idx="0">
-            <a:schemeClr val="accent6"/>
-          </a:effectRef>
-          <a:fontRef idx="minor">
-            <a:schemeClr val="dk1"/>
-          </a:fontRef>
-        </p:style>
-        <p:txBody>
-          <a:bodyPr rtlCol="0" anchor="ctr"/>
-          <a:lstStyle/>
-          <a:p>
-            <a:pPr algn="ctr"/>
-            <a:endParaRPr lang="en-IT"/>
+            <a:r>
+              <a:rPr lang="en-IT" sz="2400" dirty="0">
+                <a:latin typeface="Aptos" panose="020B0004020202020204" pitchFamily="34" charset="0"/>
+              </a:rPr>
+              <a:t>List of providers.</a:t>
+            </a:r>
           </a:p>
         </p:txBody>
       </p:sp>
       <p:cxnSp>
         <p:nvCxnSpPr>
-          <p:cNvPr id="40" name="Straight Arrow Connector 39">
-            <a:extLst>
-              <a:ext uri="{FF2B5EF4-FFF2-40B4-BE49-F238E27FC236}">
-                <a16:creationId xmlns:a16="http://schemas.microsoft.com/office/drawing/2014/main" id="{EEE1A2A9-9E71-E540-856F-EC184C65FCF4}"/>
+          <p:cNvPr id="21" name="Straight Arrow Connector 20">
+            <a:extLst>
+              <a:ext uri="{FF2B5EF4-FFF2-40B4-BE49-F238E27FC236}">
+                <a16:creationId xmlns:a16="http://schemas.microsoft.com/office/drawing/2014/main" id="{3D5B8434-1451-9542-BCB3-D1193C8575C7}"/>
               </a:ext>
             </a:extLst>
           </p:cNvPr>
           <p:cNvCxnSpPr>
             <a:cxnSpLocks/>
-            <a:stCxn id="32" idx="2"/>
-            <a:endCxn id="51" idx="1"/>
+            <a:stCxn id="15" idx="1"/>
           </p:cNvCxnSpPr>
           <p:nvPr/>
         </p:nvCxnSpPr>
         <p:spPr>
-          <a:xfrm>
-            <a:off x="7351482" y="5245488"/>
-            <a:ext cx="667473" cy="106440"/>
+          <a:xfrm flipH="1">
+            <a:off x="3357797" y="3353268"/>
+            <a:ext cx="4734077" cy="589145"/>
           </a:xfrm>
           <a:prstGeom prst="straightConnector1">
             <a:avLst/>
@@ -7375,607 +8047,12 @@
           </a:fontRef>
         </p:style>
       </p:cxnSp>
-      <p:cxnSp>
-        <p:nvCxnSpPr>
-          <p:cNvPr id="41" name="Straight Arrow Connector 40">
-            <a:extLst>
-              <a:ext uri="{FF2B5EF4-FFF2-40B4-BE49-F238E27FC236}">
-                <a16:creationId xmlns:a16="http://schemas.microsoft.com/office/drawing/2014/main" id="{05546FED-A595-FE42-B624-547A60370B86}"/>
-              </a:ext>
-            </a:extLst>
-          </p:cNvPr>
-          <p:cNvCxnSpPr>
-            <a:cxnSpLocks/>
-            <a:stCxn id="32" idx="2"/>
-            <a:endCxn id="34" idx="0"/>
-          </p:cNvCxnSpPr>
-          <p:nvPr/>
-        </p:nvCxnSpPr>
-        <p:spPr>
-          <a:xfrm flipH="1">
-            <a:off x="7092986" y="5245488"/>
-            <a:ext cx="258496" cy="239090"/>
-          </a:xfrm>
-          <a:prstGeom prst="straightConnector1">
-            <a:avLst/>
-          </a:prstGeom>
-          <a:ln>
-            <a:tailEnd type="triangle"/>
-          </a:ln>
-        </p:spPr>
-        <p:style>
-          <a:lnRef idx="1">
-            <a:schemeClr val="accent6"/>
-          </a:lnRef>
-          <a:fillRef idx="0">
-            <a:schemeClr val="accent6"/>
-          </a:fillRef>
-          <a:effectRef idx="0">
-            <a:schemeClr val="accent6"/>
-          </a:effectRef>
-          <a:fontRef idx="minor">
-            <a:schemeClr val="tx1"/>
-          </a:fontRef>
-        </p:style>
-      </p:cxnSp>
-      <p:cxnSp>
-        <p:nvCxnSpPr>
-          <p:cNvPr id="42" name="Straight Arrow Connector 41">
-            <a:extLst>
-              <a:ext uri="{FF2B5EF4-FFF2-40B4-BE49-F238E27FC236}">
-                <a16:creationId xmlns:a16="http://schemas.microsoft.com/office/drawing/2014/main" id="{62128583-786E-C740-B197-29B14CC6F4E9}"/>
-              </a:ext>
-            </a:extLst>
-          </p:cNvPr>
-          <p:cNvCxnSpPr>
-            <a:cxnSpLocks/>
-            <a:stCxn id="37" idx="2"/>
-            <a:endCxn id="38" idx="0"/>
-          </p:cNvCxnSpPr>
-          <p:nvPr/>
-        </p:nvCxnSpPr>
-        <p:spPr>
-          <a:xfrm flipH="1">
-            <a:off x="8279123" y="5869289"/>
-            <a:ext cx="322243" cy="249983"/>
-          </a:xfrm>
-          <a:prstGeom prst="straightConnector1">
-            <a:avLst/>
-          </a:prstGeom>
-          <a:ln>
-            <a:tailEnd type="triangle"/>
-          </a:ln>
-        </p:spPr>
-        <p:style>
-          <a:lnRef idx="1">
-            <a:schemeClr val="accent6"/>
-          </a:lnRef>
-          <a:fillRef idx="0">
-            <a:schemeClr val="accent6"/>
-          </a:fillRef>
-          <a:effectRef idx="0">
-            <a:schemeClr val="accent6"/>
-          </a:effectRef>
-          <a:fontRef idx="minor">
-            <a:schemeClr val="tx1"/>
-          </a:fontRef>
-        </p:style>
-      </p:cxnSp>
-      <p:cxnSp>
-        <p:nvCxnSpPr>
-          <p:cNvPr id="44" name="Straight Arrow Connector 43">
-            <a:extLst>
-              <a:ext uri="{FF2B5EF4-FFF2-40B4-BE49-F238E27FC236}">
-                <a16:creationId xmlns:a16="http://schemas.microsoft.com/office/drawing/2014/main" id="{E4636790-1ACF-7A48-9335-D6199B135726}"/>
-              </a:ext>
-            </a:extLst>
-          </p:cNvPr>
-          <p:cNvCxnSpPr>
-            <a:cxnSpLocks/>
-            <a:stCxn id="37" idx="2"/>
-            <a:endCxn id="35" idx="0"/>
-          </p:cNvCxnSpPr>
-          <p:nvPr/>
-        </p:nvCxnSpPr>
-        <p:spPr>
-          <a:xfrm>
-            <a:off x="8601366" y="5869289"/>
-            <a:ext cx="299346" cy="251223"/>
-          </a:xfrm>
-          <a:prstGeom prst="straightConnector1">
-            <a:avLst/>
-          </a:prstGeom>
-          <a:ln>
-            <a:tailEnd type="triangle"/>
-          </a:ln>
-        </p:spPr>
-        <p:style>
-          <a:lnRef idx="1">
-            <a:schemeClr val="accent6"/>
-          </a:lnRef>
-          <a:fillRef idx="0">
-            <a:schemeClr val="accent6"/>
-          </a:fillRef>
-          <a:effectRef idx="0">
-            <a:schemeClr val="accent6"/>
-          </a:effectRef>
-          <a:fontRef idx="minor">
-            <a:schemeClr val="tx1"/>
-          </a:fontRef>
-        </p:style>
-      </p:cxnSp>
-      <p:sp>
-        <p:nvSpPr>
-          <p:cNvPr id="45" name="TextBox 44">
-            <a:extLst>
-              <a:ext uri="{FF2B5EF4-FFF2-40B4-BE49-F238E27FC236}">
-                <a16:creationId xmlns:a16="http://schemas.microsoft.com/office/drawing/2014/main" id="{DFDC46EE-BA82-A84A-8C63-0FE6DDEEDDBA}"/>
-              </a:ext>
-            </a:extLst>
-          </p:cNvPr>
-          <p:cNvSpPr txBox="1"/>
-          <p:nvPr/>
-        </p:nvSpPr>
-        <p:spPr>
-          <a:xfrm>
-            <a:off x="7036225" y="4533619"/>
-            <a:ext cx="1961460" cy="369332"/>
-          </a:xfrm>
-          <a:prstGeom prst="rect">
-            <a:avLst/>
-          </a:prstGeom>
-          <a:noFill/>
-        </p:spPr>
-        <p:txBody>
-          <a:bodyPr wrap="square" rtlCol="0">
-            <a:spAutoFit/>
-          </a:bodyPr>
-          <a:lstStyle/>
-          <a:p>
-            <a:pPr algn="ctr"/>
-            <a:r>
-              <a:rPr lang="en-GB" dirty="0">
-                <a:latin typeface="Palatino Linotype" panose="02040502050505030304" pitchFamily="18" charset="0"/>
-              </a:rPr>
-              <a:t>C</a:t>
-            </a:r>
-            <a:r>
-              <a:rPr lang="en-IT" dirty="0">
-                <a:latin typeface="Palatino Linotype" panose="02040502050505030304" pitchFamily="18" charset="0"/>
-              </a:rPr>
-              <a:t>hild widget tree </a:t>
-            </a:r>
-          </a:p>
-        </p:txBody>
-      </p:sp>
-      <p:pic>
-        <p:nvPicPr>
-          <p:cNvPr id="46" name="Graphic 45" descr="Bell outline">
-            <a:extLst>
-              <a:ext uri="{FF2B5EF4-FFF2-40B4-BE49-F238E27FC236}">
-                <a16:creationId xmlns:a16="http://schemas.microsoft.com/office/drawing/2014/main" id="{957D0E34-866D-654B-B441-327CDA4EC4B0}"/>
-              </a:ext>
-            </a:extLst>
-          </p:cNvPr>
-          <p:cNvPicPr>
-            <a:picLocks noChangeAspect="1"/>
-          </p:cNvPicPr>
-          <p:nvPr/>
-        </p:nvPicPr>
-        <p:blipFill>
-          <a:blip r:embed="rId3">
-            <a:extLst>
-              <a:ext uri="{28A0092B-C50C-407E-A947-70E740481C1C}">
-                <a14:useLocalDpi xmlns:a14="http://schemas.microsoft.com/office/drawing/2010/main" val="0"/>
-              </a:ext>
-              <a:ext uri="{96DAC541-7B7A-43D3-8B79-37D633B846F1}">
-                <asvg:svgBlip xmlns:asvg="http://schemas.microsoft.com/office/drawing/2016/SVG/main" r:embed="rId4"/>
-              </a:ext>
-            </a:extLst>
-          </a:blip>
-          <a:stretch>
-            <a:fillRect/>
-          </a:stretch>
-        </p:blipFill>
-        <p:spPr>
-          <a:xfrm>
-            <a:off x="9055397" y="3740816"/>
-            <a:ext cx="512445" cy="512445"/>
-          </a:xfrm>
-          <a:prstGeom prst="rect">
-            <a:avLst/>
-          </a:prstGeom>
-        </p:spPr>
-      </p:pic>
-      <p:sp>
-        <p:nvSpPr>
-          <p:cNvPr id="47" name="Rectangle 46">
-            <a:extLst>
-              <a:ext uri="{FF2B5EF4-FFF2-40B4-BE49-F238E27FC236}">
-                <a16:creationId xmlns:a16="http://schemas.microsoft.com/office/drawing/2014/main" id="{3BEB9512-370A-2747-AE18-DA13F29FBB8E}"/>
-              </a:ext>
-            </a:extLst>
-          </p:cNvPr>
-          <p:cNvSpPr/>
-          <p:nvPr/>
-        </p:nvSpPr>
-        <p:spPr>
-          <a:xfrm>
-            <a:off x="8949836" y="3714460"/>
-            <a:ext cx="727189" cy="568912"/>
-          </a:xfrm>
-          <a:prstGeom prst="rect">
-            <a:avLst/>
-          </a:prstGeom>
-          <a:noFill/>
-        </p:spPr>
-        <p:style>
-          <a:lnRef idx="2">
-            <a:schemeClr val="accent6"/>
-          </a:lnRef>
-          <a:fillRef idx="1">
-            <a:schemeClr val="lt1"/>
-          </a:fillRef>
-          <a:effectRef idx="0">
-            <a:schemeClr val="accent6"/>
-          </a:effectRef>
-          <a:fontRef idx="minor">
-            <a:schemeClr val="dk1"/>
-          </a:fontRef>
-        </p:style>
-        <p:txBody>
-          <a:bodyPr rtlCol="0" anchor="ctr"/>
-          <a:lstStyle/>
-          <a:p>
-            <a:pPr algn="ctr"/>
-            <a:endParaRPr lang="en-IT"/>
-          </a:p>
-        </p:txBody>
-      </p:sp>
-      <p:sp>
-        <p:nvSpPr>
-          <p:cNvPr id="48" name="Rectangle 47">
-            <a:extLst>
-              <a:ext uri="{FF2B5EF4-FFF2-40B4-BE49-F238E27FC236}">
-                <a16:creationId xmlns:a16="http://schemas.microsoft.com/office/drawing/2014/main" id="{A4D35447-04B8-CE48-B390-EA9816DBD563}"/>
-              </a:ext>
-            </a:extLst>
-          </p:cNvPr>
-          <p:cNvSpPr/>
-          <p:nvPr/>
-        </p:nvSpPr>
-        <p:spPr>
-          <a:xfrm>
-            <a:off x="6772272" y="3740816"/>
-            <a:ext cx="1357060" cy="584775"/>
-          </a:xfrm>
-          <a:prstGeom prst="rect">
-            <a:avLst/>
-          </a:prstGeom>
-        </p:spPr>
-        <p:txBody>
-          <a:bodyPr wrap="square">
-            <a:spAutoFit/>
-          </a:bodyPr>
-          <a:lstStyle/>
-          <a:p>
-            <a:r>
-              <a:rPr lang="en-GB" sz="1600" dirty="0">
-                <a:latin typeface="Palatino Linotype" panose="02040502050505030304" pitchFamily="18" charset="0"/>
-              </a:rPr>
-              <a:t>Inject an instance to</a:t>
-            </a:r>
-            <a:endParaRPr lang="en-IT" sz="1600" dirty="0">
-              <a:latin typeface="Palatino Linotype" panose="02040502050505030304" pitchFamily="18" charset="0"/>
-            </a:endParaRPr>
-          </a:p>
-        </p:txBody>
-      </p:sp>
-      <p:cxnSp>
-        <p:nvCxnSpPr>
-          <p:cNvPr id="49" name="Elbow Connector 48">
-            <a:extLst>
-              <a:ext uri="{FF2B5EF4-FFF2-40B4-BE49-F238E27FC236}">
-                <a16:creationId xmlns:a16="http://schemas.microsoft.com/office/drawing/2014/main" id="{995D4FF0-CF7C-144A-8AA9-703C2521D235}"/>
-              </a:ext>
-            </a:extLst>
-          </p:cNvPr>
-          <p:cNvCxnSpPr>
-            <a:cxnSpLocks/>
-            <a:stCxn id="47" idx="1"/>
-            <a:endCxn id="31" idx="0"/>
-          </p:cNvCxnSpPr>
-          <p:nvPr/>
-        </p:nvCxnSpPr>
-        <p:spPr>
-          <a:xfrm rot="10800000" flipV="1">
-            <a:off x="8153228" y="3998915"/>
-            <a:ext cx="796609" cy="452337"/>
-          </a:xfrm>
-          <a:prstGeom prst="bentConnector2">
-            <a:avLst/>
-          </a:prstGeom>
-          <a:ln>
-            <a:tailEnd type="triangle"/>
-          </a:ln>
-        </p:spPr>
-        <p:style>
-          <a:lnRef idx="1">
-            <a:schemeClr val="accent6"/>
-          </a:lnRef>
-          <a:fillRef idx="0">
-            <a:schemeClr val="accent6"/>
-          </a:fillRef>
-          <a:effectRef idx="0">
-            <a:schemeClr val="accent6"/>
-          </a:effectRef>
-          <a:fontRef idx="minor">
-            <a:schemeClr val="tx1"/>
-          </a:fontRef>
-        </p:style>
-      </p:cxnSp>
-      <p:cxnSp>
-        <p:nvCxnSpPr>
-          <p:cNvPr id="50" name="Elbow Connector 49">
-            <a:extLst>
-              <a:ext uri="{FF2B5EF4-FFF2-40B4-BE49-F238E27FC236}">
-                <a16:creationId xmlns:a16="http://schemas.microsoft.com/office/drawing/2014/main" id="{4ECEB6BB-98BF-6B47-A5D5-F167186A05BF}"/>
-              </a:ext>
-            </a:extLst>
-          </p:cNvPr>
-          <p:cNvCxnSpPr>
-            <a:cxnSpLocks/>
-            <a:endCxn id="47" idx="3"/>
-          </p:cNvCxnSpPr>
-          <p:nvPr/>
-        </p:nvCxnSpPr>
-        <p:spPr>
-          <a:xfrm rot="5400000">
-            <a:off x="9619763" y="2718715"/>
-            <a:ext cx="1337463" cy="1222938"/>
-          </a:xfrm>
-          <a:prstGeom prst="bentConnector2">
-            <a:avLst/>
-          </a:prstGeom>
-          <a:ln>
-            <a:tailEnd type="triangle"/>
-          </a:ln>
-        </p:spPr>
-        <p:style>
-          <a:lnRef idx="1">
-            <a:schemeClr val="accent6"/>
-          </a:lnRef>
-          <a:fillRef idx="0">
-            <a:schemeClr val="accent6"/>
-          </a:fillRef>
-          <a:effectRef idx="0">
-            <a:schemeClr val="accent6"/>
-          </a:effectRef>
-          <a:fontRef idx="minor">
-            <a:schemeClr val="tx1"/>
-          </a:fontRef>
-        </p:style>
-      </p:cxnSp>
-      <p:sp>
-        <p:nvSpPr>
-          <p:cNvPr id="51" name="Rectangle 50">
-            <a:extLst>
-              <a:ext uri="{FF2B5EF4-FFF2-40B4-BE49-F238E27FC236}">
-                <a16:creationId xmlns:a16="http://schemas.microsoft.com/office/drawing/2014/main" id="{833B8466-9178-3741-BAE3-6D71C8EE8F51}"/>
-              </a:ext>
-            </a:extLst>
-          </p:cNvPr>
-          <p:cNvSpPr/>
-          <p:nvPr/>
-        </p:nvSpPr>
-        <p:spPr>
-          <a:xfrm>
-            <a:off x="8018955" y="5182651"/>
-            <a:ext cx="1170015" cy="338554"/>
-          </a:xfrm>
-          <a:prstGeom prst="rect">
-            <a:avLst/>
-          </a:prstGeom>
-        </p:spPr>
-        <p:txBody>
-          <a:bodyPr wrap="square">
-            <a:spAutoFit/>
-          </a:bodyPr>
-          <a:lstStyle/>
-          <a:p>
-            <a:r>
-              <a:rPr lang="en-GB" sz="1600" dirty="0">
-                <a:latin typeface="Courier" pitchFamily="2" charset="0"/>
-              </a:rPr>
-              <a:t>Consumer</a:t>
-            </a:r>
-            <a:endParaRPr lang="en-IT" sz="1600" dirty="0">
-              <a:latin typeface="Courier" pitchFamily="2" charset="0"/>
-            </a:endParaRPr>
-          </a:p>
-        </p:txBody>
-      </p:sp>
-      <p:cxnSp>
-        <p:nvCxnSpPr>
-          <p:cNvPr id="52" name="Elbow Connector 51">
-            <a:extLst>
-              <a:ext uri="{FF2B5EF4-FFF2-40B4-BE49-F238E27FC236}">
-                <a16:creationId xmlns:a16="http://schemas.microsoft.com/office/drawing/2014/main" id="{C89D5534-B274-3842-9AD4-6B535139EDD8}"/>
-              </a:ext>
-            </a:extLst>
-          </p:cNvPr>
-          <p:cNvCxnSpPr>
-            <a:cxnSpLocks/>
-            <a:endCxn id="17" idx="0"/>
-          </p:cNvCxnSpPr>
-          <p:nvPr/>
-        </p:nvCxnSpPr>
-        <p:spPr>
-          <a:xfrm rot="5400000">
-            <a:off x="10123019" y="3741281"/>
-            <a:ext cx="1856776" cy="1917"/>
-          </a:xfrm>
-          <a:prstGeom prst="bentConnector3">
-            <a:avLst>
-              <a:gd name="adj1" fmla="val 50000"/>
-            </a:avLst>
-          </a:prstGeom>
-          <a:ln>
-            <a:tailEnd type="triangle"/>
-          </a:ln>
-        </p:spPr>
-        <p:style>
-          <a:lnRef idx="1">
-            <a:schemeClr val="accent6"/>
-          </a:lnRef>
-          <a:fillRef idx="0">
-            <a:schemeClr val="accent6"/>
-          </a:fillRef>
-          <a:effectRef idx="0">
-            <a:schemeClr val="accent6"/>
-          </a:effectRef>
-          <a:fontRef idx="minor">
-            <a:schemeClr val="tx1"/>
-          </a:fontRef>
-        </p:style>
-      </p:cxnSp>
-      <p:sp>
-        <p:nvSpPr>
-          <p:cNvPr id="89" name="Rectangle 88">
-            <a:extLst>
-              <a:ext uri="{FF2B5EF4-FFF2-40B4-BE49-F238E27FC236}">
-                <a16:creationId xmlns:a16="http://schemas.microsoft.com/office/drawing/2014/main" id="{699AF843-0517-7842-8BD0-AC356B180D49}"/>
-              </a:ext>
-            </a:extLst>
-          </p:cNvPr>
-          <p:cNvSpPr/>
-          <p:nvPr/>
-        </p:nvSpPr>
-        <p:spPr>
-          <a:xfrm>
-            <a:off x="8034815" y="5170315"/>
-            <a:ext cx="1213557" cy="1324756"/>
-          </a:xfrm>
-          <a:prstGeom prst="rect">
-            <a:avLst/>
-          </a:prstGeom>
-          <a:noFill/>
-        </p:spPr>
-        <p:style>
-          <a:lnRef idx="2">
-            <a:schemeClr val="accent6"/>
-          </a:lnRef>
-          <a:fillRef idx="1">
-            <a:schemeClr val="lt1"/>
-          </a:fillRef>
-          <a:effectRef idx="0">
-            <a:schemeClr val="accent6"/>
-          </a:effectRef>
-          <a:fontRef idx="minor">
-            <a:schemeClr val="dk1"/>
-          </a:fontRef>
-        </p:style>
-        <p:txBody>
-          <a:bodyPr rtlCol="0" anchor="ctr"/>
-          <a:lstStyle/>
-          <a:p>
-            <a:pPr algn="ctr"/>
-            <a:endParaRPr lang="en-IT"/>
-          </a:p>
-        </p:txBody>
-      </p:sp>
-      <p:cxnSp>
-        <p:nvCxnSpPr>
-          <p:cNvPr id="94" name="Straight Arrow Connector 93">
-            <a:extLst>
-              <a:ext uri="{FF2B5EF4-FFF2-40B4-BE49-F238E27FC236}">
-                <a16:creationId xmlns:a16="http://schemas.microsoft.com/office/drawing/2014/main" id="{14171B37-1BAF-E847-8A9F-13DDD5951959}"/>
-              </a:ext>
-            </a:extLst>
-          </p:cNvPr>
-          <p:cNvCxnSpPr>
-            <a:cxnSpLocks/>
-            <a:stCxn id="18" idx="1"/>
-            <a:endCxn id="89" idx="3"/>
-          </p:cNvCxnSpPr>
-          <p:nvPr/>
-        </p:nvCxnSpPr>
-        <p:spPr>
-          <a:xfrm flipH="1" flipV="1">
-            <a:off x="9248372" y="5832693"/>
-            <a:ext cx="949487" cy="10089"/>
-          </a:xfrm>
-          <a:prstGeom prst="straightConnector1">
-            <a:avLst/>
-          </a:prstGeom>
-          <a:ln>
-            <a:tailEnd type="triangle"/>
-          </a:ln>
-        </p:spPr>
-        <p:style>
-          <a:lnRef idx="1">
-            <a:schemeClr val="accent6"/>
-          </a:lnRef>
-          <a:fillRef idx="0">
-            <a:schemeClr val="accent6"/>
-          </a:fillRef>
-          <a:effectRef idx="0">
-            <a:schemeClr val="accent6"/>
-          </a:effectRef>
-          <a:fontRef idx="minor">
-            <a:schemeClr val="tx1"/>
-          </a:fontRef>
-        </p:style>
-      </p:cxnSp>
-      <p:cxnSp>
-        <p:nvCxnSpPr>
-          <p:cNvPr id="99" name="Straight Arrow Connector 98">
-            <a:extLst>
-              <a:ext uri="{FF2B5EF4-FFF2-40B4-BE49-F238E27FC236}">
-                <a16:creationId xmlns:a16="http://schemas.microsoft.com/office/drawing/2014/main" id="{E4EA29F2-86DD-5B4E-B5D7-1BC40D33D8C5}"/>
-              </a:ext>
-            </a:extLst>
-          </p:cNvPr>
-          <p:cNvCxnSpPr>
-            <a:cxnSpLocks/>
-            <a:stCxn id="17" idx="2"/>
-            <a:endCxn id="18" idx="0"/>
-          </p:cNvCxnSpPr>
-          <p:nvPr/>
-        </p:nvCxnSpPr>
-        <p:spPr>
-          <a:xfrm flipH="1">
-            <a:off x="11050447" y="5255402"/>
-            <a:ext cx="1" cy="264214"/>
-          </a:xfrm>
-          <a:prstGeom prst="straightConnector1">
-            <a:avLst/>
-          </a:prstGeom>
-          <a:ln>
-            <a:tailEnd type="triangle"/>
-          </a:ln>
-        </p:spPr>
-        <p:style>
-          <a:lnRef idx="1">
-            <a:schemeClr val="accent6"/>
-          </a:lnRef>
-          <a:fillRef idx="0">
-            <a:schemeClr val="accent6"/>
-          </a:fillRef>
-          <a:effectRef idx="0">
-            <a:schemeClr val="accent6"/>
-          </a:effectRef>
-          <a:fontRef idx="minor">
-            <a:schemeClr val="tx1"/>
-          </a:fontRef>
-        </p:style>
-      </p:cxnSp>
       <p:sp>
         <p:nvSpPr>
           <p:cNvPr id="3" name="Slide Number Placeholder 2">
             <a:extLst>
               <a:ext uri="{FF2B5EF4-FFF2-40B4-BE49-F238E27FC236}">
-                <a16:creationId xmlns:a16="http://schemas.microsoft.com/office/drawing/2014/main" id="{EEE3CC18-2D47-F945-B89B-ACEE8C1E8A95}"/>
+                <a16:creationId xmlns:a16="http://schemas.microsoft.com/office/drawing/2014/main" id="{51B29569-E2F1-9B4F-9A21-B0C98135DF83}"/>
               </a:ext>
             </a:extLst>
           </p:cNvPr>
@@ -8002,7 +8079,7 @@
     </p:spTree>
     <p:extLst>
       <p:ext uri="{BB962C8B-B14F-4D97-AF65-F5344CB8AC3E}">
-        <p14:creationId xmlns:p14="http://schemas.microsoft.com/office/powerpoint/2010/main" val="3496802827"/>
+        <p14:creationId xmlns:p14="http://schemas.microsoft.com/office/powerpoint/2010/main" val="2681709705"/>
       </p:ext>
     </p:extLst>
   </p:cSld>
@@ -8233,7 +8310,7 @@
         <p:spPr>
           <a:xfrm>
             <a:off x="7353072" y="4670627"/>
-            <a:ext cx="2283105" cy="584775"/>
+            <a:ext cx="2283105" cy="615553"/>
           </a:xfrm>
           <a:prstGeom prst="rect">
             <a:avLst/>
@@ -8251,11 +8328,17 @@
               <a:rPr lang="en-IT" sz="1600" dirty="0">
                 <a:latin typeface="Courier" pitchFamily="2" charset="0"/>
               </a:rPr>
-              <a:t>notifyListeners() </a:t>
-            </a:r>
-            <a:r>
-              <a:rPr lang="en-IT" sz="1600" dirty="0">
-                <a:latin typeface="Palatino Linotype" panose="02040502050505030304" pitchFamily="18" charset="0"/>
+              <a:t>notifyListeners</a:t>
+            </a:r>
+            <a:r>
+              <a:rPr lang="en-IT" sz="1600">
+                <a:latin typeface="Courier" pitchFamily="2" charset="0"/>
+              </a:rPr>
+              <a:t>() </a:t>
+            </a:r>
+            <a:r>
+              <a:rPr lang="en-IT" dirty="0">
+                <a:latin typeface="Aptos" panose="020B0004020202020204" pitchFamily="34" charset="0"/>
               </a:rPr>
               <a:t>is called</a:t>
             </a:r>
@@ -8292,23 +8375,32 @@
           <a:p>
             <a:pPr algn="ctr"/>
             <a:r>
-              <a:rPr lang="en-IT" dirty="0">
+              <a:rPr lang="en-IT">
+                <a:latin typeface="Aptos" panose="020B0004020202020204" pitchFamily="34" charset="0"/>
+              </a:rPr>
+              <a:t>Call</a:t>
+            </a:r>
+            <a:r>
+              <a:rPr lang="en-IT">
                 <a:latin typeface="Palatino Linotype" panose="02040502050505030304" pitchFamily="18" charset="0"/>
               </a:rPr>
-              <a:t>Call </a:t>
-            </a:r>
-            <a:r>
-              <a:rPr lang="en-IT" dirty="0">
+              <a:t> </a:t>
+            </a:r>
+            <a:r>
+              <a:rPr lang="en-IT">
                 <a:latin typeface="Courier" pitchFamily="2" charset="0"/>
               </a:rPr>
               <a:t>builder </a:t>
             </a:r>
             <a:r>
-              <a:rPr lang="en-IT" dirty="0">
-                <a:latin typeface="Palatino Linotype" panose="02040502050505030304" pitchFamily="18" charset="0"/>
+              <a:rPr lang="en-IT">
+                <a:latin typeface="Aptos" panose="020B0004020202020204" pitchFamily="34" charset="0"/>
               </a:rPr>
               <a:t>method</a:t>
             </a:r>
+            <a:endParaRPr lang="en-IT" dirty="0">
+              <a:latin typeface="Aptos" panose="020B0004020202020204" pitchFamily="34" charset="0"/>
+            </a:endParaRPr>
           </a:p>
         </p:txBody>
       </p:sp>
@@ -8860,25 +8952,28 @@
           <a:prstGeom prst="rect">
             <a:avLst/>
           </a:prstGeom>
-          <a:noFill/>
-        </p:spPr>
-        <p:txBody>
-          <a:bodyPr wrap="square" rtlCol="0">
+        </p:spPr>
+        <p:txBody>
+          <a:bodyPr wrap="square">
             <a:spAutoFit/>
           </a:bodyPr>
-          <a:lstStyle/>
-          <a:p>
-            <a:pPr algn="ctr"/>
-            <a:r>
-              <a:rPr lang="en-GB" dirty="0">
-                <a:latin typeface="Palatino Linotype" panose="02040502050505030304" pitchFamily="18" charset="0"/>
-              </a:rPr>
+          <a:lstStyle>
+            <a:defPPr>
+              <a:defRPr lang="en-US"/>
+            </a:defPPr>
+            <a:lvl1pPr>
+              <a:defRPr sz="1600">
+                <a:latin typeface="Aptos" panose="020B0004020202020204" pitchFamily="34" charset="0"/>
+              </a:defRPr>
+            </a:lvl1pPr>
+          </a:lstStyle>
+          <a:p>
+            <a:r>
+              <a:rPr lang="en-GB"/>
               <a:t>C</a:t>
             </a:r>
             <a:r>
-              <a:rPr lang="en-IT" dirty="0">
-                <a:latin typeface="Palatino Linotype" panose="02040502050505030304" pitchFamily="18" charset="0"/>
-              </a:rPr>
+              <a:rPr lang="en-IT" dirty="0"/>
               <a:t>hild widget tree </a:t>
             </a:r>
           </a:p>
@@ -8997,12 +9092,12 @@
           <a:p>
             <a:r>
               <a:rPr lang="en-GB" sz="1600" dirty="0">
-                <a:latin typeface="Palatino Linotype" panose="02040502050505030304" pitchFamily="18" charset="0"/>
+                <a:latin typeface="Aptos" panose="020B0004020202020204" pitchFamily="34" charset="0"/>
               </a:rPr>
               <a:t>Inject an instance to</a:t>
             </a:r>
             <a:endParaRPr lang="en-IT" sz="1600" dirty="0">
-              <a:latin typeface="Palatino Linotype" panose="02040502050505030304" pitchFamily="18" charset="0"/>
+              <a:latin typeface="Aptos" panose="020B0004020202020204" pitchFamily="34" charset="0"/>
             </a:endParaRPr>
           </a:p>
         </p:txBody>
@@ -9149,8 +9244,8 @@
         </p:nvCxnSpPr>
         <p:spPr>
           <a:xfrm rot="5400000">
-            <a:off x="7540901" y="3716902"/>
-            <a:ext cx="1907450" cy="1"/>
+            <a:off x="7540902" y="3716901"/>
+            <a:ext cx="1907449" cy="2"/>
           </a:xfrm>
           <a:prstGeom prst="bentConnector3">
             <a:avLst>
@@ -9282,8 +9377,8 @@
         </p:nvCxnSpPr>
         <p:spPr>
           <a:xfrm flipH="1">
-            <a:off x="8494624" y="5255402"/>
-            <a:ext cx="1" cy="264214"/>
+            <a:off x="8494624" y="5286180"/>
+            <a:ext cx="1" cy="233436"/>
           </a:xfrm>
           <a:prstGeom prst="straightConnector1">
             <a:avLst/>
@@ -9452,18 +9547,6 @@
             </a:r>
           </a:p>
           <a:p>
-            <a:r>
-              <a:rPr lang="en-GB" dirty="0">
-                <a:solidFill>
-                  <a:schemeClr val="bg2">
-                    <a:lumMod val="90000"/>
-                  </a:schemeClr>
-                </a:solidFill>
-              </a:rPr>
-              <a:t>Other Provider classes</a:t>
-            </a:r>
-          </a:p>
-          <a:p>
             <a:endParaRPr lang="en-GB" dirty="0">
               <a:solidFill>
                 <a:schemeClr val="bg2">
@@ -9722,7 +9805,7 @@
           <a:p>
             <a:r>
               <a:rPr lang="en-IT" dirty="0">
-                <a:latin typeface="Palatino Linotype" panose="02040502050505030304" pitchFamily="18" charset="0"/>
+                <a:latin typeface="Aptos" panose="020B0004020202020204" pitchFamily="34" charset="0"/>
               </a:rPr>
               <a:t>Contains</a:t>
             </a:r>
@@ -10027,7 +10110,7 @@
         <p:spPr>
           <a:xfrm>
             <a:off x="3839547" y="5939878"/>
-            <a:ext cx="2662908" cy="369332"/>
+            <a:ext cx="2548903" cy="369332"/>
           </a:xfrm>
           <a:prstGeom prst="rect">
             <a:avLst/>
@@ -10041,7 +10124,7 @@
           <a:p>
             <a:r>
               <a:rPr lang="en-IT" dirty="0">
-                <a:latin typeface="Palatino Linotype" panose="02040502050505030304" pitchFamily="18" charset="0"/>
+                <a:latin typeface="Aptos" panose="020B0004020202020204" pitchFamily="34" charset="0"/>
               </a:rPr>
               <a:t>User chooses a product</a:t>
             </a:r>
@@ -10077,7 +10160,7 @@
           <a:p>
             <a:r>
               <a:rPr lang="en-IT" dirty="0">
-                <a:latin typeface="Palatino Linotype" panose="02040502050505030304" pitchFamily="18" charset="0"/>
+                <a:latin typeface="Aptos" panose="020B0004020202020204" pitchFamily="34" charset="0"/>
               </a:rPr>
               <a:t>Visualizes/Clears</a:t>
             </a:r>
@@ -10284,18 +10367,6 @@
             </a:r>
           </a:p>
           <a:p>
-            <a:r>
-              <a:rPr lang="en-GB" dirty="0">
-                <a:solidFill>
-                  <a:schemeClr val="bg2">
-                    <a:lumMod val="90000"/>
-                  </a:schemeClr>
-                </a:solidFill>
-              </a:rPr>
-              <a:t>Other Provider classes</a:t>
-            </a:r>
-          </a:p>
-          <a:p>
             <a:endParaRPr lang="en-GB" dirty="0">
               <a:solidFill>
                 <a:schemeClr val="bg2">
@@ -10554,7 +10625,7 @@
           <a:p>
             <a:r>
               <a:rPr lang="en-IT" sz="2400" dirty="0">
-                <a:latin typeface="Palatino Linotype" panose="02040502050505030304" pitchFamily="18" charset="0"/>
+                <a:latin typeface="Aptos" panose="020B0004020202020204" pitchFamily="34" charset="0"/>
               </a:rPr>
               <a:t>To visualize the </a:t>
             </a:r>
@@ -10994,7 +11065,7 @@
           <a:p>
             <a:r>
               <a:rPr lang="en-IT" sz="2400" dirty="0">
-                <a:latin typeface="Palatino Linotype" panose="02040502050505030304" pitchFamily="18" charset="0"/>
+                <a:latin typeface="Aptos" panose="020B0004020202020204" pitchFamily="34" charset="0"/>
               </a:rPr>
               <a:t>To visualize the number of items in the </a:t>
             </a:r>
@@ -12108,11 +12179,14 @@
               <a:rPr lang="en-IT" sz="2400" dirty="0">
                 <a:latin typeface="Palatino Linotype" panose="02040502050505030304" pitchFamily="18" charset="0"/>
               </a:rPr>
-              <a:t> is injected through the tree. </a:t>
-            </a:r>
-            <a:endParaRPr lang="en-IT" sz="2400" dirty="0">
-              <a:latin typeface="Courier" pitchFamily="2" charset="0"/>
-            </a:endParaRPr>
+              <a:t> </a:t>
+            </a:r>
+            <a:r>
+              <a:rPr lang="en-IT" sz="2400" dirty="0">
+                <a:latin typeface="Aptos" panose="020B0004020202020204" pitchFamily="34" charset="0"/>
+              </a:rPr>
+              <a:t>is injected through the tree. </a:t>
+            </a:r>
           </a:p>
         </p:txBody>
       </p:sp>
@@ -12153,7 +12227,13 @@
               <a:rPr lang="en-IT" sz="2400" dirty="0">
                 <a:latin typeface="Palatino Linotype" panose="02040502050505030304" pitchFamily="18" charset="0"/>
               </a:rPr>
-              <a:t> is just a variable of </a:t>
+              <a:t> </a:t>
+            </a:r>
+            <a:r>
+              <a:rPr lang="en-IT" sz="2400" dirty="0">
+                <a:latin typeface="Aptos" panose="020B0004020202020204" pitchFamily="34" charset="0"/>
+              </a:rPr>
+              <a:t>is just a variable of </a:t>
             </a:r>
             <a:r>
               <a:rPr lang="en-IT" sz="2400" dirty="0">
@@ -12826,12 +12906,6 @@
             </a:r>
           </a:p>
           <a:p>
-            <a:r>
-              <a:rPr lang="en-GB" b="1" dirty="0"/>
-              <a:t>Other Provider classes</a:t>
-            </a:r>
-          </a:p>
-          <a:p>
             <a:endParaRPr lang="en-GB" dirty="0">
               <a:solidFill>
                 <a:schemeClr val="bg2">
@@ -12842,6 +12916,12 @@
           </a:p>
           <a:p>
             <a:r>
+              <a:rPr lang="en-GB" b="1" dirty="0"/>
+              <a:t>Exercise</a:t>
+            </a:r>
+          </a:p>
+          <a:p>
+            <a:r>
               <a:rPr lang="en-GB" dirty="0">
                 <a:solidFill>
                   <a:schemeClr val="bg2">
@@ -12849,7 +12929,7 @@
                   </a:schemeClr>
                 </a:solidFill>
               </a:rPr>
-              <a:t>Exercise</a:t>
+              <a:t>Homework</a:t>
             </a:r>
           </a:p>
           <a:p>
@@ -12861,18 +12941,6 @@
                   </a:schemeClr>
                 </a:solidFill>
               </a:rPr>
-              <a:t>Homework</a:t>
-            </a:r>
-          </a:p>
-          <a:p>
-            <a:r>
-              <a:rPr lang="en-GB" dirty="0">
-                <a:solidFill>
-                  <a:schemeClr val="bg2">
-                    <a:lumMod val="90000"/>
-                  </a:schemeClr>
-                </a:solidFill>
-              </a:rPr>
               <a:t>Resources</a:t>
             </a:r>
           </a:p>
@@ -12886,7 +12954,7 @@
           <p:cNvPr id="4" name="Slide Number Placeholder 3">
             <a:extLst>
               <a:ext uri="{FF2B5EF4-FFF2-40B4-BE49-F238E27FC236}">
-                <a16:creationId xmlns:a16="http://schemas.microsoft.com/office/drawing/2014/main" id="{B6F9D6CC-CC02-9045-8A89-73B8E6AACA2F}"/>
+                <a16:creationId xmlns:a16="http://schemas.microsoft.com/office/drawing/2014/main" id="{B750B37B-AE23-2C4B-BF29-10DE9A83E5C5}"/>
               </a:ext>
             </a:extLst>
           </p:cNvPr>
@@ -12913,7 +12981,7 @@
     </p:spTree>
     <p:extLst>
       <p:ext uri="{BB962C8B-B14F-4D97-AF65-F5344CB8AC3E}">
-        <p14:creationId xmlns:p14="http://schemas.microsoft.com/office/powerpoint/2010/main" val="2529840399"/>
+        <p14:creationId xmlns:p14="http://schemas.microsoft.com/office/powerpoint/2010/main" val="1349122538"/>
       </p:ext>
     </p:extLst>
   </p:cSld>
@@ -12963,17 +13031,17 @@
           <a:p>
             <a:r>
               <a:rPr lang="en-IT" dirty="0"/>
-              <a:t>Provider classes </a:t>
-            </a:r>
-          </a:p>
-        </p:txBody>
-      </p:sp>
-      <p:sp>
-        <p:nvSpPr>
-          <p:cNvPr id="6" name="Content Placeholder 5">
-            <a:extLst>
-              <a:ext uri="{FF2B5EF4-FFF2-40B4-BE49-F238E27FC236}">
-                <a16:creationId xmlns:a16="http://schemas.microsoft.com/office/drawing/2014/main" id="{1CFD16F6-AE87-6245-A265-931E7A6676CD}"/>
+              <a:t>Exercise</a:t>
+            </a:r>
+          </a:p>
+        </p:txBody>
+      </p:sp>
+      <p:sp>
+        <p:nvSpPr>
+          <p:cNvPr id="3" name="Content Placeholder 2">
+            <a:extLst>
+              <a:ext uri="{FF2B5EF4-FFF2-40B4-BE49-F238E27FC236}">
+                <a16:creationId xmlns:a16="http://schemas.microsoft.com/office/drawing/2014/main" id="{8962CCAC-9D70-C543-BBE0-822B6CB5F5CB}"/>
               </a:ext>
             </a:extLst>
           </p:cNvPr>
@@ -12987,7 +13055,7 @@
         <p:spPr>
           <a:xfrm>
             <a:off x="428172" y="1361167"/>
-            <a:ext cx="10807518" cy="5153933"/>
+            <a:ext cx="10814451" cy="5334907"/>
           </a:xfrm>
         </p:spPr>
         <p:txBody>
@@ -12997,128 +13065,68 @@
           <a:lstStyle/>
           <a:p>
             <a:r>
-              <a:rPr lang="en-IT" dirty="0"/>
-              <a:t>Provider implement a set of classes, here’s the most important:</a:t>
-            </a:r>
+              <a:rPr lang="en-GB" dirty="0"/>
+              <a:t>Exercise 07.01</a:t>
+            </a:r>
+          </a:p>
+          <a:p>
+            <a:endParaRPr lang="en-GB" dirty="0"/>
           </a:p>
           <a:p>
             <a:pPr lvl="1"/>
-            <a:endParaRPr lang="en-IT" dirty="0"/>
+            <a:r>
+              <a:rPr lang="en-US" dirty="0"/>
+              <a:t>Create a new project ‘</a:t>
+            </a:r>
+            <a:r>
+              <a:rPr lang="en-US" dirty="0" err="1"/>
+              <a:t>meal_manager</a:t>
+            </a:r>
+            <a:r>
+              <a:rPr lang="en-US" dirty="0"/>
+              <a:t>’, an app that stores the meal intakes of a user in terms of carbohydrate content and meal timing. </a:t>
+            </a:r>
           </a:p>
           <a:p>
             <a:pPr lvl="1"/>
-            <a:r>
-              <a:rPr lang="en-IT" dirty="0">
-                <a:latin typeface="Courier" pitchFamily="2" charset="0"/>
-                <a:cs typeface="Courier New" panose="02070309020205020404" pitchFamily="49" charset="0"/>
-              </a:rPr>
-              <a:t>ChangeNotifier</a:t>
-            </a:r>
+            <a:endParaRPr lang="en-US" dirty="0"/>
           </a:p>
           <a:p>
             <a:pPr lvl="1"/>
-            <a:endParaRPr lang="en-IT" dirty="0">
-              <a:latin typeface="Courier" pitchFamily="2" charset="0"/>
-              <a:cs typeface="Courier New" panose="02070309020205020404" pitchFamily="49" charset="0"/>
-            </a:endParaRPr>
-          </a:p>
-          <a:p>
-            <a:pPr lvl="1"/>
-            <a:r>
-              <a:rPr lang="en-IT" dirty="0">
-                <a:latin typeface="Courier" pitchFamily="2" charset="0"/>
-                <a:cs typeface="Courier New" panose="02070309020205020404" pitchFamily="49" charset="0"/>
-              </a:rPr>
-              <a:t>ChangeNotifierProvider</a:t>
-            </a:r>
-          </a:p>
-          <a:p>
-            <a:pPr lvl="1"/>
-            <a:endParaRPr lang="en-IT" dirty="0">
-              <a:latin typeface="Courier" pitchFamily="2" charset="0"/>
-              <a:cs typeface="Courier New" panose="02070309020205020404" pitchFamily="49" charset="0"/>
-            </a:endParaRPr>
-          </a:p>
-          <a:p>
-            <a:pPr lvl="1"/>
-            <a:r>
-              <a:rPr lang="en-IT" dirty="0">
-                <a:latin typeface="Courier" pitchFamily="2" charset="0"/>
-                <a:cs typeface="Courier New" panose="02070309020205020404" pitchFamily="49" charset="0"/>
-              </a:rPr>
-              <a:t>Consumer</a:t>
-            </a:r>
-          </a:p>
-          <a:p>
-            <a:pPr lvl="1"/>
-            <a:endParaRPr lang="en-IT" dirty="0">
-              <a:latin typeface="Courier" pitchFamily="2" charset="0"/>
-              <a:cs typeface="Courier New" panose="02070309020205020404" pitchFamily="49" charset="0"/>
-            </a:endParaRPr>
-          </a:p>
-          <a:p>
-            <a:pPr lvl="1"/>
-            <a:r>
-              <a:rPr lang="en-IT" b="1" dirty="0">
-                <a:latin typeface="Courier" pitchFamily="2" charset="0"/>
-                <a:cs typeface="Courier New" panose="02070309020205020404" pitchFamily="49" charset="0"/>
-              </a:rPr>
-              <a:t>FutureProvider/StreamProvider</a:t>
-            </a:r>
-          </a:p>
-          <a:p>
-            <a:pPr lvl="1"/>
-            <a:endParaRPr lang="en-IT" b="1" dirty="0">
-              <a:latin typeface="Courier" pitchFamily="2" charset="0"/>
-              <a:cs typeface="Courier New" panose="02070309020205020404" pitchFamily="49" charset="0"/>
-            </a:endParaRPr>
-          </a:p>
-          <a:p>
-            <a:pPr lvl="1"/>
-            <a:r>
-              <a:rPr lang="en-IT" b="1" dirty="0">
-                <a:latin typeface="Courier" pitchFamily="2" charset="0"/>
-                <a:cs typeface="Courier New" panose="02070309020205020404" pitchFamily="49" charset="0"/>
-              </a:rPr>
-              <a:t>MultiProvider</a:t>
-            </a:r>
-          </a:p>
-          <a:p>
-            <a:pPr lvl="1"/>
-            <a:endParaRPr lang="en-IT" b="1" dirty="0">
-              <a:latin typeface="Courier" pitchFamily="2" charset="0"/>
-              <a:cs typeface="Courier New" panose="02070309020205020404" pitchFamily="49" charset="0"/>
-            </a:endParaRPr>
-          </a:p>
-          <a:p>
-            <a:pPr lvl="1"/>
-            <a:r>
-              <a:rPr lang="en-IT" b="1" dirty="0">
-                <a:latin typeface="Courier" pitchFamily="2" charset="0"/>
-                <a:cs typeface="Courier New" panose="02070309020205020404" pitchFamily="49" charset="0"/>
-              </a:rPr>
-              <a:t>ProxyProvider</a:t>
-            </a:r>
-          </a:p>
-          <a:p>
-            <a:pPr lvl="1"/>
-            <a:endParaRPr lang="en-IT" dirty="0"/>
-          </a:p>
-          <a:p>
-            <a:pPr lvl="1"/>
-            <a:endParaRPr lang="en-IT" dirty="0"/>
-          </a:p>
-          <a:p>
-            <a:endParaRPr lang="en-IT" dirty="0"/>
-          </a:p>
-        </p:txBody>
-      </p:sp>
-      <p:sp>
-        <p:nvSpPr>
-          <p:cNvPr id="3" name="Slide Number Placeholder 2">
-            <a:extLst>
-              <a:ext uri="{FF2B5EF4-FFF2-40B4-BE49-F238E27FC236}">
-                <a16:creationId xmlns:a16="http://schemas.microsoft.com/office/drawing/2014/main" id="{8F89A86F-0401-834D-B129-B98EB091796F}"/>
+            <a:r>
+              <a:rPr lang="en-US" dirty="0"/>
+              <a:t>The app needs to implement the following functionalities: </a:t>
+            </a:r>
+          </a:p>
+          <a:p>
+            <a:pPr lvl="2"/>
+            <a:r>
+              <a:rPr lang="en-US" dirty="0"/>
+              <a:t>When a user opens (or restarts) the app, an empty list is showed;</a:t>
+            </a:r>
+          </a:p>
+          <a:p>
+            <a:pPr lvl="2"/>
+            <a:r>
+              <a:rPr lang="en-US" dirty="0"/>
+              <a:t>By tapping a button, the user navigates to another page where he can add a new meal (CHO content and timing). Once he/she is done, the user taps a button and navigates back to the home page. The home page must show the updated meal list with the new meal just created;</a:t>
+            </a:r>
+          </a:p>
+          <a:p>
+            <a:pPr lvl="2"/>
+            <a:r>
+              <a:rPr lang="en-US" dirty="0"/>
+              <a:t>The user can select a meal from the list. If he/she does that, he/she navigates to another page where he/she can edit or delete the meal entry from the list. </a:t>
+            </a:r>
+          </a:p>
+        </p:txBody>
+      </p:sp>
+      <p:sp>
+        <p:nvSpPr>
+          <p:cNvPr id="4" name="Slide Number Placeholder 3">
+            <a:extLst>
+              <a:ext uri="{FF2B5EF4-FFF2-40B4-BE49-F238E27FC236}">
+                <a16:creationId xmlns:a16="http://schemas.microsoft.com/office/drawing/2014/main" id="{33B65F5E-766B-8A46-BC7B-5551310C6940}"/>
               </a:ext>
             </a:extLst>
           </p:cNvPr>
@@ -13145,7 +13153,7 @@
     </p:spTree>
     <p:extLst>
       <p:ext uri="{BB962C8B-B14F-4D97-AF65-F5344CB8AC3E}">
-        <p14:creationId xmlns:p14="http://schemas.microsoft.com/office/powerpoint/2010/main" val="3270982298"/>
+        <p14:creationId xmlns:p14="http://schemas.microsoft.com/office/powerpoint/2010/main" val="374531085"/>
       </p:ext>
     </p:extLst>
   </p:cSld>
@@ -13190,34 +13198,226 @@
         </p:nvSpPr>
         <p:spPr/>
         <p:txBody>
-          <a:bodyPr>
-            <a:normAutofit fontScale="90000"/>
+          <a:bodyPr/>
+          <a:lstStyle/>
+          <a:p>
+            <a:r>
+              <a:rPr lang="en-IT" dirty="0"/>
+              <a:t>Exercise: here’s a possible idea</a:t>
+            </a:r>
+          </a:p>
+        </p:txBody>
+      </p:sp>
+      <p:sp>
+        <p:nvSpPr>
+          <p:cNvPr id="29" name="Rectangle 28">
+            <a:extLst>
+              <a:ext uri="{FF2B5EF4-FFF2-40B4-BE49-F238E27FC236}">
+                <a16:creationId xmlns:a16="http://schemas.microsoft.com/office/drawing/2014/main" id="{C6376DD2-D4AA-EC49-ABA3-50DB41E08529}"/>
+              </a:ext>
+            </a:extLst>
+          </p:cNvPr>
+          <p:cNvSpPr/>
+          <p:nvPr/>
+        </p:nvSpPr>
+        <p:spPr>
+          <a:xfrm>
+            <a:off x="534413" y="5461054"/>
+            <a:ext cx="2049118" cy="584775"/>
+          </a:xfrm>
+          <a:prstGeom prst="rect">
+            <a:avLst/>
+          </a:prstGeom>
+        </p:spPr>
+        <p:txBody>
+          <a:bodyPr wrap="square">
+            <a:spAutoFit/>
           </a:bodyPr>
           <a:lstStyle/>
           <a:p>
             <a:r>
-              <a:rPr lang="en-IT" dirty="0"/>
-              <a:t>Provider classes: </a:t>
-            </a:r>
-            <a:r>
-              <a:rPr lang="en-IT" dirty="0">
-                <a:latin typeface="Courier" pitchFamily="2" charset="0"/>
-              </a:rPr>
-              <a:t>FutureProvider/StreamProvider</a:t>
-            </a:r>
-            <a:r>
-              <a:rPr lang="en-IT" dirty="0"/>
+              <a:rPr lang="en-IT" sz="1600" dirty="0">
+                <a:latin typeface="Aptos" panose="020B0004020202020204" pitchFamily="34" charset="0"/>
+              </a:rPr>
+              <a:t>Homepage is initially empty</a:t>
+            </a:r>
+          </a:p>
+        </p:txBody>
+      </p:sp>
+      <p:sp>
+        <p:nvSpPr>
+          <p:cNvPr id="30" name="Rectangle 29">
+            <a:extLst>
+              <a:ext uri="{FF2B5EF4-FFF2-40B4-BE49-F238E27FC236}">
+                <a16:creationId xmlns:a16="http://schemas.microsoft.com/office/drawing/2014/main" id="{D103D3E3-C557-EF43-8409-D2BE67BA5353}"/>
+              </a:ext>
+            </a:extLst>
+          </p:cNvPr>
+          <p:cNvSpPr/>
+          <p:nvPr/>
+        </p:nvSpPr>
+        <p:spPr>
+          <a:xfrm>
+            <a:off x="2784310" y="5423575"/>
+            <a:ext cx="2049118" cy="1323439"/>
+          </a:xfrm>
+          <a:prstGeom prst="rect">
+            <a:avLst/>
+          </a:prstGeom>
+        </p:spPr>
+        <p:txBody>
+          <a:bodyPr wrap="square">
+            <a:spAutoFit/>
+          </a:bodyPr>
+          <a:lstStyle/>
+          <a:p>
+            <a:r>
+              <a:rPr lang="en-IT" sz="1600" dirty="0">
+                <a:latin typeface="Aptos" panose="020B0004020202020204" pitchFamily="34" charset="0"/>
+              </a:rPr>
+              <a:t>When the button is tapped the user navigates to another page where he/she can add a new meal</a:t>
+            </a:r>
+          </a:p>
+        </p:txBody>
+      </p:sp>
+      <p:sp>
+        <p:nvSpPr>
+          <p:cNvPr id="31" name="Rectangle 30">
+            <a:extLst>
+              <a:ext uri="{FF2B5EF4-FFF2-40B4-BE49-F238E27FC236}">
+                <a16:creationId xmlns:a16="http://schemas.microsoft.com/office/drawing/2014/main" id="{8D75CCD2-B1B2-EF4E-BCDC-258E9B2C88DD}"/>
+              </a:ext>
+            </a:extLst>
+          </p:cNvPr>
+          <p:cNvSpPr/>
+          <p:nvPr/>
+        </p:nvSpPr>
+        <p:spPr>
+          <a:xfrm>
+            <a:off x="5189405" y="5423575"/>
+            <a:ext cx="2049118" cy="1077218"/>
+          </a:xfrm>
+          <a:prstGeom prst="rect">
+            <a:avLst/>
+          </a:prstGeom>
+        </p:spPr>
+        <p:txBody>
+          <a:bodyPr wrap="square">
+            <a:spAutoFit/>
+          </a:bodyPr>
+          <a:lstStyle/>
+          <a:p>
+            <a:r>
+              <a:rPr lang="en-IT" sz="1600" dirty="0">
+                <a:latin typeface="Aptos" panose="020B0004020202020204" pitchFamily="34" charset="0"/>
+              </a:rPr>
+              <a:t>When the </a:t>
+            </a:r>
+            <a:r>
+              <a:rPr lang="en-IT" sz="1600">
+                <a:latin typeface="Aptos" panose="020B0004020202020204" pitchFamily="34" charset="0"/>
+              </a:rPr>
+              <a:t>user </a:t>
+            </a:r>
+            <a:r>
+              <a:rPr lang="en-US" sz="1600">
+                <a:latin typeface="Aptos" panose="020B0004020202020204" pitchFamily="34" charset="0"/>
+              </a:rPr>
+              <a:t>finishes,</a:t>
+            </a:r>
+            <a:r>
+              <a:rPr lang="en-IT" sz="1600">
+                <a:latin typeface="Aptos" panose="020B0004020202020204" pitchFamily="34" charset="0"/>
+              </a:rPr>
               <a:t> </a:t>
             </a:r>
-          </a:p>
-        </p:txBody>
-      </p:sp>
-      <p:sp>
-        <p:nvSpPr>
-          <p:cNvPr id="6" name="Content Placeholder 5">
-            <a:extLst>
-              <a:ext uri="{FF2B5EF4-FFF2-40B4-BE49-F238E27FC236}">
-                <a16:creationId xmlns:a16="http://schemas.microsoft.com/office/drawing/2014/main" id="{1CFD16F6-AE87-6245-A265-931E7A6676CD}"/>
+            <a:r>
+              <a:rPr lang="en-IT" sz="1600" dirty="0">
+                <a:latin typeface="Aptos" panose="020B0004020202020204" pitchFamily="34" charset="0"/>
+              </a:rPr>
+              <a:t>the new meal is added to the list</a:t>
+            </a:r>
+          </a:p>
+        </p:txBody>
+      </p:sp>
+      <p:sp>
+        <p:nvSpPr>
+          <p:cNvPr id="32" name="Rectangle 31">
+            <a:extLst>
+              <a:ext uri="{FF2B5EF4-FFF2-40B4-BE49-F238E27FC236}">
+                <a16:creationId xmlns:a16="http://schemas.microsoft.com/office/drawing/2014/main" id="{55B51B24-C99A-544D-9531-6DD27BC03D55}"/>
+              </a:ext>
+            </a:extLst>
+          </p:cNvPr>
+          <p:cNvSpPr/>
+          <p:nvPr/>
+        </p:nvSpPr>
+        <p:spPr>
+          <a:xfrm>
+            <a:off x="7248780" y="5461054"/>
+            <a:ext cx="2049118" cy="1323439"/>
+          </a:xfrm>
+          <a:prstGeom prst="rect">
+            <a:avLst/>
+          </a:prstGeom>
+        </p:spPr>
+        <p:txBody>
+          <a:bodyPr wrap="square">
+            <a:spAutoFit/>
+          </a:bodyPr>
+          <a:lstStyle/>
+          <a:p>
+            <a:r>
+              <a:rPr lang="en-IT" sz="1600" dirty="0">
+                <a:latin typeface="Aptos" panose="020B0004020202020204" pitchFamily="34" charset="0"/>
+              </a:rPr>
+              <a:t>When the meal is tapped, the user navigates to a new screen where he/she can edit or delete it</a:t>
+            </a:r>
+          </a:p>
+        </p:txBody>
+      </p:sp>
+      <p:sp>
+        <p:nvSpPr>
+          <p:cNvPr id="33" name="Rectangle 32">
+            <a:extLst>
+              <a:ext uri="{FF2B5EF4-FFF2-40B4-BE49-F238E27FC236}">
+                <a16:creationId xmlns:a16="http://schemas.microsoft.com/office/drawing/2014/main" id="{E7488CCA-8AA7-A24E-84CB-726D1CD4AD9C}"/>
+              </a:ext>
+            </a:extLst>
+          </p:cNvPr>
+          <p:cNvSpPr/>
+          <p:nvPr/>
+        </p:nvSpPr>
+        <p:spPr>
+          <a:xfrm>
+            <a:off x="9747368" y="5507220"/>
+            <a:ext cx="2049118" cy="830997"/>
+          </a:xfrm>
+          <a:prstGeom prst="rect">
+            <a:avLst/>
+          </a:prstGeom>
+        </p:spPr>
+        <p:txBody>
+          <a:bodyPr wrap="square">
+            <a:spAutoFit/>
+          </a:bodyPr>
+          <a:lstStyle/>
+          <a:p>
+            <a:r>
+              <a:rPr lang="en-IT" sz="1600" dirty="0">
+                <a:latin typeface="Aptos" panose="020B0004020202020204" pitchFamily="34" charset="0"/>
+              </a:rPr>
+              <a:t>If the meal is edited/deleted the list is updated.</a:t>
+            </a:r>
+          </a:p>
+        </p:txBody>
+      </p:sp>
+      <p:sp>
+        <p:nvSpPr>
+          <p:cNvPr id="3" name="Slide Number Placeholder 2">
+            <a:extLst>
+              <a:ext uri="{FF2B5EF4-FFF2-40B4-BE49-F238E27FC236}">
+                <a16:creationId xmlns:a16="http://schemas.microsoft.com/office/drawing/2014/main" id="{491DE765-501F-6541-9A0D-1C7F8D96DA60}"/>
               </a:ext>
             </a:extLst>
           </p:cNvPr>
@@ -13225,429 +13425,153 @@
             <a:spLocks noGrp="1"/>
           </p:cNvSpPr>
           <p:nvPr>
-            <p:ph idx="1"/>
+            <p:ph type="sldNum" sz="quarter" idx="12"/>
           </p:nvPr>
         </p:nvSpPr>
-        <p:spPr>
-          <a:xfrm>
-            <a:off x="428172" y="1361167"/>
-            <a:ext cx="7868884" cy="5153933"/>
-          </a:xfrm>
-        </p:spPr>
-        <p:txBody>
-          <a:bodyPr>
-            <a:normAutofit fontScale="92500" lnSpcReduction="10000"/>
-          </a:bodyPr>
-          <a:lstStyle/>
-          <a:p>
-            <a:r>
-              <a:rPr lang="en-GB" dirty="0" err="1">
-                <a:latin typeface="Courier" pitchFamily="2" charset="0"/>
-              </a:rPr>
-              <a:t>FutureProvider</a:t>
-            </a:r>
-            <a:r>
-              <a:rPr lang="en-GB" dirty="0">
-                <a:latin typeface="Courier" pitchFamily="2" charset="0"/>
-              </a:rPr>
-              <a:t> </a:t>
-            </a:r>
-            <a:r>
-              <a:rPr lang="en-GB" dirty="0">
-                <a:latin typeface="Palatino" pitchFamily="2" charset="77"/>
-                <a:ea typeface="Palatino" pitchFamily="2" charset="77"/>
-              </a:rPr>
-              <a:t>and </a:t>
-            </a:r>
-            <a:r>
-              <a:rPr lang="en-GB" dirty="0" err="1">
-                <a:latin typeface="Courier" pitchFamily="2" charset="0"/>
-                <a:ea typeface="Palatino" pitchFamily="2" charset="77"/>
-              </a:rPr>
-              <a:t>Stream</a:t>
-            </a:r>
-            <a:r>
-              <a:rPr lang="en-GB" dirty="0" err="1">
-                <a:latin typeface="Courier" pitchFamily="2" charset="0"/>
-              </a:rPr>
-              <a:t>Provider</a:t>
-            </a:r>
-            <a:r>
-              <a:rPr lang="en-GB" dirty="0">
-                <a:latin typeface="Palatino" pitchFamily="2" charset="77"/>
-                <a:ea typeface="Palatino" pitchFamily="2" charset="77"/>
-              </a:rPr>
-              <a:t> are the same thing as </a:t>
-            </a:r>
-            <a:r>
-              <a:rPr lang="en-GB" dirty="0" err="1">
-                <a:latin typeface="Courier" pitchFamily="2" charset="0"/>
-              </a:rPr>
-              <a:t>ChangeNotifier</a:t>
-            </a:r>
-            <a:r>
-              <a:rPr lang="en-GB" dirty="0"/>
-              <a:t> but they work with </a:t>
-            </a:r>
-            <a:r>
-              <a:rPr lang="en-GB" dirty="0">
-                <a:latin typeface="Courier" pitchFamily="2" charset="0"/>
-              </a:rPr>
-              <a:t>Future</a:t>
-            </a:r>
-            <a:r>
-              <a:rPr lang="en-GB" dirty="0"/>
-              <a:t>s and </a:t>
-            </a:r>
-            <a:r>
-              <a:rPr lang="en-GB" dirty="0">
-                <a:latin typeface="Courier" pitchFamily="2" charset="0"/>
-              </a:rPr>
-              <a:t>Stream</a:t>
-            </a:r>
-            <a:r>
-              <a:rPr lang="en-GB" dirty="0"/>
-              <a:t>s instead of </a:t>
-            </a:r>
-            <a:r>
-              <a:rPr lang="en-GB" dirty="0" err="1">
-                <a:latin typeface="Courier" pitchFamily="2" charset="0"/>
-              </a:rPr>
-              <a:t>ChangeNotifier</a:t>
-            </a:r>
-            <a:r>
-              <a:rPr lang="en-GB" dirty="0"/>
-              <a:t>. </a:t>
-            </a:r>
-          </a:p>
-          <a:p>
-            <a:endParaRPr lang="en-GB" dirty="0"/>
-          </a:p>
-          <a:p>
-            <a:r>
-              <a:rPr lang="en-GB" dirty="0" err="1"/>
-              <a:t>Synthax</a:t>
-            </a:r>
-            <a:r>
-              <a:rPr lang="en-GB" dirty="0"/>
-              <a:t> example:</a:t>
-            </a:r>
-          </a:p>
-          <a:p>
-            <a:endParaRPr lang="en-GB" dirty="0"/>
-          </a:p>
-          <a:p>
-            <a:pPr marL="342900" lvl="1" indent="0">
-              <a:buNone/>
-            </a:pPr>
-            <a:r>
-              <a:rPr lang="en-GB" b="1" dirty="0" err="1">
-                <a:latin typeface="Courier" pitchFamily="2" charset="0"/>
-              </a:rPr>
-              <a:t>FutureProvider</a:t>
-            </a:r>
-            <a:r>
-              <a:rPr lang="en-GB" dirty="0">
-                <a:latin typeface="Courier" pitchFamily="2" charset="0"/>
-              </a:rPr>
-              <a:t>(</a:t>
-            </a:r>
-          </a:p>
-          <a:p>
-            <a:pPr marL="342900" lvl="1" indent="0">
-              <a:buNone/>
-            </a:pPr>
-            <a:r>
-              <a:rPr lang="en-GB" dirty="0">
-                <a:latin typeface="Courier" pitchFamily="2" charset="0"/>
-              </a:rPr>
-              <a:t>  </a:t>
-            </a:r>
-            <a:r>
-              <a:rPr lang="en-GB" dirty="0" err="1">
-                <a:latin typeface="Courier" pitchFamily="2" charset="0"/>
-              </a:rPr>
-              <a:t>initialData</a:t>
-            </a:r>
-            <a:r>
-              <a:rPr lang="en-GB" dirty="0">
-                <a:latin typeface="Courier" pitchFamily="2" charset="0"/>
-              </a:rPr>
-              <a:t>: null,</a:t>
-            </a:r>
-          </a:p>
-          <a:p>
-            <a:pPr marL="342900" lvl="1" indent="0">
-              <a:buNone/>
-            </a:pPr>
-            <a:r>
-              <a:rPr lang="en-GB" dirty="0">
-                <a:latin typeface="Courier" pitchFamily="2" charset="0"/>
-              </a:rPr>
-              <a:t>  create: (context) =&gt; &lt;</a:t>
-            </a:r>
-            <a:r>
-              <a:rPr lang="en-GB" dirty="0" err="1">
-                <a:latin typeface="Courier" pitchFamily="2" charset="0"/>
-              </a:rPr>
-              <a:t>get_a_future</a:t>
-            </a:r>
-            <a:r>
-              <a:rPr lang="en-GB" dirty="0">
-                <a:latin typeface="Courier" pitchFamily="2" charset="0"/>
-              </a:rPr>
-              <a:t>&gt;,</a:t>
-            </a:r>
-          </a:p>
-          <a:p>
-            <a:pPr marL="342900" lvl="1" indent="0">
-              <a:buNone/>
-            </a:pPr>
-            <a:r>
-              <a:rPr lang="en-GB" dirty="0">
-                <a:latin typeface="Courier" pitchFamily="2" charset="0"/>
-              </a:rPr>
-              <a:t>  child: &lt;widget&gt;,</a:t>
-            </a:r>
-          </a:p>
-          <a:p>
-            <a:pPr marL="342900" lvl="1" indent="0">
-              <a:buNone/>
-            </a:pPr>
-            <a:r>
-              <a:rPr lang="en-GB" dirty="0">
-                <a:latin typeface="Courier" pitchFamily="2" charset="0"/>
-              </a:rPr>
-              <a:t>);</a:t>
-            </a:r>
-          </a:p>
-          <a:p>
-            <a:pPr marL="342900" lvl="1" indent="0">
-              <a:buNone/>
-            </a:pPr>
-            <a:r>
-              <a:rPr lang="en-GB" b="1" dirty="0" err="1">
-                <a:latin typeface="Courier" pitchFamily="2" charset="0"/>
-              </a:rPr>
-              <a:t>StreamProvider</a:t>
-            </a:r>
-            <a:r>
-              <a:rPr lang="en-GB" dirty="0">
-                <a:latin typeface="Courier" pitchFamily="2" charset="0"/>
-              </a:rPr>
-              <a:t>(</a:t>
-            </a:r>
-          </a:p>
-          <a:p>
-            <a:pPr marL="342900" lvl="1" indent="0">
-              <a:buNone/>
-            </a:pPr>
-            <a:r>
-              <a:rPr lang="en-GB" dirty="0">
-                <a:latin typeface="Courier" pitchFamily="2" charset="0"/>
-              </a:rPr>
-              <a:t>  </a:t>
-            </a:r>
-            <a:r>
-              <a:rPr lang="en-GB" dirty="0" err="1">
-                <a:latin typeface="Courier" pitchFamily="2" charset="0"/>
-              </a:rPr>
-              <a:t>initialData</a:t>
-            </a:r>
-            <a:r>
-              <a:rPr lang="en-GB" dirty="0">
-                <a:latin typeface="Courier" pitchFamily="2" charset="0"/>
-              </a:rPr>
-              <a:t>: null,</a:t>
-            </a:r>
-          </a:p>
-          <a:p>
-            <a:pPr marL="342900" lvl="1" indent="0">
-              <a:buNone/>
-            </a:pPr>
-            <a:r>
-              <a:rPr lang="en-GB" dirty="0">
-                <a:latin typeface="Courier" pitchFamily="2" charset="0"/>
-              </a:rPr>
-              <a:t>  create: (context) =&gt; &lt;</a:t>
-            </a:r>
-            <a:r>
-              <a:rPr lang="en-GB" dirty="0" err="1">
-                <a:latin typeface="Courier" pitchFamily="2" charset="0"/>
-              </a:rPr>
-              <a:t>get_a_stream</a:t>
-            </a:r>
-            <a:r>
-              <a:rPr lang="en-GB" dirty="0">
-                <a:latin typeface="Courier" pitchFamily="2" charset="0"/>
-              </a:rPr>
-              <a:t>&gt;,</a:t>
-            </a:r>
-          </a:p>
-          <a:p>
-            <a:pPr marL="342900" lvl="1" indent="0">
-              <a:buNone/>
-            </a:pPr>
-            <a:r>
-              <a:rPr lang="en-GB" dirty="0">
-                <a:latin typeface="Courier" pitchFamily="2" charset="0"/>
-              </a:rPr>
-              <a:t>  child: &lt;widget&gt;,</a:t>
-            </a:r>
-          </a:p>
-          <a:p>
-            <a:pPr marL="342900" lvl="1" indent="0">
-              <a:buNone/>
-            </a:pPr>
-            <a:r>
-              <a:rPr lang="en-GB" dirty="0">
-                <a:latin typeface="Courier" pitchFamily="2" charset="0"/>
-              </a:rPr>
-              <a:t>);</a:t>
-            </a:r>
-            <a:endParaRPr lang="en-IT" dirty="0">
-              <a:latin typeface="Courier" pitchFamily="2" charset="0"/>
-            </a:endParaRPr>
-          </a:p>
-          <a:p>
-            <a:pPr marL="342900" lvl="1" indent="0">
-              <a:buNone/>
-            </a:pPr>
-            <a:endParaRPr lang="en-IT" dirty="0">
-              <a:latin typeface="Courier" pitchFamily="2" charset="0"/>
-            </a:endParaRPr>
-          </a:p>
-          <a:p>
-            <a:endParaRPr lang="en-IT" dirty="0"/>
-          </a:p>
-        </p:txBody>
-      </p:sp>
-      <p:sp>
-        <p:nvSpPr>
-          <p:cNvPr id="15" name="Rectangle 14">
-            <a:extLst>
-              <a:ext uri="{FF2B5EF4-FFF2-40B4-BE49-F238E27FC236}">
-                <a16:creationId xmlns:a16="http://schemas.microsoft.com/office/drawing/2014/main" id="{B99A70FB-D572-6A4B-8E41-00EC37FB7A6C}"/>
-              </a:ext>
-            </a:extLst>
-          </p:cNvPr>
-          <p:cNvSpPr/>
-          <p:nvPr/>
-        </p:nvSpPr>
-        <p:spPr>
-          <a:xfrm>
-            <a:off x="8091874" y="3122435"/>
-            <a:ext cx="3530500" cy="1200329"/>
+        <p:spPr/>
+        <p:txBody>
+          <a:bodyPr/>
+          <a:lstStyle/>
+          <a:p>
+            <a:fld id="{31DE2C5B-556E-47B8-A792-024C2FCA4ACC}" type="slidenum">
+              <a:rPr lang="en-GB" smtClean="0"/>
+              <a:t>25</a:t>
+            </a:fld>
+            <a:endParaRPr lang="en-GB"/>
+          </a:p>
+        </p:txBody>
+      </p:sp>
+      <p:pic>
+        <p:nvPicPr>
+          <p:cNvPr id="5" name="Picture 4" descr="A white background with black text&#10;&#10;Description automatically generated">
+            <a:extLst>
+              <a:ext uri="{FF2B5EF4-FFF2-40B4-BE49-F238E27FC236}">
+                <a16:creationId xmlns:a16="http://schemas.microsoft.com/office/drawing/2014/main" id="{79A8310B-DB16-045B-3EC4-406F5550B4B7}"/>
+              </a:ext>
+            </a:extLst>
+          </p:cNvPr>
+          <p:cNvPicPr>
+            <a:picLocks noChangeAspect="1"/>
+          </p:cNvPicPr>
+          <p:nvPr/>
+        </p:nvPicPr>
+        <p:blipFill>
+          <a:blip r:embed="rId2">
+            <a:extLst>
+              <a:ext uri="{28A0092B-C50C-407E-A947-70E740481C1C}">
+                <a14:useLocalDpi xmlns:a14="http://schemas.microsoft.com/office/drawing/2010/main" val="0"/>
+              </a:ext>
+            </a:extLst>
+          </a:blip>
+          <a:stretch>
+            <a:fillRect/>
+          </a:stretch>
+        </p:blipFill>
+        <p:spPr>
+          <a:xfrm>
+            <a:off x="375413" y="1267254"/>
+            <a:ext cx="1843131" cy="3994880"/>
           </a:xfrm>
           <a:prstGeom prst="rect">
             <a:avLst/>
           </a:prstGeom>
         </p:spPr>
-        <p:txBody>
-          <a:bodyPr wrap="square">
-            <a:spAutoFit/>
-          </a:bodyPr>
-          <a:lstStyle/>
-          <a:p>
-            <a:r>
-              <a:rPr lang="en-IT" sz="2400" dirty="0">
-                <a:latin typeface="Courier" pitchFamily="2" charset="0"/>
-              </a:rPr>
-              <a:t>initialData</a:t>
-            </a:r>
-            <a:r>
-              <a:rPr lang="en-IT" sz="2400" dirty="0">
-                <a:latin typeface="Palatino Linotype" panose="02040502050505030304" pitchFamily="18" charset="0"/>
-              </a:rPr>
-              <a:t> is used as value while the Future is loading. </a:t>
-            </a:r>
-            <a:endParaRPr lang="en-IT" sz="2400" dirty="0">
-              <a:latin typeface="Courier" pitchFamily="2" charset="0"/>
-            </a:endParaRPr>
-          </a:p>
-        </p:txBody>
-      </p:sp>
-      <p:sp>
-        <p:nvSpPr>
-          <p:cNvPr id="20" name="Rectangle 19">
-            <a:extLst>
-              <a:ext uri="{FF2B5EF4-FFF2-40B4-BE49-F238E27FC236}">
-                <a16:creationId xmlns:a16="http://schemas.microsoft.com/office/drawing/2014/main" id="{F41C418A-8428-4B43-93F3-165B170D2E57}"/>
-              </a:ext>
-            </a:extLst>
-          </p:cNvPr>
-          <p:cNvSpPr/>
-          <p:nvPr/>
-        </p:nvSpPr>
-        <p:spPr>
-          <a:xfrm>
-            <a:off x="8091874" y="4661762"/>
-            <a:ext cx="3530500" cy="830997"/>
+      </p:pic>
+      <p:pic>
+        <p:nvPicPr>
+          <p:cNvPr id="9" name="Picture 8" descr="A screenshot of a phone&#10;&#10;Description automatically generated">
+            <a:extLst>
+              <a:ext uri="{FF2B5EF4-FFF2-40B4-BE49-F238E27FC236}">
+                <a16:creationId xmlns:a16="http://schemas.microsoft.com/office/drawing/2014/main" id="{D029C91F-511D-9666-827D-62D4ED27C77A}"/>
+              </a:ext>
+            </a:extLst>
+          </p:cNvPr>
+          <p:cNvPicPr>
+            <a:picLocks noChangeAspect="1"/>
+          </p:cNvPicPr>
+          <p:nvPr/>
+        </p:nvPicPr>
+        <p:blipFill>
+          <a:blip r:embed="rId3">
+            <a:extLst>
+              <a:ext uri="{28A0092B-C50C-407E-A947-70E740481C1C}">
+                <a14:useLocalDpi xmlns:a14="http://schemas.microsoft.com/office/drawing/2010/main" val="0"/>
+              </a:ext>
+            </a:extLst>
+          </a:blip>
+          <a:stretch>
+            <a:fillRect/>
+          </a:stretch>
+        </p:blipFill>
+        <p:spPr>
+          <a:xfrm>
+            <a:off x="2887304" y="1244171"/>
+            <a:ext cx="1843131" cy="3994880"/>
           </a:xfrm>
           <a:prstGeom prst="rect">
             <a:avLst/>
           </a:prstGeom>
         </p:spPr>
-        <p:txBody>
-          <a:bodyPr wrap="square">
-            <a:spAutoFit/>
-          </a:bodyPr>
-          <a:lstStyle/>
-          <a:p>
-            <a:r>
-              <a:rPr lang="en-IT" sz="2400" dirty="0">
-                <a:latin typeface="Courier" pitchFamily="2" charset="0"/>
-              </a:rPr>
-              <a:t>create</a:t>
-            </a:r>
-            <a:r>
-              <a:rPr lang="en-IT" sz="2400" dirty="0">
-                <a:latin typeface="Palatino Linotype" panose="02040502050505030304" pitchFamily="18" charset="0"/>
-              </a:rPr>
-              <a:t> specifies the </a:t>
-            </a:r>
-            <a:r>
-              <a:rPr lang="en-IT" sz="2400" dirty="0">
-                <a:latin typeface="Courier" pitchFamily="2" charset="0"/>
-              </a:rPr>
-              <a:t>Future</a:t>
-            </a:r>
-            <a:r>
-              <a:rPr lang="en-IT" sz="2400" dirty="0">
-                <a:latin typeface="Palatino Linotype" panose="02040502050505030304" pitchFamily="18" charset="0"/>
-              </a:rPr>
-              <a:t> object.</a:t>
-            </a:r>
-            <a:endParaRPr lang="en-IT" sz="2400" dirty="0">
-              <a:latin typeface="Courier" pitchFamily="2" charset="0"/>
-            </a:endParaRPr>
-          </a:p>
-        </p:txBody>
-      </p:sp>
+      </p:pic>
+      <p:pic>
+        <p:nvPicPr>
+          <p:cNvPr id="11" name="Picture 10" descr="A white background with black dots&#10;&#10;Description automatically generated">
+            <a:extLst>
+              <a:ext uri="{FF2B5EF4-FFF2-40B4-BE49-F238E27FC236}">
+                <a16:creationId xmlns:a16="http://schemas.microsoft.com/office/drawing/2014/main" id="{A98B1D53-4ADE-7531-4B2B-E3E1E1196276}"/>
+              </a:ext>
+            </a:extLst>
+          </p:cNvPr>
+          <p:cNvPicPr>
+            <a:picLocks noChangeAspect="1"/>
+          </p:cNvPicPr>
+          <p:nvPr/>
+        </p:nvPicPr>
+        <p:blipFill>
+          <a:blip r:embed="rId4">
+            <a:extLst>
+              <a:ext uri="{28A0092B-C50C-407E-A947-70E740481C1C}">
+                <a14:useLocalDpi xmlns:a14="http://schemas.microsoft.com/office/drawing/2010/main" val="0"/>
+              </a:ext>
+            </a:extLst>
+          </a:blip>
+          <a:stretch>
+            <a:fillRect/>
+          </a:stretch>
+        </p:blipFill>
+        <p:spPr>
+          <a:xfrm>
+            <a:off x="5292398" y="1267254"/>
+            <a:ext cx="1843131" cy="3994880"/>
+          </a:xfrm>
+          <a:prstGeom prst="rect">
+            <a:avLst/>
+          </a:prstGeom>
+        </p:spPr>
+      </p:pic>
       <p:cxnSp>
         <p:nvCxnSpPr>
-          <p:cNvPr id="21" name="Straight Arrow Connector 20">
-            <a:extLst>
-              <a:ext uri="{FF2B5EF4-FFF2-40B4-BE49-F238E27FC236}">
-                <a16:creationId xmlns:a16="http://schemas.microsoft.com/office/drawing/2014/main" id="{3D5B8434-1451-9542-BCB3-D1193C8575C7}"/>
+          <p:cNvPr id="12" name="Straight Arrow Connector 11">
+            <a:extLst>
+              <a:ext uri="{FF2B5EF4-FFF2-40B4-BE49-F238E27FC236}">
+                <a16:creationId xmlns:a16="http://schemas.microsoft.com/office/drawing/2014/main" id="{0F58221F-8E69-FC96-117A-B35677389077}"/>
               </a:ext>
             </a:extLst>
           </p:cNvPr>
           <p:cNvCxnSpPr>
             <a:cxnSpLocks/>
-            <a:stCxn id="15" idx="1"/>
           </p:cNvCxnSpPr>
           <p:nvPr/>
         </p:nvCxnSpPr>
         <p:spPr>
-          <a:xfrm flipH="1">
-            <a:off x="3747541" y="3722600"/>
-            <a:ext cx="4344333" cy="129872"/>
+          <a:xfrm>
+            <a:off x="4699416" y="1618950"/>
+            <a:ext cx="936886" cy="1019319"/>
           </a:xfrm>
           <a:prstGeom prst="straightConnector1">
             <a:avLst/>
           </a:prstGeom>
-          <a:ln>
+          <a:ln w="38100">
             <a:tailEnd type="triangle"/>
           </a:ln>
         </p:spPr>
@@ -13668,28 +13592,27 @@
       </p:cxnSp>
       <p:cxnSp>
         <p:nvCxnSpPr>
-          <p:cNvPr id="22" name="Straight Arrow Connector 21">
-            <a:extLst>
-              <a:ext uri="{FF2B5EF4-FFF2-40B4-BE49-F238E27FC236}">
-                <a16:creationId xmlns:a16="http://schemas.microsoft.com/office/drawing/2014/main" id="{382569B7-EC37-714E-8EB9-51C6B56C5E57}"/>
+          <p:cNvPr id="14" name="Straight Arrow Connector 13">
+            <a:extLst>
+              <a:ext uri="{FF2B5EF4-FFF2-40B4-BE49-F238E27FC236}">
+                <a16:creationId xmlns:a16="http://schemas.microsoft.com/office/drawing/2014/main" id="{754E8FD3-9A05-D3D5-76F0-EA88063DC08A}"/>
               </a:ext>
             </a:extLst>
           </p:cNvPr>
           <p:cNvCxnSpPr>
             <a:cxnSpLocks/>
-            <a:stCxn id="20" idx="1"/>
           </p:cNvCxnSpPr>
           <p:nvPr/>
         </p:nvCxnSpPr>
         <p:spPr>
-          <a:xfrm flipH="1" flipV="1">
-            <a:off x="6355830" y="4212236"/>
-            <a:ext cx="1736044" cy="865025"/>
+          <a:xfrm flipV="1">
+            <a:off x="2218544" y="2908092"/>
+            <a:ext cx="944381" cy="1926236"/>
           </a:xfrm>
           <a:prstGeom prst="straightConnector1">
             <a:avLst/>
           </a:prstGeom>
-          <a:ln>
+          <a:ln w="38100">
             <a:tailEnd type="triangle"/>
           </a:ln>
         </p:spPr>
@@ -13708,39 +13631,164 @@
           </a:fontRef>
         </p:style>
       </p:cxnSp>
-      <p:sp>
-        <p:nvSpPr>
-          <p:cNvPr id="3" name="Slide Number Placeholder 2">
-            <a:extLst>
-              <a:ext uri="{FF2B5EF4-FFF2-40B4-BE49-F238E27FC236}">
-                <a16:creationId xmlns:a16="http://schemas.microsoft.com/office/drawing/2014/main" id="{9154E9D2-7A89-F44D-AF87-067C03E567A7}"/>
-              </a:ext>
-            </a:extLst>
-          </p:cNvPr>
-          <p:cNvSpPr>
-            <a:spLocks noGrp="1"/>
-          </p:cNvSpPr>
-          <p:nvPr>
-            <p:ph type="sldNum" sz="quarter" idx="12"/>
-          </p:nvPr>
-        </p:nvSpPr>
-        <p:spPr/>
-        <p:txBody>
-          <a:bodyPr/>
-          <a:lstStyle/>
-          <a:p>
-            <a:fld id="{31DE2C5B-556E-47B8-A792-024C2FCA4ACC}" type="slidenum">
-              <a:rPr lang="en-GB" smtClean="0"/>
-              <a:t>25</a:t>
-            </a:fld>
-            <a:endParaRPr lang="en-GB"/>
-          </a:p>
-        </p:txBody>
-      </p:sp>
+      <p:pic>
+        <p:nvPicPr>
+          <p:cNvPr id="20" name="Picture 19" descr="A screenshot of a phone&#10;&#10;Description automatically generated">
+            <a:extLst>
+              <a:ext uri="{FF2B5EF4-FFF2-40B4-BE49-F238E27FC236}">
+                <a16:creationId xmlns:a16="http://schemas.microsoft.com/office/drawing/2014/main" id="{2577ED07-9C84-AA09-2042-F7CB12150C87}"/>
+              </a:ext>
+            </a:extLst>
+          </p:cNvPr>
+          <p:cNvPicPr>
+            <a:picLocks noChangeAspect="1"/>
+          </p:cNvPicPr>
+          <p:nvPr/>
+        </p:nvPicPr>
+        <p:blipFill>
+          <a:blip r:embed="rId5">
+            <a:extLst>
+              <a:ext uri="{28A0092B-C50C-407E-A947-70E740481C1C}">
+                <a14:useLocalDpi xmlns:a14="http://schemas.microsoft.com/office/drawing/2010/main" val="0"/>
+              </a:ext>
+            </a:extLst>
+          </a:blip>
+          <a:stretch>
+            <a:fillRect/>
+          </a:stretch>
+        </p:blipFill>
+        <p:spPr>
+          <a:xfrm>
+            <a:off x="7351773" y="1267253"/>
+            <a:ext cx="1843132" cy="3994881"/>
+          </a:xfrm>
+          <a:prstGeom prst="rect">
+            <a:avLst/>
+          </a:prstGeom>
+        </p:spPr>
+      </p:pic>
+      <p:cxnSp>
+        <p:nvCxnSpPr>
+          <p:cNvPr id="21" name="Straight Arrow Connector 20">
+            <a:extLst>
+              <a:ext uri="{FF2B5EF4-FFF2-40B4-BE49-F238E27FC236}">
+                <a16:creationId xmlns:a16="http://schemas.microsoft.com/office/drawing/2014/main" id="{276F3384-8B8C-0298-D3DF-04B21BB53A19}"/>
+              </a:ext>
+            </a:extLst>
+          </p:cNvPr>
+          <p:cNvCxnSpPr>
+            <a:cxnSpLocks/>
+          </p:cNvCxnSpPr>
+          <p:nvPr/>
+        </p:nvCxnSpPr>
+        <p:spPr>
+          <a:xfrm>
+            <a:off x="6503205" y="1888773"/>
+            <a:ext cx="1306670" cy="1094270"/>
+          </a:xfrm>
+          <a:prstGeom prst="straightConnector1">
+            <a:avLst/>
+          </a:prstGeom>
+          <a:ln w="38100">
+            <a:tailEnd type="triangle"/>
+          </a:ln>
+        </p:spPr>
+        <p:style>
+          <a:lnRef idx="1">
+            <a:schemeClr val="accent6"/>
+          </a:lnRef>
+          <a:fillRef idx="0">
+            <a:schemeClr val="accent6"/>
+          </a:fillRef>
+          <a:effectRef idx="0">
+            <a:schemeClr val="accent6"/>
+          </a:effectRef>
+          <a:fontRef idx="minor">
+            <a:schemeClr val="tx1"/>
+          </a:fontRef>
+        </p:style>
+      </p:cxnSp>
+      <p:pic>
+        <p:nvPicPr>
+          <p:cNvPr id="24" name="Picture 23" descr="A white background with black text&#10;&#10;Description automatically generated">
+            <a:extLst>
+              <a:ext uri="{FF2B5EF4-FFF2-40B4-BE49-F238E27FC236}">
+                <a16:creationId xmlns:a16="http://schemas.microsoft.com/office/drawing/2014/main" id="{05D4C093-F0ED-E881-DD97-573C818F5151}"/>
+              </a:ext>
+            </a:extLst>
+          </p:cNvPr>
+          <p:cNvPicPr>
+            <a:picLocks noChangeAspect="1"/>
+          </p:cNvPicPr>
+          <p:nvPr/>
+        </p:nvPicPr>
+        <p:blipFill>
+          <a:blip r:embed="rId6">
+            <a:extLst>
+              <a:ext uri="{28A0092B-C50C-407E-A947-70E740481C1C}">
+                <a14:useLocalDpi xmlns:a14="http://schemas.microsoft.com/office/drawing/2010/main" val="0"/>
+              </a:ext>
+            </a:extLst>
+          </a:blip>
+          <a:stretch>
+            <a:fillRect/>
+          </a:stretch>
+        </p:blipFill>
+        <p:spPr>
+          <a:xfrm>
+            <a:off x="9616507" y="1267253"/>
+            <a:ext cx="1843132" cy="3994882"/>
+          </a:xfrm>
+          <a:prstGeom prst="rect">
+            <a:avLst/>
+          </a:prstGeom>
+        </p:spPr>
+      </p:pic>
+      <p:cxnSp>
+        <p:nvCxnSpPr>
+          <p:cNvPr id="26" name="Straight Arrow Connector 25">
+            <a:extLst>
+              <a:ext uri="{FF2B5EF4-FFF2-40B4-BE49-F238E27FC236}">
+                <a16:creationId xmlns:a16="http://schemas.microsoft.com/office/drawing/2014/main" id="{A765A5E0-DD98-BFF5-AF5A-75E6B886B437}"/>
+              </a:ext>
+            </a:extLst>
+          </p:cNvPr>
+          <p:cNvCxnSpPr>
+            <a:cxnSpLocks/>
+          </p:cNvCxnSpPr>
+          <p:nvPr/>
+        </p:nvCxnSpPr>
+        <p:spPr>
+          <a:xfrm flipV="1">
+            <a:off x="9158405" y="3800007"/>
+            <a:ext cx="1207293" cy="1113912"/>
+          </a:xfrm>
+          <a:prstGeom prst="straightConnector1">
+            <a:avLst/>
+          </a:prstGeom>
+          <a:ln w="38100">
+            <a:tailEnd type="triangle"/>
+          </a:ln>
+        </p:spPr>
+        <p:style>
+          <a:lnRef idx="1">
+            <a:schemeClr val="accent6"/>
+          </a:lnRef>
+          <a:fillRef idx="0">
+            <a:schemeClr val="accent6"/>
+          </a:fillRef>
+          <a:effectRef idx="0">
+            <a:schemeClr val="accent6"/>
+          </a:effectRef>
+          <a:fontRef idx="minor">
+            <a:schemeClr val="tx1"/>
+          </a:fontRef>
+        </p:style>
+      </p:cxnSp>
     </p:spTree>
     <p:extLst>
       <p:ext uri="{BB962C8B-B14F-4D97-AF65-F5344CB8AC3E}">
-        <p14:creationId xmlns:p14="http://schemas.microsoft.com/office/powerpoint/2010/main" val="246335136"/>
+        <p14:creationId xmlns:p14="http://schemas.microsoft.com/office/powerpoint/2010/main" val="1713171130"/>
       </p:ext>
     </p:extLst>
   </p:cSld>
@@ -13785,31 +13833,22 @@
         </p:nvSpPr>
         <p:spPr/>
         <p:txBody>
-          <a:bodyPr>
-            <a:normAutofit/>
-          </a:bodyPr>
+          <a:bodyPr/>
           <a:lstStyle/>
           <a:p>
             <a:r>
               <a:rPr lang="en-IT" dirty="0"/>
-              <a:t>Provider classes: </a:t>
-            </a:r>
-            <a:r>
-              <a:rPr lang="en-IT" dirty="0">
-                <a:latin typeface="Courier" pitchFamily="2" charset="0"/>
-              </a:rPr>
-              <a:t>MultiProvider</a:t>
-            </a:r>
-            <a:endParaRPr lang="en-IT" dirty="0"/>
-          </a:p>
-        </p:txBody>
-      </p:sp>
-      <p:sp>
-        <p:nvSpPr>
-          <p:cNvPr id="6" name="Content Placeholder 5">
-            <a:extLst>
-              <a:ext uri="{FF2B5EF4-FFF2-40B4-BE49-F238E27FC236}">
-                <a16:creationId xmlns:a16="http://schemas.microsoft.com/office/drawing/2014/main" id="{1CFD16F6-AE87-6245-A265-931E7A6676CD}"/>
+              <a:t>Outline</a:t>
+            </a:r>
+          </a:p>
+        </p:txBody>
+      </p:sp>
+      <p:sp>
+        <p:nvSpPr>
+          <p:cNvPr id="3" name="Content Placeholder 2">
+            <a:extLst>
+              <a:ext uri="{FF2B5EF4-FFF2-40B4-BE49-F238E27FC236}">
+                <a16:creationId xmlns:a16="http://schemas.microsoft.com/office/drawing/2014/main" id="{8962CCAC-9D70-C543-BBE0-822B6CB5F5CB}"/>
               </a:ext>
             </a:extLst>
           </p:cNvPr>
@@ -13823,7 +13862,7 @@
         <p:spPr>
           <a:xfrm>
             <a:off x="428172" y="1361167"/>
-            <a:ext cx="7868884" cy="5153933"/>
+            <a:ext cx="11213368" cy="5334907"/>
           </a:xfrm>
         </p:spPr>
         <p:txBody>
@@ -13833,242 +13872,102 @@
           <a:lstStyle/>
           <a:p>
             <a:r>
-              <a:rPr lang="en-GB" dirty="0"/>
-              <a:t>What if you need to inject more than one provider through the widget tree? Use </a:t>
-            </a:r>
-            <a:r>
-              <a:rPr lang="en-GB" dirty="0" err="1">
-                <a:latin typeface="Courier" pitchFamily="2" charset="0"/>
-              </a:rPr>
-              <a:t>MultiProvider</a:t>
-            </a:r>
-            <a:r>
               <a:rPr lang="en-GB" dirty="0">
-                <a:latin typeface="Courier" pitchFamily="2" charset="0"/>
-              </a:rPr>
-              <a:t>.</a:t>
+                <a:solidFill>
+                  <a:schemeClr val="bg2">
+                    <a:lumMod val="90000"/>
+                  </a:schemeClr>
+                </a:solidFill>
+              </a:rPr>
+              <a:t>Recap</a:t>
+            </a:r>
+          </a:p>
+          <a:p>
+            <a:r>
+              <a:rPr lang="en-GB" dirty="0">
+                <a:solidFill>
+                  <a:schemeClr val="bg2">
+                    <a:lumMod val="90000"/>
+                  </a:schemeClr>
+                </a:solidFill>
+              </a:rPr>
+              <a:t>State management concepts</a:t>
+            </a:r>
+          </a:p>
+          <a:p>
+            <a:r>
+              <a:rPr lang="en-GB" dirty="0">
+                <a:solidFill>
+                  <a:schemeClr val="bg2">
+                    <a:lumMod val="90000"/>
+                  </a:schemeClr>
+                </a:solidFill>
+              </a:rPr>
+              <a:t>Provider</a:t>
+            </a:r>
+          </a:p>
+          <a:p>
+            <a:r>
+              <a:rPr lang="en-GB" dirty="0">
+                <a:solidFill>
+                  <a:schemeClr val="bg2">
+                    <a:lumMod val="90000"/>
+                  </a:schemeClr>
+                </a:solidFill>
+              </a:rPr>
+              <a:t>Case study</a:t>
+            </a:r>
+          </a:p>
+          <a:p>
+            <a:endParaRPr lang="en-GB" dirty="0">
+              <a:solidFill>
+                <a:schemeClr val="bg2">
+                  <a:lumMod val="90000"/>
+                </a:schemeClr>
+              </a:solidFill>
+            </a:endParaRPr>
+          </a:p>
+          <a:p>
+            <a:r>
+              <a:rPr lang="en-GB" dirty="0">
+                <a:solidFill>
+                  <a:schemeClr val="bg2">
+                    <a:lumMod val="90000"/>
+                  </a:schemeClr>
+                </a:solidFill>
+              </a:rPr>
+              <a:t>Exercise</a:t>
+            </a:r>
+          </a:p>
+          <a:p>
+            <a:r>
+              <a:rPr lang="en-GB" b="1" dirty="0"/>
+              <a:t>Homework</a:t>
+            </a:r>
+          </a:p>
+          <a:p>
+            <a:r>
+              <a:rPr lang="en-GB" dirty="0">
+                <a:solidFill>
+                  <a:schemeClr val="bg2">
+                    <a:lumMod val="90000"/>
+                  </a:schemeClr>
+                </a:solidFill>
+              </a:rPr>
+              <a:t>Resources</a:t>
             </a:r>
           </a:p>
           <a:p>
             <a:endParaRPr lang="en-GB" dirty="0"/>
           </a:p>
-          <a:p>
-            <a:r>
-              <a:rPr lang="en-GB" dirty="0" err="1"/>
-              <a:t>Synthax</a:t>
-            </a:r>
-            <a:r>
-              <a:rPr lang="en-GB" dirty="0"/>
-              <a:t> example:</a:t>
-            </a:r>
-          </a:p>
-          <a:p>
-            <a:endParaRPr lang="en-GB" dirty="0"/>
-          </a:p>
-          <a:p>
-            <a:pPr marL="342900" lvl="1" indent="0">
-              <a:buNone/>
-            </a:pPr>
-            <a:r>
-              <a:rPr lang="en-GB" b="1" dirty="0" err="1">
-                <a:latin typeface="Courier" pitchFamily="2" charset="0"/>
-              </a:rPr>
-              <a:t>MultiProvider</a:t>
-            </a:r>
-            <a:r>
-              <a:rPr lang="en-GB" dirty="0">
-                <a:latin typeface="Courier" pitchFamily="2" charset="0"/>
-              </a:rPr>
-              <a:t>(</a:t>
-            </a:r>
-          </a:p>
-          <a:p>
-            <a:pPr marL="342900" lvl="1" indent="0">
-              <a:buNone/>
-            </a:pPr>
-            <a:r>
-              <a:rPr lang="en-GB" dirty="0">
-                <a:latin typeface="Courier" pitchFamily="2" charset="0"/>
-              </a:rPr>
-              <a:t>  providers: [</a:t>
-            </a:r>
-          </a:p>
-          <a:p>
-            <a:pPr marL="342900" lvl="1" indent="0">
-              <a:buNone/>
-            </a:pPr>
-            <a:r>
-              <a:rPr lang="en-GB" dirty="0" err="1">
-                <a:latin typeface="Courier" pitchFamily="2" charset="0"/>
-              </a:rPr>
-              <a:t>ChangeNotifierProvider</a:t>
-            </a:r>
-            <a:r>
-              <a:rPr lang="en-GB" dirty="0">
-                <a:latin typeface="Courier" pitchFamily="2" charset="0"/>
-              </a:rPr>
-              <a:t>(...),</a:t>
-            </a:r>
-          </a:p>
-          <a:p>
-            <a:pPr marL="342900" lvl="1" indent="0">
-              <a:buNone/>
-            </a:pPr>
-            <a:r>
-              <a:rPr lang="en-GB" dirty="0" err="1">
-                <a:latin typeface="Courier" pitchFamily="2" charset="0"/>
-              </a:rPr>
-              <a:t>FutureProvider</a:t>
-            </a:r>
-            <a:r>
-              <a:rPr lang="en-GB" dirty="0">
-                <a:latin typeface="Courier" pitchFamily="2" charset="0"/>
-              </a:rPr>
-              <a:t>(...),</a:t>
-            </a:r>
-          </a:p>
-          <a:p>
-            <a:pPr marL="342900" lvl="1" indent="0">
-              <a:buNone/>
-            </a:pPr>
-            <a:r>
-              <a:rPr lang="en-GB" dirty="0">
-                <a:latin typeface="Courier" pitchFamily="2" charset="0"/>
-              </a:rPr>
-              <a:t>  ],</a:t>
-            </a:r>
-          </a:p>
-          <a:p>
-            <a:pPr marL="342900" lvl="1" indent="0">
-              <a:buNone/>
-            </a:pPr>
-            <a:r>
-              <a:rPr lang="en-GB" dirty="0">
-                <a:latin typeface="Courier" pitchFamily="2" charset="0"/>
-              </a:rPr>
-              <a:t>  child: &lt;</a:t>
-            </a:r>
-            <a:r>
-              <a:rPr lang="en-GB" dirty="0" err="1">
-                <a:latin typeface="Courier" pitchFamily="2" charset="0"/>
-              </a:rPr>
-              <a:t>widget_tree</a:t>
-            </a:r>
-            <a:r>
-              <a:rPr lang="en-GB" dirty="0">
-                <a:latin typeface="Courier" pitchFamily="2" charset="0"/>
-              </a:rPr>
-              <a:t>&gt;,</a:t>
-            </a:r>
-          </a:p>
-          <a:p>
-            <a:pPr marL="342900" lvl="1" indent="0">
-              <a:buNone/>
-            </a:pPr>
-            <a:r>
-              <a:rPr lang="en-GB" dirty="0">
-                <a:latin typeface="Courier" pitchFamily="2" charset="0"/>
-              </a:rPr>
-              <a:t>);</a:t>
-            </a:r>
-          </a:p>
-          <a:p>
-            <a:pPr marL="0" indent="0">
-              <a:buNone/>
-            </a:pPr>
-            <a:endParaRPr lang="en-IT" dirty="0">
-              <a:latin typeface="Courier" pitchFamily="2" charset="0"/>
-            </a:endParaRPr>
-          </a:p>
-          <a:p>
-            <a:endParaRPr lang="en-IT" dirty="0"/>
-          </a:p>
-        </p:txBody>
-      </p:sp>
-      <p:sp>
-        <p:nvSpPr>
-          <p:cNvPr id="15" name="Rectangle 14">
-            <a:extLst>
-              <a:ext uri="{FF2B5EF4-FFF2-40B4-BE49-F238E27FC236}">
-                <a16:creationId xmlns:a16="http://schemas.microsoft.com/office/drawing/2014/main" id="{B99A70FB-D572-6A4B-8E41-00EC37FB7A6C}"/>
-              </a:ext>
-            </a:extLst>
-          </p:cNvPr>
-          <p:cNvSpPr/>
-          <p:nvPr/>
-        </p:nvSpPr>
-        <p:spPr>
-          <a:xfrm>
-            <a:off x="8091874" y="3122435"/>
-            <a:ext cx="3530500" cy="461665"/>
-          </a:xfrm>
-          <a:prstGeom prst="rect">
-            <a:avLst/>
-          </a:prstGeom>
-        </p:spPr>
-        <p:txBody>
-          <a:bodyPr wrap="square">
-            <a:spAutoFit/>
-          </a:bodyPr>
-          <a:lstStyle/>
-          <a:p>
-            <a:r>
-              <a:rPr lang="en-IT" sz="2400" dirty="0">
-                <a:latin typeface="Palatino Linotype" panose="02040502050505030304" pitchFamily="18" charset="0"/>
-              </a:rPr>
-              <a:t>List of providers.</a:t>
-            </a:r>
-          </a:p>
-        </p:txBody>
-      </p:sp>
-      <p:cxnSp>
-        <p:nvCxnSpPr>
-          <p:cNvPr id="21" name="Straight Arrow Connector 20">
-            <a:extLst>
-              <a:ext uri="{FF2B5EF4-FFF2-40B4-BE49-F238E27FC236}">
-                <a16:creationId xmlns:a16="http://schemas.microsoft.com/office/drawing/2014/main" id="{3D5B8434-1451-9542-BCB3-D1193C8575C7}"/>
-              </a:ext>
-            </a:extLst>
-          </p:cNvPr>
-          <p:cNvCxnSpPr>
-            <a:cxnSpLocks/>
-            <a:stCxn id="15" idx="1"/>
-          </p:cNvCxnSpPr>
-          <p:nvPr/>
-        </p:nvCxnSpPr>
-        <p:spPr>
-          <a:xfrm flipH="1">
-            <a:off x="3357797" y="3353268"/>
-            <a:ext cx="4734077" cy="589145"/>
-          </a:xfrm>
-          <a:prstGeom prst="straightConnector1">
-            <a:avLst/>
-          </a:prstGeom>
-          <a:ln>
-            <a:tailEnd type="triangle"/>
-          </a:ln>
-        </p:spPr>
-        <p:style>
-          <a:lnRef idx="1">
-            <a:schemeClr val="accent6"/>
-          </a:lnRef>
-          <a:fillRef idx="0">
-            <a:schemeClr val="accent6"/>
-          </a:fillRef>
-          <a:effectRef idx="0">
-            <a:schemeClr val="accent6"/>
-          </a:effectRef>
-          <a:fontRef idx="minor">
-            <a:schemeClr val="tx1"/>
-          </a:fontRef>
-        </p:style>
-      </p:cxnSp>
-      <p:sp>
-        <p:nvSpPr>
-          <p:cNvPr id="3" name="Slide Number Placeholder 2">
-            <a:extLst>
-              <a:ext uri="{FF2B5EF4-FFF2-40B4-BE49-F238E27FC236}">
-                <a16:creationId xmlns:a16="http://schemas.microsoft.com/office/drawing/2014/main" id="{51B29569-E2F1-9B4F-9A21-B0C98135DF83}"/>
+        </p:txBody>
+      </p:sp>
+      <p:sp>
+        <p:nvSpPr>
+          <p:cNvPr id="4" name="Slide Number Placeholder 3">
+            <a:extLst>
+              <a:ext uri="{FF2B5EF4-FFF2-40B4-BE49-F238E27FC236}">
+                <a16:creationId xmlns:a16="http://schemas.microsoft.com/office/drawing/2014/main" id="{1171AD0C-792C-CF4C-B1D5-345BFD596129}"/>
               </a:ext>
             </a:extLst>
           </p:cNvPr>
@@ -14095,7 +13994,7 @@
     </p:spTree>
     <p:extLst>
       <p:ext uri="{BB962C8B-B14F-4D97-AF65-F5344CB8AC3E}">
-        <p14:creationId xmlns:p14="http://schemas.microsoft.com/office/powerpoint/2010/main" val="2681709705"/>
+        <p14:creationId xmlns:p14="http://schemas.microsoft.com/office/powerpoint/2010/main" val="2172692874"/>
       </p:ext>
     </p:extLst>
   </p:cSld>
@@ -14140,31 +14039,22 @@
         </p:nvSpPr>
         <p:spPr/>
         <p:txBody>
-          <a:bodyPr>
-            <a:normAutofit/>
-          </a:bodyPr>
+          <a:bodyPr/>
           <a:lstStyle/>
           <a:p>
             <a:r>
               <a:rPr lang="en-IT" dirty="0"/>
-              <a:t>Provider classes: </a:t>
-            </a:r>
-            <a:r>
-              <a:rPr lang="en-IT" dirty="0">
-                <a:latin typeface="Courier" pitchFamily="2" charset="0"/>
-              </a:rPr>
-              <a:t>ProxyProvider</a:t>
-            </a:r>
-            <a:endParaRPr lang="en-IT" dirty="0"/>
-          </a:p>
-        </p:txBody>
-      </p:sp>
-      <p:sp>
-        <p:nvSpPr>
-          <p:cNvPr id="6" name="Content Placeholder 5">
-            <a:extLst>
-              <a:ext uri="{FF2B5EF4-FFF2-40B4-BE49-F238E27FC236}">
-                <a16:creationId xmlns:a16="http://schemas.microsoft.com/office/drawing/2014/main" id="{1CFD16F6-AE87-6245-A265-931E7A6676CD}"/>
+              <a:t>Homework </a:t>
+            </a:r>
+          </a:p>
+        </p:txBody>
+      </p:sp>
+      <p:sp>
+        <p:nvSpPr>
+          <p:cNvPr id="3" name="Content Placeholder 2">
+            <a:extLst>
+              <a:ext uri="{FF2B5EF4-FFF2-40B4-BE49-F238E27FC236}">
+                <a16:creationId xmlns:a16="http://schemas.microsoft.com/office/drawing/2014/main" id="{8962CCAC-9D70-C543-BBE0-822B6CB5F5CB}"/>
               </a:ext>
             </a:extLst>
           </p:cNvPr>
@@ -14178,28 +14068,43 @@
         <p:spPr>
           <a:xfrm>
             <a:off x="428172" y="1361167"/>
-            <a:ext cx="7868884" cy="5153933"/>
+            <a:ext cx="11213368" cy="5334907"/>
           </a:xfrm>
         </p:spPr>
         <p:txBody>
           <a:bodyPr>
-            <a:normAutofit fontScale="85000" lnSpcReduction="20000"/>
+            <a:normAutofit/>
           </a:bodyPr>
           <a:lstStyle/>
           <a:p>
             <a:r>
               <a:rPr lang="en-GB" dirty="0"/>
-              <a:t>What if you have two models that you want to provide, but one of the models depends on the other one? In that case you can use a </a:t>
-            </a:r>
-            <a:r>
-              <a:rPr lang="en-GB" dirty="0" err="1">
-                <a:latin typeface="Courier" pitchFamily="2" charset="0"/>
-              </a:rPr>
-              <a:t>ProxyProvider</a:t>
-            </a:r>
+              <a:t>Get familiar with Provider</a:t>
+            </a:r>
+          </a:p>
+          <a:p>
+            <a:endParaRPr lang="en-GB" dirty="0"/>
+          </a:p>
+          <a:p>
             <a:r>
               <a:rPr lang="en-GB" dirty="0"/>
-              <a:t>. </a:t>
+              <a:t>Take a look to other approaches, e.g., </a:t>
+            </a:r>
+            <a:r>
+              <a:rPr lang="en-GB" dirty="0" err="1"/>
+              <a:t>Riverpod</a:t>
+            </a:r>
+            <a:r>
+              <a:rPr lang="en-GB" dirty="0"/>
+              <a:t> or </a:t>
+            </a:r>
+            <a:r>
+              <a:rPr lang="en-GB" dirty="0" err="1"/>
+              <a:t>BLoC</a:t>
+            </a:r>
+            <a:r>
+              <a:rPr lang="en-GB" dirty="0"/>
+              <a:t>. Maybe there is something that fits better your way of thinking!</a:t>
             </a:r>
           </a:p>
           <a:p>
@@ -14208,274 +14113,21 @@
           <a:p>
             <a:r>
               <a:rPr lang="en-GB" dirty="0"/>
-              <a:t>A </a:t>
-            </a:r>
-            <a:r>
-              <a:rPr lang="en-GB" dirty="0" err="1">
-                <a:latin typeface="Courier" pitchFamily="2" charset="0"/>
-              </a:rPr>
-              <a:t>ProxyProvider</a:t>
-            </a:r>
-            <a:r>
+              <a:t>Take a look at my solution. You will find some useful code.</a:t>
+            </a:r>
+            <a:br>
               <a:rPr lang="en-GB" dirty="0"/>
-              <a:t> takes the value from one provider and lets it be injected into another provider.</a:t>
-            </a:r>
-          </a:p>
-          <a:p>
-            <a:endParaRPr lang="en-GB" dirty="0"/>
-          </a:p>
-          <a:p>
-            <a:r>
-              <a:rPr lang="en-GB" dirty="0" err="1"/>
-              <a:t>Synthax</a:t>
-            </a:r>
-            <a:r>
-              <a:rPr lang="en-GB" dirty="0"/>
-              <a:t> example:</a:t>
-            </a:r>
-          </a:p>
-          <a:p>
-            <a:endParaRPr lang="en-GB" dirty="0"/>
-          </a:p>
-          <a:p>
-            <a:pPr marL="342900" lvl="1" indent="0">
-              <a:buNone/>
-            </a:pPr>
-            <a:r>
-              <a:rPr lang="en-GB" dirty="0" err="1">
-                <a:latin typeface="Courier" pitchFamily="2" charset="0"/>
-              </a:rPr>
-              <a:t>MultiProvider</a:t>
-            </a:r>
-            <a:r>
-              <a:rPr lang="en-GB" dirty="0">
-                <a:latin typeface="Courier" pitchFamily="2" charset="0"/>
-              </a:rPr>
-              <a:t>(</a:t>
-            </a:r>
-          </a:p>
-          <a:p>
-            <a:pPr marL="342900" lvl="1" indent="0">
-              <a:buNone/>
-            </a:pPr>
-            <a:r>
-              <a:rPr lang="en-GB" dirty="0">
-                <a:latin typeface="Courier" pitchFamily="2" charset="0"/>
-              </a:rPr>
-              <a:t>  providers: [</a:t>
-            </a:r>
-          </a:p>
-          <a:p>
-            <a:pPr marL="342900" lvl="1" indent="0">
-              <a:buNone/>
-            </a:pPr>
-            <a:r>
-              <a:rPr lang="en-GB" dirty="0">
-                <a:latin typeface="Courier" pitchFamily="2" charset="0"/>
-              </a:rPr>
-              <a:t>    </a:t>
-            </a:r>
-            <a:r>
-              <a:rPr lang="en-GB" dirty="0" err="1">
-                <a:latin typeface="Courier" pitchFamily="2" charset="0"/>
-              </a:rPr>
-              <a:t>ChangeNotifierProvider</a:t>
-            </a:r>
-            <a:r>
-              <a:rPr lang="en-GB" dirty="0">
-                <a:latin typeface="Courier" pitchFamily="2" charset="0"/>
-              </a:rPr>
-              <a:t>&lt;</a:t>
-            </a:r>
-            <a:r>
-              <a:rPr lang="en-GB" dirty="0" err="1">
-                <a:latin typeface="Courier" pitchFamily="2" charset="0"/>
-              </a:rPr>
-              <a:t>MyModel</a:t>
-            </a:r>
-            <a:r>
-              <a:rPr lang="en-GB" dirty="0">
-                <a:latin typeface="Courier" pitchFamily="2" charset="0"/>
-              </a:rPr>
-              <a:t>&gt;(</a:t>
-            </a:r>
-          </a:p>
-          <a:p>
-            <a:pPr marL="342900" lvl="1" indent="0">
-              <a:buNone/>
-            </a:pPr>
-            <a:r>
-              <a:rPr lang="en-GB" dirty="0">
-                <a:latin typeface="Courier" pitchFamily="2" charset="0"/>
-              </a:rPr>
-              <a:t>      create: (context) =&gt; </a:t>
-            </a:r>
-            <a:r>
-              <a:rPr lang="en-GB" dirty="0" err="1">
-                <a:latin typeface="Courier" pitchFamily="2" charset="0"/>
-              </a:rPr>
-              <a:t>MyModel</a:t>
-            </a:r>
-            <a:r>
-              <a:rPr lang="en-GB" dirty="0">
-                <a:latin typeface="Courier" pitchFamily="2" charset="0"/>
-              </a:rPr>
-              <a:t>(),</a:t>
-            </a:r>
-          </a:p>
-          <a:p>
-            <a:pPr marL="342900" lvl="1" indent="0">
-              <a:buNone/>
-            </a:pPr>
-            <a:r>
-              <a:rPr lang="en-GB" dirty="0">
-                <a:latin typeface="Courier" pitchFamily="2" charset="0"/>
-              </a:rPr>
-              <a:t>    ),</a:t>
-            </a:r>
-          </a:p>
-          <a:p>
-            <a:pPr marL="342900" lvl="1" indent="0">
-              <a:buNone/>
-            </a:pPr>
-            <a:r>
-              <a:rPr lang="en-GB" dirty="0">
-                <a:latin typeface="Courier" pitchFamily="2" charset="0"/>
-              </a:rPr>
-              <a:t>    </a:t>
-            </a:r>
-            <a:r>
-              <a:rPr lang="en-GB" b="1" dirty="0" err="1">
-                <a:latin typeface="Courier" pitchFamily="2" charset="0"/>
-              </a:rPr>
-              <a:t>ProxyProvider</a:t>
-            </a:r>
-            <a:r>
-              <a:rPr lang="en-GB" dirty="0">
-                <a:latin typeface="Courier" pitchFamily="2" charset="0"/>
-              </a:rPr>
-              <a:t>&lt;</a:t>
-            </a:r>
-            <a:r>
-              <a:rPr lang="en-GB" dirty="0" err="1">
-                <a:latin typeface="Courier" pitchFamily="2" charset="0"/>
-              </a:rPr>
-              <a:t>MyModel</a:t>
-            </a:r>
-            <a:r>
-              <a:rPr lang="en-GB" dirty="0">
-                <a:latin typeface="Courier" pitchFamily="2" charset="0"/>
-              </a:rPr>
-              <a:t>, </a:t>
-            </a:r>
-            <a:r>
-              <a:rPr lang="en-GB" dirty="0" err="1">
-                <a:latin typeface="Courier" pitchFamily="2" charset="0"/>
-              </a:rPr>
-              <a:t>AnotherModel</a:t>
-            </a:r>
-            <a:r>
-              <a:rPr lang="en-GB" dirty="0">
-                <a:latin typeface="Courier" pitchFamily="2" charset="0"/>
-              </a:rPr>
-              <a:t>&gt;(</a:t>
-            </a:r>
-          </a:p>
-          <a:p>
-            <a:pPr marL="342900" lvl="1" indent="0">
-              <a:buNone/>
-            </a:pPr>
-            <a:r>
-              <a:rPr lang="en-GB" dirty="0">
-                <a:latin typeface="Courier" pitchFamily="2" charset="0"/>
-              </a:rPr>
-              <a:t>      update: (context, </a:t>
-            </a:r>
-            <a:r>
-              <a:rPr lang="en-GB" dirty="0" err="1">
-                <a:latin typeface="Courier" pitchFamily="2" charset="0"/>
-              </a:rPr>
-              <a:t>myModel</a:t>
-            </a:r>
-            <a:r>
-              <a:rPr lang="en-GB" dirty="0">
-                <a:latin typeface="Courier" pitchFamily="2" charset="0"/>
-              </a:rPr>
-              <a:t>, </a:t>
-            </a:r>
-            <a:r>
-              <a:rPr lang="en-GB" dirty="0" err="1">
-                <a:latin typeface="Courier" pitchFamily="2" charset="0"/>
-              </a:rPr>
-              <a:t>anotherModel</a:t>
-            </a:r>
-            <a:r>
-              <a:rPr lang="en-GB" dirty="0">
-                <a:latin typeface="Courier" pitchFamily="2" charset="0"/>
-              </a:rPr>
-              <a:t>) =&gt; </a:t>
-            </a:r>
-            <a:r>
-              <a:rPr lang="en-GB" dirty="0" err="1">
-                <a:latin typeface="Courier" pitchFamily="2" charset="0"/>
-              </a:rPr>
-              <a:t>AnotherModel</a:t>
-            </a:r>
-            <a:r>
-              <a:rPr lang="en-GB" dirty="0">
-                <a:latin typeface="Courier" pitchFamily="2" charset="0"/>
-              </a:rPr>
-              <a:t>(</a:t>
-            </a:r>
-            <a:r>
-              <a:rPr lang="en-GB" dirty="0" err="1">
-                <a:latin typeface="Courier" pitchFamily="2" charset="0"/>
-              </a:rPr>
-              <a:t>myModel</a:t>
-            </a:r>
-            <a:r>
-              <a:rPr lang="en-GB" dirty="0">
-                <a:latin typeface="Courier" pitchFamily="2" charset="0"/>
-              </a:rPr>
-              <a:t>),</a:t>
-            </a:r>
-          </a:p>
-          <a:p>
-            <a:pPr marL="342900" lvl="1" indent="0">
-              <a:buNone/>
-            </a:pPr>
-            <a:r>
-              <a:rPr lang="en-GB" dirty="0">
-                <a:latin typeface="Courier" pitchFamily="2" charset="0"/>
-              </a:rPr>
-              <a:t>    ),</a:t>
-            </a:r>
-          </a:p>
-          <a:p>
-            <a:pPr marL="342900" lvl="1" indent="0">
-              <a:buNone/>
-            </a:pPr>
-            <a:r>
-              <a:rPr lang="en-GB" dirty="0">
-                <a:latin typeface="Courier" pitchFamily="2" charset="0"/>
-              </a:rPr>
-              <a:t>  ],</a:t>
-            </a:r>
-            <a:endParaRPr lang="en-IT" dirty="0">
-              <a:latin typeface="Courier" pitchFamily="2" charset="0"/>
-            </a:endParaRPr>
-          </a:p>
-          <a:p>
+            </a:br>
             <a:endParaRPr lang="en-IT" dirty="0"/>
           </a:p>
         </p:txBody>
       </p:sp>
       <p:sp>
         <p:nvSpPr>
-          <p:cNvPr id="3" name="Slide Number Placeholder 2">
-            <a:extLst>
-              <a:ext uri="{FF2B5EF4-FFF2-40B4-BE49-F238E27FC236}">
-                <a16:creationId xmlns:a16="http://schemas.microsoft.com/office/drawing/2014/main" id="{5ED7CB96-6715-ED4D-9229-69136B6E06D6}"/>
+          <p:cNvPr id="4" name="Slide Number Placeholder 3">
+            <a:extLst>
+              <a:ext uri="{FF2B5EF4-FFF2-40B4-BE49-F238E27FC236}">
+                <a16:creationId xmlns:a16="http://schemas.microsoft.com/office/drawing/2014/main" id="{E68CFC3E-1378-2647-904C-EBD658AAFA78}"/>
               </a:ext>
             </a:extLst>
           </p:cNvPr>
@@ -14502,7 +14154,7 @@
     </p:spTree>
     <p:extLst>
       <p:ext uri="{BB962C8B-B14F-4D97-AF65-F5344CB8AC3E}">
-        <p14:creationId xmlns:p14="http://schemas.microsoft.com/office/powerpoint/2010/main" val="2314439587"/>
+        <p14:creationId xmlns:p14="http://schemas.microsoft.com/office/powerpoint/2010/main" val="895378464"/>
       </p:ext>
     </p:extLst>
   </p:cSld>
@@ -14552,17 +14204,17 @@
           <a:p>
             <a:r>
               <a:rPr lang="en-IT" dirty="0"/>
-              <a:t>Provider classes – Much more </a:t>
-            </a:r>
-          </a:p>
-        </p:txBody>
-      </p:sp>
-      <p:sp>
-        <p:nvSpPr>
-          <p:cNvPr id="6" name="Content Placeholder 5">
-            <a:extLst>
-              <a:ext uri="{FF2B5EF4-FFF2-40B4-BE49-F238E27FC236}">
-                <a16:creationId xmlns:a16="http://schemas.microsoft.com/office/drawing/2014/main" id="{1CFD16F6-AE87-6245-A265-931E7A6676CD}"/>
+              <a:t>Outline</a:t>
+            </a:r>
+          </a:p>
+        </p:txBody>
+      </p:sp>
+      <p:sp>
+        <p:nvSpPr>
+          <p:cNvPr id="3" name="Content Placeholder 2">
+            <a:extLst>
+              <a:ext uri="{FF2B5EF4-FFF2-40B4-BE49-F238E27FC236}">
+                <a16:creationId xmlns:a16="http://schemas.microsoft.com/office/drawing/2014/main" id="{8962CCAC-9D70-C543-BBE0-822B6CB5F5CB}"/>
               </a:ext>
             </a:extLst>
           </p:cNvPr>
@@ -14576,160 +14228,100 @@
         <p:spPr>
           <a:xfrm>
             <a:off x="428172" y="1361167"/>
-            <a:ext cx="10807518" cy="5153933"/>
+            <a:ext cx="11213368" cy="5334907"/>
           </a:xfrm>
         </p:spPr>
         <p:txBody>
           <a:bodyPr>
-            <a:normAutofit lnSpcReduction="10000"/>
+            <a:normAutofit/>
           </a:bodyPr>
           <a:lstStyle/>
           <a:p>
             <a:r>
-              <a:rPr lang="en-IT" dirty="0"/>
-              <a:t>Of course, t</a:t>
-            </a:r>
-            <a:r>
-              <a:rPr lang="en-GB" dirty="0"/>
-              <a:t>he</a:t>
-            </a:r>
-            <a:r>
-              <a:rPr lang="en-IT" dirty="0"/>
-              <a:t> Provider package can do much more</a:t>
-            </a:r>
-          </a:p>
-          <a:p>
-            <a:pPr lvl="1"/>
-            <a:endParaRPr lang="en-IT" dirty="0"/>
-          </a:p>
-          <a:p>
-            <a:pPr lvl="1"/>
-            <a:r>
-              <a:rPr lang="en-GB" dirty="0" err="1">
-                <a:latin typeface="Courier" pitchFamily="2" charset="0"/>
-              </a:rPr>
-              <a:t>ListenableProvider</a:t>
-            </a:r>
-            <a:endParaRPr lang="en-IT" dirty="0">
-              <a:latin typeface="Courier" pitchFamily="2" charset="0"/>
-              <a:cs typeface="Courier New" panose="02070309020205020404" pitchFamily="49" charset="0"/>
+              <a:rPr lang="en-GB" dirty="0">
+                <a:solidFill>
+                  <a:schemeClr val="bg2">
+                    <a:lumMod val="90000"/>
+                  </a:schemeClr>
+                </a:solidFill>
+              </a:rPr>
+              <a:t>State management concepts</a:t>
+            </a:r>
+          </a:p>
+          <a:p>
+            <a:r>
+              <a:rPr lang="en-GB" dirty="0">
+                <a:solidFill>
+                  <a:schemeClr val="bg2">
+                    <a:lumMod val="90000"/>
+                  </a:schemeClr>
+                </a:solidFill>
+              </a:rPr>
+              <a:t>Provider</a:t>
+            </a:r>
+          </a:p>
+          <a:p>
+            <a:r>
+              <a:rPr lang="en-GB" dirty="0">
+                <a:solidFill>
+                  <a:schemeClr val="bg2">
+                    <a:lumMod val="90000"/>
+                  </a:schemeClr>
+                </a:solidFill>
+              </a:rPr>
+              <a:t>Case study</a:t>
+            </a:r>
+          </a:p>
+          <a:p>
+            <a:endParaRPr lang="en-GB" dirty="0">
+              <a:solidFill>
+                <a:schemeClr val="bg2">
+                  <a:lumMod val="90000"/>
+                </a:schemeClr>
+              </a:solidFill>
             </a:endParaRPr>
           </a:p>
           <a:p>
-            <a:pPr lvl="1"/>
-            <a:endParaRPr lang="en-IT" dirty="0">
-              <a:latin typeface="Courier" pitchFamily="2" charset="0"/>
-              <a:cs typeface="Courier New" panose="02070309020205020404" pitchFamily="49" charset="0"/>
-            </a:endParaRPr>
-          </a:p>
-          <a:p>
-            <a:pPr lvl="1"/>
-            <a:r>
-              <a:rPr lang="en-GB" dirty="0" err="1">
-                <a:latin typeface="Courier" pitchFamily="2" charset="0"/>
-              </a:rPr>
-              <a:t>ValueListenableProvider</a:t>
-            </a:r>
-            <a:endParaRPr lang="en-IT" dirty="0">
-              <a:latin typeface="Courier" pitchFamily="2" charset="0"/>
-              <a:cs typeface="Courier New" panose="02070309020205020404" pitchFamily="49" charset="0"/>
-            </a:endParaRPr>
-          </a:p>
-          <a:p>
-            <a:pPr lvl="1"/>
-            <a:endParaRPr lang="en-IT" dirty="0">
-              <a:latin typeface="Courier" pitchFamily="2" charset="0"/>
-              <a:cs typeface="Courier New" panose="02070309020205020404" pitchFamily="49" charset="0"/>
-            </a:endParaRPr>
-          </a:p>
-          <a:p>
-            <a:pPr lvl="1"/>
-            <a:r>
-              <a:rPr lang="en-GB" dirty="0" err="1">
-                <a:latin typeface="Courier" pitchFamily="2" charset="0"/>
-              </a:rPr>
-              <a:t>ChangeNotifierProxyProvider</a:t>
-            </a:r>
-            <a:endParaRPr lang="en-GB" dirty="0">
-              <a:latin typeface="Courier" pitchFamily="2" charset="0"/>
-            </a:endParaRPr>
-          </a:p>
-          <a:p>
-            <a:pPr lvl="1"/>
-            <a:endParaRPr lang="en-GB" dirty="0">
-              <a:latin typeface="Courier" pitchFamily="2" charset="0"/>
-              <a:cs typeface="Courier New" panose="02070309020205020404" pitchFamily="49" charset="0"/>
-            </a:endParaRPr>
-          </a:p>
-          <a:p>
-            <a:pPr lvl="1"/>
-            <a:r>
-              <a:rPr lang="en-IT" dirty="0">
-                <a:latin typeface="Courier" pitchFamily="2" charset="0"/>
-                <a:cs typeface="Courier New" panose="02070309020205020404" pitchFamily="49" charset="0"/>
-              </a:rPr>
-              <a:t>Selector</a:t>
-            </a:r>
-          </a:p>
-          <a:p>
-            <a:pPr lvl="1"/>
-            <a:endParaRPr lang="en-IT" dirty="0">
-              <a:latin typeface="Courier" pitchFamily="2" charset="0"/>
-              <a:cs typeface="Courier New" panose="02070309020205020404" pitchFamily="49" charset="0"/>
-            </a:endParaRPr>
-          </a:p>
-          <a:p>
-            <a:pPr lvl="1"/>
-            <a:r>
-              <a:rPr lang="en-IT" dirty="0">
-                <a:latin typeface="Courier" pitchFamily="2" charset="0"/>
-                <a:cs typeface="Courier New" panose="02070309020205020404" pitchFamily="49" charset="0"/>
-              </a:rPr>
-              <a:t>...</a:t>
-            </a:r>
-          </a:p>
-          <a:p>
-            <a:pPr lvl="1"/>
-            <a:endParaRPr lang="en-IT" dirty="0"/>
-          </a:p>
-          <a:p>
-            <a:r>
-              <a:rPr lang="en-IT" dirty="0"/>
-              <a:t>To learn more, take a look at this useful article: </a:t>
-            </a:r>
-          </a:p>
-          <a:p>
-            <a:pPr lvl="1"/>
-            <a:r>
-              <a:rPr lang="en-IT" dirty="0"/>
-              <a:t> </a:t>
-            </a:r>
-            <a:r>
-              <a:rPr lang="en-GB" dirty="0"/>
-              <a:t>Making sense of all those Flutter Providers</a:t>
-            </a:r>
-          </a:p>
-          <a:p>
-            <a:pPr lvl="2"/>
             <a:r>
               <a:rPr lang="en-GB" dirty="0">
-                <a:hlinkClick r:id="rId2"/>
-              </a:rPr>
-              <a:t>https://medium.com/flutter-community/making-sense-all-of-those-flutter-providers-e842e18f45dd</a:t>
-            </a:r>
-            <a:endParaRPr lang="en-IT" dirty="0"/>
-          </a:p>
-          <a:p>
-            <a:endParaRPr lang="en-IT" dirty="0"/>
-          </a:p>
-        </p:txBody>
-      </p:sp>
-      <p:sp>
-        <p:nvSpPr>
-          <p:cNvPr id="3" name="Slide Number Placeholder 2">
-            <a:extLst>
-              <a:ext uri="{FF2B5EF4-FFF2-40B4-BE49-F238E27FC236}">
-                <a16:creationId xmlns:a16="http://schemas.microsoft.com/office/drawing/2014/main" id="{1896C29E-2316-B942-B887-683B9316379B}"/>
+                <a:solidFill>
+                  <a:schemeClr val="bg2">
+                    <a:lumMod val="90000"/>
+                  </a:schemeClr>
+                </a:solidFill>
+              </a:rPr>
+              <a:t>Exercise</a:t>
+            </a:r>
+          </a:p>
+          <a:p>
+            <a:r>
+              <a:rPr lang="en-GB" dirty="0">
+                <a:solidFill>
+                  <a:schemeClr val="bg2">
+                    <a:lumMod val="90000"/>
+                  </a:schemeClr>
+                </a:solidFill>
+              </a:rPr>
+              <a:t>Homework</a:t>
+            </a:r>
+          </a:p>
+          <a:p>
+            <a:r>
+              <a:rPr lang="en-GB" b="1" dirty="0"/>
+              <a:t>Resources</a:t>
+            </a:r>
+          </a:p>
+          <a:p>
+            <a:endParaRPr lang="en-GB" dirty="0"/>
+          </a:p>
+        </p:txBody>
+      </p:sp>
+      <p:sp>
+        <p:nvSpPr>
+          <p:cNvPr id="4" name="Slide Number Placeholder 3">
+            <a:extLst>
+              <a:ext uri="{FF2B5EF4-FFF2-40B4-BE49-F238E27FC236}">
+                <a16:creationId xmlns:a16="http://schemas.microsoft.com/office/drawing/2014/main" id="{17E875FA-29EF-4844-8FBA-457AB668E4F4}"/>
               </a:ext>
             </a:extLst>
           </p:cNvPr>
@@ -14756,7 +14348,7 @@
     </p:spTree>
     <p:extLst>
       <p:ext uri="{BB962C8B-B14F-4D97-AF65-F5344CB8AC3E}">
-        <p14:creationId xmlns:p14="http://schemas.microsoft.com/office/powerpoint/2010/main" val="3260111545"/>
+        <p14:creationId xmlns:p14="http://schemas.microsoft.com/office/powerpoint/2010/main" val="2147711427"/>
       </p:ext>
     </p:extLst>
   </p:cSld>
@@ -14806,7 +14398,7 @@
           <a:p>
             <a:r>
               <a:rPr lang="en-IT" dirty="0"/>
-              <a:t>Outline</a:t>
+              <a:t>Resources</a:t>
             </a:r>
           </a:p>
         </p:txBody>
@@ -14829,8 +14421,8 @@
         </p:nvSpPr>
         <p:spPr>
           <a:xfrm>
-            <a:off x="428172" y="1361167"/>
-            <a:ext cx="11213368" cy="5334907"/>
+            <a:off x="428171" y="1361167"/>
+            <a:ext cx="10913119" cy="5334907"/>
           </a:xfrm>
         </p:spPr>
         <p:txBody>
@@ -14840,93 +14432,68 @@
           <a:lstStyle/>
           <a:p>
             <a:r>
+              <a:rPr lang="en-IT" dirty="0"/>
+              <a:t>State management</a:t>
+            </a:r>
+          </a:p>
+          <a:p>
+            <a:pPr lvl="1"/>
+            <a:r>
               <a:rPr lang="en-GB" dirty="0">
-                <a:solidFill>
-                  <a:schemeClr val="bg2">
-                    <a:lumMod val="90000"/>
-                  </a:schemeClr>
-                </a:solidFill>
-              </a:rPr>
-              <a:t>State management concepts</a:t>
-            </a:r>
-          </a:p>
-          <a:p>
+                <a:hlinkClick r:id="rId2"/>
+              </a:rPr>
+              <a:t>https://docs.flutter.dev/development/data-and-backend/state-mgmt/intro</a:t>
+            </a:r>
+            <a:r>
+              <a:rPr lang="en-GB" dirty="0"/>
+              <a:t> </a:t>
+            </a:r>
+          </a:p>
+          <a:p>
+            <a:endParaRPr lang="en-GB" dirty="0"/>
+          </a:p>
+          <a:p>
+            <a:r>
+              <a:rPr lang="en-GB" dirty="0"/>
+              <a:t>Making sense of all those Flutter Providers</a:t>
+            </a:r>
+          </a:p>
+          <a:p>
+            <a:pPr lvl="1"/>
             <a:r>
               <a:rPr lang="en-GB" dirty="0">
-                <a:solidFill>
-                  <a:schemeClr val="bg2">
-                    <a:lumMod val="90000"/>
-                  </a:schemeClr>
-                </a:solidFill>
-              </a:rPr>
-              <a:t>Provider</a:t>
-            </a:r>
-          </a:p>
-          <a:p>
+                <a:hlinkClick r:id="rId3"/>
+              </a:rPr>
+              <a:t>https://medium.com/flutter-community/making-sense-all-of-those-flutter-providers-e842e18f45dd</a:t>
+            </a:r>
+            <a:r>
+              <a:rPr lang="en-GB" dirty="0"/>
+              <a:t>	</a:t>
+            </a:r>
+          </a:p>
+          <a:p>
+            <a:pPr lvl="1"/>
+            <a:endParaRPr lang="en-GB" dirty="0"/>
+          </a:p>
+          <a:p>
+            <a:r>
+              <a:rPr lang="en-GB" dirty="0"/>
+              <a:t>List of state management approaches</a:t>
+            </a:r>
+          </a:p>
+          <a:p>
+            <a:pPr lvl="1"/>
             <a:r>
               <a:rPr lang="en-GB" dirty="0">
-                <a:solidFill>
-                  <a:schemeClr val="bg2">
-                    <a:lumMod val="90000"/>
-                  </a:schemeClr>
-                </a:solidFill>
-              </a:rPr>
-              <a:t>Case study</a:t>
-            </a:r>
-          </a:p>
-          <a:p>
-            <a:r>
-              <a:rPr lang="en-GB" dirty="0">
-                <a:solidFill>
-                  <a:schemeClr val="bg2">
-                    <a:lumMod val="90000"/>
-                  </a:schemeClr>
-                </a:solidFill>
-              </a:rPr>
-              <a:t>Other Provider classes</a:t>
-            </a:r>
-          </a:p>
-          <a:p>
-            <a:endParaRPr lang="en-GB" dirty="0">
-              <a:solidFill>
-                <a:schemeClr val="bg2">
-                  <a:lumMod val="90000"/>
-                </a:schemeClr>
-              </a:solidFill>
-            </a:endParaRPr>
-          </a:p>
-          <a:p>
-            <a:r>
-              <a:rPr lang="en-GB" b="1" dirty="0"/>
-              <a:t>Exercise</a:t>
-            </a:r>
-          </a:p>
-          <a:p>
-            <a:r>
-              <a:rPr lang="en-GB" dirty="0">
-                <a:solidFill>
-                  <a:schemeClr val="bg2">
-                    <a:lumMod val="90000"/>
-                  </a:schemeClr>
-                </a:solidFill>
-              </a:rPr>
-              <a:t>Homework</a:t>
-            </a:r>
-          </a:p>
-          <a:p>
-            <a:r>
-              <a:rPr lang="en-GB" dirty="0">
-                <a:solidFill>
-                  <a:schemeClr val="bg2">
-                    <a:lumMod val="90000"/>
-                  </a:schemeClr>
-                </a:solidFill>
-              </a:rPr>
-              <a:t>Resources</a:t>
-            </a:r>
-          </a:p>
-          <a:p>
-            <a:endParaRPr lang="en-GB" dirty="0"/>
+                <a:hlinkClick r:id="rId4"/>
+              </a:rPr>
+              <a:t>https://docs.flutter.dev/development/data-and-backend/state-mgmt/options</a:t>
+            </a:r>
+            <a:r>
+              <a:rPr lang="en-GB" dirty="0"/>
+              <a:t> </a:t>
+            </a:r>
+            <a:endParaRPr lang="en-IT" dirty="0"/>
           </a:p>
         </p:txBody>
       </p:sp>
@@ -14935,7 +14502,7 @@
           <p:cNvPr id="4" name="Slide Number Placeholder 3">
             <a:extLst>
               <a:ext uri="{FF2B5EF4-FFF2-40B4-BE49-F238E27FC236}">
-                <a16:creationId xmlns:a16="http://schemas.microsoft.com/office/drawing/2014/main" id="{B750B37B-AE23-2C4B-BF29-10DE9A83E5C5}"/>
+                <a16:creationId xmlns:a16="http://schemas.microsoft.com/office/drawing/2014/main" id="{80C65FD1-2BD8-A345-B072-D664E64012BF}"/>
               </a:ext>
             </a:extLst>
           </p:cNvPr>
@@ -14962,7 +14529,7 @@
     </p:spTree>
     <p:extLst>
       <p:ext uri="{BB962C8B-B14F-4D97-AF65-F5344CB8AC3E}">
-        <p14:creationId xmlns:p14="http://schemas.microsoft.com/office/powerpoint/2010/main" val="1349122538"/>
+        <p14:creationId xmlns:p14="http://schemas.microsoft.com/office/powerpoint/2010/main" val="417771806"/>
       </p:ext>
     </p:extLst>
   </p:cSld>
@@ -15164,1578 +14731,6 @@
     <p:extLst>
       <p:ext uri="{BB962C8B-B14F-4D97-AF65-F5344CB8AC3E}">
         <p14:creationId xmlns:p14="http://schemas.microsoft.com/office/powerpoint/2010/main" val="2814992303"/>
-      </p:ext>
-    </p:extLst>
-  </p:cSld>
-  <p:clrMapOvr>
-    <a:masterClrMapping/>
-  </p:clrMapOvr>
-</p:sld>
-</file>
-
-<file path=ppt/slides/slide30.xml><?xml version="1.0" encoding="utf-8"?>
-<p:sld xmlns:a="http://schemas.openxmlformats.org/drawingml/2006/main" xmlns:r="http://schemas.openxmlformats.org/officeDocument/2006/relationships" xmlns:p="http://schemas.openxmlformats.org/presentationml/2006/main">
-  <p:cSld>
-    <p:spTree>
-      <p:nvGrpSpPr>
-        <p:cNvPr id="1" name=""/>
-        <p:cNvGrpSpPr/>
-        <p:nvPr/>
-      </p:nvGrpSpPr>
-      <p:grpSpPr>
-        <a:xfrm>
-          <a:off x="0" y="0"/>
-          <a:ext cx="0" cy="0"/>
-          <a:chOff x="0" y="0"/>
-          <a:chExt cx="0" cy="0"/>
-        </a:xfrm>
-      </p:grpSpPr>
-      <p:sp>
-        <p:nvSpPr>
-          <p:cNvPr id="2" name="Title 1">
-            <a:extLst>
-              <a:ext uri="{FF2B5EF4-FFF2-40B4-BE49-F238E27FC236}">
-                <a16:creationId xmlns:a16="http://schemas.microsoft.com/office/drawing/2014/main" id="{122C1E14-0610-FB4E-BCD3-3BA8CADF9D02}"/>
-              </a:ext>
-            </a:extLst>
-          </p:cNvPr>
-          <p:cNvSpPr>
-            <a:spLocks noGrp="1"/>
-          </p:cNvSpPr>
-          <p:nvPr>
-            <p:ph type="title"/>
-          </p:nvPr>
-        </p:nvSpPr>
-        <p:spPr/>
-        <p:txBody>
-          <a:bodyPr/>
-          <a:lstStyle/>
-          <a:p>
-            <a:r>
-              <a:rPr lang="en-IT" dirty="0"/>
-              <a:t>Exercise</a:t>
-            </a:r>
-          </a:p>
-        </p:txBody>
-      </p:sp>
-      <p:sp>
-        <p:nvSpPr>
-          <p:cNvPr id="3" name="Content Placeholder 2">
-            <a:extLst>
-              <a:ext uri="{FF2B5EF4-FFF2-40B4-BE49-F238E27FC236}">
-                <a16:creationId xmlns:a16="http://schemas.microsoft.com/office/drawing/2014/main" id="{8962CCAC-9D70-C543-BBE0-822B6CB5F5CB}"/>
-              </a:ext>
-            </a:extLst>
-          </p:cNvPr>
-          <p:cNvSpPr>
-            <a:spLocks noGrp="1"/>
-          </p:cNvSpPr>
-          <p:nvPr>
-            <p:ph idx="1"/>
-          </p:nvPr>
-        </p:nvSpPr>
-        <p:spPr>
-          <a:xfrm>
-            <a:off x="428172" y="1361167"/>
-            <a:ext cx="10814451" cy="5334907"/>
-          </a:xfrm>
-        </p:spPr>
-        <p:txBody>
-          <a:bodyPr>
-            <a:normAutofit/>
-          </a:bodyPr>
-          <a:lstStyle/>
-          <a:p>
-            <a:r>
-              <a:rPr lang="en-GB" dirty="0"/>
-              <a:t>Exercise 07.01</a:t>
-            </a:r>
-          </a:p>
-          <a:p>
-            <a:endParaRPr lang="en-GB" dirty="0"/>
-          </a:p>
-          <a:p>
-            <a:pPr lvl="1"/>
-            <a:r>
-              <a:rPr lang="en-US" dirty="0"/>
-              <a:t>Create a new project ‘</a:t>
-            </a:r>
-            <a:r>
-              <a:rPr lang="en-US" dirty="0" err="1"/>
-              <a:t>meal_manager</a:t>
-            </a:r>
-            <a:r>
-              <a:rPr lang="en-US" dirty="0"/>
-              <a:t>’, an app that stores the meal intakes of a user in terms of carbohydrate content and meal timing. </a:t>
-            </a:r>
-          </a:p>
-          <a:p>
-            <a:pPr lvl="1"/>
-            <a:endParaRPr lang="en-US" dirty="0"/>
-          </a:p>
-          <a:p>
-            <a:pPr lvl="1"/>
-            <a:r>
-              <a:rPr lang="en-US" dirty="0"/>
-              <a:t>The app needs to implement the following functionalities: </a:t>
-            </a:r>
-          </a:p>
-          <a:p>
-            <a:pPr lvl="2"/>
-            <a:r>
-              <a:rPr lang="en-US" dirty="0"/>
-              <a:t>When a user opens (or restarts) the app, an empty list is showed;</a:t>
-            </a:r>
-          </a:p>
-          <a:p>
-            <a:pPr lvl="2"/>
-            <a:r>
-              <a:rPr lang="en-US" dirty="0"/>
-              <a:t>By tapping a button, the user navigates to another page where he can add a new meal (CHO content and timing). Once he/she is done, the user taps a button and navigates back to the home page. The home page must show the updated meal list with the new meal just created;</a:t>
-            </a:r>
-          </a:p>
-          <a:p>
-            <a:pPr lvl="2"/>
-            <a:r>
-              <a:rPr lang="en-US" dirty="0"/>
-              <a:t>The user can select a meal from the list. If he/she does that, he/she navigates to another page where he/she can edit or delete the meal entry from the list. </a:t>
-            </a:r>
-          </a:p>
-        </p:txBody>
-      </p:sp>
-      <p:sp>
-        <p:nvSpPr>
-          <p:cNvPr id="4" name="Slide Number Placeholder 3">
-            <a:extLst>
-              <a:ext uri="{FF2B5EF4-FFF2-40B4-BE49-F238E27FC236}">
-                <a16:creationId xmlns:a16="http://schemas.microsoft.com/office/drawing/2014/main" id="{33B65F5E-766B-8A46-BC7B-5551310C6940}"/>
-              </a:ext>
-            </a:extLst>
-          </p:cNvPr>
-          <p:cNvSpPr>
-            <a:spLocks noGrp="1"/>
-          </p:cNvSpPr>
-          <p:nvPr>
-            <p:ph type="sldNum" sz="quarter" idx="12"/>
-          </p:nvPr>
-        </p:nvSpPr>
-        <p:spPr/>
-        <p:txBody>
-          <a:bodyPr/>
-          <a:lstStyle/>
-          <a:p>
-            <a:fld id="{31DE2C5B-556E-47B8-A792-024C2FCA4ACC}" type="slidenum">
-              <a:rPr lang="en-GB" smtClean="0"/>
-              <a:t>30</a:t>
-            </a:fld>
-            <a:endParaRPr lang="en-GB"/>
-          </a:p>
-        </p:txBody>
-      </p:sp>
-    </p:spTree>
-    <p:extLst>
-      <p:ext uri="{BB962C8B-B14F-4D97-AF65-F5344CB8AC3E}">
-        <p14:creationId xmlns:p14="http://schemas.microsoft.com/office/powerpoint/2010/main" val="374531085"/>
-      </p:ext>
-    </p:extLst>
-  </p:cSld>
-  <p:clrMapOvr>
-    <a:masterClrMapping/>
-  </p:clrMapOvr>
-</p:sld>
-</file>
-
-<file path=ppt/slides/slide31.xml><?xml version="1.0" encoding="utf-8"?>
-<p:sld xmlns:a="http://schemas.openxmlformats.org/drawingml/2006/main" xmlns:r="http://schemas.openxmlformats.org/officeDocument/2006/relationships" xmlns:p="http://schemas.openxmlformats.org/presentationml/2006/main">
-  <p:cSld>
-    <p:spTree>
-      <p:nvGrpSpPr>
-        <p:cNvPr id="1" name=""/>
-        <p:cNvGrpSpPr/>
-        <p:nvPr/>
-      </p:nvGrpSpPr>
-      <p:grpSpPr>
-        <a:xfrm>
-          <a:off x="0" y="0"/>
-          <a:ext cx="0" cy="0"/>
-          <a:chOff x="0" y="0"/>
-          <a:chExt cx="0" cy="0"/>
-        </a:xfrm>
-      </p:grpSpPr>
-      <p:sp>
-        <p:nvSpPr>
-          <p:cNvPr id="2" name="Title 1">
-            <a:extLst>
-              <a:ext uri="{FF2B5EF4-FFF2-40B4-BE49-F238E27FC236}">
-                <a16:creationId xmlns:a16="http://schemas.microsoft.com/office/drawing/2014/main" id="{122C1E14-0610-FB4E-BCD3-3BA8CADF9D02}"/>
-              </a:ext>
-            </a:extLst>
-          </p:cNvPr>
-          <p:cNvSpPr>
-            <a:spLocks noGrp="1"/>
-          </p:cNvSpPr>
-          <p:nvPr>
-            <p:ph type="title"/>
-          </p:nvPr>
-        </p:nvSpPr>
-        <p:spPr/>
-        <p:txBody>
-          <a:bodyPr/>
-          <a:lstStyle/>
-          <a:p>
-            <a:r>
-              <a:rPr lang="en-IT" dirty="0"/>
-              <a:t>Exercise: here’s a possible idea</a:t>
-            </a:r>
-          </a:p>
-        </p:txBody>
-      </p:sp>
-      <p:sp>
-        <p:nvSpPr>
-          <p:cNvPr id="29" name="Rectangle 28">
-            <a:extLst>
-              <a:ext uri="{FF2B5EF4-FFF2-40B4-BE49-F238E27FC236}">
-                <a16:creationId xmlns:a16="http://schemas.microsoft.com/office/drawing/2014/main" id="{C6376DD2-D4AA-EC49-ABA3-50DB41E08529}"/>
-              </a:ext>
-            </a:extLst>
-          </p:cNvPr>
-          <p:cNvSpPr/>
-          <p:nvPr/>
-        </p:nvSpPr>
-        <p:spPr>
-          <a:xfrm>
-            <a:off x="534413" y="5461054"/>
-            <a:ext cx="2049118" cy="584775"/>
-          </a:xfrm>
-          <a:prstGeom prst="rect">
-            <a:avLst/>
-          </a:prstGeom>
-        </p:spPr>
-        <p:txBody>
-          <a:bodyPr wrap="square">
-            <a:spAutoFit/>
-          </a:bodyPr>
-          <a:lstStyle/>
-          <a:p>
-            <a:r>
-              <a:rPr lang="en-IT" sz="1600" dirty="0">
-                <a:latin typeface="Palatino Linotype" panose="02040502050505030304" pitchFamily="18" charset="0"/>
-              </a:rPr>
-              <a:t>Homepage is initially empty</a:t>
-            </a:r>
-          </a:p>
-        </p:txBody>
-      </p:sp>
-      <p:sp>
-        <p:nvSpPr>
-          <p:cNvPr id="30" name="Rectangle 29">
-            <a:extLst>
-              <a:ext uri="{FF2B5EF4-FFF2-40B4-BE49-F238E27FC236}">
-                <a16:creationId xmlns:a16="http://schemas.microsoft.com/office/drawing/2014/main" id="{D103D3E3-C557-EF43-8409-D2BE67BA5353}"/>
-              </a:ext>
-            </a:extLst>
-          </p:cNvPr>
-          <p:cNvSpPr/>
-          <p:nvPr/>
-        </p:nvSpPr>
-        <p:spPr>
-          <a:xfrm>
-            <a:off x="2784310" y="5423575"/>
-            <a:ext cx="2049118" cy="1323439"/>
-          </a:xfrm>
-          <a:prstGeom prst="rect">
-            <a:avLst/>
-          </a:prstGeom>
-        </p:spPr>
-        <p:txBody>
-          <a:bodyPr wrap="square">
-            <a:spAutoFit/>
-          </a:bodyPr>
-          <a:lstStyle/>
-          <a:p>
-            <a:r>
-              <a:rPr lang="en-IT" sz="1600" dirty="0">
-                <a:latin typeface="Palatino Linotype" panose="02040502050505030304" pitchFamily="18" charset="0"/>
-              </a:rPr>
-              <a:t>When the button is tapped the user navigates to another page where he/she can add a new meal</a:t>
-            </a:r>
-          </a:p>
-        </p:txBody>
-      </p:sp>
-      <p:sp>
-        <p:nvSpPr>
-          <p:cNvPr id="31" name="Rectangle 30">
-            <a:extLst>
-              <a:ext uri="{FF2B5EF4-FFF2-40B4-BE49-F238E27FC236}">
-                <a16:creationId xmlns:a16="http://schemas.microsoft.com/office/drawing/2014/main" id="{8D75CCD2-B1B2-EF4E-BCDC-258E9B2C88DD}"/>
-              </a:ext>
-            </a:extLst>
-          </p:cNvPr>
-          <p:cNvSpPr/>
-          <p:nvPr/>
-        </p:nvSpPr>
-        <p:spPr>
-          <a:xfrm>
-            <a:off x="5189405" y="5423575"/>
-            <a:ext cx="2049118" cy="1077218"/>
-          </a:xfrm>
-          <a:prstGeom prst="rect">
-            <a:avLst/>
-          </a:prstGeom>
-        </p:spPr>
-        <p:txBody>
-          <a:bodyPr wrap="square">
-            <a:spAutoFit/>
-          </a:bodyPr>
-          <a:lstStyle/>
-          <a:p>
-            <a:r>
-              <a:rPr lang="en-IT" sz="1600" dirty="0">
-                <a:latin typeface="Palatino Linotype" panose="02040502050505030304" pitchFamily="18" charset="0"/>
-              </a:rPr>
-              <a:t>When the </a:t>
-            </a:r>
-            <a:r>
-              <a:rPr lang="en-IT" sz="1600">
-                <a:latin typeface="Palatino Linotype" panose="02040502050505030304" pitchFamily="18" charset="0"/>
-              </a:rPr>
-              <a:t>user </a:t>
-            </a:r>
-            <a:r>
-              <a:rPr lang="en-US" sz="1600">
-                <a:latin typeface="Palatino Linotype" panose="02040502050505030304" pitchFamily="18" charset="0"/>
-              </a:rPr>
-              <a:t>finishes,</a:t>
-            </a:r>
-            <a:r>
-              <a:rPr lang="en-IT" sz="1600">
-                <a:latin typeface="Palatino Linotype" panose="02040502050505030304" pitchFamily="18" charset="0"/>
-              </a:rPr>
-              <a:t> </a:t>
-            </a:r>
-            <a:r>
-              <a:rPr lang="en-IT" sz="1600" dirty="0">
-                <a:latin typeface="Palatino Linotype" panose="02040502050505030304" pitchFamily="18" charset="0"/>
-              </a:rPr>
-              <a:t>the new meal is added to the list</a:t>
-            </a:r>
-          </a:p>
-        </p:txBody>
-      </p:sp>
-      <p:sp>
-        <p:nvSpPr>
-          <p:cNvPr id="32" name="Rectangle 31">
-            <a:extLst>
-              <a:ext uri="{FF2B5EF4-FFF2-40B4-BE49-F238E27FC236}">
-                <a16:creationId xmlns:a16="http://schemas.microsoft.com/office/drawing/2014/main" id="{55B51B24-C99A-544D-9531-6DD27BC03D55}"/>
-              </a:ext>
-            </a:extLst>
-          </p:cNvPr>
-          <p:cNvSpPr/>
-          <p:nvPr/>
-        </p:nvSpPr>
-        <p:spPr>
-          <a:xfrm>
-            <a:off x="7248780" y="5461054"/>
-            <a:ext cx="2049118" cy="1323439"/>
-          </a:xfrm>
-          <a:prstGeom prst="rect">
-            <a:avLst/>
-          </a:prstGeom>
-        </p:spPr>
-        <p:txBody>
-          <a:bodyPr wrap="square">
-            <a:spAutoFit/>
-          </a:bodyPr>
-          <a:lstStyle/>
-          <a:p>
-            <a:r>
-              <a:rPr lang="en-IT" sz="1600" dirty="0">
-                <a:latin typeface="Palatino Linotype" panose="02040502050505030304" pitchFamily="18" charset="0"/>
-              </a:rPr>
-              <a:t>When the meal is tapped, the user navigates to a new screen where he/she can edit or delete it</a:t>
-            </a:r>
-          </a:p>
-        </p:txBody>
-      </p:sp>
-      <p:sp>
-        <p:nvSpPr>
-          <p:cNvPr id="33" name="Rectangle 32">
-            <a:extLst>
-              <a:ext uri="{FF2B5EF4-FFF2-40B4-BE49-F238E27FC236}">
-                <a16:creationId xmlns:a16="http://schemas.microsoft.com/office/drawing/2014/main" id="{E7488CCA-8AA7-A24E-84CB-726D1CD4AD9C}"/>
-              </a:ext>
-            </a:extLst>
-          </p:cNvPr>
-          <p:cNvSpPr/>
-          <p:nvPr/>
-        </p:nvSpPr>
-        <p:spPr>
-          <a:xfrm>
-            <a:off x="9747368" y="5507220"/>
-            <a:ext cx="2049118" cy="830997"/>
-          </a:xfrm>
-          <a:prstGeom prst="rect">
-            <a:avLst/>
-          </a:prstGeom>
-        </p:spPr>
-        <p:txBody>
-          <a:bodyPr wrap="square">
-            <a:spAutoFit/>
-          </a:bodyPr>
-          <a:lstStyle/>
-          <a:p>
-            <a:r>
-              <a:rPr lang="en-IT" sz="1600" dirty="0">
-                <a:latin typeface="Palatino Linotype" panose="02040502050505030304" pitchFamily="18" charset="0"/>
-              </a:rPr>
-              <a:t>If the meal is edited/deleted the list is updated.</a:t>
-            </a:r>
-          </a:p>
-        </p:txBody>
-      </p:sp>
-      <p:sp>
-        <p:nvSpPr>
-          <p:cNvPr id="3" name="Slide Number Placeholder 2">
-            <a:extLst>
-              <a:ext uri="{FF2B5EF4-FFF2-40B4-BE49-F238E27FC236}">
-                <a16:creationId xmlns:a16="http://schemas.microsoft.com/office/drawing/2014/main" id="{491DE765-501F-6541-9A0D-1C7F8D96DA60}"/>
-              </a:ext>
-            </a:extLst>
-          </p:cNvPr>
-          <p:cNvSpPr>
-            <a:spLocks noGrp="1"/>
-          </p:cNvSpPr>
-          <p:nvPr>
-            <p:ph type="sldNum" sz="quarter" idx="12"/>
-          </p:nvPr>
-        </p:nvSpPr>
-        <p:spPr/>
-        <p:txBody>
-          <a:bodyPr/>
-          <a:lstStyle/>
-          <a:p>
-            <a:fld id="{31DE2C5B-556E-47B8-A792-024C2FCA4ACC}" type="slidenum">
-              <a:rPr lang="en-GB" smtClean="0"/>
-              <a:t>31</a:t>
-            </a:fld>
-            <a:endParaRPr lang="en-GB"/>
-          </a:p>
-        </p:txBody>
-      </p:sp>
-      <p:pic>
-        <p:nvPicPr>
-          <p:cNvPr id="5" name="Picture 4" descr="A white background with black text&#10;&#10;Description automatically generated">
-            <a:extLst>
-              <a:ext uri="{FF2B5EF4-FFF2-40B4-BE49-F238E27FC236}">
-                <a16:creationId xmlns:a16="http://schemas.microsoft.com/office/drawing/2014/main" id="{79A8310B-DB16-045B-3EC4-406F5550B4B7}"/>
-              </a:ext>
-            </a:extLst>
-          </p:cNvPr>
-          <p:cNvPicPr>
-            <a:picLocks noChangeAspect="1"/>
-          </p:cNvPicPr>
-          <p:nvPr/>
-        </p:nvPicPr>
-        <p:blipFill>
-          <a:blip r:embed="rId2">
-            <a:extLst>
-              <a:ext uri="{28A0092B-C50C-407E-A947-70E740481C1C}">
-                <a14:useLocalDpi xmlns:a14="http://schemas.microsoft.com/office/drawing/2010/main" val="0"/>
-              </a:ext>
-            </a:extLst>
-          </a:blip>
-          <a:stretch>
-            <a:fillRect/>
-          </a:stretch>
-        </p:blipFill>
-        <p:spPr>
-          <a:xfrm>
-            <a:off x="375413" y="1267254"/>
-            <a:ext cx="1843131" cy="3994880"/>
-          </a:xfrm>
-          <a:prstGeom prst="rect">
-            <a:avLst/>
-          </a:prstGeom>
-        </p:spPr>
-      </p:pic>
-      <p:pic>
-        <p:nvPicPr>
-          <p:cNvPr id="9" name="Picture 8" descr="A screenshot of a phone&#10;&#10;Description automatically generated">
-            <a:extLst>
-              <a:ext uri="{FF2B5EF4-FFF2-40B4-BE49-F238E27FC236}">
-                <a16:creationId xmlns:a16="http://schemas.microsoft.com/office/drawing/2014/main" id="{D029C91F-511D-9666-827D-62D4ED27C77A}"/>
-              </a:ext>
-            </a:extLst>
-          </p:cNvPr>
-          <p:cNvPicPr>
-            <a:picLocks noChangeAspect="1"/>
-          </p:cNvPicPr>
-          <p:nvPr/>
-        </p:nvPicPr>
-        <p:blipFill>
-          <a:blip r:embed="rId3">
-            <a:extLst>
-              <a:ext uri="{28A0092B-C50C-407E-A947-70E740481C1C}">
-                <a14:useLocalDpi xmlns:a14="http://schemas.microsoft.com/office/drawing/2010/main" val="0"/>
-              </a:ext>
-            </a:extLst>
-          </a:blip>
-          <a:stretch>
-            <a:fillRect/>
-          </a:stretch>
-        </p:blipFill>
-        <p:spPr>
-          <a:xfrm>
-            <a:off x="2887304" y="1244171"/>
-            <a:ext cx="1843131" cy="3994880"/>
-          </a:xfrm>
-          <a:prstGeom prst="rect">
-            <a:avLst/>
-          </a:prstGeom>
-        </p:spPr>
-      </p:pic>
-      <p:pic>
-        <p:nvPicPr>
-          <p:cNvPr id="11" name="Picture 10" descr="A white background with black dots&#10;&#10;Description automatically generated">
-            <a:extLst>
-              <a:ext uri="{FF2B5EF4-FFF2-40B4-BE49-F238E27FC236}">
-                <a16:creationId xmlns:a16="http://schemas.microsoft.com/office/drawing/2014/main" id="{A98B1D53-4ADE-7531-4B2B-E3E1E1196276}"/>
-              </a:ext>
-            </a:extLst>
-          </p:cNvPr>
-          <p:cNvPicPr>
-            <a:picLocks noChangeAspect="1"/>
-          </p:cNvPicPr>
-          <p:nvPr/>
-        </p:nvPicPr>
-        <p:blipFill>
-          <a:blip r:embed="rId4">
-            <a:extLst>
-              <a:ext uri="{28A0092B-C50C-407E-A947-70E740481C1C}">
-                <a14:useLocalDpi xmlns:a14="http://schemas.microsoft.com/office/drawing/2010/main" val="0"/>
-              </a:ext>
-            </a:extLst>
-          </a:blip>
-          <a:stretch>
-            <a:fillRect/>
-          </a:stretch>
-        </p:blipFill>
-        <p:spPr>
-          <a:xfrm>
-            <a:off x="5292398" y="1267254"/>
-            <a:ext cx="1843131" cy="3994880"/>
-          </a:xfrm>
-          <a:prstGeom prst="rect">
-            <a:avLst/>
-          </a:prstGeom>
-        </p:spPr>
-      </p:pic>
-      <p:cxnSp>
-        <p:nvCxnSpPr>
-          <p:cNvPr id="12" name="Straight Arrow Connector 11">
-            <a:extLst>
-              <a:ext uri="{FF2B5EF4-FFF2-40B4-BE49-F238E27FC236}">
-                <a16:creationId xmlns:a16="http://schemas.microsoft.com/office/drawing/2014/main" id="{0F58221F-8E69-FC96-117A-B35677389077}"/>
-              </a:ext>
-            </a:extLst>
-          </p:cNvPr>
-          <p:cNvCxnSpPr>
-            <a:cxnSpLocks/>
-          </p:cNvCxnSpPr>
-          <p:nvPr/>
-        </p:nvCxnSpPr>
-        <p:spPr>
-          <a:xfrm>
-            <a:off x="4699416" y="1618950"/>
-            <a:ext cx="936886" cy="1019319"/>
-          </a:xfrm>
-          <a:prstGeom prst="straightConnector1">
-            <a:avLst/>
-          </a:prstGeom>
-          <a:ln w="38100">
-            <a:tailEnd type="triangle"/>
-          </a:ln>
-        </p:spPr>
-        <p:style>
-          <a:lnRef idx="1">
-            <a:schemeClr val="accent6"/>
-          </a:lnRef>
-          <a:fillRef idx="0">
-            <a:schemeClr val="accent6"/>
-          </a:fillRef>
-          <a:effectRef idx="0">
-            <a:schemeClr val="accent6"/>
-          </a:effectRef>
-          <a:fontRef idx="minor">
-            <a:schemeClr val="tx1"/>
-          </a:fontRef>
-        </p:style>
-      </p:cxnSp>
-      <p:cxnSp>
-        <p:nvCxnSpPr>
-          <p:cNvPr id="14" name="Straight Arrow Connector 13">
-            <a:extLst>
-              <a:ext uri="{FF2B5EF4-FFF2-40B4-BE49-F238E27FC236}">
-                <a16:creationId xmlns:a16="http://schemas.microsoft.com/office/drawing/2014/main" id="{754E8FD3-9A05-D3D5-76F0-EA88063DC08A}"/>
-              </a:ext>
-            </a:extLst>
-          </p:cNvPr>
-          <p:cNvCxnSpPr>
-            <a:cxnSpLocks/>
-          </p:cNvCxnSpPr>
-          <p:nvPr/>
-        </p:nvCxnSpPr>
-        <p:spPr>
-          <a:xfrm flipV="1">
-            <a:off x="2218544" y="2908092"/>
-            <a:ext cx="944381" cy="1926236"/>
-          </a:xfrm>
-          <a:prstGeom prst="straightConnector1">
-            <a:avLst/>
-          </a:prstGeom>
-          <a:ln w="38100">
-            <a:tailEnd type="triangle"/>
-          </a:ln>
-        </p:spPr>
-        <p:style>
-          <a:lnRef idx="1">
-            <a:schemeClr val="accent6"/>
-          </a:lnRef>
-          <a:fillRef idx="0">
-            <a:schemeClr val="accent6"/>
-          </a:fillRef>
-          <a:effectRef idx="0">
-            <a:schemeClr val="accent6"/>
-          </a:effectRef>
-          <a:fontRef idx="minor">
-            <a:schemeClr val="tx1"/>
-          </a:fontRef>
-        </p:style>
-      </p:cxnSp>
-      <p:pic>
-        <p:nvPicPr>
-          <p:cNvPr id="20" name="Picture 19" descr="A screenshot of a phone&#10;&#10;Description automatically generated">
-            <a:extLst>
-              <a:ext uri="{FF2B5EF4-FFF2-40B4-BE49-F238E27FC236}">
-                <a16:creationId xmlns:a16="http://schemas.microsoft.com/office/drawing/2014/main" id="{2577ED07-9C84-AA09-2042-F7CB12150C87}"/>
-              </a:ext>
-            </a:extLst>
-          </p:cNvPr>
-          <p:cNvPicPr>
-            <a:picLocks noChangeAspect="1"/>
-          </p:cNvPicPr>
-          <p:nvPr/>
-        </p:nvPicPr>
-        <p:blipFill>
-          <a:blip r:embed="rId5">
-            <a:extLst>
-              <a:ext uri="{28A0092B-C50C-407E-A947-70E740481C1C}">
-                <a14:useLocalDpi xmlns:a14="http://schemas.microsoft.com/office/drawing/2010/main" val="0"/>
-              </a:ext>
-            </a:extLst>
-          </a:blip>
-          <a:stretch>
-            <a:fillRect/>
-          </a:stretch>
-        </p:blipFill>
-        <p:spPr>
-          <a:xfrm>
-            <a:off x="7351773" y="1267253"/>
-            <a:ext cx="1843132" cy="3994881"/>
-          </a:xfrm>
-          <a:prstGeom prst="rect">
-            <a:avLst/>
-          </a:prstGeom>
-        </p:spPr>
-      </p:pic>
-      <p:cxnSp>
-        <p:nvCxnSpPr>
-          <p:cNvPr id="21" name="Straight Arrow Connector 20">
-            <a:extLst>
-              <a:ext uri="{FF2B5EF4-FFF2-40B4-BE49-F238E27FC236}">
-                <a16:creationId xmlns:a16="http://schemas.microsoft.com/office/drawing/2014/main" id="{276F3384-8B8C-0298-D3DF-04B21BB53A19}"/>
-              </a:ext>
-            </a:extLst>
-          </p:cNvPr>
-          <p:cNvCxnSpPr>
-            <a:cxnSpLocks/>
-          </p:cNvCxnSpPr>
-          <p:nvPr/>
-        </p:nvCxnSpPr>
-        <p:spPr>
-          <a:xfrm>
-            <a:off x="6503205" y="1888773"/>
-            <a:ext cx="1306670" cy="1094270"/>
-          </a:xfrm>
-          <a:prstGeom prst="straightConnector1">
-            <a:avLst/>
-          </a:prstGeom>
-          <a:ln w="38100">
-            <a:tailEnd type="triangle"/>
-          </a:ln>
-        </p:spPr>
-        <p:style>
-          <a:lnRef idx="1">
-            <a:schemeClr val="accent6"/>
-          </a:lnRef>
-          <a:fillRef idx="0">
-            <a:schemeClr val="accent6"/>
-          </a:fillRef>
-          <a:effectRef idx="0">
-            <a:schemeClr val="accent6"/>
-          </a:effectRef>
-          <a:fontRef idx="minor">
-            <a:schemeClr val="tx1"/>
-          </a:fontRef>
-        </p:style>
-      </p:cxnSp>
-      <p:pic>
-        <p:nvPicPr>
-          <p:cNvPr id="24" name="Picture 23" descr="A white background with black text&#10;&#10;Description automatically generated">
-            <a:extLst>
-              <a:ext uri="{FF2B5EF4-FFF2-40B4-BE49-F238E27FC236}">
-                <a16:creationId xmlns:a16="http://schemas.microsoft.com/office/drawing/2014/main" id="{05D4C093-F0ED-E881-DD97-573C818F5151}"/>
-              </a:ext>
-            </a:extLst>
-          </p:cNvPr>
-          <p:cNvPicPr>
-            <a:picLocks noChangeAspect="1"/>
-          </p:cNvPicPr>
-          <p:nvPr/>
-        </p:nvPicPr>
-        <p:blipFill>
-          <a:blip r:embed="rId6">
-            <a:extLst>
-              <a:ext uri="{28A0092B-C50C-407E-A947-70E740481C1C}">
-                <a14:useLocalDpi xmlns:a14="http://schemas.microsoft.com/office/drawing/2010/main" val="0"/>
-              </a:ext>
-            </a:extLst>
-          </a:blip>
-          <a:stretch>
-            <a:fillRect/>
-          </a:stretch>
-        </p:blipFill>
-        <p:spPr>
-          <a:xfrm>
-            <a:off x="9616507" y="1267253"/>
-            <a:ext cx="1843132" cy="3994882"/>
-          </a:xfrm>
-          <a:prstGeom prst="rect">
-            <a:avLst/>
-          </a:prstGeom>
-        </p:spPr>
-      </p:pic>
-      <p:cxnSp>
-        <p:nvCxnSpPr>
-          <p:cNvPr id="26" name="Straight Arrow Connector 25">
-            <a:extLst>
-              <a:ext uri="{FF2B5EF4-FFF2-40B4-BE49-F238E27FC236}">
-                <a16:creationId xmlns:a16="http://schemas.microsoft.com/office/drawing/2014/main" id="{A765A5E0-DD98-BFF5-AF5A-75E6B886B437}"/>
-              </a:ext>
-            </a:extLst>
-          </p:cNvPr>
-          <p:cNvCxnSpPr>
-            <a:cxnSpLocks/>
-          </p:cNvCxnSpPr>
-          <p:nvPr/>
-        </p:nvCxnSpPr>
-        <p:spPr>
-          <a:xfrm flipV="1">
-            <a:off x="9158405" y="3800007"/>
-            <a:ext cx="1207293" cy="1113912"/>
-          </a:xfrm>
-          <a:prstGeom prst="straightConnector1">
-            <a:avLst/>
-          </a:prstGeom>
-          <a:ln w="38100">
-            <a:tailEnd type="triangle"/>
-          </a:ln>
-        </p:spPr>
-        <p:style>
-          <a:lnRef idx="1">
-            <a:schemeClr val="accent6"/>
-          </a:lnRef>
-          <a:fillRef idx="0">
-            <a:schemeClr val="accent6"/>
-          </a:fillRef>
-          <a:effectRef idx="0">
-            <a:schemeClr val="accent6"/>
-          </a:effectRef>
-          <a:fontRef idx="minor">
-            <a:schemeClr val="tx1"/>
-          </a:fontRef>
-        </p:style>
-      </p:cxnSp>
-    </p:spTree>
-    <p:extLst>
-      <p:ext uri="{BB962C8B-B14F-4D97-AF65-F5344CB8AC3E}">
-        <p14:creationId xmlns:p14="http://schemas.microsoft.com/office/powerpoint/2010/main" val="1713171130"/>
-      </p:ext>
-    </p:extLst>
-  </p:cSld>
-  <p:clrMapOvr>
-    <a:masterClrMapping/>
-  </p:clrMapOvr>
-</p:sld>
-</file>
-
-<file path=ppt/slides/slide32.xml><?xml version="1.0" encoding="utf-8"?>
-<p:sld xmlns:a="http://schemas.openxmlformats.org/drawingml/2006/main" xmlns:r="http://schemas.openxmlformats.org/officeDocument/2006/relationships" xmlns:p="http://schemas.openxmlformats.org/presentationml/2006/main">
-  <p:cSld>
-    <p:spTree>
-      <p:nvGrpSpPr>
-        <p:cNvPr id="1" name=""/>
-        <p:cNvGrpSpPr/>
-        <p:nvPr/>
-      </p:nvGrpSpPr>
-      <p:grpSpPr>
-        <a:xfrm>
-          <a:off x="0" y="0"/>
-          <a:ext cx="0" cy="0"/>
-          <a:chOff x="0" y="0"/>
-          <a:chExt cx="0" cy="0"/>
-        </a:xfrm>
-      </p:grpSpPr>
-      <p:sp>
-        <p:nvSpPr>
-          <p:cNvPr id="2" name="Title 1">
-            <a:extLst>
-              <a:ext uri="{FF2B5EF4-FFF2-40B4-BE49-F238E27FC236}">
-                <a16:creationId xmlns:a16="http://schemas.microsoft.com/office/drawing/2014/main" id="{122C1E14-0610-FB4E-BCD3-3BA8CADF9D02}"/>
-              </a:ext>
-            </a:extLst>
-          </p:cNvPr>
-          <p:cNvSpPr>
-            <a:spLocks noGrp="1"/>
-          </p:cNvSpPr>
-          <p:nvPr>
-            <p:ph type="title"/>
-          </p:nvPr>
-        </p:nvSpPr>
-        <p:spPr/>
-        <p:txBody>
-          <a:bodyPr/>
-          <a:lstStyle/>
-          <a:p>
-            <a:r>
-              <a:rPr lang="en-IT" dirty="0"/>
-              <a:t>Outline</a:t>
-            </a:r>
-          </a:p>
-        </p:txBody>
-      </p:sp>
-      <p:sp>
-        <p:nvSpPr>
-          <p:cNvPr id="3" name="Content Placeholder 2">
-            <a:extLst>
-              <a:ext uri="{FF2B5EF4-FFF2-40B4-BE49-F238E27FC236}">
-                <a16:creationId xmlns:a16="http://schemas.microsoft.com/office/drawing/2014/main" id="{8962CCAC-9D70-C543-BBE0-822B6CB5F5CB}"/>
-              </a:ext>
-            </a:extLst>
-          </p:cNvPr>
-          <p:cNvSpPr>
-            <a:spLocks noGrp="1"/>
-          </p:cNvSpPr>
-          <p:nvPr>
-            <p:ph idx="1"/>
-          </p:nvPr>
-        </p:nvSpPr>
-        <p:spPr>
-          <a:xfrm>
-            <a:off x="428172" y="1361167"/>
-            <a:ext cx="11213368" cy="5334907"/>
-          </a:xfrm>
-        </p:spPr>
-        <p:txBody>
-          <a:bodyPr>
-            <a:normAutofit/>
-          </a:bodyPr>
-          <a:lstStyle/>
-          <a:p>
-            <a:r>
-              <a:rPr lang="en-GB" dirty="0">
-                <a:solidFill>
-                  <a:schemeClr val="bg2">
-                    <a:lumMod val="90000"/>
-                  </a:schemeClr>
-                </a:solidFill>
-              </a:rPr>
-              <a:t>Recap</a:t>
-            </a:r>
-          </a:p>
-          <a:p>
-            <a:r>
-              <a:rPr lang="en-GB" dirty="0">
-                <a:solidFill>
-                  <a:schemeClr val="bg2">
-                    <a:lumMod val="90000"/>
-                  </a:schemeClr>
-                </a:solidFill>
-              </a:rPr>
-              <a:t>State management concepts</a:t>
-            </a:r>
-          </a:p>
-          <a:p>
-            <a:r>
-              <a:rPr lang="en-GB" dirty="0">
-                <a:solidFill>
-                  <a:schemeClr val="bg2">
-                    <a:lumMod val="90000"/>
-                  </a:schemeClr>
-                </a:solidFill>
-              </a:rPr>
-              <a:t>Provider</a:t>
-            </a:r>
-          </a:p>
-          <a:p>
-            <a:r>
-              <a:rPr lang="en-GB" dirty="0">
-                <a:solidFill>
-                  <a:schemeClr val="bg2">
-                    <a:lumMod val="90000"/>
-                  </a:schemeClr>
-                </a:solidFill>
-              </a:rPr>
-              <a:t>Case study</a:t>
-            </a:r>
-          </a:p>
-          <a:p>
-            <a:r>
-              <a:rPr lang="en-GB" dirty="0">
-                <a:solidFill>
-                  <a:schemeClr val="bg2">
-                    <a:lumMod val="90000"/>
-                  </a:schemeClr>
-                </a:solidFill>
-              </a:rPr>
-              <a:t>Other Provider classes</a:t>
-            </a:r>
-          </a:p>
-          <a:p>
-            <a:endParaRPr lang="en-GB" dirty="0">
-              <a:solidFill>
-                <a:schemeClr val="bg2">
-                  <a:lumMod val="90000"/>
-                </a:schemeClr>
-              </a:solidFill>
-            </a:endParaRPr>
-          </a:p>
-          <a:p>
-            <a:r>
-              <a:rPr lang="en-GB" dirty="0">
-                <a:solidFill>
-                  <a:schemeClr val="bg2">
-                    <a:lumMod val="90000"/>
-                  </a:schemeClr>
-                </a:solidFill>
-              </a:rPr>
-              <a:t>Exercise</a:t>
-            </a:r>
-          </a:p>
-          <a:p>
-            <a:r>
-              <a:rPr lang="en-GB" b="1" dirty="0"/>
-              <a:t>Homework</a:t>
-            </a:r>
-          </a:p>
-          <a:p>
-            <a:r>
-              <a:rPr lang="en-GB" dirty="0">
-                <a:solidFill>
-                  <a:schemeClr val="bg2">
-                    <a:lumMod val="90000"/>
-                  </a:schemeClr>
-                </a:solidFill>
-              </a:rPr>
-              <a:t>Resources</a:t>
-            </a:r>
-          </a:p>
-          <a:p>
-            <a:endParaRPr lang="en-GB" dirty="0"/>
-          </a:p>
-        </p:txBody>
-      </p:sp>
-      <p:sp>
-        <p:nvSpPr>
-          <p:cNvPr id="4" name="Slide Number Placeholder 3">
-            <a:extLst>
-              <a:ext uri="{FF2B5EF4-FFF2-40B4-BE49-F238E27FC236}">
-                <a16:creationId xmlns:a16="http://schemas.microsoft.com/office/drawing/2014/main" id="{1171AD0C-792C-CF4C-B1D5-345BFD596129}"/>
-              </a:ext>
-            </a:extLst>
-          </p:cNvPr>
-          <p:cNvSpPr>
-            <a:spLocks noGrp="1"/>
-          </p:cNvSpPr>
-          <p:nvPr>
-            <p:ph type="sldNum" sz="quarter" idx="12"/>
-          </p:nvPr>
-        </p:nvSpPr>
-        <p:spPr/>
-        <p:txBody>
-          <a:bodyPr/>
-          <a:lstStyle/>
-          <a:p>
-            <a:fld id="{31DE2C5B-556E-47B8-A792-024C2FCA4ACC}" type="slidenum">
-              <a:rPr lang="en-GB" smtClean="0"/>
-              <a:t>32</a:t>
-            </a:fld>
-            <a:endParaRPr lang="en-GB"/>
-          </a:p>
-        </p:txBody>
-      </p:sp>
-    </p:spTree>
-    <p:extLst>
-      <p:ext uri="{BB962C8B-B14F-4D97-AF65-F5344CB8AC3E}">
-        <p14:creationId xmlns:p14="http://schemas.microsoft.com/office/powerpoint/2010/main" val="2172692874"/>
-      </p:ext>
-    </p:extLst>
-  </p:cSld>
-  <p:clrMapOvr>
-    <a:masterClrMapping/>
-  </p:clrMapOvr>
-</p:sld>
-</file>
-
-<file path=ppt/slides/slide33.xml><?xml version="1.0" encoding="utf-8"?>
-<p:sld xmlns:a="http://schemas.openxmlformats.org/drawingml/2006/main" xmlns:r="http://schemas.openxmlformats.org/officeDocument/2006/relationships" xmlns:p="http://schemas.openxmlformats.org/presentationml/2006/main">
-  <p:cSld>
-    <p:spTree>
-      <p:nvGrpSpPr>
-        <p:cNvPr id="1" name=""/>
-        <p:cNvGrpSpPr/>
-        <p:nvPr/>
-      </p:nvGrpSpPr>
-      <p:grpSpPr>
-        <a:xfrm>
-          <a:off x="0" y="0"/>
-          <a:ext cx="0" cy="0"/>
-          <a:chOff x="0" y="0"/>
-          <a:chExt cx="0" cy="0"/>
-        </a:xfrm>
-      </p:grpSpPr>
-      <p:sp>
-        <p:nvSpPr>
-          <p:cNvPr id="2" name="Title 1">
-            <a:extLst>
-              <a:ext uri="{FF2B5EF4-FFF2-40B4-BE49-F238E27FC236}">
-                <a16:creationId xmlns:a16="http://schemas.microsoft.com/office/drawing/2014/main" id="{122C1E14-0610-FB4E-BCD3-3BA8CADF9D02}"/>
-              </a:ext>
-            </a:extLst>
-          </p:cNvPr>
-          <p:cNvSpPr>
-            <a:spLocks noGrp="1"/>
-          </p:cNvSpPr>
-          <p:nvPr>
-            <p:ph type="title"/>
-          </p:nvPr>
-        </p:nvSpPr>
-        <p:spPr/>
-        <p:txBody>
-          <a:bodyPr/>
-          <a:lstStyle/>
-          <a:p>
-            <a:r>
-              <a:rPr lang="en-IT" dirty="0"/>
-              <a:t>Homework </a:t>
-            </a:r>
-          </a:p>
-        </p:txBody>
-      </p:sp>
-      <p:sp>
-        <p:nvSpPr>
-          <p:cNvPr id="3" name="Content Placeholder 2">
-            <a:extLst>
-              <a:ext uri="{FF2B5EF4-FFF2-40B4-BE49-F238E27FC236}">
-                <a16:creationId xmlns:a16="http://schemas.microsoft.com/office/drawing/2014/main" id="{8962CCAC-9D70-C543-BBE0-822B6CB5F5CB}"/>
-              </a:ext>
-            </a:extLst>
-          </p:cNvPr>
-          <p:cNvSpPr>
-            <a:spLocks noGrp="1"/>
-          </p:cNvSpPr>
-          <p:nvPr>
-            <p:ph idx="1"/>
-          </p:nvPr>
-        </p:nvSpPr>
-        <p:spPr>
-          <a:xfrm>
-            <a:off x="428172" y="1361167"/>
-            <a:ext cx="11213368" cy="5334907"/>
-          </a:xfrm>
-        </p:spPr>
-        <p:txBody>
-          <a:bodyPr>
-            <a:normAutofit/>
-          </a:bodyPr>
-          <a:lstStyle/>
-          <a:p>
-            <a:r>
-              <a:rPr lang="en-GB" dirty="0"/>
-              <a:t>Get familiar with Provider</a:t>
-            </a:r>
-          </a:p>
-          <a:p>
-            <a:endParaRPr lang="en-GB" dirty="0"/>
-          </a:p>
-          <a:p>
-            <a:r>
-              <a:rPr lang="en-GB" dirty="0"/>
-              <a:t>Take a look to other approaches, e.g., </a:t>
-            </a:r>
-            <a:r>
-              <a:rPr lang="en-GB" dirty="0" err="1"/>
-              <a:t>Riverpod</a:t>
-            </a:r>
-            <a:r>
-              <a:rPr lang="en-GB" dirty="0"/>
-              <a:t> or </a:t>
-            </a:r>
-            <a:r>
-              <a:rPr lang="en-GB" dirty="0" err="1"/>
-              <a:t>BLoC</a:t>
-            </a:r>
-            <a:r>
-              <a:rPr lang="en-GB" dirty="0"/>
-              <a:t>. Maybe there is something that fits better your way of thinking!</a:t>
-            </a:r>
-          </a:p>
-          <a:p>
-            <a:endParaRPr lang="en-GB" dirty="0"/>
-          </a:p>
-          <a:p>
-            <a:r>
-              <a:rPr lang="en-GB" dirty="0"/>
-              <a:t>Take a look at my solution. You will find some useful code.</a:t>
-            </a:r>
-            <a:br>
-              <a:rPr lang="en-GB" dirty="0"/>
-            </a:br>
-            <a:endParaRPr lang="en-IT" dirty="0"/>
-          </a:p>
-        </p:txBody>
-      </p:sp>
-      <p:sp>
-        <p:nvSpPr>
-          <p:cNvPr id="4" name="Slide Number Placeholder 3">
-            <a:extLst>
-              <a:ext uri="{FF2B5EF4-FFF2-40B4-BE49-F238E27FC236}">
-                <a16:creationId xmlns:a16="http://schemas.microsoft.com/office/drawing/2014/main" id="{E68CFC3E-1378-2647-904C-EBD658AAFA78}"/>
-              </a:ext>
-            </a:extLst>
-          </p:cNvPr>
-          <p:cNvSpPr>
-            <a:spLocks noGrp="1"/>
-          </p:cNvSpPr>
-          <p:nvPr>
-            <p:ph type="sldNum" sz="quarter" idx="12"/>
-          </p:nvPr>
-        </p:nvSpPr>
-        <p:spPr/>
-        <p:txBody>
-          <a:bodyPr/>
-          <a:lstStyle/>
-          <a:p>
-            <a:fld id="{31DE2C5B-556E-47B8-A792-024C2FCA4ACC}" type="slidenum">
-              <a:rPr lang="en-GB" smtClean="0"/>
-              <a:t>33</a:t>
-            </a:fld>
-            <a:endParaRPr lang="en-GB"/>
-          </a:p>
-        </p:txBody>
-      </p:sp>
-    </p:spTree>
-    <p:extLst>
-      <p:ext uri="{BB962C8B-B14F-4D97-AF65-F5344CB8AC3E}">
-        <p14:creationId xmlns:p14="http://schemas.microsoft.com/office/powerpoint/2010/main" val="895378464"/>
-      </p:ext>
-    </p:extLst>
-  </p:cSld>
-  <p:clrMapOvr>
-    <a:masterClrMapping/>
-  </p:clrMapOvr>
-</p:sld>
-</file>
-
-<file path=ppt/slides/slide34.xml><?xml version="1.0" encoding="utf-8"?>
-<p:sld xmlns:a="http://schemas.openxmlformats.org/drawingml/2006/main" xmlns:r="http://schemas.openxmlformats.org/officeDocument/2006/relationships" xmlns:p="http://schemas.openxmlformats.org/presentationml/2006/main">
-  <p:cSld>
-    <p:spTree>
-      <p:nvGrpSpPr>
-        <p:cNvPr id="1" name=""/>
-        <p:cNvGrpSpPr/>
-        <p:nvPr/>
-      </p:nvGrpSpPr>
-      <p:grpSpPr>
-        <a:xfrm>
-          <a:off x="0" y="0"/>
-          <a:ext cx="0" cy="0"/>
-          <a:chOff x="0" y="0"/>
-          <a:chExt cx="0" cy="0"/>
-        </a:xfrm>
-      </p:grpSpPr>
-      <p:sp>
-        <p:nvSpPr>
-          <p:cNvPr id="2" name="Title 1">
-            <a:extLst>
-              <a:ext uri="{FF2B5EF4-FFF2-40B4-BE49-F238E27FC236}">
-                <a16:creationId xmlns:a16="http://schemas.microsoft.com/office/drawing/2014/main" id="{122C1E14-0610-FB4E-BCD3-3BA8CADF9D02}"/>
-              </a:ext>
-            </a:extLst>
-          </p:cNvPr>
-          <p:cNvSpPr>
-            <a:spLocks noGrp="1"/>
-          </p:cNvSpPr>
-          <p:nvPr>
-            <p:ph type="title"/>
-          </p:nvPr>
-        </p:nvSpPr>
-        <p:spPr/>
-        <p:txBody>
-          <a:bodyPr/>
-          <a:lstStyle/>
-          <a:p>
-            <a:r>
-              <a:rPr lang="en-IT" dirty="0"/>
-              <a:t>Outline</a:t>
-            </a:r>
-          </a:p>
-        </p:txBody>
-      </p:sp>
-      <p:sp>
-        <p:nvSpPr>
-          <p:cNvPr id="3" name="Content Placeholder 2">
-            <a:extLst>
-              <a:ext uri="{FF2B5EF4-FFF2-40B4-BE49-F238E27FC236}">
-                <a16:creationId xmlns:a16="http://schemas.microsoft.com/office/drawing/2014/main" id="{8962CCAC-9D70-C543-BBE0-822B6CB5F5CB}"/>
-              </a:ext>
-            </a:extLst>
-          </p:cNvPr>
-          <p:cNvSpPr>
-            <a:spLocks noGrp="1"/>
-          </p:cNvSpPr>
-          <p:nvPr>
-            <p:ph idx="1"/>
-          </p:nvPr>
-        </p:nvSpPr>
-        <p:spPr>
-          <a:xfrm>
-            <a:off x="428172" y="1361167"/>
-            <a:ext cx="11213368" cy="5334907"/>
-          </a:xfrm>
-        </p:spPr>
-        <p:txBody>
-          <a:bodyPr>
-            <a:normAutofit/>
-          </a:bodyPr>
-          <a:lstStyle/>
-          <a:p>
-            <a:r>
-              <a:rPr lang="en-GB" dirty="0">
-                <a:solidFill>
-                  <a:schemeClr val="bg2">
-                    <a:lumMod val="90000"/>
-                  </a:schemeClr>
-                </a:solidFill>
-              </a:rPr>
-              <a:t>State management concepts</a:t>
-            </a:r>
-          </a:p>
-          <a:p>
-            <a:r>
-              <a:rPr lang="en-GB" dirty="0">
-                <a:solidFill>
-                  <a:schemeClr val="bg2">
-                    <a:lumMod val="90000"/>
-                  </a:schemeClr>
-                </a:solidFill>
-              </a:rPr>
-              <a:t>Provider</a:t>
-            </a:r>
-          </a:p>
-          <a:p>
-            <a:r>
-              <a:rPr lang="en-GB" dirty="0">
-                <a:solidFill>
-                  <a:schemeClr val="bg2">
-                    <a:lumMod val="90000"/>
-                  </a:schemeClr>
-                </a:solidFill>
-              </a:rPr>
-              <a:t>Case study</a:t>
-            </a:r>
-          </a:p>
-          <a:p>
-            <a:r>
-              <a:rPr lang="en-GB" dirty="0">
-                <a:solidFill>
-                  <a:schemeClr val="bg2">
-                    <a:lumMod val="90000"/>
-                  </a:schemeClr>
-                </a:solidFill>
-              </a:rPr>
-              <a:t>Other Provider classes</a:t>
-            </a:r>
-          </a:p>
-          <a:p>
-            <a:endParaRPr lang="en-GB" dirty="0">
-              <a:solidFill>
-                <a:schemeClr val="bg2">
-                  <a:lumMod val="90000"/>
-                </a:schemeClr>
-              </a:solidFill>
-            </a:endParaRPr>
-          </a:p>
-          <a:p>
-            <a:r>
-              <a:rPr lang="en-GB" dirty="0">
-                <a:solidFill>
-                  <a:schemeClr val="bg2">
-                    <a:lumMod val="90000"/>
-                  </a:schemeClr>
-                </a:solidFill>
-              </a:rPr>
-              <a:t>Exercise</a:t>
-            </a:r>
-          </a:p>
-          <a:p>
-            <a:r>
-              <a:rPr lang="en-GB" dirty="0">
-                <a:solidFill>
-                  <a:schemeClr val="bg2">
-                    <a:lumMod val="90000"/>
-                  </a:schemeClr>
-                </a:solidFill>
-              </a:rPr>
-              <a:t>Homework</a:t>
-            </a:r>
-          </a:p>
-          <a:p>
-            <a:r>
-              <a:rPr lang="en-GB" b="1" dirty="0"/>
-              <a:t>Resources</a:t>
-            </a:r>
-          </a:p>
-          <a:p>
-            <a:endParaRPr lang="en-GB" dirty="0"/>
-          </a:p>
-        </p:txBody>
-      </p:sp>
-      <p:sp>
-        <p:nvSpPr>
-          <p:cNvPr id="4" name="Slide Number Placeholder 3">
-            <a:extLst>
-              <a:ext uri="{FF2B5EF4-FFF2-40B4-BE49-F238E27FC236}">
-                <a16:creationId xmlns:a16="http://schemas.microsoft.com/office/drawing/2014/main" id="{17E875FA-29EF-4844-8FBA-457AB668E4F4}"/>
-              </a:ext>
-            </a:extLst>
-          </p:cNvPr>
-          <p:cNvSpPr>
-            <a:spLocks noGrp="1"/>
-          </p:cNvSpPr>
-          <p:nvPr>
-            <p:ph type="sldNum" sz="quarter" idx="12"/>
-          </p:nvPr>
-        </p:nvSpPr>
-        <p:spPr/>
-        <p:txBody>
-          <a:bodyPr/>
-          <a:lstStyle/>
-          <a:p>
-            <a:fld id="{31DE2C5B-556E-47B8-A792-024C2FCA4ACC}" type="slidenum">
-              <a:rPr lang="en-GB" smtClean="0"/>
-              <a:t>34</a:t>
-            </a:fld>
-            <a:endParaRPr lang="en-GB"/>
-          </a:p>
-        </p:txBody>
-      </p:sp>
-    </p:spTree>
-    <p:extLst>
-      <p:ext uri="{BB962C8B-B14F-4D97-AF65-F5344CB8AC3E}">
-        <p14:creationId xmlns:p14="http://schemas.microsoft.com/office/powerpoint/2010/main" val="2147711427"/>
-      </p:ext>
-    </p:extLst>
-  </p:cSld>
-  <p:clrMapOvr>
-    <a:masterClrMapping/>
-  </p:clrMapOvr>
-</p:sld>
-</file>
-
-<file path=ppt/slides/slide35.xml><?xml version="1.0" encoding="utf-8"?>
-<p:sld xmlns:a="http://schemas.openxmlformats.org/drawingml/2006/main" xmlns:r="http://schemas.openxmlformats.org/officeDocument/2006/relationships" xmlns:p="http://schemas.openxmlformats.org/presentationml/2006/main">
-  <p:cSld>
-    <p:spTree>
-      <p:nvGrpSpPr>
-        <p:cNvPr id="1" name=""/>
-        <p:cNvGrpSpPr/>
-        <p:nvPr/>
-      </p:nvGrpSpPr>
-      <p:grpSpPr>
-        <a:xfrm>
-          <a:off x="0" y="0"/>
-          <a:ext cx="0" cy="0"/>
-          <a:chOff x="0" y="0"/>
-          <a:chExt cx="0" cy="0"/>
-        </a:xfrm>
-      </p:grpSpPr>
-      <p:sp>
-        <p:nvSpPr>
-          <p:cNvPr id="2" name="Title 1">
-            <a:extLst>
-              <a:ext uri="{FF2B5EF4-FFF2-40B4-BE49-F238E27FC236}">
-                <a16:creationId xmlns:a16="http://schemas.microsoft.com/office/drawing/2014/main" id="{122C1E14-0610-FB4E-BCD3-3BA8CADF9D02}"/>
-              </a:ext>
-            </a:extLst>
-          </p:cNvPr>
-          <p:cNvSpPr>
-            <a:spLocks noGrp="1"/>
-          </p:cNvSpPr>
-          <p:nvPr>
-            <p:ph type="title"/>
-          </p:nvPr>
-        </p:nvSpPr>
-        <p:spPr/>
-        <p:txBody>
-          <a:bodyPr/>
-          <a:lstStyle/>
-          <a:p>
-            <a:r>
-              <a:rPr lang="en-IT" dirty="0"/>
-              <a:t>Resources</a:t>
-            </a:r>
-          </a:p>
-        </p:txBody>
-      </p:sp>
-      <p:sp>
-        <p:nvSpPr>
-          <p:cNvPr id="3" name="Content Placeholder 2">
-            <a:extLst>
-              <a:ext uri="{FF2B5EF4-FFF2-40B4-BE49-F238E27FC236}">
-                <a16:creationId xmlns:a16="http://schemas.microsoft.com/office/drawing/2014/main" id="{8962CCAC-9D70-C543-BBE0-822B6CB5F5CB}"/>
-              </a:ext>
-            </a:extLst>
-          </p:cNvPr>
-          <p:cNvSpPr>
-            <a:spLocks noGrp="1"/>
-          </p:cNvSpPr>
-          <p:nvPr>
-            <p:ph idx="1"/>
-          </p:nvPr>
-        </p:nvSpPr>
-        <p:spPr>
-          <a:xfrm>
-            <a:off x="428171" y="1361167"/>
-            <a:ext cx="10913119" cy="5334907"/>
-          </a:xfrm>
-        </p:spPr>
-        <p:txBody>
-          <a:bodyPr>
-            <a:normAutofit/>
-          </a:bodyPr>
-          <a:lstStyle/>
-          <a:p>
-            <a:r>
-              <a:rPr lang="en-IT" dirty="0"/>
-              <a:t>State management</a:t>
-            </a:r>
-          </a:p>
-          <a:p>
-            <a:pPr lvl="1"/>
-            <a:r>
-              <a:rPr lang="en-GB" dirty="0">
-                <a:hlinkClick r:id="rId2"/>
-              </a:rPr>
-              <a:t>https://docs.flutter.dev/development/data-and-backend/state-mgmt/intro</a:t>
-            </a:r>
-            <a:r>
-              <a:rPr lang="en-GB" dirty="0"/>
-              <a:t> </a:t>
-            </a:r>
-          </a:p>
-          <a:p>
-            <a:endParaRPr lang="en-GB" dirty="0"/>
-          </a:p>
-          <a:p>
-            <a:r>
-              <a:rPr lang="en-GB" dirty="0"/>
-              <a:t>Making sense of all those Flutter Providers</a:t>
-            </a:r>
-          </a:p>
-          <a:p>
-            <a:pPr lvl="1"/>
-            <a:r>
-              <a:rPr lang="en-GB" dirty="0">
-                <a:hlinkClick r:id="rId3"/>
-              </a:rPr>
-              <a:t>https://medium.com/flutter-community/making-sense-all-of-those-flutter-providers-e842e18f45dd</a:t>
-            </a:r>
-            <a:r>
-              <a:rPr lang="en-GB" dirty="0"/>
-              <a:t>	</a:t>
-            </a:r>
-          </a:p>
-          <a:p>
-            <a:pPr lvl="1"/>
-            <a:endParaRPr lang="en-GB" dirty="0"/>
-          </a:p>
-          <a:p>
-            <a:r>
-              <a:rPr lang="en-GB" dirty="0"/>
-              <a:t>List of state management approaches</a:t>
-            </a:r>
-          </a:p>
-          <a:p>
-            <a:pPr lvl="1"/>
-            <a:r>
-              <a:rPr lang="en-GB" dirty="0">
-                <a:hlinkClick r:id="rId4"/>
-              </a:rPr>
-              <a:t>https://docs.flutter.dev/development/data-and-backend/state-mgmt/options</a:t>
-            </a:r>
-            <a:r>
-              <a:rPr lang="en-GB" dirty="0"/>
-              <a:t> </a:t>
-            </a:r>
-            <a:endParaRPr lang="en-IT" dirty="0"/>
-          </a:p>
-        </p:txBody>
-      </p:sp>
-      <p:sp>
-        <p:nvSpPr>
-          <p:cNvPr id="4" name="Slide Number Placeholder 3">
-            <a:extLst>
-              <a:ext uri="{FF2B5EF4-FFF2-40B4-BE49-F238E27FC236}">
-                <a16:creationId xmlns:a16="http://schemas.microsoft.com/office/drawing/2014/main" id="{80C65FD1-2BD8-A345-B072-D664E64012BF}"/>
-              </a:ext>
-            </a:extLst>
-          </p:cNvPr>
-          <p:cNvSpPr>
-            <a:spLocks noGrp="1"/>
-          </p:cNvSpPr>
-          <p:nvPr>
-            <p:ph type="sldNum" sz="quarter" idx="12"/>
-          </p:nvPr>
-        </p:nvSpPr>
-        <p:spPr/>
-        <p:txBody>
-          <a:bodyPr/>
-          <a:lstStyle/>
-          <a:p>
-            <a:fld id="{31DE2C5B-556E-47B8-A792-024C2FCA4ACC}" type="slidenum">
-              <a:rPr lang="en-GB" smtClean="0"/>
-              <a:t>35</a:t>
-            </a:fld>
-            <a:endParaRPr lang="en-GB"/>
-          </a:p>
-        </p:txBody>
-      </p:sp>
-    </p:spTree>
-    <p:extLst>
-      <p:ext uri="{BB962C8B-B14F-4D97-AF65-F5344CB8AC3E}">
-        <p14:creationId xmlns:p14="http://schemas.microsoft.com/office/powerpoint/2010/main" val="417771806"/>
       </p:ext>
     </p:extLst>
   </p:cSld>
@@ -17754,7 +15749,7 @@
         </p:spPr>
         <p:txBody>
           <a:bodyPr>
-            <a:normAutofit fontScale="92500" lnSpcReduction="10000"/>
+            <a:normAutofit fontScale="92500"/>
           </a:bodyPr>
           <a:lstStyle/>
           <a:p>
@@ -18303,8 +16298,16 @@
           </a:p>
           <a:p>
             <a:r>
+              <a:rPr lang="en-US" dirty="0"/>
+              <a:t>There </a:t>
+            </a:r>
+            <a:r>
+              <a:rPr lang="en-IT"/>
+              <a:t>are </a:t>
+            </a:r>
+            <a:r>
               <a:rPr lang="en-IT" dirty="0"/>
-              <a:t>Actually, there are a lot of possible approaches:</a:t>
+              <a:t>a lot of possible approaches:</a:t>
             </a:r>
           </a:p>
           <a:p>

--- a/lab_07-state_management/lab_07-state_management.pptx
+++ b/lab_07-state_management/lab_07-state_management.pptx
@@ -228,7 +228,7 @@
           <a:p>
             <a:fld id="{81C4B3FE-0320-8142-8396-5C3025C019EC}" type="datetimeFigureOut">
               <a:rPr lang="en-IT" smtClean="0"/>
-              <a:t>4/14/25</a:t>
+              <a:t>5/21/25</a:t>
             </a:fld>
             <a:endParaRPr lang="en-IT"/>
           </a:p>
@@ -7807,7 +7807,7 @@
         <p:spPr>
           <a:xfrm>
             <a:off x="428172" y="1361167"/>
-            <a:ext cx="7868884" cy="5153933"/>
+            <a:ext cx="11763828" cy="5153933"/>
           </a:xfrm>
         </p:spPr>
         <p:txBody>
@@ -7882,33 +7882,92 @@
               <a:buNone/>
             </a:pPr>
             <a:r>
-              <a:rPr lang="en-GB" dirty="0" err="1">
+              <a:rPr lang="en-US" dirty="0">
                 <a:latin typeface="Courier" pitchFamily="2" charset="0"/>
               </a:rPr>
-              <a:t>ChangeNotifierProvider</a:t>
+              <a:t>	Provider&lt;</a:t>
             </a:r>
             <a:r>
               <a:rPr lang="en-GB" dirty="0">
                 <a:latin typeface="Courier" pitchFamily="2" charset="0"/>
               </a:rPr>
-              <a:t>(...),</a:t>
-            </a:r>
+              <a:t>ChangeNotifier1</a:t>
+            </a:r>
+            <a:r>
+              <a:rPr lang="en-US" dirty="0">
+                <a:latin typeface="Courier" pitchFamily="2" charset="0"/>
+              </a:rPr>
+              <a:t>&gt;(create: (_) =&gt; </a:t>
+            </a:r>
+            <a:r>
+              <a:rPr lang="en-GB" dirty="0">
+                <a:latin typeface="Courier" pitchFamily="2" charset="0"/>
+              </a:rPr>
+              <a:t>ChangeNotifier1</a:t>
+            </a:r>
+            <a:r>
+              <a:rPr lang="en-US" dirty="0">
+                <a:latin typeface="Courier" pitchFamily="2" charset="0"/>
+              </a:rPr>
+              <a:t>()),</a:t>
+            </a:r>
+            <a:endParaRPr lang="en-GB" dirty="0">
+              <a:latin typeface="Courier" pitchFamily="2" charset="0"/>
+            </a:endParaRPr>
           </a:p>
           <a:p>
             <a:pPr marL="342900" lvl="1" indent="0">
               <a:buNone/>
             </a:pPr>
             <a:r>
-              <a:rPr lang="en-GB" dirty="0" err="1">
-                <a:latin typeface="Courier" pitchFamily="2" charset="0"/>
-              </a:rPr>
-              <a:t>ChangeNotifierProvider</a:t>
-            </a:r>
-            <a:r>
               <a:rPr lang="en-GB" dirty="0">
                 <a:latin typeface="Courier" pitchFamily="2" charset="0"/>
               </a:rPr>
-              <a:t>(...),</a:t>
+              <a:t>	</a:t>
+            </a:r>
+            <a:r>
+              <a:rPr lang="en-US" dirty="0">
+                <a:latin typeface="Courier" pitchFamily="2" charset="0"/>
+              </a:rPr>
+              <a:t>Provider&lt;</a:t>
+            </a:r>
+            <a:r>
+              <a:rPr lang="en-GB" dirty="0">
+                <a:latin typeface="Courier" pitchFamily="2" charset="0"/>
+              </a:rPr>
+              <a:t>ChangeNotifier2</a:t>
+            </a:r>
+            <a:r>
+              <a:rPr lang="en-US" dirty="0">
+                <a:latin typeface="Courier" pitchFamily="2" charset="0"/>
+              </a:rPr>
+              <a:t>&gt;(create: (_) =&gt; </a:t>
+            </a:r>
+            <a:r>
+              <a:rPr lang="en-GB" dirty="0">
+                <a:latin typeface="Courier" pitchFamily="2" charset="0"/>
+              </a:rPr>
+              <a:t>ChangeNotifier2</a:t>
+            </a:r>
+            <a:r>
+              <a:rPr lang="en-US" dirty="0">
+                <a:latin typeface="Courier" pitchFamily="2" charset="0"/>
+              </a:rPr>
+              <a:t>()),</a:t>
+            </a:r>
+            <a:endParaRPr lang="en-GB" dirty="0">
+              <a:latin typeface="Courier" pitchFamily="2" charset="0"/>
+            </a:endParaRPr>
+          </a:p>
+          <a:p>
+            <a:pPr marL="342900" lvl="1" indent="0">
+              <a:buNone/>
+            </a:pPr>
+            <a:r>
+              <a:rPr lang="en-GB" dirty="0">
+                <a:latin typeface="Courier" pitchFamily="2" charset="0"/>
+              </a:rPr>
+              <a:t>	...</a:t>
             </a:r>
           </a:p>
           <a:p>
@@ -8022,8 +8081,8 @@
         </p:nvCxnSpPr>
         <p:spPr>
           <a:xfrm flipH="1">
-            <a:off x="3357797" y="3353268"/>
-            <a:ext cx="4734077" cy="589145"/>
+            <a:off x="3922295" y="3353268"/>
+            <a:ext cx="4169579" cy="461665"/>
           </a:xfrm>
           <a:prstGeom prst="straightConnector1">
             <a:avLst/>
